--- a/04/ppt/04-2_pandas로_표_데이터를_쉽게_사용하기.pptx
+++ b/04/ppt/04-2_pandas로_표_데이터를_쉽게_사용하기.pptx
@@ -2,33 +2,33 @@
 <file path=ppt/presentation.xml><?xml version="1.0" encoding="utf-8"?>
 <p:presentation xmlns:p="http://schemas.openxmlformats.org/presentationml/2006/main">
   <p:sldMasterIdLst>
-    <p:sldMasterId xmlns:r="http://schemas.openxmlformats.org/officeDocument/2006/relationships" id="2147483648" r:id="R66c2177d38e2439b"/>
+    <p:sldMasterId xmlns:r="http://schemas.openxmlformats.org/officeDocument/2006/relationships" id="2147483648" r:id="Rfb33aaae0e03449c"/>
   </p:sldMasterIdLst>
   <p:notesMasterIdLst>
-    <p:notesMasterId xmlns:r="http://schemas.openxmlformats.org/officeDocument/2006/relationships" r:id="R3cc6649876244706"/>
+    <p:notesMasterId xmlns:r="http://schemas.openxmlformats.org/officeDocument/2006/relationships" r:id="R8380352cf0be4c98"/>
   </p:notesMasterIdLst>
   <p:sldIdLst>
-    <p:sldId xmlns:r="http://schemas.openxmlformats.org/officeDocument/2006/relationships" id="256" r:id="R1682cca4a6034d6e"/>
-    <p:sldId xmlns:r="http://schemas.openxmlformats.org/officeDocument/2006/relationships" id="257" r:id="Raf15eee1988c4840"/>
-    <p:sldId xmlns:r="http://schemas.openxmlformats.org/officeDocument/2006/relationships" id="258" r:id="R2ff36c237d4a4b9a"/>
-    <p:sldId xmlns:r="http://schemas.openxmlformats.org/officeDocument/2006/relationships" id="259" r:id="R60311b81aa9c4639"/>
-    <p:sldId xmlns:r="http://schemas.openxmlformats.org/officeDocument/2006/relationships" id="260" r:id="R2c37f2794eab4985"/>
-    <p:sldId xmlns:r="http://schemas.openxmlformats.org/officeDocument/2006/relationships" id="261" r:id="R459eb88fb54544a5"/>
-    <p:sldId xmlns:r="http://schemas.openxmlformats.org/officeDocument/2006/relationships" id="262" r:id="R665bb5059b314fd6"/>
-    <p:sldId xmlns:r="http://schemas.openxmlformats.org/officeDocument/2006/relationships" id="263" r:id="R07f999d2b2614f19"/>
-    <p:sldId xmlns:r="http://schemas.openxmlformats.org/officeDocument/2006/relationships" id="264" r:id="R9d6dcbd6d5a84236"/>
-    <p:sldId xmlns:r="http://schemas.openxmlformats.org/officeDocument/2006/relationships" id="265" r:id="R29dc2f0131764fb5"/>
-    <p:sldId xmlns:r="http://schemas.openxmlformats.org/officeDocument/2006/relationships" id="266" r:id="R66f9f29908304c3d"/>
-    <p:sldId xmlns:r="http://schemas.openxmlformats.org/officeDocument/2006/relationships" id="267" r:id="R647030729c6044d2"/>
-    <p:sldId xmlns:r="http://schemas.openxmlformats.org/officeDocument/2006/relationships" id="268" r:id="Rdbd2d300afd549b1"/>
-    <p:sldId xmlns:r="http://schemas.openxmlformats.org/officeDocument/2006/relationships" id="269" r:id="R598526b727bf4352"/>
-    <p:sldId xmlns:r="http://schemas.openxmlformats.org/officeDocument/2006/relationships" id="270" r:id="Ra0506840171c41fd"/>
-    <p:sldId xmlns:r="http://schemas.openxmlformats.org/officeDocument/2006/relationships" id="271" r:id="Rb6f31c5f835b4d7c"/>
-    <p:sldId xmlns:r="http://schemas.openxmlformats.org/officeDocument/2006/relationships" id="272" r:id="R89f7163717664c1d"/>
-    <p:sldId xmlns:r="http://schemas.openxmlformats.org/officeDocument/2006/relationships" id="273" r:id="R9d5d66f459d843da"/>
-    <p:sldId xmlns:r="http://schemas.openxmlformats.org/officeDocument/2006/relationships" id="274" r:id="R2c6fcde8bcb54761"/>
-    <p:sldId xmlns:r="http://schemas.openxmlformats.org/officeDocument/2006/relationships" id="275" r:id="R405a637c3bdc4fff"/>
-    <p:sldId xmlns:r="http://schemas.openxmlformats.org/officeDocument/2006/relationships" id="276" r:id="R764b4bcdfa3e4d48"/>
+    <p:sldId xmlns:r="http://schemas.openxmlformats.org/officeDocument/2006/relationships" id="256" r:id="R22297bc081054a17"/>
+    <p:sldId xmlns:r="http://schemas.openxmlformats.org/officeDocument/2006/relationships" id="257" r:id="Rec560a2977a94642"/>
+    <p:sldId xmlns:r="http://schemas.openxmlformats.org/officeDocument/2006/relationships" id="258" r:id="Rb37e0734f3374c83"/>
+    <p:sldId xmlns:r="http://schemas.openxmlformats.org/officeDocument/2006/relationships" id="259" r:id="Rcdac84b4112d40df"/>
+    <p:sldId xmlns:r="http://schemas.openxmlformats.org/officeDocument/2006/relationships" id="260" r:id="R8a07b1b291c5454a"/>
+    <p:sldId xmlns:r="http://schemas.openxmlformats.org/officeDocument/2006/relationships" id="261" r:id="Rad7d1ab240b84527"/>
+    <p:sldId xmlns:r="http://schemas.openxmlformats.org/officeDocument/2006/relationships" id="262" r:id="R5324f1e407c44090"/>
+    <p:sldId xmlns:r="http://schemas.openxmlformats.org/officeDocument/2006/relationships" id="263" r:id="R27a35b14110c4172"/>
+    <p:sldId xmlns:r="http://schemas.openxmlformats.org/officeDocument/2006/relationships" id="264" r:id="R88147430fd42493b"/>
+    <p:sldId xmlns:r="http://schemas.openxmlformats.org/officeDocument/2006/relationships" id="265" r:id="R1e43185da9564690"/>
+    <p:sldId xmlns:r="http://schemas.openxmlformats.org/officeDocument/2006/relationships" id="266" r:id="R3d708d1cd1e643ca"/>
+    <p:sldId xmlns:r="http://schemas.openxmlformats.org/officeDocument/2006/relationships" id="267" r:id="R8201f13e88114c12"/>
+    <p:sldId xmlns:r="http://schemas.openxmlformats.org/officeDocument/2006/relationships" id="268" r:id="R8f7f40fa24364b88"/>
+    <p:sldId xmlns:r="http://schemas.openxmlformats.org/officeDocument/2006/relationships" id="269" r:id="Rcccf63a01ee84988"/>
+    <p:sldId xmlns:r="http://schemas.openxmlformats.org/officeDocument/2006/relationships" id="270" r:id="Rb2be65735b5c4ce8"/>
+    <p:sldId xmlns:r="http://schemas.openxmlformats.org/officeDocument/2006/relationships" id="271" r:id="Ra723050f243e4928"/>
+    <p:sldId xmlns:r="http://schemas.openxmlformats.org/officeDocument/2006/relationships" id="272" r:id="R52727c80db4c4a67"/>
+    <p:sldId xmlns:r="http://schemas.openxmlformats.org/officeDocument/2006/relationships" id="273" r:id="R5edc4d15b0674353"/>
+    <p:sldId xmlns:r="http://schemas.openxmlformats.org/officeDocument/2006/relationships" id="274" r:id="R1598c7a37f1a4332"/>
+    <p:sldId xmlns:r="http://schemas.openxmlformats.org/officeDocument/2006/relationships" id="275" r:id="Ra124e67c51634e3a"/>
+    <p:sldId xmlns:r="http://schemas.openxmlformats.org/officeDocument/2006/relationships" id="276" r:id="R85cc1b6bbd0b4f2e"/>
   </p:sldIdLst>
   <p:sldSz cx="12191695" cy="6858000"/>
   <p:notesSz cx="6858000" cy="9144000"/>
@@ -602,7 +602,7 @@
           <a:lstStyle xmlns:a="http://schemas.openxmlformats.org/drawingml/2006/main"/>
           <a:p xmlns:a="http://schemas.openxmlformats.org/drawingml/2006/main">
             <a:r>
-              <a:t>이번에는 4-1과 비교하기 위해 x축 date, y축 visitors를 고릅니다.</a:t>
+              <a:t>이번 질문은 날짜가 지나면서 도서관 방문자 수가 어떻게 달라졌는지입니다. 그래서 시간의 순서인 date를 x축에, 날짜마다 달라지는 visitors를 y축에 놓습니다. borrowed_books를 고르면 대출 권수의 흐름을 볼 수 있다고 비교합니다.</a:t>
             </a:r>
           </a:p>
         </p:txBody>
@@ -742,7 +742,7 @@
           <a:lstStyle xmlns:a="http://schemas.openxmlformats.org/drawingml/2006/main"/>
           <a:p xmlns:a="http://schemas.openxmlformats.org/drawingml/2006/main">
             <a:r>
-              <a:t>학생이 파일 경로와 열 이름을 확인한 뒤 AI가 작성한 셀을 직접 실행합니다.</a:t>
+              <a:t>AI가 코드를 채워도 셀은 아직 실행되지 않았을 수 있습니다. 학생이 Notebook으로 돌아와 파일 경로와 열 이름을 확인한 뒤, AI가 작성한 셀을 위에서 아래로 직접 실행합니다.</a:t>
             </a:r>
           </a:p>
         </p:txBody>
@@ -882,7 +882,7 @@
           <a:lstStyle xmlns:a="http://schemas.openxmlformats.org/drawingml/2006/main"/>
           <a:p xmlns:a="http://schemas.openxmlformats.org/drawingml/2006/main">
             <a:r>
-              <a:t>학생에게 notebooks/04-2_pandas_table.ipynb를 열게 합니다. 실습에서 만든 결과와 같은 작업이 코드에 어떻게 적혀 있는지 이제 번호 순서대로 읽겠다고 말한 뒤, 1번의 파일 경로와 머리글부터 함께 읽습니다.</a:t>
+              <a:t>학생에게 notebooks/04-2_pandas_table.ipynb를 열게 합니다. 실습에서 만든 결과와 같은 작업이 코드에 어떻게 적혀 있는지 이제 번호 순서대로 읽겠다고 말합니다. ../는 notebooks에서 한 단계 위의 04 폴더로 올라간 뒤 data 폴더로 들어가라는 뜻이라고 먼저 설명합니다.</a:t>
             </a:r>
           </a:p>
         </p:txBody>
@@ -1232,7 +1232,7 @@
           <a:lstStyle xmlns:a="http://schemas.openxmlformats.org/drawingml/2006/main"/>
           <a:p xmlns:a="http://schemas.openxmlformats.org/drawingml/2006/main">
             <a:r>
-              <a:t>두 파일의 확장자와 여는 방법은 다르지만 머리글과 60줄의 값은 같습니다.</a:t>
+              <a:t>두 파일의 확장자와 여는 방법은 다르지만 머리글과 60줄의 값은 같습니다. Excel에서는 값이 칸 안에 보이고, CSV에서는 같은 값이 쉼표로 나뉜 글자 줄로 저장됩니다. 오늘은 pandas가 이 글자 줄을 다시 표로 읽는 과정을 살펴봅니다.</a:t>
             </a:r>
           </a:p>
         </p:txBody>
@@ -1442,7 +1442,7 @@
           <a:lstStyle xmlns:a="http://schemas.openxmlformats.org/drawingml/2006/main"/>
           <a:p xmlns:a="http://schemas.openxmlformats.org/drawingml/2006/main">
             <a:r>
-              <a:t>이번에는 오류를 일부러 만들지 않습니다. uv add pandas를 직접 실행하고 pyproject.toml에 pandas가 생겼는지 확인한 뒤 커널을 다시 시작합니다.</a:t>
+              <a:t>이번에는 오류를 일부러 만들지 않습니다. uv add pandas를 직접 실행하면 uv가 pandas를 프로젝트의 라이브러리 목록에 기록하고 .venv에서도 사용할 수 있게 준비합니다. pyproject.toml에 pandas가 생겼는지 확인한 뒤 Notebook 화면으로 돌아가 커널을 다시 시작합니다.</a:t>
             </a:r>
           </a:p>
         </p:txBody>
@@ -1652,7 +1652,7 @@
           <a:lstStyle xmlns:a="http://schemas.openxmlformats.org/drawingml/2006/main"/>
           <a:p xmlns:a="http://schemas.openxmlformats.org/drawingml/2006/main">
             <a:r>
-              <a:t>AI가 말한 자료의 내용, 머리글, 줄 수와 Excel과의 차이를 원본에서 확인합니다.</a:t>
+              <a:t>AI의 답이 도착해도 바로 다음 요청을 보내지 않습니다. CSV의 머리글과 줄 수를 직접 보며 자료 내용, 머리글, 60줄, Excel과의 차이가 맞는지 하나씩 확인합니다. 다르면 원본과 다른 항목을 구체적으로 말하고 CSV를 다시 읽게 합니다.</a:t>
             </a:r>
           </a:p>
         </p:txBody>
@@ -1722,7 +1722,7 @@
           <a:lstStyle xmlns:a="http://schemas.openxmlformats.org/drawingml/2006/main"/>
           <a:p xmlns:a="http://schemas.openxmlformats.org/drawingml/2006/main">
             <a:r>
-              <a:t>두 번째 요청으로 방문자 수와 대출 권수의 평균을 계산하고 Notebook에 출력하게 합니다.</a:t>
+              <a:t>두 번째 요청으로 방문자 수와 대출 권수의 평균을 계산하고 Notebook에 출력하게 합니다. AI가 셀을 만들었다고 답하면 04-2_exercise.ipynb로 돌아가 두 열 이름부터 찾고 실행합니다.</a:t>
             </a:r>
           </a:p>
         </p:txBody>
@@ -1862,7 +1862,7 @@
           <a:lstStyle xmlns:a="http://schemas.openxmlformats.org/drawingml/2006/main"/>
           <a:p xmlns:a="http://schemas.openxmlformats.org/drawingml/2006/main">
             <a:r>
-              <a:t>추세선은 예측선이 아니라 전체 흐름을 보기 쉽게 만든 선이라고 설명합니다.</a:t>
+              <a:t>추세선에는 여러 방법이 있습니다. 이번 수업에서는 가까운 5개 평일의 평균을 이어 만든 선을 사용합니다. 내일 값을 맞히는 예측선이 아니라, 흔들리는 값 속 전체 흐름을 보기 쉽게 하는 선이라고 설명합니다.</a:t>
             </a:r>
           </a:p>
         </p:txBody>
@@ -1930,7 +1930,7 @@
   </p:cSld>
   <p:clrMap bg1="lt1" tx1="dk1" bg2="lt2" tx2="dk2" accent1="accent1" accent2="accent2" accent3="accent3" accent4="accent4" accent5="accent5" accent6="accent6" hlink="hlink" folHlink="folHlink"/>
   <p:sldLayoutIdLst>
-    <p:sldLayoutId xmlns:r="http://schemas.openxmlformats.org/officeDocument/2006/relationships" id="2147483649" r:id="Ra0a1c7d1fa564dcf"/>
+    <p:sldLayoutId xmlns:r="http://schemas.openxmlformats.org/officeDocument/2006/relationships" id="2147483649" r:id="R673a52a19a6c451d"/>
   </p:sldLayoutIdLst>
   <p:txStyles>
     <p:titleStyle>
@@ -2481,7 +2481,7 @@
           <p:cNvPr id="7" name="">
             <a:extLst xmlns:a="http://schemas.openxmlformats.org/drawingml/2006/main">
               <a:ext uri="{FF2B5EF4-FFF2-40B4-BE49-F238E27FC236}">
-                <a16:creationId xmlns:a16="http://schemas.microsoft.com/office/drawing/2014/main" id="{F42A8A70-F38F-4BFF-BF03-46858E0CB0F5}"/>
+                <a16:creationId xmlns:a16="http://schemas.microsoft.com/office/drawing/2014/main" id="{6AAB22E4-8B0C-4D4C-B397-85D5FFBFBD6D}"/>
               </a:ext>
             </a:extLst>
           </p:cNvPr>
@@ -2513,7 +2513,7 @@
           <p:cNvPr id="2" name="">
             <a:extLst xmlns:a="http://schemas.openxmlformats.org/drawingml/2006/main">
               <a:ext uri="{FF2B5EF4-FFF2-40B4-BE49-F238E27FC236}">
-                <a16:creationId xmlns:a16="http://schemas.microsoft.com/office/drawing/2014/main" id="{03D9F41A-9B58-4FA3-B113-E74702C4FA0D}"/>
+                <a16:creationId xmlns:a16="http://schemas.microsoft.com/office/drawing/2014/main" id="{BF5A1F24-7E14-4817-B3D1-AEFBCC875FE1}"/>
               </a:ext>
             </a:extLst>
           </p:cNvPr>
@@ -2574,7 +2574,7 @@
           <p:cNvPr id="3" name="">
             <a:extLst xmlns:a="http://schemas.openxmlformats.org/drawingml/2006/main">
               <a:ext uri="{FF2B5EF4-FFF2-40B4-BE49-F238E27FC236}">
-                <a16:creationId xmlns:a16="http://schemas.microsoft.com/office/drawing/2014/main" id="{7AA97577-E318-4C51-ADF0-FBB4D393BE0B}"/>
+                <a16:creationId xmlns:a16="http://schemas.microsoft.com/office/drawing/2014/main" id="{2477C0E2-C14E-4B29-B7F0-3697AE05C8A6}"/>
               </a:ext>
             </a:extLst>
           </p:cNvPr>
@@ -2662,7 +2662,7 @@
           <p:cNvPr id="4" name="">
             <a:extLst xmlns:a="http://schemas.openxmlformats.org/drawingml/2006/main">
               <a:ext uri="{FF2B5EF4-FFF2-40B4-BE49-F238E27FC236}">
-                <a16:creationId xmlns:a16="http://schemas.microsoft.com/office/drawing/2014/main" id="{F885D7CB-7F62-4D73-8F19-D5B0FE381173}"/>
+                <a16:creationId xmlns:a16="http://schemas.microsoft.com/office/drawing/2014/main" id="{8405B52D-0C5C-4FBD-BAAE-EA77632942DE}"/>
               </a:ext>
             </a:extLst>
           </p:cNvPr>
@@ -2723,7 +2723,7 @@
           <p:cNvPr id="5" name="">
             <a:extLst xmlns:a="http://schemas.openxmlformats.org/drawingml/2006/main">
               <a:ext uri="{FF2B5EF4-FFF2-40B4-BE49-F238E27FC236}">
-                <a16:creationId xmlns:a16="http://schemas.microsoft.com/office/drawing/2014/main" id="{748D2AE5-6EFE-473D-BD34-07EAF5863B65}"/>
+                <a16:creationId xmlns:a16="http://schemas.microsoft.com/office/drawing/2014/main" id="{A19EF86A-9526-4A08-9AFA-73D92C6115FA}"/>
               </a:ext>
             </a:extLst>
           </p:cNvPr>
@@ -2784,7 +2784,7 @@
           <p:cNvPr id="6" name="">
             <a:extLst xmlns:a="http://schemas.openxmlformats.org/drawingml/2006/main">
               <a:ext uri="{FF2B5EF4-FFF2-40B4-BE49-F238E27FC236}">
-                <a16:creationId xmlns:a16="http://schemas.microsoft.com/office/drawing/2014/main" id="{6595BF07-B51D-446C-97E9-E459A00CB9D9}"/>
+                <a16:creationId xmlns:a16="http://schemas.microsoft.com/office/drawing/2014/main" id="{C3C642EC-7E98-4514-A1E5-7BB529C745C3}"/>
               </a:ext>
             </a:extLst>
           </p:cNvPr>
@@ -2843,7 +2843,7 @@
     </p:spTree>
     <p:extLst>
       <p:ext uri="{BB962C8B-B14F-4D97-AF65-F5344CB8AC3E}">
-        <p14:creationId xmlns:p14="http://schemas.microsoft.com/office/powerpoint/2010/main" val="899760915"/>
+        <p14:creationId xmlns:p14="http://schemas.microsoft.com/office/powerpoint/2010/main" val="271629474"/>
       </p:ext>
     </p:extLst>
   </p:cSld>
@@ -2874,7 +2874,7 @@
           <p:cNvPr id="10" name="">
             <a:extLst xmlns:a="http://schemas.openxmlformats.org/drawingml/2006/main">
               <a:ext uri="{FF2B5EF4-FFF2-40B4-BE49-F238E27FC236}">
-                <a16:creationId xmlns:a16="http://schemas.microsoft.com/office/drawing/2014/main" id="{14EBFF07-586C-4AB8-A505-6094E3B3FF84}"/>
+                <a16:creationId xmlns:a16="http://schemas.microsoft.com/office/drawing/2014/main" id="{DC02EDA2-3A84-45A9-B7EF-6EFC881921B9}"/>
               </a:ext>
             </a:extLst>
           </p:cNvPr>
@@ -2935,7 +2935,7 @@
           <p:cNvPr id="2" name="">
             <a:extLst xmlns:a="http://schemas.openxmlformats.org/drawingml/2006/main">
               <a:ext uri="{FF2B5EF4-FFF2-40B4-BE49-F238E27FC236}">
-                <a16:creationId xmlns:a16="http://schemas.microsoft.com/office/drawing/2014/main" id="{6E1343B3-B24B-4761-98A0-ABC5119D619A}"/>
+                <a16:creationId xmlns:a16="http://schemas.microsoft.com/office/drawing/2014/main" id="{EBD82CF7-158C-4BC8-91B7-A4A0E8328118}"/>
               </a:ext>
             </a:extLst>
           </p:cNvPr>
@@ -2996,7 +2996,7 @@
           <p:cNvPr id="3" name="">
             <a:extLst xmlns:a="http://schemas.openxmlformats.org/drawingml/2006/main">
               <a:ext uri="{FF2B5EF4-FFF2-40B4-BE49-F238E27FC236}">
-                <a16:creationId xmlns:a16="http://schemas.microsoft.com/office/drawing/2014/main" id="{32A5C996-029E-482B-B9E1-759D84BA8F26}"/>
+                <a16:creationId xmlns:a16="http://schemas.microsoft.com/office/drawing/2014/main" id="{30D22A8F-112F-47D3-AD55-8EA2583A453D}"/>
               </a:ext>
             </a:extLst>
           </p:cNvPr>
@@ -3057,7 +3057,7 @@
           <p:cNvPr id="4" name="">
             <a:extLst xmlns:a="http://schemas.openxmlformats.org/drawingml/2006/main">
               <a:ext uri="{FF2B5EF4-FFF2-40B4-BE49-F238E27FC236}">
-                <a16:creationId xmlns:a16="http://schemas.microsoft.com/office/drawing/2014/main" id="{E4E78A25-4FD4-4CB9-89C9-000B6A1D216A}"/>
+                <a16:creationId xmlns:a16="http://schemas.microsoft.com/office/drawing/2014/main" id="{B39D80FD-967F-4940-9FA8-726BCACBC0D0}"/>
               </a:ext>
             </a:extLst>
           </p:cNvPr>
@@ -3089,7 +3089,7 @@
           <p:cNvPr id="5" name="">
             <a:extLst xmlns:a="http://schemas.openxmlformats.org/drawingml/2006/main">
               <a:ext uri="{FF2B5EF4-FFF2-40B4-BE49-F238E27FC236}">
-                <a16:creationId xmlns:a16="http://schemas.microsoft.com/office/drawing/2014/main" id="{C7D645D7-4BFE-40B5-83E8-F7829C7D59FF}"/>
+                <a16:creationId xmlns:a16="http://schemas.microsoft.com/office/drawing/2014/main" id="{2E79C703-E5FC-4C09-83AF-171960FE30D1}"/>
               </a:ext>
             </a:extLst>
           </p:cNvPr>
@@ -3150,7 +3150,7 @@
           <p:cNvPr id="6" name="">
             <a:extLst xmlns:a="http://schemas.openxmlformats.org/drawingml/2006/main">
               <a:ext uri="{FF2B5EF4-FFF2-40B4-BE49-F238E27FC236}">
-                <a16:creationId xmlns:a16="http://schemas.microsoft.com/office/drawing/2014/main" id="{02A7A6CF-9B5B-4CB2-932A-7386A70CCBA0}"/>
+                <a16:creationId xmlns:a16="http://schemas.microsoft.com/office/drawing/2014/main" id="{E66D7C09-A574-45F7-8448-3578B076DA02}"/>
               </a:ext>
             </a:extLst>
           </p:cNvPr>
@@ -3211,7 +3211,7 @@
           <p:cNvPr id="7" name="">
             <a:extLst xmlns:a="http://schemas.openxmlformats.org/drawingml/2006/main">
               <a:ext uri="{FF2B5EF4-FFF2-40B4-BE49-F238E27FC236}">
-                <a16:creationId xmlns:a16="http://schemas.microsoft.com/office/drawing/2014/main" id="{9F9CEE9A-C314-4D94-BB19-F0FC304BD348}"/>
+                <a16:creationId xmlns:a16="http://schemas.microsoft.com/office/drawing/2014/main" id="{73AE19B9-E418-4DA2-B964-508E93201ACF}"/>
               </a:ext>
             </a:extLst>
           </p:cNvPr>
@@ -3272,7 +3272,7 @@
           <p:cNvPr id="8" name="">
             <a:extLst xmlns:a="http://schemas.openxmlformats.org/drawingml/2006/main">
               <a:ext uri="{FF2B5EF4-FFF2-40B4-BE49-F238E27FC236}">
-                <a16:creationId xmlns:a16="http://schemas.microsoft.com/office/drawing/2014/main" id="{355C2725-5AD5-41B5-9F0D-BE21403C7CB7}"/>
+                <a16:creationId xmlns:a16="http://schemas.microsoft.com/office/drawing/2014/main" id="{C4A3B6AD-CC1F-44AE-B588-19F991816AA1}"/>
               </a:ext>
             </a:extLst>
           </p:cNvPr>
@@ -3450,7 +3450,7 @@
           <p:cNvPr id="9" name="">
             <a:extLst xmlns:a="http://schemas.openxmlformats.org/drawingml/2006/main">
               <a:ext uri="{FF2B5EF4-FFF2-40B4-BE49-F238E27FC236}">
-                <a16:creationId xmlns:a16="http://schemas.microsoft.com/office/drawing/2014/main" id="{D1F9B872-20CA-4227-9040-8B49BCDD312C}"/>
+                <a16:creationId xmlns:a16="http://schemas.microsoft.com/office/drawing/2014/main" id="{4B112B6F-D25C-4805-9ED1-F20FE77D02C4}"/>
               </a:ext>
             </a:extLst>
           </p:cNvPr>
@@ -3509,7 +3509,7 @@
     </p:spTree>
     <p:extLst>
       <p:ext uri="{BB962C8B-B14F-4D97-AF65-F5344CB8AC3E}">
-        <p14:creationId xmlns:p14="http://schemas.microsoft.com/office/powerpoint/2010/main" val="1147718739"/>
+        <p14:creationId xmlns:p14="http://schemas.microsoft.com/office/powerpoint/2010/main" val="865754900"/>
       </p:ext>
     </p:extLst>
   </p:cSld>
@@ -3540,7 +3540,7 @@
           <p:cNvPr id="10" name="">
             <a:extLst xmlns:a="http://schemas.openxmlformats.org/drawingml/2006/main">
               <a:ext uri="{FF2B5EF4-FFF2-40B4-BE49-F238E27FC236}">
-                <a16:creationId xmlns:a16="http://schemas.microsoft.com/office/drawing/2014/main" id="{01D3FBF9-7173-4BFE-8E44-07EF6402BC94}"/>
+                <a16:creationId xmlns:a16="http://schemas.microsoft.com/office/drawing/2014/main" id="{B82D2173-9C89-41B9-9522-F75EC0F09B17}"/>
               </a:ext>
             </a:extLst>
           </p:cNvPr>
@@ -3601,7 +3601,7 @@
           <p:cNvPr id="2" name="">
             <a:extLst xmlns:a="http://schemas.openxmlformats.org/drawingml/2006/main">
               <a:ext uri="{FF2B5EF4-FFF2-40B4-BE49-F238E27FC236}">
-                <a16:creationId xmlns:a16="http://schemas.microsoft.com/office/drawing/2014/main" id="{8631575F-FFA5-4D6F-B263-04CB6EFC73A5}"/>
+                <a16:creationId xmlns:a16="http://schemas.microsoft.com/office/drawing/2014/main" id="{C2096705-7E2B-42E6-97B5-14C17708EA2C}"/>
               </a:ext>
             </a:extLst>
           </p:cNvPr>
@@ -3662,7 +3662,7 @@
           <p:cNvPr id="3" name="">
             <a:extLst xmlns:a="http://schemas.openxmlformats.org/drawingml/2006/main">
               <a:ext uri="{FF2B5EF4-FFF2-40B4-BE49-F238E27FC236}">
-                <a16:creationId xmlns:a16="http://schemas.microsoft.com/office/drawing/2014/main" id="{AFAC55B5-48AD-4C87-96C7-E039DCF7322A}"/>
+                <a16:creationId xmlns:a16="http://schemas.microsoft.com/office/drawing/2014/main" id="{F781434C-ED12-4499-BBB0-1042480FE4E0}"/>
               </a:ext>
             </a:extLst>
           </p:cNvPr>
@@ -3723,7 +3723,7 @@
           <p:cNvPr id="4" name="">
             <a:extLst xmlns:a="http://schemas.openxmlformats.org/drawingml/2006/main">
               <a:ext uri="{FF2B5EF4-FFF2-40B4-BE49-F238E27FC236}">
-                <a16:creationId xmlns:a16="http://schemas.microsoft.com/office/drawing/2014/main" id="{6C1E9485-0869-4F3B-8B81-AEEE576E8590}"/>
+                <a16:creationId xmlns:a16="http://schemas.microsoft.com/office/drawing/2014/main" id="{E568E11E-A393-442F-99C0-AA1892B18BB1}"/>
               </a:ext>
             </a:extLst>
           </p:cNvPr>
@@ -3755,7 +3755,7 @@
           <p:cNvPr id="5" name="">
             <a:extLst xmlns:a="http://schemas.openxmlformats.org/drawingml/2006/main">
               <a:ext uri="{FF2B5EF4-FFF2-40B4-BE49-F238E27FC236}">
-                <a16:creationId xmlns:a16="http://schemas.microsoft.com/office/drawing/2014/main" id="{A5F055B2-4C97-4CA6-A775-4F4A6A378223}"/>
+                <a16:creationId xmlns:a16="http://schemas.microsoft.com/office/drawing/2014/main" id="{327A2380-7659-4F32-B24B-7129435BB40C}"/>
               </a:ext>
             </a:extLst>
           </p:cNvPr>
@@ -3816,7 +3816,7 @@
           <p:cNvPr id="6" name="">
             <a:extLst xmlns:a="http://schemas.openxmlformats.org/drawingml/2006/main">
               <a:ext uri="{FF2B5EF4-FFF2-40B4-BE49-F238E27FC236}">
-                <a16:creationId xmlns:a16="http://schemas.microsoft.com/office/drawing/2014/main" id="{56D026EB-40F7-4FB5-AA9D-999431E3DB72}"/>
+                <a16:creationId xmlns:a16="http://schemas.microsoft.com/office/drawing/2014/main" id="{94DDBE3B-9FCB-4BD1-9274-4526EEB491AD}"/>
               </a:ext>
             </a:extLst>
           </p:cNvPr>
@@ -3877,7 +3877,7 @@
           <p:cNvPr id="7" name="">
             <a:extLst xmlns:a="http://schemas.openxmlformats.org/drawingml/2006/main">
               <a:ext uri="{FF2B5EF4-FFF2-40B4-BE49-F238E27FC236}">
-                <a16:creationId xmlns:a16="http://schemas.microsoft.com/office/drawing/2014/main" id="{A8E53E13-F496-4276-A973-DB01DE1D33D1}"/>
+                <a16:creationId xmlns:a16="http://schemas.microsoft.com/office/drawing/2014/main" id="{41A12644-D58F-4D47-94D2-9A7B40C63FD8}"/>
               </a:ext>
             </a:extLst>
           </p:cNvPr>
@@ -4192,7 +4192,7 @@
           <p:cNvPr id="9" name="">
             <a:extLst xmlns:a="http://schemas.openxmlformats.org/drawingml/2006/main">
               <a:ext uri="{FF2B5EF4-FFF2-40B4-BE49-F238E27FC236}">
-                <a16:creationId xmlns:a16="http://schemas.microsoft.com/office/drawing/2014/main" id="{7CB8E577-A1A5-49BA-BC7A-2DC04437EFBC}"/>
+                <a16:creationId xmlns:a16="http://schemas.microsoft.com/office/drawing/2014/main" id="{BA3880B3-0F3F-47CA-A90F-6068E8E386E0}"/>
               </a:ext>
             </a:extLst>
           </p:cNvPr>
@@ -4251,7 +4251,7 @@
     </p:spTree>
     <p:extLst>
       <p:ext uri="{BB962C8B-B14F-4D97-AF65-F5344CB8AC3E}">
-        <p14:creationId xmlns:p14="http://schemas.microsoft.com/office/powerpoint/2010/main" val="452763094"/>
+        <p14:creationId xmlns:p14="http://schemas.microsoft.com/office/powerpoint/2010/main" val="943132072"/>
       </p:ext>
     </p:extLst>
   </p:cSld>
@@ -4282,7 +4282,7 @@
           <p:cNvPr id="9" name="">
             <a:extLst xmlns:a="http://schemas.openxmlformats.org/drawingml/2006/main">
               <a:ext uri="{FF2B5EF4-FFF2-40B4-BE49-F238E27FC236}">
-                <a16:creationId xmlns:a16="http://schemas.microsoft.com/office/drawing/2014/main" id="{F9C7C65B-BBD4-449B-AB94-BF5BC16A155C}"/>
+                <a16:creationId xmlns:a16="http://schemas.microsoft.com/office/drawing/2014/main" id="{46A5EEC1-C4E0-4156-B096-040B48666809}"/>
               </a:ext>
             </a:extLst>
           </p:cNvPr>
@@ -4343,7 +4343,7 @@
           <p:cNvPr id="2" name="">
             <a:extLst xmlns:a="http://schemas.openxmlformats.org/drawingml/2006/main">
               <a:ext uri="{FF2B5EF4-FFF2-40B4-BE49-F238E27FC236}">
-                <a16:creationId xmlns:a16="http://schemas.microsoft.com/office/drawing/2014/main" id="{DC4B4187-F37D-4663-B87D-A09010A1238A}"/>
+                <a16:creationId xmlns:a16="http://schemas.microsoft.com/office/drawing/2014/main" id="{4026E946-7B31-49F0-9E67-31E2E16235D4}"/>
               </a:ext>
             </a:extLst>
           </p:cNvPr>
@@ -4404,7 +4404,7 @@
           <p:cNvPr id="3" name="">
             <a:extLst xmlns:a="http://schemas.openxmlformats.org/drawingml/2006/main">
               <a:ext uri="{FF2B5EF4-FFF2-40B4-BE49-F238E27FC236}">
-                <a16:creationId xmlns:a16="http://schemas.microsoft.com/office/drawing/2014/main" id="{165A9F86-C3BF-475D-A0DB-4B4E128E778B}"/>
+                <a16:creationId xmlns:a16="http://schemas.microsoft.com/office/drawing/2014/main" id="{FAA3DF70-4195-46A2-9839-23A785859363}"/>
               </a:ext>
             </a:extLst>
           </p:cNvPr>
@@ -4465,7 +4465,7 @@
           <p:cNvPr id="4" name="">
             <a:extLst xmlns:a="http://schemas.openxmlformats.org/drawingml/2006/main">
               <a:ext uri="{FF2B5EF4-FFF2-40B4-BE49-F238E27FC236}">
-                <a16:creationId xmlns:a16="http://schemas.microsoft.com/office/drawing/2014/main" id="{4D193DDB-AE13-4000-83D1-02B13E85C346}"/>
+                <a16:creationId xmlns:a16="http://schemas.microsoft.com/office/drawing/2014/main" id="{DD37752D-263D-4377-B724-CB523A8C1EB4}"/>
               </a:ext>
             </a:extLst>
           </p:cNvPr>
@@ -4497,7 +4497,7 @@
           <p:cNvPr id="5" name="">
             <a:extLst xmlns:a="http://schemas.openxmlformats.org/drawingml/2006/main">
               <a:ext uri="{FF2B5EF4-FFF2-40B4-BE49-F238E27FC236}">
-                <a16:creationId xmlns:a16="http://schemas.microsoft.com/office/drawing/2014/main" id="{70FC5251-012E-4F98-9877-6086A926F389}"/>
+                <a16:creationId xmlns:a16="http://schemas.microsoft.com/office/drawing/2014/main" id="{D6E818D1-B7B0-4785-B35B-16C1B15E64F9}"/>
               </a:ext>
             </a:extLst>
           </p:cNvPr>
@@ -4558,7 +4558,7 @@
           <p:cNvPr id="6" name="">
             <a:extLst xmlns:a="http://schemas.openxmlformats.org/drawingml/2006/main">
               <a:ext uri="{FF2B5EF4-FFF2-40B4-BE49-F238E27FC236}">
-                <a16:creationId xmlns:a16="http://schemas.microsoft.com/office/drawing/2014/main" id="{0FD9EBDE-F7D1-4274-851F-D905ACDA1BB7}"/>
+                <a16:creationId xmlns:a16="http://schemas.microsoft.com/office/drawing/2014/main" id="{20CBFCB8-5411-4D0D-8D35-28F476B165DB}"/>
               </a:ext>
             </a:extLst>
           </p:cNvPr>
@@ -4619,7 +4619,7 @@
           <p:cNvPr id="7" name="">
             <a:extLst xmlns:a="http://schemas.openxmlformats.org/drawingml/2006/main">
               <a:ext uri="{FF2B5EF4-FFF2-40B4-BE49-F238E27FC236}">
-                <a16:creationId xmlns:a16="http://schemas.microsoft.com/office/drawing/2014/main" id="{6DE5E029-4277-4455-A99D-21E212DD590E}"/>
+                <a16:creationId xmlns:a16="http://schemas.microsoft.com/office/drawing/2014/main" id="{48FF16F4-359D-4771-AC98-EA5D6EC6D81C}"/>
               </a:ext>
             </a:extLst>
           </p:cNvPr>
@@ -4680,7 +4680,7 @@
           <p:cNvPr id="8" name="">
             <a:extLst xmlns:a="http://schemas.openxmlformats.org/drawingml/2006/main">
               <a:ext uri="{FF2B5EF4-FFF2-40B4-BE49-F238E27FC236}">
-                <a16:creationId xmlns:a16="http://schemas.microsoft.com/office/drawing/2014/main" id="{8AEB9CE9-8536-49A3-9941-3D3FD42F0B3F}"/>
+                <a16:creationId xmlns:a16="http://schemas.microsoft.com/office/drawing/2014/main" id="{1B18C991-460C-416C-A602-6B31A34BD028}"/>
               </a:ext>
             </a:extLst>
           </p:cNvPr>
@@ -4910,7 +4910,7 @@
     </p:spTree>
     <p:extLst>
       <p:ext uri="{BB962C8B-B14F-4D97-AF65-F5344CB8AC3E}">
-        <p14:creationId xmlns:p14="http://schemas.microsoft.com/office/powerpoint/2010/main" val="1704363637"/>
+        <p14:creationId xmlns:p14="http://schemas.microsoft.com/office/powerpoint/2010/main" val="1171509660"/>
       </p:ext>
     </p:extLst>
   </p:cSld>
@@ -4941,7 +4941,7 @@
           <p:cNvPr id="18" name="">
             <a:extLst xmlns:a="http://schemas.openxmlformats.org/drawingml/2006/main">
               <a:ext uri="{FF2B5EF4-FFF2-40B4-BE49-F238E27FC236}">
-                <a16:creationId xmlns:a16="http://schemas.microsoft.com/office/drawing/2014/main" id="{294DD696-DB3A-467B-92F3-30E7F151B3FE}"/>
+                <a16:creationId xmlns:a16="http://schemas.microsoft.com/office/drawing/2014/main" id="{C5811847-675F-4064-8A70-1FDF1CC893FD}"/>
               </a:ext>
             </a:extLst>
           </p:cNvPr>
@@ -5002,7 +5002,7 @@
           <p:cNvPr id="2" name="">
             <a:extLst xmlns:a="http://schemas.openxmlformats.org/drawingml/2006/main">
               <a:ext uri="{FF2B5EF4-FFF2-40B4-BE49-F238E27FC236}">
-                <a16:creationId xmlns:a16="http://schemas.microsoft.com/office/drawing/2014/main" id="{89E9E9A8-92CF-430E-BA03-766235D48BB2}"/>
+                <a16:creationId xmlns:a16="http://schemas.microsoft.com/office/drawing/2014/main" id="{74C0C7A8-1BB1-424D-B332-C560A85CBBB7}"/>
               </a:ext>
             </a:extLst>
           </p:cNvPr>
@@ -5063,7 +5063,7 @@
           <p:cNvPr id="3" name="">
             <a:extLst xmlns:a="http://schemas.openxmlformats.org/drawingml/2006/main">
               <a:ext uri="{FF2B5EF4-FFF2-40B4-BE49-F238E27FC236}">
-                <a16:creationId xmlns:a16="http://schemas.microsoft.com/office/drawing/2014/main" id="{F15C3647-8D75-4224-9A80-B25F052D933C}"/>
+                <a16:creationId xmlns:a16="http://schemas.microsoft.com/office/drawing/2014/main" id="{35019F9B-9915-4091-A838-C2C22A5A62B8}"/>
               </a:ext>
             </a:extLst>
           </p:cNvPr>
@@ -5124,7 +5124,7 @@
           <p:cNvPr id="4" name="">
             <a:extLst xmlns:a="http://schemas.openxmlformats.org/drawingml/2006/main">
               <a:ext uri="{FF2B5EF4-FFF2-40B4-BE49-F238E27FC236}">
-                <a16:creationId xmlns:a16="http://schemas.microsoft.com/office/drawing/2014/main" id="{5CE3DE47-C33C-458E-BFC6-6D8B08F3DFF1}"/>
+                <a16:creationId xmlns:a16="http://schemas.microsoft.com/office/drawing/2014/main" id="{211E6C42-36FD-4653-90EC-1AC194D0C962}"/>
               </a:ext>
             </a:extLst>
           </p:cNvPr>
@@ -5156,7 +5156,7 @@
           <p:cNvPr id="5" name="">
             <a:extLst xmlns:a="http://schemas.openxmlformats.org/drawingml/2006/main">
               <a:ext uri="{FF2B5EF4-FFF2-40B4-BE49-F238E27FC236}">
-                <a16:creationId xmlns:a16="http://schemas.microsoft.com/office/drawing/2014/main" id="{B615A2F0-6ED6-47B0-800E-7225299AAB78}"/>
+                <a16:creationId xmlns:a16="http://schemas.microsoft.com/office/drawing/2014/main" id="{FC0216B3-4D87-4B37-A459-76E3B732C2CD}"/>
               </a:ext>
             </a:extLst>
           </p:cNvPr>
@@ -5217,7 +5217,7 @@
           <p:cNvPr id="6" name="">
             <a:extLst xmlns:a="http://schemas.openxmlformats.org/drawingml/2006/main">
               <a:ext uri="{FF2B5EF4-FFF2-40B4-BE49-F238E27FC236}">
-                <a16:creationId xmlns:a16="http://schemas.microsoft.com/office/drawing/2014/main" id="{9BBF4423-D3CF-4AD9-A00F-CD9145085EBE}"/>
+                <a16:creationId xmlns:a16="http://schemas.microsoft.com/office/drawing/2014/main" id="{CA7C2FA7-07A8-423E-9217-23A541599DFA}"/>
               </a:ext>
             </a:extLst>
           </p:cNvPr>
@@ -5278,7 +5278,7 @@
           <p:cNvPr id="7" name="">
             <a:extLst xmlns:a="http://schemas.openxmlformats.org/drawingml/2006/main">
               <a:ext uri="{FF2B5EF4-FFF2-40B4-BE49-F238E27FC236}">
-                <a16:creationId xmlns:a16="http://schemas.microsoft.com/office/drawing/2014/main" id="{35F28242-D5A2-4055-8B6F-AB61C5BB59B6}"/>
+                <a16:creationId xmlns:a16="http://schemas.microsoft.com/office/drawing/2014/main" id="{1E2DB11F-3465-4025-BE72-44543DE155A5}"/>
               </a:ext>
             </a:extLst>
           </p:cNvPr>
@@ -5339,7 +5339,7 @@
           <p:cNvPr id="8" name="">
             <a:extLst xmlns:a="http://schemas.openxmlformats.org/drawingml/2006/main">
               <a:ext uri="{FF2B5EF4-FFF2-40B4-BE49-F238E27FC236}">
-                <a16:creationId xmlns:a16="http://schemas.microsoft.com/office/drawing/2014/main" id="{4EE84774-770A-4DDE-A1C7-8E7AD2057103}"/>
+                <a16:creationId xmlns:a16="http://schemas.microsoft.com/office/drawing/2014/main" id="{ABB8A273-B4DA-46F6-B37B-FD53CF015551}"/>
               </a:ext>
             </a:extLst>
           </p:cNvPr>
@@ -5406,7 +5406,7 @@
           <p:cNvPr id="9" name="">
             <a:extLst xmlns:a="http://schemas.openxmlformats.org/drawingml/2006/main">
               <a:ext uri="{FF2B5EF4-FFF2-40B4-BE49-F238E27FC236}">
-                <a16:creationId xmlns:a16="http://schemas.microsoft.com/office/drawing/2014/main" id="{81C7475D-2E6F-4F95-BC7E-F71310A92E80}"/>
+                <a16:creationId xmlns:a16="http://schemas.microsoft.com/office/drawing/2014/main" id="{7DE03736-BEDC-4856-AFF3-77A5F5ACEDA9}"/>
               </a:ext>
             </a:extLst>
           </p:cNvPr>
@@ -5467,7 +5467,7 @@
           <p:cNvPr id="10" name="">
             <a:extLst xmlns:a="http://schemas.openxmlformats.org/drawingml/2006/main">
               <a:ext uri="{FF2B5EF4-FFF2-40B4-BE49-F238E27FC236}">
-                <a16:creationId xmlns:a16="http://schemas.microsoft.com/office/drawing/2014/main" id="{2759F1D3-6F00-4BC2-978A-A331196FEBDB}"/>
+                <a16:creationId xmlns:a16="http://schemas.microsoft.com/office/drawing/2014/main" id="{4A2163E8-78D4-43EA-9581-B815592B54A7}"/>
               </a:ext>
             </a:extLst>
           </p:cNvPr>
@@ -5528,7 +5528,7 @@
           <p:cNvPr id="11" name="">
             <a:extLst xmlns:a="http://schemas.openxmlformats.org/drawingml/2006/main">
               <a:ext uri="{FF2B5EF4-FFF2-40B4-BE49-F238E27FC236}">
-                <a16:creationId xmlns:a16="http://schemas.microsoft.com/office/drawing/2014/main" id="{E4B240DD-435F-45CF-8660-6E157039C890}"/>
+                <a16:creationId xmlns:a16="http://schemas.microsoft.com/office/drawing/2014/main" id="{28C1F774-DB81-4A00-97F1-BE40603C74D8}"/>
               </a:ext>
             </a:extLst>
           </p:cNvPr>
@@ -5595,7 +5595,7 @@
           <p:cNvPr id="12" name="">
             <a:extLst xmlns:a="http://schemas.openxmlformats.org/drawingml/2006/main">
               <a:ext uri="{FF2B5EF4-FFF2-40B4-BE49-F238E27FC236}">
-                <a16:creationId xmlns:a16="http://schemas.microsoft.com/office/drawing/2014/main" id="{93ED86A8-89DA-485A-BBCF-24F578EA25E7}"/>
+                <a16:creationId xmlns:a16="http://schemas.microsoft.com/office/drawing/2014/main" id="{D8AC01B4-158E-4F70-B697-63A355DF2C27}"/>
               </a:ext>
             </a:extLst>
           </p:cNvPr>
@@ -5656,7 +5656,7 @@
           <p:cNvPr id="13" name="">
             <a:extLst xmlns:a="http://schemas.openxmlformats.org/drawingml/2006/main">
               <a:ext uri="{FF2B5EF4-FFF2-40B4-BE49-F238E27FC236}">
-                <a16:creationId xmlns:a16="http://schemas.microsoft.com/office/drawing/2014/main" id="{0914D8A8-70BD-4208-97DF-D5851FFA4C74}"/>
+                <a16:creationId xmlns:a16="http://schemas.microsoft.com/office/drawing/2014/main" id="{49486F22-6DDE-45DD-8394-B3DCB33F349C}"/>
               </a:ext>
             </a:extLst>
           </p:cNvPr>
@@ -5717,7 +5717,7 @@
           <p:cNvPr id="14" name="">
             <a:extLst xmlns:a="http://schemas.openxmlformats.org/drawingml/2006/main">
               <a:ext uri="{FF2B5EF4-FFF2-40B4-BE49-F238E27FC236}">
-                <a16:creationId xmlns:a16="http://schemas.microsoft.com/office/drawing/2014/main" id="{9A4D1A73-9699-4B9F-8F18-10C06E14E61F}"/>
+                <a16:creationId xmlns:a16="http://schemas.microsoft.com/office/drawing/2014/main" id="{54C8BCF8-3B88-4DDF-9BD8-18B82C95C96A}"/>
               </a:ext>
             </a:extLst>
           </p:cNvPr>
@@ -5784,7 +5784,7 @@
           <p:cNvPr id="15" name="">
             <a:extLst xmlns:a="http://schemas.openxmlformats.org/drawingml/2006/main">
               <a:ext uri="{FF2B5EF4-FFF2-40B4-BE49-F238E27FC236}">
-                <a16:creationId xmlns:a16="http://schemas.microsoft.com/office/drawing/2014/main" id="{30DF3E59-9AC3-4717-BFAB-46F1449853E9}"/>
+                <a16:creationId xmlns:a16="http://schemas.microsoft.com/office/drawing/2014/main" id="{F9BA6EB9-5D66-4793-BAA2-8C0C5D17E6FD}"/>
               </a:ext>
             </a:extLst>
           </p:cNvPr>
@@ -5845,7 +5845,7 @@
           <p:cNvPr id="16" name="">
             <a:extLst xmlns:a="http://schemas.openxmlformats.org/drawingml/2006/main">
               <a:ext uri="{FF2B5EF4-FFF2-40B4-BE49-F238E27FC236}">
-                <a16:creationId xmlns:a16="http://schemas.microsoft.com/office/drawing/2014/main" id="{76B92A96-6405-47FD-963B-95921881465D}"/>
+                <a16:creationId xmlns:a16="http://schemas.microsoft.com/office/drawing/2014/main" id="{69786F0C-5ABE-425E-A4CC-2454309DD970}"/>
               </a:ext>
             </a:extLst>
           </p:cNvPr>
@@ -5906,7 +5906,7 @@
           <p:cNvPr id="17" name="">
             <a:extLst xmlns:a="http://schemas.openxmlformats.org/drawingml/2006/main">
               <a:ext uri="{FF2B5EF4-FFF2-40B4-BE49-F238E27FC236}">
-                <a16:creationId xmlns:a16="http://schemas.microsoft.com/office/drawing/2014/main" id="{C5E967FD-8145-40CC-BB91-32BD0750F41C}"/>
+                <a16:creationId xmlns:a16="http://schemas.microsoft.com/office/drawing/2014/main" id="{01FE447D-C4C3-4A35-827D-80EB08E8E5F9}"/>
               </a:ext>
             </a:extLst>
           </p:cNvPr>
@@ -5965,7 +5965,7 @@
     </p:spTree>
     <p:extLst>
       <p:ext uri="{BB962C8B-B14F-4D97-AF65-F5344CB8AC3E}">
-        <p14:creationId xmlns:p14="http://schemas.microsoft.com/office/powerpoint/2010/main" val="1338871648"/>
+        <p14:creationId xmlns:p14="http://schemas.microsoft.com/office/powerpoint/2010/main" val="1636745528"/>
       </p:ext>
     </p:extLst>
   </p:cSld>
@@ -5996,7 +5996,7 @@
           <p:cNvPr id="10" name="">
             <a:extLst xmlns:a="http://schemas.openxmlformats.org/drawingml/2006/main">
               <a:ext uri="{FF2B5EF4-FFF2-40B4-BE49-F238E27FC236}">
-                <a16:creationId xmlns:a16="http://schemas.microsoft.com/office/drawing/2014/main" id="{79D0FF0D-3EE3-4800-A663-FCC9BE89D8E4}"/>
+                <a16:creationId xmlns:a16="http://schemas.microsoft.com/office/drawing/2014/main" id="{4E807986-368A-4FC1-A4D3-3C73AD9A44F1}"/>
               </a:ext>
             </a:extLst>
           </p:cNvPr>
@@ -6057,7 +6057,7 @@
           <p:cNvPr id="2" name="">
             <a:extLst xmlns:a="http://schemas.openxmlformats.org/drawingml/2006/main">
               <a:ext uri="{FF2B5EF4-FFF2-40B4-BE49-F238E27FC236}">
-                <a16:creationId xmlns:a16="http://schemas.microsoft.com/office/drawing/2014/main" id="{3E3F18F3-E0B5-4DAC-AAE0-D897854A11AD}"/>
+                <a16:creationId xmlns:a16="http://schemas.microsoft.com/office/drawing/2014/main" id="{2049BAB2-A191-4778-BB0E-46BDC34ED25C}"/>
               </a:ext>
             </a:extLst>
           </p:cNvPr>
@@ -6118,7 +6118,7 @@
           <p:cNvPr id="3" name="">
             <a:extLst xmlns:a="http://schemas.openxmlformats.org/drawingml/2006/main">
               <a:ext uri="{FF2B5EF4-FFF2-40B4-BE49-F238E27FC236}">
-                <a16:creationId xmlns:a16="http://schemas.microsoft.com/office/drawing/2014/main" id="{3946830B-1814-46EF-B2D8-5CA93B7A21F6}"/>
+                <a16:creationId xmlns:a16="http://schemas.microsoft.com/office/drawing/2014/main" id="{C97541BF-F19B-483B-88AD-74157D74FA2F}"/>
               </a:ext>
             </a:extLst>
           </p:cNvPr>
@@ -6179,7 +6179,7 @@
           <p:cNvPr id="4" name="">
             <a:extLst xmlns:a="http://schemas.openxmlformats.org/drawingml/2006/main">
               <a:ext uri="{FF2B5EF4-FFF2-40B4-BE49-F238E27FC236}">
-                <a16:creationId xmlns:a16="http://schemas.microsoft.com/office/drawing/2014/main" id="{92733F25-4169-44FD-BB0F-8014ADA62A33}"/>
+                <a16:creationId xmlns:a16="http://schemas.microsoft.com/office/drawing/2014/main" id="{0009EF9C-CCE0-41EE-A340-49B2C1647848}"/>
               </a:ext>
             </a:extLst>
           </p:cNvPr>
@@ -6211,7 +6211,7 @@
           <p:cNvPr id="5" name="">
             <a:extLst xmlns:a="http://schemas.openxmlformats.org/drawingml/2006/main">
               <a:ext uri="{FF2B5EF4-FFF2-40B4-BE49-F238E27FC236}">
-                <a16:creationId xmlns:a16="http://schemas.microsoft.com/office/drawing/2014/main" id="{B88A9137-37AF-4A5D-856E-FCCC1F7D827C}"/>
+                <a16:creationId xmlns:a16="http://schemas.microsoft.com/office/drawing/2014/main" id="{9BC3D603-C7FD-41B8-B0EC-BA2640613A82}"/>
               </a:ext>
             </a:extLst>
           </p:cNvPr>
@@ -6272,7 +6272,7 @@
           <p:cNvPr id="6" name="">
             <a:extLst xmlns:a="http://schemas.openxmlformats.org/drawingml/2006/main">
               <a:ext uri="{FF2B5EF4-FFF2-40B4-BE49-F238E27FC236}">
-                <a16:creationId xmlns:a16="http://schemas.microsoft.com/office/drawing/2014/main" id="{CDF32B0F-883A-49C1-88CD-DCD733FF1594}"/>
+                <a16:creationId xmlns:a16="http://schemas.microsoft.com/office/drawing/2014/main" id="{2B406D25-DBBE-4EA0-AF65-FDAD2256B8A4}"/>
               </a:ext>
             </a:extLst>
           </p:cNvPr>
@@ -6333,7 +6333,7 @@
           <p:cNvPr id="7" name="">
             <a:extLst xmlns:a="http://schemas.openxmlformats.org/drawingml/2006/main">
               <a:ext uri="{FF2B5EF4-FFF2-40B4-BE49-F238E27FC236}">
-                <a16:creationId xmlns:a16="http://schemas.microsoft.com/office/drawing/2014/main" id="{E5B0DAC8-6373-4E44-8A37-1F3CE92F202A}"/>
+                <a16:creationId xmlns:a16="http://schemas.microsoft.com/office/drawing/2014/main" id="{65F8A1E4-4E4A-43B5-8418-219DD23D6927}"/>
               </a:ext>
             </a:extLst>
           </p:cNvPr>
@@ -6394,7 +6394,7 @@
           <p:cNvPr id="8" name="">
             <a:extLst xmlns:a="http://schemas.openxmlformats.org/drawingml/2006/main">
               <a:ext uri="{FF2B5EF4-FFF2-40B4-BE49-F238E27FC236}">
-                <a16:creationId xmlns:a16="http://schemas.microsoft.com/office/drawing/2014/main" id="{6E508CA3-346B-445B-A85D-9DD76BB7984E}"/>
+                <a16:creationId xmlns:a16="http://schemas.microsoft.com/office/drawing/2014/main" id="{A35FE812-E459-4C1B-B593-693F132DA75D}"/>
               </a:ext>
             </a:extLst>
           </p:cNvPr>
@@ -6643,7 +6643,7 @@
                 <a:ea typeface="IBM Plex Mono"/>
                 <a:cs typeface="IBM Plex Mono"/>
               </a:rPr>
-              <a:t>다른 항목이 있으면 코드도 고쳐 줘.</a:t>
+              <a:t>맞지 않는 항목이 있으면 코드도 고쳐 줘.</a:t>
             </a:r>
           </a:p>
         </p:txBody>
@@ -6653,7 +6653,7 @@
           <p:cNvPr id="9" name="">
             <a:extLst xmlns:a="http://schemas.openxmlformats.org/drawingml/2006/main">
               <a:ext uri="{FF2B5EF4-FFF2-40B4-BE49-F238E27FC236}">
-                <a16:creationId xmlns:a16="http://schemas.microsoft.com/office/drawing/2014/main" id="{EBE1B04A-1E6A-4D77-8A31-60145A9543F9}"/>
+                <a16:creationId xmlns:a16="http://schemas.microsoft.com/office/drawing/2014/main" id="{E11BC2AA-543A-46D2-889A-3C93F02D053B}"/>
               </a:ext>
             </a:extLst>
           </p:cNvPr>
@@ -6712,7 +6712,7 @@
     </p:spTree>
     <p:extLst>
       <p:ext uri="{BB962C8B-B14F-4D97-AF65-F5344CB8AC3E}">
-        <p14:creationId xmlns:p14="http://schemas.microsoft.com/office/powerpoint/2010/main" val="78746717"/>
+        <p14:creationId xmlns:p14="http://schemas.microsoft.com/office/powerpoint/2010/main" val="741948176"/>
       </p:ext>
     </p:extLst>
   </p:cSld>
@@ -6743,7 +6743,7 @@
           <p:cNvPr id="31" name="">
             <a:extLst xmlns:a="http://schemas.openxmlformats.org/drawingml/2006/main">
               <a:ext uri="{FF2B5EF4-FFF2-40B4-BE49-F238E27FC236}">
-                <a16:creationId xmlns:a16="http://schemas.microsoft.com/office/drawing/2014/main" id="{AFBA94F1-98D1-4DFD-8291-BFBC5ADD27AD}"/>
+                <a16:creationId xmlns:a16="http://schemas.microsoft.com/office/drawing/2014/main" id="{3682E99D-46F5-4F14-BBB0-6C6536C103AB}"/>
               </a:ext>
             </a:extLst>
           </p:cNvPr>
@@ -6804,7 +6804,7 @@
           <p:cNvPr id="2" name="">
             <a:extLst xmlns:a="http://schemas.openxmlformats.org/drawingml/2006/main">
               <a:ext uri="{FF2B5EF4-FFF2-40B4-BE49-F238E27FC236}">
-                <a16:creationId xmlns:a16="http://schemas.microsoft.com/office/drawing/2014/main" id="{05FB73B5-CAEE-40FB-86ED-66770E15A303}"/>
+                <a16:creationId xmlns:a16="http://schemas.microsoft.com/office/drawing/2014/main" id="{69FD6959-61AA-4861-922A-698828F5C3DA}"/>
               </a:ext>
             </a:extLst>
           </p:cNvPr>
@@ -6865,7 +6865,7 @@
           <p:cNvPr id="3" name="">
             <a:extLst xmlns:a="http://schemas.openxmlformats.org/drawingml/2006/main">
               <a:ext uri="{FF2B5EF4-FFF2-40B4-BE49-F238E27FC236}">
-                <a16:creationId xmlns:a16="http://schemas.microsoft.com/office/drawing/2014/main" id="{0B6024C4-61C6-4185-B065-78D9C83BF4FC}"/>
+                <a16:creationId xmlns:a16="http://schemas.microsoft.com/office/drawing/2014/main" id="{4FE8460F-851C-4FBE-98B6-8019F74BDDE4}"/>
               </a:ext>
             </a:extLst>
           </p:cNvPr>
@@ -6926,7 +6926,7 @@
           <p:cNvPr id="4" name="">
             <a:extLst xmlns:a="http://schemas.openxmlformats.org/drawingml/2006/main">
               <a:ext uri="{FF2B5EF4-FFF2-40B4-BE49-F238E27FC236}">
-                <a16:creationId xmlns:a16="http://schemas.microsoft.com/office/drawing/2014/main" id="{265F2B2B-5CAA-4405-84F3-8750418719C4}"/>
+                <a16:creationId xmlns:a16="http://schemas.microsoft.com/office/drawing/2014/main" id="{D758640C-CB3C-4532-86A5-C14462BECEFE}"/>
               </a:ext>
             </a:extLst>
           </p:cNvPr>
@@ -6958,7 +6958,7 @@
           <p:cNvPr id="5" name="">
             <a:extLst xmlns:a="http://schemas.openxmlformats.org/drawingml/2006/main">
               <a:ext uri="{FF2B5EF4-FFF2-40B4-BE49-F238E27FC236}">
-                <a16:creationId xmlns:a16="http://schemas.microsoft.com/office/drawing/2014/main" id="{29479FE3-EBA0-4EFC-B1F7-82ADCF65B8FF}"/>
+                <a16:creationId xmlns:a16="http://schemas.microsoft.com/office/drawing/2014/main" id="{C0D8FC0E-C49C-43DB-A727-43F52B5C1647}"/>
               </a:ext>
             </a:extLst>
           </p:cNvPr>
@@ -7019,7 +7019,7 @@
           <p:cNvPr id="6" name="">
             <a:extLst xmlns:a="http://schemas.openxmlformats.org/drawingml/2006/main">
               <a:ext uri="{FF2B5EF4-FFF2-40B4-BE49-F238E27FC236}">
-                <a16:creationId xmlns:a16="http://schemas.microsoft.com/office/drawing/2014/main" id="{146CD07F-C513-445B-AE4D-6319C509900C}"/>
+                <a16:creationId xmlns:a16="http://schemas.microsoft.com/office/drawing/2014/main" id="{4339FC0B-3171-4C96-BDC1-E3C95FC55DFA}"/>
               </a:ext>
             </a:extLst>
           </p:cNvPr>
@@ -7080,7 +7080,7 @@
           <p:cNvPr id="7" name="">
             <a:extLst xmlns:a="http://schemas.openxmlformats.org/drawingml/2006/main">
               <a:ext uri="{FF2B5EF4-FFF2-40B4-BE49-F238E27FC236}">
-                <a16:creationId xmlns:a16="http://schemas.microsoft.com/office/drawing/2014/main" id="{3F582DB1-0DAA-4B2C-994F-D6809762AAA3}"/>
+                <a16:creationId xmlns:a16="http://schemas.microsoft.com/office/drawing/2014/main" id="{12302950-AA32-48CF-BA91-84DD88E69FC2}"/>
               </a:ext>
             </a:extLst>
           </p:cNvPr>
@@ -7141,7 +7141,7 @@
           <p:cNvPr id="8" name="">
             <a:extLst xmlns:a="http://schemas.openxmlformats.org/drawingml/2006/main">
               <a:ext uri="{FF2B5EF4-FFF2-40B4-BE49-F238E27FC236}">
-                <a16:creationId xmlns:a16="http://schemas.microsoft.com/office/drawing/2014/main" id="{75DA6367-EE2B-4F51-8FAE-E98D1B8E0649}"/>
+                <a16:creationId xmlns:a16="http://schemas.microsoft.com/office/drawing/2014/main" id="{D5F5608C-0BED-4D89-812D-8970E84BF5F8}"/>
               </a:ext>
             </a:extLst>
           </p:cNvPr>
@@ -7202,7 +7202,7 @@
           <p:cNvPr id="9" name="">
             <a:extLst xmlns:a="http://schemas.openxmlformats.org/drawingml/2006/main">
               <a:ext uri="{FF2B5EF4-FFF2-40B4-BE49-F238E27FC236}">
-                <a16:creationId xmlns:a16="http://schemas.microsoft.com/office/drawing/2014/main" id="{848ECEB3-1405-4C81-987F-E93F8098056A}"/>
+                <a16:creationId xmlns:a16="http://schemas.microsoft.com/office/drawing/2014/main" id="{9590FD7A-19E4-427D-85C1-732C395815F1}"/>
               </a:ext>
             </a:extLst>
           </p:cNvPr>
@@ -7214,11 +7214,11 @@
         <p:spPr>
           <a:xfrm xmlns:a="http://schemas.openxmlformats.org/drawingml/2006/main">
             <a:off x="666750" y="2000250"/>
-            <a:ext cx="6667500" cy="781050"/>
+            <a:ext cx="6667500" cy="876300"/>
           </a:xfrm>
           <a:prstGeom xmlns:a="http://schemas.openxmlformats.org/drawingml/2006/main" prst="roundRect">
             <a:avLst>
-              <a:gd name="adj" fmla="val 6098"/>
+              <a:gd name="adj" fmla="val 5435"/>
             </a:avLst>
           </a:prstGeom>
           <a:solidFill xmlns:a="http://schemas.openxmlformats.org/drawingml/2006/main">
@@ -7236,7 +7236,7 @@
           <p:cNvPr id="10" name="">
             <a:extLst xmlns:a="http://schemas.openxmlformats.org/drawingml/2006/main">
               <a:ext uri="{FF2B5EF4-FFF2-40B4-BE49-F238E27FC236}">
-                <a16:creationId xmlns:a16="http://schemas.microsoft.com/office/drawing/2014/main" id="{495361B7-CBA4-41DF-9F8B-4796884BB34E}"/>
+                <a16:creationId xmlns:a16="http://schemas.microsoft.com/office/drawing/2014/main" id="{DCC068C6-EA42-4C2D-B38F-D93AE0084326}"/>
               </a:ext>
             </a:extLst>
           </p:cNvPr>
@@ -7297,7 +7297,7 @@
           <p:cNvPr id="11" name="">
             <a:extLst xmlns:a="http://schemas.openxmlformats.org/drawingml/2006/main">
               <a:ext uri="{FF2B5EF4-FFF2-40B4-BE49-F238E27FC236}">
-                <a16:creationId xmlns:a16="http://schemas.microsoft.com/office/drawing/2014/main" id="{B1E7C5B9-5F4B-4522-B5DB-C3F11ADADCEF}"/>
+                <a16:creationId xmlns:a16="http://schemas.microsoft.com/office/drawing/2014/main" id="{4C798A2F-DBCD-4C9E-9620-2C02CDB8D8D4}"/>
               </a:ext>
             </a:extLst>
           </p:cNvPr>
@@ -7309,7 +7309,7 @@
         <p:spPr>
           <a:xfrm xmlns:a="http://schemas.openxmlformats.org/drawingml/2006/main">
             <a:off x="1219200" y="2095500"/>
-            <a:ext cx="5981700" cy="590550"/>
+            <a:ext cx="5981700" cy="685800"/>
           </a:xfrm>
           <a:prstGeom xmlns:a="http://schemas.openxmlformats.org/drawingml/2006/main" prst="rect">
             <a:avLst/>
@@ -7358,23 +7358,23 @@
           <p:cNvPr id="12" name="">
             <a:extLst xmlns:a="http://schemas.openxmlformats.org/drawingml/2006/main">
               <a:ext uri="{FF2B5EF4-FFF2-40B4-BE49-F238E27FC236}">
-                <a16:creationId xmlns:a16="http://schemas.microsoft.com/office/drawing/2014/main" id="{31885B08-3163-4817-90F2-2ABE4E9B986F}"/>
-              </a:ext>
-            </a:extLst>
-          </p:cNvPr>
-          <p:cNvSpPr>
-            <a:spLocks xmlns:a="http://schemas.openxmlformats.org/drawingml/2006/main" noGrp="1"/>
-          </p:cNvSpPr>
-          <p:nvPr/>
-        </p:nvSpPr>
-        <p:spPr>
-          <a:xfrm xmlns:a="http://schemas.openxmlformats.org/drawingml/2006/main">
-            <a:off x="666750" y="2933700"/>
-            <a:ext cx="6667500" cy="781050"/>
+                <a16:creationId xmlns:a16="http://schemas.microsoft.com/office/drawing/2014/main" id="{25A63F03-2A8D-4F34-BD68-D235895A5669}"/>
+              </a:ext>
+            </a:extLst>
+          </p:cNvPr>
+          <p:cNvSpPr>
+            <a:spLocks xmlns:a="http://schemas.openxmlformats.org/drawingml/2006/main" noGrp="1"/>
+          </p:cNvSpPr>
+          <p:nvPr/>
+        </p:nvSpPr>
+        <p:spPr>
+          <a:xfrm xmlns:a="http://schemas.openxmlformats.org/drawingml/2006/main">
+            <a:off x="666750" y="3028950"/>
+            <a:ext cx="6667500" cy="1000125"/>
           </a:xfrm>
           <a:prstGeom xmlns:a="http://schemas.openxmlformats.org/drawingml/2006/main" prst="roundRect">
             <a:avLst>
-              <a:gd name="adj" fmla="val 6098"/>
+              <a:gd name="adj" fmla="val 4762"/>
             </a:avLst>
           </a:prstGeom>
           <a:solidFill xmlns:a="http://schemas.openxmlformats.org/drawingml/2006/main">
@@ -7392,18 +7392,18 @@
           <p:cNvPr id="13" name="">
             <a:extLst xmlns:a="http://schemas.openxmlformats.org/drawingml/2006/main">
               <a:ext uri="{FF2B5EF4-FFF2-40B4-BE49-F238E27FC236}">
-                <a16:creationId xmlns:a16="http://schemas.microsoft.com/office/drawing/2014/main" id="{DFFAEFEC-F28D-4809-A49D-A36722C74932}"/>
-              </a:ext>
-            </a:extLst>
-          </p:cNvPr>
-          <p:cNvSpPr>
-            <a:spLocks xmlns:a="http://schemas.openxmlformats.org/drawingml/2006/main" noGrp="1"/>
-          </p:cNvSpPr>
-          <p:nvPr/>
-        </p:nvSpPr>
-        <p:spPr>
-          <a:xfrm xmlns:a="http://schemas.openxmlformats.org/drawingml/2006/main">
-            <a:off x="781050" y="3048000"/>
+                <a16:creationId xmlns:a16="http://schemas.microsoft.com/office/drawing/2014/main" id="{284E022C-A145-4747-88D9-30B74FE0D435}"/>
+              </a:ext>
+            </a:extLst>
+          </p:cNvPr>
+          <p:cNvSpPr>
+            <a:spLocks xmlns:a="http://schemas.openxmlformats.org/drawingml/2006/main" noGrp="1"/>
+          </p:cNvSpPr>
+          <p:nvPr/>
+        </p:nvSpPr>
+        <p:spPr>
+          <a:xfrm xmlns:a="http://schemas.openxmlformats.org/drawingml/2006/main">
+            <a:off x="781050" y="3143250"/>
             <a:ext cx="323850" cy="285750"/>
           </a:xfrm>
           <a:prstGeom xmlns:a="http://schemas.openxmlformats.org/drawingml/2006/main" prst="roundRect">
@@ -7453,19 +7453,19 @@
           <p:cNvPr id="14" name="">
             <a:extLst xmlns:a="http://schemas.openxmlformats.org/drawingml/2006/main">
               <a:ext uri="{FF2B5EF4-FFF2-40B4-BE49-F238E27FC236}">
-                <a16:creationId xmlns:a16="http://schemas.microsoft.com/office/drawing/2014/main" id="{BB6C02ED-489E-4063-8B06-D535DDD7FC98}"/>
-              </a:ext>
-            </a:extLst>
-          </p:cNvPr>
-          <p:cNvSpPr>
-            <a:spLocks xmlns:a="http://schemas.openxmlformats.org/drawingml/2006/main" noGrp="1"/>
-          </p:cNvSpPr>
-          <p:nvPr/>
-        </p:nvSpPr>
-        <p:spPr>
-          <a:xfrm xmlns:a="http://schemas.openxmlformats.org/drawingml/2006/main">
-            <a:off x="1219200" y="3028950"/>
-            <a:ext cx="5981700" cy="590550"/>
+                <a16:creationId xmlns:a16="http://schemas.microsoft.com/office/drawing/2014/main" id="{73ADF941-52EA-49B6-BC1D-1B391642B5D7}"/>
+              </a:ext>
+            </a:extLst>
+          </p:cNvPr>
+          <p:cNvSpPr>
+            <a:spLocks xmlns:a="http://schemas.openxmlformats.org/drawingml/2006/main" noGrp="1"/>
+          </p:cNvSpPr>
+          <p:nvPr/>
+        </p:nvSpPr>
+        <p:spPr>
+          <a:xfrm xmlns:a="http://schemas.openxmlformats.org/drawingml/2006/main">
+            <a:off x="1219200" y="3124200"/>
+            <a:ext cx="5981700" cy="809625"/>
           </a:xfrm>
           <a:prstGeom xmlns:a="http://schemas.openxmlformats.org/drawingml/2006/main" prst="rect">
             <a:avLst/>
@@ -7514,23 +7514,23 @@
           <p:cNvPr id="15" name="">
             <a:extLst xmlns:a="http://schemas.openxmlformats.org/drawingml/2006/main">
               <a:ext uri="{FF2B5EF4-FFF2-40B4-BE49-F238E27FC236}">
-                <a16:creationId xmlns:a16="http://schemas.microsoft.com/office/drawing/2014/main" id="{88B7F425-B5D5-45D2-8789-A5CC312712E0}"/>
-              </a:ext>
-            </a:extLst>
-          </p:cNvPr>
-          <p:cNvSpPr>
-            <a:spLocks xmlns:a="http://schemas.openxmlformats.org/drawingml/2006/main" noGrp="1"/>
-          </p:cNvSpPr>
-          <p:nvPr/>
-        </p:nvSpPr>
-        <p:spPr>
-          <a:xfrm xmlns:a="http://schemas.openxmlformats.org/drawingml/2006/main">
-            <a:off x="666750" y="3867150"/>
-            <a:ext cx="6667500" cy="1028700"/>
+                <a16:creationId xmlns:a16="http://schemas.microsoft.com/office/drawing/2014/main" id="{47AEA768-A3B7-4060-87DF-5F9E395BEF4D}"/>
+              </a:ext>
+            </a:extLst>
+          </p:cNvPr>
+          <p:cNvSpPr>
+            <a:spLocks xmlns:a="http://schemas.openxmlformats.org/drawingml/2006/main" noGrp="1"/>
+          </p:cNvSpPr>
+          <p:nvPr/>
+        </p:nvSpPr>
+        <p:spPr>
+          <a:xfrm xmlns:a="http://schemas.openxmlformats.org/drawingml/2006/main">
+            <a:off x="666750" y="4181475"/>
+            <a:ext cx="6667500" cy="1000125"/>
           </a:xfrm>
           <a:prstGeom xmlns:a="http://schemas.openxmlformats.org/drawingml/2006/main" prst="roundRect">
             <a:avLst>
-              <a:gd name="adj" fmla="val 4630"/>
+              <a:gd name="adj" fmla="val 4762"/>
             </a:avLst>
           </a:prstGeom>
           <a:solidFill xmlns:a="http://schemas.openxmlformats.org/drawingml/2006/main">
@@ -7548,18 +7548,18 @@
           <p:cNvPr id="16" name="">
             <a:extLst xmlns:a="http://schemas.openxmlformats.org/drawingml/2006/main">
               <a:ext uri="{FF2B5EF4-FFF2-40B4-BE49-F238E27FC236}">
-                <a16:creationId xmlns:a16="http://schemas.microsoft.com/office/drawing/2014/main" id="{7E65853F-B740-45E7-B60C-DD40FF32C851}"/>
-              </a:ext>
-            </a:extLst>
-          </p:cNvPr>
-          <p:cNvSpPr>
-            <a:spLocks xmlns:a="http://schemas.openxmlformats.org/drawingml/2006/main" noGrp="1"/>
-          </p:cNvSpPr>
-          <p:nvPr/>
-        </p:nvSpPr>
-        <p:spPr>
-          <a:xfrm xmlns:a="http://schemas.openxmlformats.org/drawingml/2006/main">
-            <a:off x="781050" y="3981450"/>
+                <a16:creationId xmlns:a16="http://schemas.microsoft.com/office/drawing/2014/main" id="{2CB0511C-A942-497D-B729-5D732BABB56C}"/>
+              </a:ext>
+            </a:extLst>
+          </p:cNvPr>
+          <p:cNvSpPr>
+            <a:spLocks xmlns:a="http://schemas.openxmlformats.org/drawingml/2006/main" noGrp="1"/>
+          </p:cNvSpPr>
+          <p:nvPr/>
+        </p:nvSpPr>
+        <p:spPr>
+          <a:xfrm xmlns:a="http://schemas.openxmlformats.org/drawingml/2006/main">
+            <a:off x="781050" y="4295775"/>
             <a:ext cx="323850" cy="285750"/>
           </a:xfrm>
           <a:prstGeom xmlns:a="http://schemas.openxmlformats.org/drawingml/2006/main" prst="roundRect">
@@ -7609,19 +7609,19 @@
           <p:cNvPr id="17" name="">
             <a:extLst xmlns:a="http://schemas.openxmlformats.org/drawingml/2006/main">
               <a:ext uri="{FF2B5EF4-FFF2-40B4-BE49-F238E27FC236}">
-                <a16:creationId xmlns:a16="http://schemas.microsoft.com/office/drawing/2014/main" id="{60244EEF-F843-4953-97E4-365B8FC1AB66}"/>
-              </a:ext>
-            </a:extLst>
-          </p:cNvPr>
-          <p:cNvSpPr>
-            <a:spLocks xmlns:a="http://schemas.openxmlformats.org/drawingml/2006/main" noGrp="1"/>
-          </p:cNvSpPr>
-          <p:nvPr/>
-        </p:nvSpPr>
-        <p:spPr>
-          <a:xfrm xmlns:a="http://schemas.openxmlformats.org/drawingml/2006/main">
-            <a:off x="1219200" y="3962400"/>
-            <a:ext cx="5981700" cy="838200"/>
+                <a16:creationId xmlns:a16="http://schemas.microsoft.com/office/drawing/2014/main" id="{623AF16C-8D9D-481B-9F9D-9A22A3A6C2FC}"/>
+              </a:ext>
+            </a:extLst>
+          </p:cNvPr>
+          <p:cNvSpPr>
+            <a:spLocks xmlns:a="http://schemas.openxmlformats.org/drawingml/2006/main" noGrp="1"/>
+          </p:cNvSpPr>
+          <p:nvPr/>
+        </p:nvSpPr>
+        <p:spPr>
+          <a:xfrm xmlns:a="http://schemas.openxmlformats.org/drawingml/2006/main">
+            <a:off x="1219200" y="4276725"/>
+            <a:ext cx="5981700" cy="809625"/>
           </a:xfrm>
           <a:prstGeom xmlns:a="http://schemas.openxmlformats.org/drawingml/2006/main" prst="rect">
             <a:avLst/>
@@ -7697,7 +7697,7 @@
           <p:cNvPr id="18" name="">
             <a:extLst xmlns:a="http://schemas.openxmlformats.org/drawingml/2006/main">
               <a:ext uri="{FF2B5EF4-FFF2-40B4-BE49-F238E27FC236}">
-                <a16:creationId xmlns:a16="http://schemas.microsoft.com/office/drawing/2014/main" id="{38C4C0BA-D1DB-48E6-8A46-DE8B1FD86486}"/>
+                <a16:creationId xmlns:a16="http://schemas.microsoft.com/office/drawing/2014/main" id="{54C60943-7F79-4DBC-B2EF-5A9ADEDCE9DD}"/>
               </a:ext>
             </a:extLst>
           </p:cNvPr>
@@ -7731,7 +7731,7 @@
           <p:cNvPr id="19" name="">
             <a:extLst xmlns:a="http://schemas.openxmlformats.org/drawingml/2006/main">
               <a:ext uri="{FF2B5EF4-FFF2-40B4-BE49-F238E27FC236}">
-                <a16:creationId xmlns:a16="http://schemas.microsoft.com/office/drawing/2014/main" id="{A8EB9E2C-E393-4FF8-ACBA-E06443478246}"/>
+                <a16:creationId xmlns:a16="http://schemas.microsoft.com/office/drawing/2014/main" id="{D07A663C-CF54-4A83-A881-0B82CDEC186E}"/>
               </a:ext>
             </a:extLst>
           </p:cNvPr>
@@ -7792,7 +7792,7 @@
           <p:cNvPr id="20" name="">
             <a:extLst xmlns:a="http://schemas.openxmlformats.org/drawingml/2006/main">
               <a:ext uri="{FF2B5EF4-FFF2-40B4-BE49-F238E27FC236}">
-                <a16:creationId xmlns:a16="http://schemas.microsoft.com/office/drawing/2014/main" id="{BA057D2B-71DE-42C2-A149-71405D6C2581}"/>
+                <a16:creationId xmlns:a16="http://schemas.microsoft.com/office/drawing/2014/main" id="{7465DA61-1122-4EAF-9D87-534AEB233F40}"/>
               </a:ext>
             </a:extLst>
           </p:cNvPr>
@@ -7853,7 +7853,7 @@
           <p:cNvPr id="21" name="">
             <a:extLst xmlns:a="http://schemas.openxmlformats.org/drawingml/2006/main">
               <a:ext uri="{FF2B5EF4-FFF2-40B4-BE49-F238E27FC236}">
-                <a16:creationId xmlns:a16="http://schemas.microsoft.com/office/drawing/2014/main" id="{CDBC00BB-BE9A-4BC6-B6AC-2DAB33365414}"/>
+                <a16:creationId xmlns:a16="http://schemas.microsoft.com/office/drawing/2014/main" id="{A6294C18-3515-40AE-A6F6-1CF5DEF3A849}"/>
               </a:ext>
             </a:extLst>
           </p:cNvPr>
@@ -7914,7 +7914,7 @@
           <p:cNvPr id="22" name="">
             <a:extLst xmlns:a="http://schemas.openxmlformats.org/drawingml/2006/main">
               <a:ext uri="{FF2B5EF4-FFF2-40B4-BE49-F238E27FC236}">
-                <a16:creationId xmlns:a16="http://schemas.microsoft.com/office/drawing/2014/main" id="{838240DA-8A01-486C-B39C-1C1CB383A404}"/>
+                <a16:creationId xmlns:a16="http://schemas.microsoft.com/office/drawing/2014/main" id="{EE2D9CE8-7C91-4189-B80E-2C7FC402AE37}"/>
               </a:ext>
             </a:extLst>
           </p:cNvPr>
@@ -7948,7 +7948,7 @@
           <p:cNvPr id="23" name="">
             <a:extLst xmlns:a="http://schemas.openxmlformats.org/drawingml/2006/main">
               <a:ext uri="{FF2B5EF4-FFF2-40B4-BE49-F238E27FC236}">
-                <a16:creationId xmlns:a16="http://schemas.microsoft.com/office/drawing/2014/main" id="{D0BA05AA-BC6E-444B-BA89-482E835C2192}"/>
+                <a16:creationId xmlns:a16="http://schemas.microsoft.com/office/drawing/2014/main" id="{A81AB00C-2D11-4F28-964F-48D17668ACF0}"/>
               </a:ext>
             </a:extLst>
           </p:cNvPr>
@@ -8009,7 +8009,7 @@
           <p:cNvPr id="24" name="">
             <a:extLst xmlns:a="http://schemas.openxmlformats.org/drawingml/2006/main">
               <a:ext uri="{FF2B5EF4-FFF2-40B4-BE49-F238E27FC236}">
-                <a16:creationId xmlns:a16="http://schemas.microsoft.com/office/drawing/2014/main" id="{69F973F8-D29A-439B-A026-4BDA1DDC5142}"/>
+                <a16:creationId xmlns:a16="http://schemas.microsoft.com/office/drawing/2014/main" id="{6FD90A3E-4831-4526-8A37-8465067BDAA0}"/>
               </a:ext>
             </a:extLst>
           </p:cNvPr>
@@ -8070,7 +8070,7 @@
           <p:cNvPr id="25" name="">
             <a:extLst xmlns:a="http://schemas.openxmlformats.org/drawingml/2006/main">
               <a:ext uri="{FF2B5EF4-FFF2-40B4-BE49-F238E27FC236}">
-                <a16:creationId xmlns:a16="http://schemas.microsoft.com/office/drawing/2014/main" id="{6B52C132-08EF-4537-A055-6D1F9C1B4A97}"/>
+                <a16:creationId xmlns:a16="http://schemas.microsoft.com/office/drawing/2014/main" id="{42ABF965-B62D-4EC5-BACC-19D2C4B32895}"/>
               </a:ext>
             </a:extLst>
           </p:cNvPr>
@@ -8131,7 +8131,7 @@
           <p:cNvPr id="26" name="">
             <a:extLst xmlns:a="http://schemas.openxmlformats.org/drawingml/2006/main">
               <a:ext uri="{FF2B5EF4-FFF2-40B4-BE49-F238E27FC236}">
-                <a16:creationId xmlns:a16="http://schemas.microsoft.com/office/drawing/2014/main" id="{2742E4EE-C637-40CA-AC75-5609C9BFBDF0}"/>
+                <a16:creationId xmlns:a16="http://schemas.microsoft.com/office/drawing/2014/main" id="{376DECBE-E08F-456E-9DE4-880B9F91F398}"/>
               </a:ext>
             </a:extLst>
           </p:cNvPr>
@@ -8165,7 +8165,7 @@
           <p:cNvPr id="27" name="">
             <a:extLst xmlns:a="http://schemas.openxmlformats.org/drawingml/2006/main">
               <a:ext uri="{FF2B5EF4-FFF2-40B4-BE49-F238E27FC236}">
-                <a16:creationId xmlns:a16="http://schemas.microsoft.com/office/drawing/2014/main" id="{DACF7C17-808C-43C1-9BCF-F8EA1F26A14C}"/>
+                <a16:creationId xmlns:a16="http://schemas.microsoft.com/office/drawing/2014/main" id="{66CCFD53-E67D-47F0-9DE7-571DDA1E4EBC}"/>
               </a:ext>
             </a:extLst>
           </p:cNvPr>
@@ -8226,7 +8226,7 @@
           <p:cNvPr id="28" name="">
             <a:extLst xmlns:a="http://schemas.openxmlformats.org/drawingml/2006/main">
               <a:ext uri="{FF2B5EF4-FFF2-40B4-BE49-F238E27FC236}">
-                <a16:creationId xmlns:a16="http://schemas.microsoft.com/office/drawing/2014/main" id="{23E0CB68-A6A8-4298-B830-680470334AC6}"/>
+                <a16:creationId xmlns:a16="http://schemas.microsoft.com/office/drawing/2014/main" id="{E546A3D5-0667-4EB5-888A-A9704CEB57DB}"/>
               </a:ext>
             </a:extLst>
           </p:cNvPr>
@@ -8287,7 +8287,7 @@
           <p:cNvPr id="29" name="">
             <a:extLst xmlns:a="http://schemas.openxmlformats.org/drawingml/2006/main">
               <a:ext uri="{FF2B5EF4-FFF2-40B4-BE49-F238E27FC236}">
-                <a16:creationId xmlns:a16="http://schemas.microsoft.com/office/drawing/2014/main" id="{F5889A2D-7246-4963-B8BF-F1534D1BED53}"/>
+                <a16:creationId xmlns:a16="http://schemas.microsoft.com/office/drawing/2014/main" id="{9BC5F474-FF9B-4AF7-8D14-1A175475B408}"/>
               </a:ext>
             </a:extLst>
           </p:cNvPr>
@@ -8348,7 +8348,7 @@
           <p:cNvPr id="30" name="">
             <a:extLst xmlns:a="http://schemas.openxmlformats.org/drawingml/2006/main">
               <a:ext uri="{FF2B5EF4-FFF2-40B4-BE49-F238E27FC236}">
-                <a16:creationId xmlns:a16="http://schemas.microsoft.com/office/drawing/2014/main" id="{BC4CE2A5-D3FD-4BAC-886B-844600EBD415}"/>
+                <a16:creationId xmlns:a16="http://schemas.microsoft.com/office/drawing/2014/main" id="{D6A82DC6-8483-4689-8C6B-6A78F27423A2}"/>
               </a:ext>
             </a:extLst>
           </p:cNvPr>
@@ -8407,7 +8407,7 @@
     </p:spTree>
     <p:extLst>
       <p:ext uri="{BB962C8B-B14F-4D97-AF65-F5344CB8AC3E}">
-        <p14:creationId xmlns:p14="http://schemas.microsoft.com/office/powerpoint/2010/main" val="919597050"/>
+        <p14:creationId xmlns:p14="http://schemas.microsoft.com/office/powerpoint/2010/main" val="700088263"/>
       </p:ext>
     </p:extLst>
   </p:cSld>
@@ -8435,10 +8435,10 @@
       </p:grpSpPr>
       <p:sp>
         <p:nvSpPr>
-          <p:cNvPr id="20" name="">
-            <a:extLst xmlns:a="http://schemas.openxmlformats.org/drawingml/2006/main">
-              <a:ext uri="{FF2B5EF4-FFF2-40B4-BE49-F238E27FC236}">
-                <a16:creationId xmlns:a16="http://schemas.microsoft.com/office/drawing/2014/main" id="{49C29E0C-0122-40C1-9BF0-C332FDC389F7}"/>
+          <p:cNvPr id="21" name="">
+            <a:extLst xmlns:a="http://schemas.openxmlformats.org/drawingml/2006/main">
+              <a:ext uri="{FF2B5EF4-FFF2-40B4-BE49-F238E27FC236}">
+                <a16:creationId xmlns:a16="http://schemas.microsoft.com/office/drawing/2014/main" id="{18F814B5-2949-427B-98BE-60546F93D7A3}"/>
               </a:ext>
             </a:extLst>
           </p:cNvPr>
@@ -8499,7 +8499,7 @@
           <p:cNvPr id="2" name="">
             <a:extLst xmlns:a="http://schemas.openxmlformats.org/drawingml/2006/main">
               <a:ext uri="{FF2B5EF4-FFF2-40B4-BE49-F238E27FC236}">
-                <a16:creationId xmlns:a16="http://schemas.microsoft.com/office/drawing/2014/main" id="{A4AA2DD6-3420-4C50-8BE1-8629FBAE1E3C}"/>
+                <a16:creationId xmlns:a16="http://schemas.microsoft.com/office/drawing/2014/main" id="{EAEC7687-0F9F-4E39-8A24-1646C424D8A3}"/>
               </a:ext>
             </a:extLst>
           </p:cNvPr>
@@ -8560,7 +8560,7 @@
           <p:cNvPr id="3" name="">
             <a:extLst xmlns:a="http://schemas.openxmlformats.org/drawingml/2006/main">
               <a:ext uri="{FF2B5EF4-FFF2-40B4-BE49-F238E27FC236}">
-                <a16:creationId xmlns:a16="http://schemas.microsoft.com/office/drawing/2014/main" id="{FB5706B0-4E9F-4F80-8C5F-E8CBB5089350}"/>
+                <a16:creationId xmlns:a16="http://schemas.microsoft.com/office/drawing/2014/main" id="{69FD303D-EE56-44FE-9784-EFE8EEB3CC52}"/>
               </a:ext>
             </a:extLst>
           </p:cNvPr>
@@ -8621,7 +8621,7 @@
           <p:cNvPr id="4" name="">
             <a:extLst xmlns:a="http://schemas.openxmlformats.org/drawingml/2006/main">
               <a:ext uri="{FF2B5EF4-FFF2-40B4-BE49-F238E27FC236}">
-                <a16:creationId xmlns:a16="http://schemas.microsoft.com/office/drawing/2014/main" id="{4BCD36F4-BFA2-49A8-8789-8D364B6D1F14}"/>
+                <a16:creationId xmlns:a16="http://schemas.microsoft.com/office/drawing/2014/main" id="{74B98B2F-56A9-4565-AA21-9C98E0296114}"/>
               </a:ext>
             </a:extLst>
           </p:cNvPr>
@@ -8653,7 +8653,7 @@
           <p:cNvPr id="5" name="">
             <a:extLst xmlns:a="http://schemas.openxmlformats.org/drawingml/2006/main">
               <a:ext uri="{FF2B5EF4-FFF2-40B4-BE49-F238E27FC236}">
-                <a16:creationId xmlns:a16="http://schemas.microsoft.com/office/drawing/2014/main" id="{16D470FC-7E4F-45BF-B388-214A604DA53E}"/>
+                <a16:creationId xmlns:a16="http://schemas.microsoft.com/office/drawing/2014/main" id="{DCEC7C4A-FDFB-4C18-AC0B-F6349D1C4346}"/>
               </a:ext>
             </a:extLst>
           </p:cNvPr>
@@ -8714,7 +8714,7 @@
           <p:cNvPr id="6" name="">
             <a:extLst xmlns:a="http://schemas.openxmlformats.org/drawingml/2006/main">
               <a:ext uri="{FF2B5EF4-FFF2-40B4-BE49-F238E27FC236}">
-                <a16:creationId xmlns:a16="http://schemas.microsoft.com/office/drawing/2014/main" id="{EB79A947-9619-4C21-83F1-A71526945522}"/>
+                <a16:creationId xmlns:a16="http://schemas.microsoft.com/office/drawing/2014/main" id="{402D592F-8763-435D-9EC4-C4DD6241C1F0}"/>
               </a:ext>
             </a:extLst>
           </p:cNvPr>
@@ -8775,7 +8775,7 @@
           <p:cNvPr id="7" name="">
             <a:extLst xmlns:a="http://schemas.openxmlformats.org/drawingml/2006/main">
               <a:ext uri="{FF2B5EF4-FFF2-40B4-BE49-F238E27FC236}">
-                <a16:creationId xmlns:a16="http://schemas.microsoft.com/office/drawing/2014/main" id="{6A5A5D3C-6EA2-4071-90D5-B691CCFA5BEF}"/>
+                <a16:creationId xmlns:a16="http://schemas.microsoft.com/office/drawing/2014/main" id="{4B847736-6DAB-46BA-B9E2-50942BC09B08}"/>
               </a:ext>
             </a:extLst>
           </p:cNvPr>
@@ -8836,23 +8836,84 @@
           <p:cNvPr id="8" name="">
             <a:extLst xmlns:a="http://schemas.openxmlformats.org/drawingml/2006/main">
               <a:ext uri="{FF2B5EF4-FFF2-40B4-BE49-F238E27FC236}">
-                <a16:creationId xmlns:a16="http://schemas.microsoft.com/office/drawing/2014/main" id="{13BD25F7-1E32-46D1-BB24-D0BED99153DC}"/>
-              </a:ext>
-            </a:extLst>
-          </p:cNvPr>
-          <p:cNvSpPr>
-            <a:spLocks xmlns:a="http://schemas.openxmlformats.org/drawingml/2006/main" noGrp="1"/>
-          </p:cNvSpPr>
-          <p:nvPr/>
-        </p:nvSpPr>
-        <p:spPr>
-          <a:xfrm xmlns:a="http://schemas.openxmlformats.org/drawingml/2006/main">
-            <a:off x="904875" y="2238375"/>
-            <a:ext cx="6667500" cy="1143000"/>
+                <a16:creationId xmlns:a16="http://schemas.microsoft.com/office/drawing/2014/main" id="{21568C24-BFFF-4B32-AC72-E4D0771103C3}"/>
+              </a:ext>
+            </a:extLst>
+          </p:cNvPr>
+          <p:cNvSpPr>
+            <a:spLocks xmlns:a="http://schemas.openxmlformats.org/drawingml/2006/main" noGrp="1"/>
+          </p:cNvSpPr>
+          <p:nvPr/>
+        </p:nvSpPr>
+        <p:spPr>
+          <a:xfrm xmlns:a="http://schemas.openxmlformats.org/drawingml/2006/main">
+            <a:off x="904875" y="1619250"/>
+            <a:ext cx="10477500" cy="266700"/>
+          </a:xfrm>
+          <a:prstGeom xmlns:a="http://schemas.openxmlformats.org/drawingml/2006/main" prst="rect">
+            <a:avLst/>
+          </a:prstGeom>
+          <a:noFill xmlns:a="http://schemas.openxmlformats.org/drawingml/2006/main"/>
+          <a:ln xmlns:a="http://schemas.openxmlformats.org/drawingml/2006/main" w="0">
+            <a:noFill/>
+          </a:ln>
+        </p:spPr>
+        <p:txBody>
+          <a:bodyPr xmlns:a="http://schemas.openxmlformats.org/drawingml/2006/main" wrap="square" lIns="0" tIns="0" rIns="0" bIns="0" anchor="t">
+            <a:noAutofit/>
+          </a:bodyPr>
+          <a:lstStyle xmlns:a="http://schemas.openxmlformats.org/drawingml/2006/main"/>
+          <a:p xmlns:a="http://schemas.openxmlformats.org/drawingml/2006/main">
+            <a:pPr algn="l">
+              <a:lnSpc>
+                <a:spcPct val="112000"/>
+              </a:lnSpc>
+              <a:buNone/>
+              <a:defRPr sz="1275" b="0">
+                <a:solidFill>
+                  <a:srgbClr val="34373D"/>
+                </a:solidFill>
+                <a:latin typeface="IBM Plex Sans KR"/>
+                <a:ea typeface="IBM Plex Sans KR"/>
+                <a:cs typeface="IBM Plex Sans KR"/>
+              </a:defRPr>
+            </a:pPr>
+            <a:r>
+              <a:rPr sz="1275" b="0">
+                <a:solidFill>
+                  <a:srgbClr val="34373D"/>
+                </a:solidFill>
+                <a:latin typeface="IBM Plex Sans KR"/>
+                <a:ea typeface="IBM Plex Sans KR"/>
+                <a:cs typeface="IBM Plex Sans KR"/>
+              </a:rPr>
+              <a:t>1번에서 원본 파일을 확인했으니, 이제 실제 코드가 시작돼요.</a:t>
+            </a:r>
+          </a:p>
+        </p:txBody>
+      </p:sp>
+      <p:sp>
+        <p:nvSpPr>
+          <p:cNvPr id="9" name="">
+            <a:extLst xmlns:a="http://schemas.openxmlformats.org/drawingml/2006/main">
+              <a:ext uri="{FF2B5EF4-FFF2-40B4-BE49-F238E27FC236}">
+                <a16:creationId xmlns:a16="http://schemas.microsoft.com/office/drawing/2014/main" id="{ECFA3F74-0E9C-4287-8DAE-4330935B2731}"/>
+              </a:ext>
+            </a:extLst>
+          </p:cNvPr>
+          <p:cNvSpPr>
+            <a:spLocks xmlns:a="http://schemas.openxmlformats.org/drawingml/2006/main" noGrp="1"/>
+          </p:cNvSpPr>
+          <p:nvPr/>
+        </p:nvSpPr>
+        <p:spPr>
+          <a:xfrm xmlns:a="http://schemas.openxmlformats.org/drawingml/2006/main">
+            <a:off x="904875" y="2000250"/>
+            <a:ext cx="6667500" cy="2524125"/>
           </a:xfrm>
           <a:prstGeom xmlns:a="http://schemas.openxmlformats.org/drawingml/2006/main" prst="roundRect">
             <a:avLst>
-              <a:gd name="adj" fmla="val 4167"/>
+              <a:gd name="adj" fmla="val 1887"/>
             </a:avLst>
           </a:prstGeom>
           <a:solidFill xmlns:a="http://schemas.openxmlformats.org/drawingml/2006/main">
@@ -8867,21 +8928,21 @@
       </p:sp>
       <p:sp>
         <p:nvSpPr>
-          <p:cNvPr id="9" name="">
-            <a:extLst xmlns:a="http://schemas.openxmlformats.org/drawingml/2006/main">
-              <a:ext uri="{FF2B5EF4-FFF2-40B4-BE49-F238E27FC236}">
-                <a16:creationId xmlns:a16="http://schemas.microsoft.com/office/drawing/2014/main" id="{0980F060-681A-4E7B-8804-748093FEF788}"/>
-              </a:ext>
-            </a:extLst>
-          </p:cNvPr>
-          <p:cNvSpPr>
-            <a:spLocks xmlns:a="http://schemas.openxmlformats.org/drawingml/2006/main" noGrp="1"/>
-          </p:cNvSpPr>
-          <p:nvPr/>
-        </p:nvSpPr>
-        <p:spPr>
-          <a:xfrm xmlns:a="http://schemas.openxmlformats.org/drawingml/2006/main">
-            <a:off x="1019175" y="2352675"/>
+          <p:cNvPr id="10" name="">
+            <a:extLst xmlns:a="http://schemas.openxmlformats.org/drawingml/2006/main">
+              <a:ext uri="{FF2B5EF4-FFF2-40B4-BE49-F238E27FC236}">
+                <a16:creationId xmlns:a16="http://schemas.microsoft.com/office/drawing/2014/main" id="{37EAEA77-C5DA-4F98-90DA-754D8873932C}"/>
+              </a:ext>
+            </a:extLst>
+          </p:cNvPr>
+          <p:cNvSpPr>
+            <a:spLocks xmlns:a="http://schemas.openxmlformats.org/drawingml/2006/main" noGrp="1"/>
+          </p:cNvSpPr>
+          <p:nvPr/>
+        </p:nvSpPr>
+        <p:spPr>
+          <a:xfrm xmlns:a="http://schemas.openxmlformats.org/drawingml/2006/main">
+            <a:off x="1019175" y="2114550"/>
             <a:ext cx="323850" cy="285750"/>
           </a:xfrm>
           <a:prstGeom xmlns:a="http://schemas.openxmlformats.org/drawingml/2006/main" prst="roundRect">
@@ -8928,22 +8989,22 @@
       </p:sp>
       <p:sp>
         <p:nvSpPr>
-          <p:cNvPr id="10" name="">
-            <a:extLst xmlns:a="http://schemas.openxmlformats.org/drawingml/2006/main">
-              <a:ext uri="{FF2B5EF4-FFF2-40B4-BE49-F238E27FC236}">
-                <a16:creationId xmlns:a16="http://schemas.microsoft.com/office/drawing/2014/main" id="{1B13C7F9-59C7-4E85-9289-53FC2922CEF9}"/>
-              </a:ext>
-            </a:extLst>
-          </p:cNvPr>
-          <p:cNvSpPr>
-            <a:spLocks xmlns:a="http://schemas.openxmlformats.org/drawingml/2006/main" noGrp="1"/>
-          </p:cNvSpPr>
-          <p:nvPr/>
-        </p:nvSpPr>
-        <p:spPr>
-          <a:xfrm xmlns:a="http://schemas.openxmlformats.org/drawingml/2006/main">
-            <a:off x="1457325" y="2333625"/>
-            <a:ext cx="5981700" cy="952500"/>
+          <p:cNvPr id="11" name="">
+            <a:extLst xmlns:a="http://schemas.openxmlformats.org/drawingml/2006/main">
+              <a:ext uri="{FF2B5EF4-FFF2-40B4-BE49-F238E27FC236}">
+                <a16:creationId xmlns:a16="http://schemas.microsoft.com/office/drawing/2014/main" id="{F7CB8579-AB12-4457-8D3C-7B3124262B86}"/>
+              </a:ext>
+            </a:extLst>
+          </p:cNvPr>
+          <p:cNvSpPr>
+            <a:spLocks xmlns:a="http://schemas.openxmlformats.org/drawingml/2006/main" noGrp="1"/>
+          </p:cNvSpPr>
+          <p:nvPr/>
+        </p:nvSpPr>
+        <p:spPr>
+          <a:xfrm xmlns:a="http://schemas.openxmlformats.org/drawingml/2006/main">
+            <a:off x="1457325" y="2095500"/>
+            <a:ext cx="5981700" cy="2333625"/>
           </a:xfrm>
           <a:prstGeom xmlns:a="http://schemas.openxmlformats.org/drawingml/2006/main" prst="rect">
             <a:avLst/>
@@ -8989,10 +9050,10 @@
       </p:sp>
       <p:sp>
         <p:nvSpPr>
-          <p:cNvPr id="11" name="">
-            <a:extLst xmlns:a="http://schemas.openxmlformats.org/drawingml/2006/main">
-              <a:ext uri="{FF2B5EF4-FFF2-40B4-BE49-F238E27FC236}">
-                <a16:creationId xmlns:a16="http://schemas.microsoft.com/office/drawing/2014/main" id="{352C2BD8-6650-4ABC-9FF1-E7E59BD4B1BE}"/>
+          <p:cNvPr id="12" name="">
+            <a:extLst xmlns:a="http://schemas.openxmlformats.org/drawingml/2006/main">
+              <a:ext uri="{FF2B5EF4-FFF2-40B4-BE49-F238E27FC236}">
+                <a16:creationId xmlns:a16="http://schemas.microsoft.com/office/drawing/2014/main" id="{0C4AA442-3FE9-4E0A-BF87-74D7ADDEDC16}"/>
               </a:ext>
             </a:extLst>
           </p:cNvPr>
@@ -9004,11 +9065,11 @@
         <p:spPr>
           <a:xfrm xmlns:a="http://schemas.openxmlformats.org/drawingml/2006/main">
             <a:off x="7953375" y="2000250"/>
-            <a:ext cx="3429000" cy="1190625"/>
+            <a:ext cx="3429000" cy="1143000"/>
           </a:xfrm>
           <a:prstGeom xmlns:a="http://schemas.openxmlformats.org/drawingml/2006/main" prst="roundRect">
             <a:avLst>
-              <a:gd name="adj" fmla="val 4800"/>
+              <a:gd name="adj" fmla="val 5000"/>
             </a:avLst>
           </a:prstGeom>
           <a:solidFill xmlns:a="http://schemas.openxmlformats.org/drawingml/2006/main">
@@ -9023,10 +9084,10 @@
       </p:sp>
       <p:sp>
         <p:nvSpPr>
-          <p:cNvPr id="12" name="">
-            <a:extLst xmlns:a="http://schemas.openxmlformats.org/drawingml/2006/main">
-              <a:ext uri="{FF2B5EF4-FFF2-40B4-BE49-F238E27FC236}">
-                <a16:creationId xmlns:a16="http://schemas.microsoft.com/office/drawing/2014/main" id="{D30C822E-F1E8-4517-972E-E9B21B8D227E}"/>
+          <p:cNvPr id="13" name="">
+            <a:extLst xmlns:a="http://schemas.openxmlformats.org/drawingml/2006/main">
+              <a:ext uri="{FF2B5EF4-FFF2-40B4-BE49-F238E27FC236}">
+                <a16:creationId xmlns:a16="http://schemas.microsoft.com/office/drawing/2014/main" id="{A4A73D72-E204-4E20-A327-38ABD132D2FC}"/>
               </a:ext>
             </a:extLst>
           </p:cNvPr>
@@ -9084,10 +9145,10 @@
       </p:sp>
       <p:sp>
         <p:nvSpPr>
-          <p:cNvPr id="13" name="">
-            <a:extLst xmlns:a="http://schemas.openxmlformats.org/drawingml/2006/main">
-              <a:ext uri="{FF2B5EF4-FFF2-40B4-BE49-F238E27FC236}">
-                <a16:creationId xmlns:a16="http://schemas.microsoft.com/office/drawing/2014/main" id="{D4A58655-6A8F-4164-BFC1-B5BBB496CA9F}"/>
+          <p:cNvPr id="14" name="">
+            <a:extLst xmlns:a="http://schemas.openxmlformats.org/drawingml/2006/main">
+              <a:ext uri="{FF2B5EF4-FFF2-40B4-BE49-F238E27FC236}">
+                <a16:creationId xmlns:a16="http://schemas.microsoft.com/office/drawing/2014/main" id="{6610E5EB-C748-4E54-BCFC-572273853C2C}"/>
               </a:ext>
             </a:extLst>
           </p:cNvPr>
@@ -9145,10 +9206,10 @@
       </p:sp>
       <p:sp>
         <p:nvSpPr>
-          <p:cNvPr id="14" name="">
-            <a:extLst xmlns:a="http://schemas.openxmlformats.org/drawingml/2006/main">
-              <a:ext uri="{FF2B5EF4-FFF2-40B4-BE49-F238E27FC236}">
-                <a16:creationId xmlns:a16="http://schemas.microsoft.com/office/drawing/2014/main" id="{5B50BE3A-DCF2-4BC1-AC31-D953B2A3218E}"/>
+          <p:cNvPr id="15" name="">
+            <a:extLst xmlns:a="http://schemas.openxmlformats.org/drawingml/2006/main">
+              <a:ext uri="{FF2B5EF4-FFF2-40B4-BE49-F238E27FC236}">
+                <a16:creationId xmlns:a16="http://schemas.microsoft.com/office/drawing/2014/main" id="{7C102D5A-E881-4C4A-8122-E21C5C172DFD}"/>
               </a:ext>
             </a:extLst>
           </p:cNvPr>
@@ -9160,7 +9221,7 @@
         <p:spPr>
           <a:xfrm xmlns:a="http://schemas.openxmlformats.org/drawingml/2006/main">
             <a:off x="8124825" y="2466975"/>
-            <a:ext cx="3086100" cy="619125"/>
+            <a:ext cx="3086100" cy="571500"/>
           </a:xfrm>
           <a:prstGeom xmlns:a="http://schemas.openxmlformats.org/drawingml/2006/main" prst="rect">
             <a:avLst/>
@@ -9206,26 +9267,26 @@
       </p:sp>
       <p:sp>
         <p:nvSpPr>
-          <p:cNvPr id="15" name="">
-            <a:extLst xmlns:a="http://schemas.openxmlformats.org/drawingml/2006/main">
-              <a:ext uri="{FF2B5EF4-FFF2-40B4-BE49-F238E27FC236}">
-                <a16:creationId xmlns:a16="http://schemas.microsoft.com/office/drawing/2014/main" id="{01132F15-26B3-46C0-BA5B-F3B17BDA30B7}"/>
-              </a:ext>
-            </a:extLst>
-          </p:cNvPr>
-          <p:cNvSpPr>
-            <a:spLocks xmlns:a="http://schemas.openxmlformats.org/drawingml/2006/main" noGrp="1"/>
-          </p:cNvSpPr>
-          <p:nvPr/>
-        </p:nvSpPr>
-        <p:spPr>
-          <a:xfrm xmlns:a="http://schemas.openxmlformats.org/drawingml/2006/main">
-            <a:off x="7953375" y="3429000"/>
-            <a:ext cx="3429000" cy="1095375"/>
+          <p:cNvPr id="16" name="">
+            <a:extLst xmlns:a="http://schemas.openxmlformats.org/drawingml/2006/main">
+              <a:ext uri="{FF2B5EF4-FFF2-40B4-BE49-F238E27FC236}">
+                <a16:creationId xmlns:a16="http://schemas.microsoft.com/office/drawing/2014/main" id="{D6298855-B640-4C53-AB31-E8ACE2103DED}"/>
+              </a:ext>
+            </a:extLst>
+          </p:cNvPr>
+          <p:cNvSpPr>
+            <a:spLocks xmlns:a="http://schemas.openxmlformats.org/drawingml/2006/main" noGrp="1"/>
+          </p:cNvSpPr>
+          <p:nvPr/>
+        </p:nvSpPr>
+        <p:spPr>
+          <a:xfrm xmlns:a="http://schemas.openxmlformats.org/drawingml/2006/main">
+            <a:off x="7953375" y="3381375"/>
+            <a:ext cx="3429000" cy="1143000"/>
           </a:xfrm>
           <a:prstGeom xmlns:a="http://schemas.openxmlformats.org/drawingml/2006/main" prst="roundRect">
             <a:avLst>
-              <a:gd name="adj" fmla="val 5217"/>
+              <a:gd name="adj" fmla="val 5000"/>
             </a:avLst>
           </a:prstGeom>
           <a:solidFill xmlns:a="http://schemas.openxmlformats.org/drawingml/2006/main">
@@ -9240,21 +9301,21 @@
       </p:sp>
       <p:sp>
         <p:nvSpPr>
-          <p:cNvPr id="16" name="">
-            <a:extLst xmlns:a="http://schemas.openxmlformats.org/drawingml/2006/main">
-              <a:ext uri="{FF2B5EF4-FFF2-40B4-BE49-F238E27FC236}">
-                <a16:creationId xmlns:a16="http://schemas.microsoft.com/office/drawing/2014/main" id="{7C1EFA8C-3A44-4623-BBE9-FC836240F02A}"/>
-              </a:ext>
-            </a:extLst>
-          </p:cNvPr>
-          <p:cNvSpPr>
-            <a:spLocks xmlns:a="http://schemas.openxmlformats.org/drawingml/2006/main" noGrp="1"/>
-          </p:cNvSpPr>
-          <p:nvPr/>
-        </p:nvSpPr>
-        <p:spPr>
-          <a:xfrm xmlns:a="http://schemas.openxmlformats.org/drawingml/2006/main">
-            <a:off x="8086725" y="3552825"/>
+          <p:cNvPr id="17" name="">
+            <a:extLst xmlns:a="http://schemas.openxmlformats.org/drawingml/2006/main">
+              <a:ext uri="{FF2B5EF4-FFF2-40B4-BE49-F238E27FC236}">
+                <a16:creationId xmlns:a16="http://schemas.microsoft.com/office/drawing/2014/main" id="{B72048A8-62A1-40FD-B57E-6F1809DD56FE}"/>
+              </a:ext>
+            </a:extLst>
+          </p:cNvPr>
+          <p:cNvSpPr>
+            <a:spLocks xmlns:a="http://schemas.openxmlformats.org/drawingml/2006/main" noGrp="1"/>
+          </p:cNvSpPr>
+          <p:nvPr/>
+        </p:nvSpPr>
+        <p:spPr>
+          <a:xfrm xmlns:a="http://schemas.openxmlformats.org/drawingml/2006/main">
+            <a:off x="8086725" y="3505200"/>
             <a:ext cx="323850" cy="266700"/>
           </a:xfrm>
           <a:prstGeom xmlns:a="http://schemas.openxmlformats.org/drawingml/2006/main" prst="rect">
@@ -9301,21 +9362,21 @@
       </p:sp>
       <p:sp>
         <p:nvSpPr>
-          <p:cNvPr id="17" name="">
-            <a:extLst xmlns:a="http://schemas.openxmlformats.org/drawingml/2006/main">
-              <a:ext uri="{FF2B5EF4-FFF2-40B4-BE49-F238E27FC236}">
-                <a16:creationId xmlns:a16="http://schemas.microsoft.com/office/drawing/2014/main" id="{1EFF8F47-06CD-48D9-BA16-FA8124D3A4CF}"/>
-              </a:ext>
-            </a:extLst>
-          </p:cNvPr>
-          <p:cNvSpPr>
-            <a:spLocks xmlns:a="http://schemas.openxmlformats.org/drawingml/2006/main" noGrp="1"/>
-          </p:cNvSpPr>
-          <p:nvPr/>
-        </p:nvSpPr>
-        <p:spPr>
-          <a:xfrm xmlns:a="http://schemas.openxmlformats.org/drawingml/2006/main">
-            <a:off x="8486775" y="3552825"/>
+          <p:cNvPr id="18" name="">
+            <a:extLst xmlns:a="http://schemas.openxmlformats.org/drawingml/2006/main">
+              <a:ext uri="{FF2B5EF4-FFF2-40B4-BE49-F238E27FC236}">
+                <a16:creationId xmlns:a16="http://schemas.microsoft.com/office/drawing/2014/main" id="{D35F7865-108D-4A3D-B80F-1E6230192AE9}"/>
+              </a:ext>
+            </a:extLst>
+          </p:cNvPr>
+          <p:cNvSpPr>
+            <a:spLocks xmlns:a="http://schemas.openxmlformats.org/drawingml/2006/main" noGrp="1"/>
+          </p:cNvSpPr>
+          <p:nvPr/>
+        </p:nvSpPr>
+        <p:spPr>
+          <a:xfrm xmlns:a="http://schemas.openxmlformats.org/drawingml/2006/main">
+            <a:off x="8486775" y="3505200"/>
             <a:ext cx="2762250" cy="266700"/>
           </a:xfrm>
           <a:prstGeom xmlns:a="http://schemas.openxmlformats.org/drawingml/2006/main" prst="rect">
@@ -9362,22 +9423,22 @@
       </p:sp>
       <p:sp>
         <p:nvSpPr>
-          <p:cNvPr id="18" name="">
-            <a:extLst xmlns:a="http://schemas.openxmlformats.org/drawingml/2006/main">
-              <a:ext uri="{FF2B5EF4-FFF2-40B4-BE49-F238E27FC236}">
-                <a16:creationId xmlns:a16="http://schemas.microsoft.com/office/drawing/2014/main" id="{6BDAD62D-58CA-466B-AB59-F9434B44943E}"/>
-              </a:ext>
-            </a:extLst>
-          </p:cNvPr>
-          <p:cNvSpPr>
-            <a:spLocks xmlns:a="http://schemas.openxmlformats.org/drawingml/2006/main" noGrp="1"/>
-          </p:cNvSpPr>
-          <p:nvPr/>
-        </p:nvSpPr>
-        <p:spPr>
-          <a:xfrm xmlns:a="http://schemas.openxmlformats.org/drawingml/2006/main">
-            <a:off x="8124825" y="3895725"/>
-            <a:ext cx="3086100" cy="523875"/>
+          <p:cNvPr id="19" name="">
+            <a:extLst xmlns:a="http://schemas.openxmlformats.org/drawingml/2006/main">
+              <a:ext uri="{FF2B5EF4-FFF2-40B4-BE49-F238E27FC236}">
+                <a16:creationId xmlns:a16="http://schemas.microsoft.com/office/drawing/2014/main" id="{DD74374D-8EDA-4003-BB86-1C3441800193}"/>
+              </a:ext>
+            </a:extLst>
+          </p:cNvPr>
+          <p:cNvSpPr>
+            <a:spLocks xmlns:a="http://schemas.openxmlformats.org/drawingml/2006/main" noGrp="1"/>
+          </p:cNvSpPr>
+          <p:nvPr/>
+        </p:nvSpPr>
+        <p:spPr>
+          <a:xfrm xmlns:a="http://schemas.openxmlformats.org/drawingml/2006/main">
+            <a:off x="8124825" y="3848100"/>
+            <a:ext cx="3086100" cy="571500"/>
           </a:xfrm>
           <a:prstGeom xmlns:a="http://schemas.openxmlformats.org/drawingml/2006/main" prst="rect">
             <a:avLst/>
@@ -9423,10 +9484,10 @@
       </p:sp>
       <p:sp>
         <p:nvSpPr>
-          <p:cNvPr id="19" name="">
-            <a:extLst xmlns:a="http://schemas.openxmlformats.org/drawingml/2006/main">
-              <a:ext uri="{FF2B5EF4-FFF2-40B4-BE49-F238E27FC236}">
-                <a16:creationId xmlns:a16="http://schemas.microsoft.com/office/drawing/2014/main" id="{937A2DAE-4541-4900-B5F9-9C811349E9A7}"/>
+          <p:cNvPr id="20" name="">
+            <a:extLst xmlns:a="http://schemas.openxmlformats.org/drawingml/2006/main">
+              <a:ext uri="{FF2B5EF4-FFF2-40B4-BE49-F238E27FC236}">
+                <a16:creationId xmlns:a16="http://schemas.microsoft.com/office/drawing/2014/main" id="{7199AEEC-7425-4299-9E5F-94652ACFF297}"/>
               </a:ext>
             </a:extLst>
           </p:cNvPr>
@@ -9485,7 +9546,7 @@
     </p:spTree>
     <p:extLst>
       <p:ext uri="{BB962C8B-B14F-4D97-AF65-F5344CB8AC3E}">
-        <p14:creationId xmlns:p14="http://schemas.microsoft.com/office/powerpoint/2010/main" val="935238480"/>
+        <p14:creationId xmlns:p14="http://schemas.microsoft.com/office/powerpoint/2010/main" val="1097806684"/>
       </p:ext>
     </p:extLst>
   </p:cSld>
@@ -9513,10 +9574,10 @@
       </p:grpSpPr>
       <p:sp>
         <p:nvSpPr>
-          <p:cNvPr id="23" name="">
-            <a:extLst xmlns:a="http://schemas.openxmlformats.org/drawingml/2006/main">
-              <a:ext uri="{FF2B5EF4-FFF2-40B4-BE49-F238E27FC236}">
-                <a16:creationId xmlns:a16="http://schemas.microsoft.com/office/drawing/2014/main" id="{811C873E-D09C-498B-AC0F-9501AFC3DED0}"/>
+          <p:cNvPr id="24" name="">
+            <a:extLst xmlns:a="http://schemas.openxmlformats.org/drawingml/2006/main">
+              <a:ext uri="{FF2B5EF4-FFF2-40B4-BE49-F238E27FC236}">
+                <a16:creationId xmlns:a16="http://schemas.microsoft.com/office/drawing/2014/main" id="{7F9F19EA-F524-4742-8570-67E0BAA7566E}"/>
               </a:ext>
             </a:extLst>
           </p:cNvPr>
@@ -9577,7 +9638,7 @@
           <p:cNvPr id="2" name="">
             <a:extLst xmlns:a="http://schemas.openxmlformats.org/drawingml/2006/main">
               <a:ext uri="{FF2B5EF4-FFF2-40B4-BE49-F238E27FC236}">
-                <a16:creationId xmlns:a16="http://schemas.microsoft.com/office/drawing/2014/main" id="{F6A8CBD2-0B8C-4D93-8C62-1EDACEDCC8F2}"/>
+                <a16:creationId xmlns:a16="http://schemas.microsoft.com/office/drawing/2014/main" id="{9D776D35-BABD-4DBA-926E-DC9CD3CC05F2}"/>
               </a:ext>
             </a:extLst>
           </p:cNvPr>
@@ -9638,7 +9699,7 @@
           <p:cNvPr id="3" name="">
             <a:extLst xmlns:a="http://schemas.openxmlformats.org/drawingml/2006/main">
               <a:ext uri="{FF2B5EF4-FFF2-40B4-BE49-F238E27FC236}">
-                <a16:creationId xmlns:a16="http://schemas.microsoft.com/office/drawing/2014/main" id="{F967F157-BCCB-4C1A-BD49-6012DBB72BFC}"/>
+                <a16:creationId xmlns:a16="http://schemas.microsoft.com/office/drawing/2014/main" id="{5DDD47EF-55E1-4335-BFA0-59C33147B43C}"/>
               </a:ext>
             </a:extLst>
           </p:cNvPr>
@@ -9699,7 +9760,7 @@
           <p:cNvPr id="4" name="">
             <a:extLst xmlns:a="http://schemas.openxmlformats.org/drawingml/2006/main">
               <a:ext uri="{FF2B5EF4-FFF2-40B4-BE49-F238E27FC236}">
-                <a16:creationId xmlns:a16="http://schemas.microsoft.com/office/drawing/2014/main" id="{7FC075D1-0696-4E60-93CE-14AEF4A8B7A6}"/>
+                <a16:creationId xmlns:a16="http://schemas.microsoft.com/office/drawing/2014/main" id="{3FDDF774-CE1E-4092-A27C-E39AB8C93F3E}"/>
               </a:ext>
             </a:extLst>
           </p:cNvPr>
@@ -9731,7 +9792,7 @@
           <p:cNvPr id="5" name="">
             <a:extLst xmlns:a="http://schemas.openxmlformats.org/drawingml/2006/main">
               <a:ext uri="{FF2B5EF4-FFF2-40B4-BE49-F238E27FC236}">
-                <a16:creationId xmlns:a16="http://schemas.microsoft.com/office/drawing/2014/main" id="{114A7AED-031C-44B6-833D-597E81F371A7}"/>
+                <a16:creationId xmlns:a16="http://schemas.microsoft.com/office/drawing/2014/main" id="{46323B71-DC7D-4190-AD03-DA7873103223}"/>
               </a:ext>
             </a:extLst>
           </p:cNvPr>
@@ -9792,7 +9853,7 @@
           <p:cNvPr id="6" name="">
             <a:extLst xmlns:a="http://schemas.openxmlformats.org/drawingml/2006/main">
               <a:ext uri="{FF2B5EF4-FFF2-40B4-BE49-F238E27FC236}">
-                <a16:creationId xmlns:a16="http://schemas.microsoft.com/office/drawing/2014/main" id="{A38A14F2-3667-420C-BF43-A00466AA2624}"/>
+                <a16:creationId xmlns:a16="http://schemas.microsoft.com/office/drawing/2014/main" id="{7302021F-A92D-4EDB-BB1E-8F79CBE54B94}"/>
               </a:ext>
             </a:extLst>
           </p:cNvPr>
@@ -9853,7 +9914,7 @@
           <p:cNvPr id="7" name="">
             <a:extLst xmlns:a="http://schemas.openxmlformats.org/drawingml/2006/main">
               <a:ext uri="{FF2B5EF4-FFF2-40B4-BE49-F238E27FC236}">
-                <a16:creationId xmlns:a16="http://schemas.microsoft.com/office/drawing/2014/main" id="{30C27121-DCBD-4977-A113-6657DDC1F201}"/>
+                <a16:creationId xmlns:a16="http://schemas.microsoft.com/office/drawing/2014/main" id="{EDE76561-85BC-4C54-8CCC-736DF3A5245B}"/>
               </a:ext>
             </a:extLst>
           </p:cNvPr>
@@ -9914,7 +9975,68 @@
           <p:cNvPr id="8" name="">
             <a:extLst xmlns:a="http://schemas.openxmlformats.org/drawingml/2006/main">
               <a:ext uri="{FF2B5EF4-FFF2-40B4-BE49-F238E27FC236}">
-                <a16:creationId xmlns:a16="http://schemas.microsoft.com/office/drawing/2014/main" id="{F91C7051-B7B3-4963-ACC2-7F39A9A37BFA}"/>
+                <a16:creationId xmlns:a16="http://schemas.microsoft.com/office/drawing/2014/main" id="{C1A6B654-B2D0-4165-B355-5DBF95C6B980}"/>
+              </a:ext>
+            </a:extLst>
+          </p:cNvPr>
+          <p:cNvSpPr>
+            <a:spLocks xmlns:a="http://schemas.openxmlformats.org/drawingml/2006/main" noGrp="1"/>
+          </p:cNvSpPr>
+          <p:nvPr/>
+        </p:nvSpPr>
+        <p:spPr>
+          <a:xfrm xmlns:a="http://schemas.openxmlformats.org/drawingml/2006/main">
+            <a:off x="666750" y="1619250"/>
+            <a:ext cx="10477500" cy="266700"/>
+          </a:xfrm>
+          <a:prstGeom xmlns:a="http://schemas.openxmlformats.org/drawingml/2006/main" prst="rect">
+            <a:avLst/>
+          </a:prstGeom>
+          <a:noFill xmlns:a="http://schemas.openxmlformats.org/drawingml/2006/main"/>
+          <a:ln xmlns:a="http://schemas.openxmlformats.org/drawingml/2006/main" w="0">
+            <a:noFill/>
+          </a:ln>
+        </p:spPr>
+        <p:txBody>
+          <a:bodyPr xmlns:a="http://schemas.openxmlformats.org/drawingml/2006/main" wrap="square" lIns="0" tIns="0" rIns="0" bIns="0" anchor="t">
+            <a:noAutofit/>
+          </a:bodyPr>
+          <a:lstStyle xmlns:a="http://schemas.openxmlformats.org/drawingml/2006/main"/>
+          <a:p xmlns:a="http://schemas.openxmlformats.org/drawingml/2006/main">
+            <a:pPr algn="l">
+              <a:lnSpc>
+                <a:spcPct val="112000"/>
+              </a:lnSpc>
+              <a:buNone/>
+              <a:defRPr sz="1275" b="0">
+                <a:solidFill>
+                  <a:srgbClr val="34373D"/>
+                </a:solidFill>
+                <a:latin typeface="IBM Plex Sans KR"/>
+                <a:ea typeface="IBM Plex Sans KR"/>
+                <a:cs typeface="IBM Plex Sans KR"/>
+              </a:defRPr>
+            </a:pPr>
+            <a:r>
+              <a:rPr sz="1275" b="0">
+                <a:solidFill>
+                  <a:srgbClr val="34373D"/>
+                </a:solidFill>
+                <a:latin typeface="IBM Plex Sans KR"/>
+                <a:ea typeface="IBM Plex Sans KR"/>
+                <a:cs typeface="IBM Plex Sans KR"/>
+              </a:rPr>
+              <a:t>도구를 불렀다면 다음은 원본 CSV를 읽을 차례예요.</a:t>
+            </a:r>
+          </a:p>
+        </p:txBody>
+      </p:sp>
+      <p:sp>
+        <p:nvSpPr>
+          <p:cNvPr id="9" name="">
+            <a:extLst xmlns:a="http://schemas.openxmlformats.org/drawingml/2006/main">
+              <a:ext uri="{FF2B5EF4-FFF2-40B4-BE49-F238E27FC236}">
+                <a16:creationId xmlns:a16="http://schemas.microsoft.com/office/drawing/2014/main" id="{AAC03BEF-EDC7-45CE-AA31-7FB863243C5A}"/>
               </a:ext>
             </a:extLst>
           </p:cNvPr>
@@ -9926,11 +10048,11 @@
         <p:spPr>
           <a:xfrm xmlns:a="http://schemas.openxmlformats.org/drawingml/2006/main">
             <a:off x="666750" y="1952625"/>
-            <a:ext cx="6858000" cy="1000125"/>
+            <a:ext cx="6858000" cy="1285875"/>
           </a:xfrm>
           <a:prstGeom xmlns:a="http://schemas.openxmlformats.org/drawingml/2006/main" prst="roundRect">
             <a:avLst>
-              <a:gd name="adj" fmla="val 4762"/>
+              <a:gd name="adj" fmla="val 3704"/>
             </a:avLst>
           </a:prstGeom>
           <a:solidFill xmlns:a="http://schemas.openxmlformats.org/drawingml/2006/main">
@@ -9945,10 +10067,10 @@
       </p:sp>
       <p:sp>
         <p:nvSpPr>
-          <p:cNvPr id="9" name="">
-            <a:extLst xmlns:a="http://schemas.openxmlformats.org/drawingml/2006/main">
-              <a:ext uri="{FF2B5EF4-FFF2-40B4-BE49-F238E27FC236}">
-                <a16:creationId xmlns:a16="http://schemas.microsoft.com/office/drawing/2014/main" id="{B97AC7ED-FCEE-46F4-A180-DE16E1310589}"/>
+          <p:cNvPr id="10" name="">
+            <a:extLst xmlns:a="http://schemas.openxmlformats.org/drawingml/2006/main">
+              <a:ext uri="{FF2B5EF4-FFF2-40B4-BE49-F238E27FC236}">
+                <a16:creationId xmlns:a16="http://schemas.microsoft.com/office/drawing/2014/main" id="{75CDD668-3294-4B58-A45B-A677D76337F6}"/>
               </a:ext>
             </a:extLst>
           </p:cNvPr>
@@ -10006,10 +10128,10 @@
       </p:sp>
       <p:sp>
         <p:nvSpPr>
-          <p:cNvPr id="10" name="">
-            <a:extLst xmlns:a="http://schemas.openxmlformats.org/drawingml/2006/main">
-              <a:ext uri="{FF2B5EF4-FFF2-40B4-BE49-F238E27FC236}">
-                <a16:creationId xmlns:a16="http://schemas.microsoft.com/office/drawing/2014/main" id="{42E89FAB-04A3-4B41-9CA3-0C099B6FBD6B}"/>
+          <p:cNvPr id="11" name="">
+            <a:extLst xmlns:a="http://schemas.openxmlformats.org/drawingml/2006/main">
+              <a:ext uri="{FF2B5EF4-FFF2-40B4-BE49-F238E27FC236}">
+                <a16:creationId xmlns:a16="http://schemas.microsoft.com/office/drawing/2014/main" id="{F81E5167-37E0-469C-883A-79D83D59C81C}"/>
               </a:ext>
             </a:extLst>
           </p:cNvPr>
@@ -10021,7 +10143,7 @@
         <p:spPr>
           <a:xfrm xmlns:a="http://schemas.openxmlformats.org/drawingml/2006/main">
             <a:off x="1219200" y="2047875"/>
-            <a:ext cx="6172200" cy="809625"/>
+            <a:ext cx="6172200" cy="1095375"/>
           </a:xfrm>
           <a:prstGeom xmlns:a="http://schemas.openxmlformats.org/drawingml/2006/main" prst="rect">
             <a:avLst/>
@@ -10067,26 +10189,26 @@
       </p:sp>
       <p:sp>
         <p:nvSpPr>
-          <p:cNvPr id="11" name="">
-            <a:extLst xmlns:a="http://schemas.openxmlformats.org/drawingml/2006/main">
-              <a:ext uri="{FF2B5EF4-FFF2-40B4-BE49-F238E27FC236}">
-                <a16:creationId xmlns:a16="http://schemas.microsoft.com/office/drawing/2014/main" id="{39892291-2E23-4C69-B836-5CC07193DEC8}"/>
-              </a:ext>
-            </a:extLst>
-          </p:cNvPr>
-          <p:cNvSpPr>
-            <a:spLocks xmlns:a="http://schemas.openxmlformats.org/drawingml/2006/main" noGrp="1"/>
-          </p:cNvSpPr>
-          <p:nvPr/>
-        </p:nvSpPr>
-        <p:spPr>
-          <a:xfrm xmlns:a="http://schemas.openxmlformats.org/drawingml/2006/main">
-            <a:off x="666750" y="3162300"/>
-            <a:ext cx="6858000" cy="876300"/>
+          <p:cNvPr id="12" name="">
+            <a:extLst xmlns:a="http://schemas.openxmlformats.org/drawingml/2006/main">
+              <a:ext uri="{FF2B5EF4-FFF2-40B4-BE49-F238E27FC236}">
+                <a16:creationId xmlns:a16="http://schemas.microsoft.com/office/drawing/2014/main" id="{5ACDF24A-2A78-4C27-8974-6EF768F39637}"/>
+              </a:ext>
+            </a:extLst>
+          </p:cNvPr>
+          <p:cNvSpPr>
+            <a:spLocks xmlns:a="http://schemas.openxmlformats.org/drawingml/2006/main" noGrp="1"/>
+          </p:cNvSpPr>
+          <p:nvPr/>
+        </p:nvSpPr>
+        <p:spPr>
+          <a:xfrm xmlns:a="http://schemas.openxmlformats.org/drawingml/2006/main">
+            <a:off x="666750" y="3476625"/>
+            <a:ext cx="6858000" cy="1095375"/>
           </a:xfrm>
           <a:prstGeom xmlns:a="http://schemas.openxmlformats.org/drawingml/2006/main" prst="roundRect">
             <a:avLst>
-              <a:gd name="adj" fmla="val 5435"/>
+              <a:gd name="adj" fmla="val 4348"/>
             </a:avLst>
           </a:prstGeom>
           <a:solidFill xmlns:a="http://schemas.openxmlformats.org/drawingml/2006/main">
@@ -10101,21 +10223,21 @@
       </p:sp>
       <p:sp>
         <p:nvSpPr>
-          <p:cNvPr id="12" name="">
-            <a:extLst xmlns:a="http://schemas.openxmlformats.org/drawingml/2006/main">
-              <a:ext uri="{FF2B5EF4-FFF2-40B4-BE49-F238E27FC236}">
-                <a16:creationId xmlns:a16="http://schemas.microsoft.com/office/drawing/2014/main" id="{8D6BA348-CF38-4476-8A6B-F02174CA1441}"/>
-              </a:ext>
-            </a:extLst>
-          </p:cNvPr>
-          <p:cNvSpPr>
-            <a:spLocks xmlns:a="http://schemas.openxmlformats.org/drawingml/2006/main" noGrp="1"/>
-          </p:cNvSpPr>
-          <p:nvPr/>
-        </p:nvSpPr>
-        <p:spPr>
-          <a:xfrm xmlns:a="http://schemas.openxmlformats.org/drawingml/2006/main">
-            <a:off x="781050" y="3276600"/>
+          <p:cNvPr id="13" name="">
+            <a:extLst xmlns:a="http://schemas.openxmlformats.org/drawingml/2006/main">
+              <a:ext uri="{FF2B5EF4-FFF2-40B4-BE49-F238E27FC236}">
+                <a16:creationId xmlns:a16="http://schemas.microsoft.com/office/drawing/2014/main" id="{15D0FDDD-2664-4C87-9389-AC0170FA3BB7}"/>
+              </a:ext>
+            </a:extLst>
+          </p:cNvPr>
+          <p:cNvSpPr>
+            <a:spLocks xmlns:a="http://schemas.openxmlformats.org/drawingml/2006/main" noGrp="1"/>
+          </p:cNvSpPr>
+          <p:nvPr/>
+        </p:nvSpPr>
+        <p:spPr>
+          <a:xfrm xmlns:a="http://schemas.openxmlformats.org/drawingml/2006/main">
+            <a:off x="781050" y="3590925"/>
             <a:ext cx="323850" cy="285750"/>
           </a:xfrm>
           <a:prstGeom xmlns:a="http://schemas.openxmlformats.org/drawingml/2006/main" prst="roundRect">
@@ -10162,22 +10284,22 @@
       </p:sp>
       <p:sp>
         <p:nvSpPr>
-          <p:cNvPr id="13" name="">
-            <a:extLst xmlns:a="http://schemas.openxmlformats.org/drawingml/2006/main">
-              <a:ext uri="{FF2B5EF4-FFF2-40B4-BE49-F238E27FC236}">
-                <a16:creationId xmlns:a16="http://schemas.microsoft.com/office/drawing/2014/main" id="{96541767-FD32-4E97-891C-9D986928ECBE}"/>
-              </a:ext>
-            </a:extLst>
-          </p:cNvPr>
-          <p:cNvSpPr>
-            <a:spLocks xmlns:a="http://schemas.openxmlformats.org/drawingml/2006/main" noGrp="1"/>
-          </p:cNvSpPr>
-          <p:nvPr/>
-        </p:nvSpPr>
-        <p:spPr>
-          <a:xfrm xmlns:a="http://schemas.openxmlformats.org/drawingml/2006/main">
-            <a:off x="1219200" y="3257550"/>
-            <a:ext cx="6172200" cy="685800"/>
+          <p:cNvPr id="14" name="">
+            <a:extLst xmlns:a="http://schemas.openxmlformats.org/drawingml/2006/main">
+              <a:ext uri="{FF2B5EF4-FFF2-40B4-BE49-F238E27FC236}">
+                <a16:creationId xmlns:a16="http://schemas.microsoft.com/office/drawing/2014/main" id="{7C4F0FE6-F96A-4857-849B-68E9218E1874}"/>
+              </a:ext>
+            </a:extLst>
+          </p:cNvPr>
+          <p:cNvSpPr>
+            <a:spLocks xmlns:a="http://schemas.openxmlformats.org/drawingml/2006/main" noGrp="1"/>
+          </p:cNvSpPr>
+          <p:nvPr/>
+        </p:nvSpPr>
+        <p:spPr>
+          <a:xfrm xmlns:a="http://schemas.openxmlformats.org/drawingml/2006/main">
+            <a:off x="1219200" y="3571875"/>
+            <a:ext cx="6172200" cy="904875"/>
           </a:xfrm>
           <a:prstGeom xmlns:a="http://schemas.openxmlformats.org/drawingml/2006/main" prst="rect">
             <a:avLst/>
@@ -10223,10 +10345,10 @@
       </p:sp>
       <p:sp>
         <p:nvSpPr>
-          <p:cNvPr id="14" name="">
-            <a:extLst xmlns:a="http://schemas.openxmlformats.org/drawingml/2006/main">
-              <a:ext uri="{FF2B5EF4-FFF2-40B4-BE49-F238E27FC236}">
-                <a16:creationId xmlns:a16="http://schemas.microsoft.com/office/drawing/2014/main" id="{47C0917B-E71D-44EC-8B77-1DD9E604C9DB}"/>
+          <p:cNvPr id="15" name="">
+            <a:extLst xmlns:a="http://schemas.openxmlformats.org/drawingml/2006/main">
+              <a:ext uri="{FF2B5EF4-FFF2-40B4-BE49-F238E27FC236}">
+                <a16:creationId xmlns:a16="http://schemas.microsoft.com/office/drawing/2014/main" id="{08A74A8E-52A4-4205-9C26-F9D07F6B0DD5}"/>
               </a:ext>
             </a:extLst>
           </p:cNvPr>
@@ -10257,10 +10379,10 @@
       </p:sp>
       <p:sp>
         <p:nvSpPr>
-          <p:cNvPr id="15" name="">
-            <a:extLst xmlns:a="http://schemas.openxmlformats.org/drawingml/2006/main">
-              <a:ext uri="{FF2B5EF4-FFF2-40B4-BE49-F238E27FC236}">
-                <a16:creationId xmlns:a16="http://schemas.microsoft.com/office/drawing/2014/main" id="{CAFC1D7B-01E7-405C-BFBA-9D709591497F}"/>
+          <p:cNvPr id="16" name="">
+            <a:extLst xmlns:a="http://schemas.openxmlformats.org/drawingml/2006/main">
+              <a:ext uri="{FF2B5EF4-FFF2-40B4-BE49-F238E27FC236}">
+                <a16:creationId xmlns:a16="http://schemas.microsoft.com/office/drawing/2014/main" id="{6E4BAF15-D50A-45FA-A6A4-F0C82CC4C66D}"/>
               </a:ext>
             </a:extLst>
           </p:cNvPr>
@@ -10318,10 +10440,10 @@
       </p:sp>
       <p:sp>
         <p:nvSpPr>
-          <p:cNvPr id="16" name="">
-            <a:extLst xmlns:a="http://schemas.openxmlformats.org/drawingml/2006/main">
-              <a:ext uri="{FF2B5EF4-FFF2-40B4-BE49-F238E27FC236}">
-                <a16:creationId xmlns:a16="http://schemas.microsoft.com/office/drawing/2014/main" id="{9F371993-5623-4A16-88A8-BC17EA8882E2}"/>
+          <p:cNvPr id="17" name="">
+            <a:extLst xmlns:a="http://schemas.openxmlformats.org/drawingml/2006/main">
+              <a:ext uri="{FF2B5EF4-FFF2-40B4-BE49-F238E27FC236}">
+                <a16:creationId xmlns:a16="http://schemas.microsoft.com/office/drawing/2014/main" id="{290C6D6C-7A20-4385-87D0-71240C4D1F58}"/>
               </a:ext>
             </a:extLst>
           </p:cNvPr>
@@ -10379,10 +10501,10 @@
       </p:sp>
       <p:sp>
         <p:nvSpPr>
-          <p:cNvPr id="17" name="">
-            <a:extLst xmlns:a="http://schemas.openxmlformats.org/drawingml/2006/main">
-              <a:ext uri="{FF2B5EF4-FFF2-40B4-BE49-F238E27FC236}">
-                <a16:creationId xmlns:a16="http://schemas.microsoft.com/office/drawing/2014/main" id="{4B1D4FFA-06CC-48F8-8417-CF7339A7475A}"/>
+          <p:cNvPr id="18" name="">
+            <a:extLst xmlns:a="http://schemas.openxmlformats.org/drawingml/2006/main">
+              <a:ext uri="{FF2B5EF4-FFF2-40B4-BE49-F238E27FC236}">
+                <a16:creationId xmlns:a16="http://schemas.microsoft.com/office/drawing/2014/main" id="{0404CBA7-E452-4B83-B392-B66BEFBEC64E}"/>
               </a:ext>
             </a:extLst>
           </p:cNvPr>
@@ -10440,10 +10562,10 @@
       </p:sp>
       <p:sp>
         <p:nvSpPr>
-          <p:cNvPr id="18" name="">
-            <a:extLst xmlns:a="http://schemas.openxmlformats.org/drawingml/2006/main">
-              <a:ext uri="{FF2B5EF4-FFF2-40B4-BE49-F238E27FC236}">
-                <a16:creationId xmlns:a16="http://schemas.microsoft.com/office/drawing/2014/main" id="{4BEBEE3B-98E5-488D-8B99-744560CE44CA}"/>
+          <p:cNvPr id="19" name="">
+            <a:extLst xmlns:a="http://schemas.openxmlformats.org/drawingml/2006/main">
+              <a:ext uri="{FF2B5EF4-FFF2-40B4-BE49-F238E27FC236}">
+                <a16:creationId xmlns:a16="http://schemas.microsoft.com/office/drawing/2014/main" id="{942026A5-4A8C-48EC-9EFE-3199E9E495AA}"/>
               </a:ext>
             </a:extLst>
           </p:cNvPr>
@@ -10474,10 +10596,10 @@
       </p:sp>
       <p:sp>
         <p:nvSpPr>
-          <p:cNvPr id="19" name="">
-            <a:extLst xmlns:a="http://schemas.openxmlformats.org/drawingml/2006/main">
-              <a:ext uri="{FF2B5EF4-FFF2-40B4-BE49-F238E27FC236}">
-                <a16:creationId xmlns:a16="http://schemas.microsoft.com/office/drawing/2014/main" id="{AE9AB8B6-E79F-4AAE-AAF4-E2C9C410F0B1}"/>
+          <p:cNvPr id="20" name="">
+            <a:extLst xmlns:a="http://schemas.openxmlformats.org/drawingml/2006/main">
+              <a:ext uri="{FF2B5EF4-FFF2-40B4-BE49-F238E27FC236}">
+                <a16:creationId xmlns:a16="http://schemas.microsoft.com/office/drawing/2014/main" id="{616DF72D-43CA-4FB4-BE4C-E62E5A85A905}"/>
               </a:ext>
             </a:extLst>
           </p:cNvPr>
@@ -10535,10 +10657,10 @@
       </p:sp>
       <p:sp>
         <p:nvSpPr>
-          <p:cNvPr id="20" name="">
-            <a:extLst xmlns:a="http://schemas.openxmlformats.org/drawingml/2006/main">
-              <a:ext uri="{FF2B5EF4-FFF2-40B4-BE49-F238E27FC236}">
-                <a16:creationId xmlns:a16="http://schemas.microsoft.com/office/drawing/2014/main" id="{8E0FFBDE-DAB6-48DE-BEE1-A035541BEBF7}"/>
+          <p:cNvPr id="21" name="">
+            <a:extLst xmlns:a="http://schemas.openxmlformats.org/drawingml/2006/main">
+              <a:ext uri="{FF2B5EF4-FFF2-40B4-BE49-F238E27FC236}">
+                <a16:creationId xmlns:a16="http://schemas.microsoft.com/office/drawing/2014/main" id="{C2983504-BC33-4BA8-A604-30FE5AF15974}"/>
               </a:ext>
             </a:extLst>
           </p:cNvPr>
@@ -10596,10 +10718,10 @@
       </p:sp>
       <p:sp>
         <p:nvSpPr>
-          <p:cNvPr id="21" name="">
-            <a:extLst xmlns:a="http://schemas.openxmlformats.org/drawingml/2006/main">
-              <a:ext uri="{FF2B5EF4-FFF2-40B4-BE49-F238E27FC236}">
-                <a16:creationId xmlns:a16="http://schemas.microsoft.com/office/drawing/2014/main" id="{9050C976-99E3-4CDC-A857-9681E15BE7DB}"/>
+          <p:cNvPr id="22" name="">
+            <a:extLst xmlns:a="http://schemas.openxmlformats.org/drawingml/2006/main">
+              <a:ext uri="{FF2B5EF4-FFF2-40B4-BE49-F238E27FC236}">
+                <a16:creationId xmlns:a16="http://schemas.microsoft.com/office/drawing/2014/main" id="{74C31F86-57E1-4CFB-AA44-5552BFBD971E}"/>
               </a:ext>
             </a:extLst>
           </p:cNvPr>
@@ -10657,10 +10779,10 @@
       </p:sp>
       <p:sp>
         <p:nvSpPr>
-          <p:cNvPr id="22" name="">
-            <a:extLst xmlns:a="http://schemas.openxmlformats.org/drawingml/2006/main">
-              <a:ext uri="{FF2B5EF4-FFF2-40B4-BE49-F238E27FC236}">
-                <a16:creationId xmlns:a16="http://schemas.microsoft.com/office/drawing/2014/main" id="{CE8045AF-35C5-4856-B9DF-72164BE480A8}"/>
+          <p:cNvPr id="23" name="">
+            <a:extLst xmlns:a="http://schemas.openxmlformats.org/drawingml/2006/main">
+              <a:ext uri="{FF2B5EF4-FFF2-40B4-BE49-F238E27FC236}">
+                <a16:creationId xmlns:a16="http://schemas.microsoft.com/office/drawing/2014/main" id="{BCBF791B-37E1-4DD8-B522-F6BC924DD725}"/>
               </a:ext>
             </a:extLst>
           </p:cNvPr>
@@ -10719,7 +10841,7 @@
     </p:spTree>
     <p:extLst>
       <p:ext uri="{BB962C8B-B14F-4D97-AF65-F5344CB8AC3E}">
-        <p14:creationId xmlns:p14="http://schemas.microsoft.com/office/powerpoint/2010/main" val="1158537770"/>
+        <p14:creationId xmlns:p14="http://schemas.microsoft.com/office/powerpoint/2010/main" val="818611185"/>
       </p:ext>
     </p:extLst>
   </p:cSld>
@@ -10747,10 +10869,10 @@
       </p:grpSpPr>
       <p:sp>
         <p:nvSpPr>
-          <p:cNvPr id="23" name="">
-            <a:extLst xmlns:a="http://schemas.openxmlformats.org/drawingml/2006/main">
-              <a:ext uri="{FF2B5EF4-FFF2-40B4-BE49-F238E27FC236}">
-                <a16:creationId xmlns:a16="http://schemas.microsoft.com/office/drawing/2014/main" id="{6DABCD23-B468-4483-9409-D65D7B6CA813}"/>
+          <p:cNvPr id="24" name="">
+            <a:extLst xmlns:a="http://schemas.openxmlformats.org/drawingml/2006/main">
+              <a:ext uri="{FF2B5EF4-FFF2-40B4-BE49-F238E27FC236}">
+                <a16:creationId xmlns:a16="http://schemas.microsoft.com/office/drawing/2014/main" id="{342D01C4-D3D1-4385-9489-E0FFAFEC183E}"/>
               </a:ext>
             </a:extLst>
           </p:cNvPr>
@@ -10811,7 +10933,7 @@
           <p:cNvPr id="2" name="">
             <a:extLst xmlns:a="http://schemas.openxmlformats.org/drawingml/2006/main">
               <a:ext uri="{FF2B5EF4-FFF2-40B4-BE49-F238E27FC236}">
-                <a16:creationId xmlns:a16="http://schemas.microsoft.com/office/drawing/2014/main" id="{74D813A0-F568-4C67-8BB2-DDF18CC16991}"/>
+                <a16:creationId xmlns:a16="http://schemas.microsoft.com/office/drawing/2014/main" id="{35DE1B75-1A9F-4E44-8656-95A4C74CBF0C}"/>
               </a:ext>
             </a:extLst>
           </p:cNvPr>
@@ -10872,7 +10994,7 @@
           <p:cNvPr id="3" name="">
             <a:extLst xmlns:a="http://schemas.openxmlformats.org/drawingml/2006/main">
               <a:ext uri="{FF2B5EF4-FFF2-40B4-BE49-F238E27FC236}">
-                <a16:creationId xmlns:a16="http://schemas.microsoft.com/office/drawing/2014/main" id="{D03E9382-0D70-4B25-BD71-CCD60AAB3102}"/>
+                <a16:creationId xmlns:a16="http://schemas.microsoft.com/office/drawing/2014/main" id="{1938BA25-B50A-426E-B48D-E84FC5234E01}"/>
               </a:ext>
             </a:extLst>
           </p:cNvPr>
@@ -10923,7 +11045,7 @@
                 <a:ea typeface="IBM Plex Sans KR"/>
                 <a:cs typeface="IBM Plex Sans KR"/>
               </a:rPr>
-              <a:t>4. 표의 상태와 두 평균을 출력한다</a:t>
+              <a:t>4. 표를 확인하고 두 평균을 출력한다</a:t>
             </a:r>
           </a:p>
         </p:txBody>
@@ -10933,7 +11055,7 @@
           <p:cNvPr id="4" name="">
             <a:extLst xmlns:a="http://schemas.openxmlformats.org/drawingml/2006/main">
               <a:ext uri="{FF2B5EF4-FFF2-40B4-BE49-F238E27FC236}">
-                <a16:creationId xmlns:a16="http://schemas.microsoft.com/office/drawing/2014/main" id="{40BE5897-ADD3-4240-8491-459991C17363}"/>
+                <a16:creationId xmlns:a16="http://schemas.microsoft.com/office/drawing/2014/main" id="{E6304012-5AC9-45B6-8029-88F1A7BE9BB8}"/>
               </a:ext>
             </a:extLst>
           </p:cNvPr>
@@ -10965,7 +11087,7 @@
           <p:cNvPr id="5" name="">
             <a:extLst xmlns:a="http://schemas.openxmlformats.org/drawingml/2006/main">
               <a:ext uri="{FF2B5EF4-FFF2-40B4-BE49-F238E27FC236}">
-                <a16:creationId xmlns:a16="http://schemas.microsoft.com/office/drawing/2014/main" id="{FF290224-FC9F-4CFD-B216-92A6CBBF8ADE}"/>
+                <a16:creationId xmlns:a16="http://schemas.microsoft.com/office/drawing/2014/main" id="{21C2C7B9-E62A-4701-ACEB-809F701FAFB5}"/>
               </a:ext>
             </a:extLst>
           </p:cNvPr>
@@ -11026,7 +11148,7 @@
           <p:cNvPr id="6" name="">
             <a:extLst xmlns:a="http://schemas.openxmlformats.org/drawingml/2006/main">
               <a:ext uri="{FF2B5EF4-FFF2-40B4-BE49-F238E27FC236}">
-                <a16:creationId xmlns:a16="http://schemas.microsoft.com/office/drawing/2014/main" id="{777BF136-CB88-4F5C-BEE5-3DF9AE09E50B}"/>
+                <a16:creationId xmlns:a16="http://schemas.microsoft.com/office/drawing/2014/main" id="{5F4DEEE5-85D6-40D3-845F-DE140D2A59B9}"/>
               </a:ext>
             </a:extLst>
           </p:cNvPr>
@@ -11087,7 +11209,7 @@
           <p:cNvPr id="7" name="">
             <a:extLst xmlns:a="http://schemas.openxmlformats.org/drawingml/2006/main">
               <a:ext uri="{FF2B5EF4-FFF2-40B4-BE49-F238E27FC236}">
-                <a16:creationId xmlns:a16="http://schemas.microsoft.com/office/drawing/2014/main" id="{94F98C72-3444-430E-92F3-C2517835CCE8}"/>
+                <a16:creationId xmlns:a16="http://schemas.microsoft.com/office/drawing/2014/main" id="{D1AAE522-9F3E-4A74-9BA2-C5C19176CB2D}"/>
               </a:ext>
             </a:extLst>
           </p:cNvPr>
@@ -11148,23 +11270,84 @@
           <p:cNvPr id="8" name="">
             <a:extLst xmlns:a="http://schemas.openxmlformats.org/drawingml/2006/main">
               <a:ext uri="{FF2B5EF4-FFF2-40B4-BE49-F238E27FC236}">
-                <a16:creationId xmlns:a16="http://schemas.microsoft.com/office/drawing/2014/main" id="{83DBDD54-7902-4319-BE01-8666FAE5F1D2}"/>
-              </a:ext>
-            </a:extLst>
-          </p:cNvPr>
-          <p:cNvSpPr>
-            <a:spLocks xmlns:a="http://schemas.openxmlformats.org/drawingml/2006/main" noGrp="1"/>
-          </p:cNvSpPr>
-          <p:nvPr/>
-        </p:nvSpPr>
-        <p:spPr>
-          <a:xfrm xmlns:a="http://schemas.openxmlformats.org/drawingml/2006/main">
-            <a:off x="523875" y="1714500"/>
-            <a:ext cx="7286625" cy="1714500"/>
+                <a16:creationId xmlns:a16="http://schemas.microsoft.com/office/drawing/2014/main" id="{30ADB10F-5D2A-4FDC-B796-D5287AF3F78E}"/>
+              </a:ext>
+            </a:extLst>
+          </p:cNvPr>
+          <p:cNvSpPr>
+            <a:spLocks xmlns:a="http://schemas.openxmlformats.org/drawingml/2006/main" noGrp="1"/>
+          </p:cNvSpPr>
+          <p:nvPr/>
+        </p:nvSpPr>
+        <p:spPr>
+          <a:xfrm xmlns:a="http://schemas.openxmlformats.org/drawingml/2006/main">
+            <a:off x="523875" y="1571625"/>
+            <a:ext cx="10668000" cy="228600"/>
+          </a:xfrm>
+          <a:prstGeom xmlns:a="http://schemas.openxmlformats.org/drawingml/2006/main" prst="rect">
+            <a:avLst/>
+          </a:prstGeom>
+          <a:noFill xmlns:a="http://schemas.openxmlformats.org/drawingml/2006/main"/>
+          <a:ln xmlns:a="http://schemas.openxmlformats.org/drawingml/2006/main" w="0">
+            <a:noFill/>
+          </a:ln>
+        </p:spPr>
+        <p:txBody>
+          <a:bodyPr xmlns:a="http://schemas.openxmlformats.org/drawingml/2006/main" wrap="square" lIns="0" tIns="0" rIns="0" bIns="0" anchor="t">
+            <a:noAutofit/>
+          </a:bodyPr>
+          <a:lstStyle xmlns:a="http://schemas.openxmlformats.org/drawingml/2006/main"/>
+          <a:p xmlns:a="http://schemas.openxmlformats.org/drawingml/2006/main">
+            <a:pPr algn="l">
+              <a:lnSpc>
+                <a:spcPct val="112000"/>
+              </a:lnSpc>
+              <a:buNone/>
+              <a:defRPr sz="1200" b="0">
+                <a:solidFill>
+                  <a:srgbClr val="34373D"/>
+                </a:solidFill>
+                <a:latin typeface="IBM Plex Sans KR"/>
+                <a:ea typeface="IBM Plex Sans KR"/>
+                <a:cs typeface="IBM Plex Sans KR"/>
+              </a:defRPr>
+            </a:pPr>
+            <a:r>
+              <a:rPr sz="1200" b="0">
+                <a:solidFill>
+                  <a:srgbClr val="34373D"/>
+                </a:solidFill>
+                <a:latin typeface="IBM Plex Sans KR"/>
+                <a:ea typeface="IBM Plex Sans KR"/>
+                <a:cs typeface="IBM Plex Sans KR"/>
+              </a:rPr>
+              <a:t>표를 읽은 뒤에는 크기와 열 이름부터 원본과 맞춰 봐요.</a:t>
+            </a:r>
+          </a:p>
+        </p:txBody>
+      </p:sp>
+      <p:sp>
+        <p:nvSpPr>
+          <p:cNvPr id="9" name="">
+            <a:extLst xmlns:a="http://schemas.openxmlformats.org/drawingml/2006/main">
+              <a:ext uri="{FF2B5EF4-FFF2-40B4-BE49-F238E27FC236}">
+                <a16:creationId xmlns:a16="http://schemas.microsoft.com/office/drawing/2014/main" id="{5C89AB76-C5CB-4A9E-8DEC-2E7CA59A6728}"/>
+              </a:ext>
+            </a:extLst>
+          </p:cNvPr>
+          <p:cNvSpPr>
+            <a:spLocks xmlns:a="http://schemas.openxmlformats.org/drawingml/2006/main" noGrp="1"/>
+          </p:cNvSpPr>
+          <p:nvPr/>
+        </p:nvSpPr>
+        <p:spPr>
+          <a:xfrm xmlns:a="http://schemas.openxmlformats.org/drawingml/2006/main">
+            <a:off x="523875" y="1857375"/>
+            <a:ext cx="7286625" cy="1495425"/>
           </a:xfrm>
           <a:prstGeom xmlns:a="http://schemas.openxmlformats.org/drawingml/2006/main" prst="roundRect">
             <a:avLst>
-              <a:gd name="adj" fmla="val 2778"/>
+              <a:gd name="adj" fmla="val 3185"/>
             </a:avLst>
           </a:prstGeom>
           <a:solidFill xmlns:a="http://schemas.openxmlformats.org/drawingml/2006/main">
@@ -11179,21 +11362,21 @@
       </p:sp>
       <p:sp>
         <p:nvSpPr>
-          <p:cNvPr id="9" name="">
-            <a:extLst xmlns:a="http://schemas.openxmlformats.org/drawingml/2006/main">
-              <a:ext uri="{FF2B5EF4-FFF2-40B4-BE49-F238E27FC236}">
-                <a16:creationId xmlns:a16="http://schemas.microsoft.com/office/drawing/2014/main" id="{F6AF3375-F44D-4D8F-A1F1-C5B6BD4384D4}"/>
-              </a:ext>
-            </a:extLst>
-          </p:cNvPr>
-          <p:cNvSpPr>
-            <a:spLocks xmlns:a="http://schemas.openxmlformats.org/drawingml/2006/main" noGrp="1"/>
-          </p:cNvSpPr>
-          <p:nvPr/>
-        </p:nvSpPr>
-        <p:spPr>
-          <a:xfrm xmlns:a="http://schemas.openxmlformats.org/drawingml/2006/main">
-            <a:off x="638175" y="1828800"/>
+          <p:cNvPr id="10" name="">
+            <a:extLst xmlns:a="http://schemas.openxmlformats.org/drawingml/2006/main">
+              <a:ext uri="{FF2B5EF4-FFF2-40B4-BE49-F238E27FC236}">
+                <a16:creationId xmlns:a16="http://schemas.microsoft.com/office/drawing/2014/main" id="{86E1DB10-8746-43A8-A5A6-DE4BF94314D2}"/>
+              </a:ext>
+            </a:extLst>
+          </p:cNvPr>
+          <p:cNvSpPr>
+            <a:spLocks xmlns:a="http://schemas.openxmlformats.org/drawingml/2006/main" noGrp="1"/>
+          </p:cNvSpPr>
+          <p:nvPr/>
+        </p:nvSpPr>
+        <p:spPr>
+          <a:xfrm xmlns:a="http://schemas.openxmlformats.org/drawingml/2006/main">
+            <a:off x="638175" y="1971675"/>
             <a:ext cx="323850" cy="285750"/>
           </a:xfrm>
           <a:prstGeom xmlns:a="http://schemas.openxmlformats.org/drawingml/2006/main" prst="roundRect">
@@ -11240,22 +11423,22 @@
       </p:sp>
       <p:sp>
         <p:nvSpPr>
-          <p:cNvPr id="10" name="">
-            <a:extLst xmlns:a="http://schemas.openxmlformats.org/drawingml/2006/main">
-              <a:ext uri="{FF2B5EF4-FFF2-40B4-BE49-F238E27FC236}">
-                <a16:creationId xmlns:a16="http://schemas.microsoft.com/office/drawing/2014/main" id="{B5EE7434-086C-4BE9-A60C-97EF911F63E8}"/>
-              </a:ext>
-            </a:extLst>
-          </p:cNvPr>
-          <p:cNvSpPr>
-            <a:spLocks xmlns:a="http://schemas.openxmlformats.org/drawingml/2006/main" noGrp="1"/>
-          </p:cNvSpPr>
-          <p:nvPr/>
-        </p:nvSpPr>
-        <p:spPr>
-          <a:xfrm xmlns:a="http://schemas.openxmlformats.org/drawingml/2006/main">
-            <a:off x="1076325" y="1809750"/>
-            <a:ext cx="6600825" cy="1524000"/>
+          <p:cNvPr id="11" name="">
+            <a:extLst xmlns:a="http://schemas.openxmlformats.org/drawingml/2006/main">
+              <a:ext uri="{FF2B5EF4-FFF2-40B4-BE49-F238E27FC236}">
+                <a16:creationId xmlns:a16="http://schemas.microsoft.com/office/drawing/2014/main" id="{14F1FB63-774A-4905-A586-80D531E91D19}"/>
+              </a:ext>
+            </a:extLst>
+          </p:cNvPr>
+          <p:cNvSpPr>
+            <a:spLocks xmlns:a="http://schemas.openxmlformats.org/drawingml/2006/main" noGrp="1"/>
+          </p:cNvSpPr>
+          <p:nvPr/>
+        </p:nvSpPr>
+        <p:spPr>
+          <a:xfrm xmlns:a="http://schemas.openxmlformats.org/drawingml/2006/main">
+            <a:off x="1076325" y="1952625"/>
+            <a:ext cx="6600825" cy="1304925"/>
           </a:xfrm>
           <a:prstGeom xmlns:a="http://schemas.openxmlformats.org/drawingml/2006/main" prst="rect">
             <a:avLst/>
@@ -11355,21 +11538,21 @@
       </p:sp>
       <p:sp>
         <p:nvSpPr>
-          <p:cNvPr id="11" name="">
-            <a:extLst xmlns:a="http://schemas.openxmlformats.org/drawingml/2006/main">
-              <a:ext uri="{FF2B5EF4-FFF2-40B4-BE49-F238E27FC236}">
-                <a16:creationId xmlns:a16="http://schemas.microsoft.com/office/drawing/2014/main" id="{8F54DB18-0BBF-4185-BC6C-A272C682DD1B}"/>
-              </a:ext>
-            </a:extLst>
-          </p:cNvPr>
-          <p:cNvSpPr>
-            <a:spLocks xmlns:a="http://schemas.openxmlformats.org/drawingml/2006/main" noGrp="1"/>
-          </p:cNvSpPr>
-          <p:nvPr/>
-        </p:nvSpPr>
-        <p:spPr>
-          <a:xfrm xmlns:a="http://schemas.openxmlformats.org/drawingml/2006/main">
-            <a:off x="523875" y="3638550"/>
+          <p:cNvPr id="12" name="">
+            <a:extLst xmlns:a="http://schemas.openxmlformats.org/drawingml/2006/main">
+              <a:ext uri="{FF2B5EF4-FFF2-40B4-BE49-F238E27FC236}">
+                <a16:creationId xmlns:a16="http://schemas.microsoft.com/office/drawing/2014/main" id="{72E99432-237F-4717-AD71-AECC9BCFF8EB}"/>
+              </a:ext>
+            </a:extLst>
+          </p:cNvPr>
+          <p:cNvSpPr>
+            <a:spLocks xmlns:a="http://schemas.openxmlformats.org/drawingml/2006/main" noGrp="1"/>
+          </p:cNvSpPr>
+          <p:nvPr/>
+        </p:nvSpPr>
+        <p:spPr>
+          <a:xfrm xmlns:a="http://schemas.openxmlformats.org/drawingml/2006/main">
+            <a:off x="523875" y="3571875"/>
             <a:ext cx="7286625" cy="1381125"/>
           </a:xfrm>
           <a:prstGeom xmlns:a="http://schemas.openxmlformats.org/drawingml/2006/main" prst="roundRect">
@@ -11389,21 +11572,21 @@
       </p:sp>
       <p:sp>
         <p:nvSpPr>
-          <p:cNvPr id="12" name="">
-            <a:extLst xmlns:a="http://schemas.openxmlformats.org/drawingml/2006/main">
-              <a:ext uri="{FF2B5EF4-FFF2-40B4-BE49-F238E27FC236}">
-                <a16:creationId xmlns:a16="http://schemas.microsoft.com/office/drawing/2014/main" id="{D476CA76-837D-48D2-9454-1ECA3C52D4C7}"/>
-              </a:ext>
-            </a:extLst>
-          </p:cNvPr>
-          <p:cNvSpPr>
-            <a:spLocks xmlns:a="http://schemas.openxmlformats.org/drawingml/2006/main" noGrp="1"/>
-          </p:cNvSpPr>
-          <p:nvPr/>
-        </p:nvSpPr>
-        <p:spPr>
-          <a:xfrm xmlns:a="http://schemas.openxmlformats.org/drawingml/2006/main">
-            <a:off x="638175" y="3752850"/>
+          <p:cNvPr id="13" name="">
+            <a:extLst xmlns:a="http://schemas.openxmlformats.org/drawingml/2006/main">
+              <a:ext uri="{FF2B5EF4-FFF2-40B4-BE49-F238E27FC236}">
+                <a16:creationId xmlns:a16="http://schemas.microsoft.com/office/drawing/2014/main" id="{A0501889-E203-4510-A009-09DBECFDA7AF}"/>
+              </a:ext>
+            </a:extLst>
+          </p:cNvPr>
+          <p:cNvSpPr>
+            <a:spLocks xmlns:a="http://schemas.openxmlformats.org/drawingml/2006/main" noGrp="1"/>
+          </p:cNvSpPr>
+          <p:nvPr/>
+        </p:nvSpPr>
+        <p:spPr>
+          <a:xfrm xmlns:a="http://schemas.openxmlformats.org/drawingml/2006/main">
+            <a:off x="638175" y="3686175"/>
             <a:ext cx="323850" cy="285750"/>
           </a:xfrm>
           <a:prstGeom xmlns:a="http://schemas.openxmlformats.org/drawingml/2006/main" prst="roundRect">
@@ -11450,21 +11633,21 @@
       </p:sp>
       <p:sp>
         <p:nvSpPr>
-          <p:cNvPr id="13" name="">
-            <a:extLst xmlns:a="http://schemas.openxmlformats.org/drawingml/2006/main">
-              <a:ext uri="{FF2B5EF4-FFF2-40B4-BE49-F238E27FC236}">
-                <a16:creationId xmlns:a16="http://schemas.microsoft.com/office/drawing/2014/main" id="{F16DFC12-F4B1-4348-BB6E-B84592AD855F}"/>
-              </a:ext>
-            </a:extLst>
-          </p:cNvPr>
-          <p:cNvSpPr>
-            <a:spLocks xmlns:a="http://schemas.openxmlformats.org/drawingml/2006/main" noGrp="1"/>
-          </p:cNvSpPr>
-          <p:nvPr/>
-        </p:nvSpPr>
-        <p:spPr>
-          <a:xfrm xmlns:a="http://schemas.openxmlformats.org/drawingml/2006/main">
-            <a:off x="1076325" y="3733800"/>
+          <p:cNvPr id="14" name="">
+            <a:extLst xmlns:a="http://schemas.openxmlformats.org/drawingml/2006/main">
+              <a:ext uri="{FF2B5EF4-FFF2-40B4-BE49-F238E27FC236}">
+                <a16:creationId xmlns:a16="http://schemas.microsoft.com/office/drawing/2014/main" id="{5393130B-8B9A-4969-B9D9-468B1D2312EC}"/>
+              </a:ext>
+            </a:extLst>
+          </p:cNvPr>
+          <p:cNvSpPr>
+            <a:spLocks xmlns:a="http://schemas.openxmlformats.org/drawingml/2006/main" noGrp="1"/>
+          </p:cNvSpPr>
+          <p:nvPr/>
+        </p:nvSpPr>
+        <p:spPr>
+          <a:xfrm xmlns:a="http://schemas.openxmlformats.org/drawingml/2006/main">
+            <a:off x="1076325" y="3667125"/>
             <a:ext cx="6600825" cy="1190625"/>
           </a:xfrm>
           <a:prstGeom xmlns:a="http://schemas.openxmlformats.org/drawingml/2006/main" prst="rect">
@@ -11538,26 +11721,26 @@
       </p:sp>
       <p:sp>
         <p:nvSpPr>
-          <p:cNvPr id="14" name="">
-            <a:extLst xmlns:a="http://schemas.openxmlformats.org/drawingml/2006/main">
-              <a:ext uri="{FF2B5EF4-FFF2-40B4-BE49-F238E27FC236}">
-                <a16:creationId xmlns:a16="http://schemas.microsoft.com/office/drawing/2014/main" id="{B966063F-32A9-44EA-9146-162D4AD78CD4}"/>
-              </a:ext>
-            </a:extLst>
-          </p:cNvPr>
-          <p:cNvSpPr>
-            <a:spLocks xmlns:a="http://schemas.openxmlformats.org/drawingml/2006/main" noGrp="1"/>
-          </p:cNvSpPr>
-          <p:nvPr/>
-        </p:nvSpPr>
-        <p:spPr>
-          <a:xfrm xmlns:a="http://schemas.openxmlformats.org/drawingml/2006/main">
-            <a:off x="8096250" y="1828800"/>
-            <a:ext cx="3429000" cy="1381125"/>
+          <p:cNvPr id="15" name="">
+            <a:extLst xmlns:a="http://schemas.openxmlformats.org/drawingml/2006/main">
+              <a:ext uri="{FF2B5EF4-FFF2-40B4-BE49-F238E27FC236}">
+                <a16:creationId xmlns:a16="http://schemas.microsoft.com/office/drawing/2014/main" id="{D8A88E39-16E6-448D-B48D-89F2952B51FB}"/>
+              </a:ext>
+            </a:extLst>
+          </p:cNvPr>
+          <p:cNvSpPr>
+            <a:spLocks xmlns:a="http://schemas.openxmlformats.org/drawingml/2006/main" noGrp="1"/>
+          </p:cNvSpPr>
+          <p:nvPr/>
+        </p:nvSpPr>
+        <p:spPr>
+          <a:xfrm xmlns:a="http://schemas.openxmlformats.org/drawingml/2006/main">
+            <a:off x="8096250" y="1857375"/>
+            <a:ext cx="3429000" cy="1495425"/>
           </a:xfrm>
           <a:prstGeom xmlns:a="http://schemas.openxmlformats.org/drawingml/2006/main" prst="roundRect">
             <a:avLst>
-              <a:gd name="adj" fmla="val 4138"/>
+              <a:gd name="adj" fmla="val 3822"/>
             </a:avLst>
           </a:prstGeom>
           <a:solidFill xmlns:a="http://schemas.openxmlformats.org/drawingml/2006/main">
@@ -11572,21 +11755,21 @@
       </p:sp>
       <p:sp>
         <p:nvSpPr>
-          <p:cNvPr id="15" name="">
-            <a:extLst xmlns:a="http://schemas.openxmlformats.org/drawingml/2006/main">
-              <a:ext uri="{FF2B5EF4-FFF2-40B4-BE49-F238E27FC236}">
-                <a16:creationId xmlns:a16="http://schemas.microsoft.com/office/drawing/2014/main" id="{169F4477-DB18-455F-AA76-9FEBEA0A2ABB}"/>
-              </a:ext>
-            </a:extLst>
-          </p:cNvPr>
-          <p:cNvSpPr>
-            <a:spLocks xmlns:a="http://schemas.openxmlformats.org/drawingml/2006/main" noGrp="1"/>
-          </p:cNvSpPr>
-          <p:nvPr/>
-        </p:nvSpPr>
-        <p:spPr>
-          <a:xfrm xmlns:a="http://schemas.openxmlformats.org/drawingml/2006/main">
-            <a:off x="8229600" y="1952625"/>
+          <p:cNvPr id="16" name="">
+            <a:extLst xmlns:a="http://schemas.openxmlformats.org/drawingml/2006/main">
+              <a:ext uri="{FF2B5EF4-FFF2-40B4-BE49-F238E27FC236}">
+                <a16:creationId xmlns:a16="http://schemas.microsoft.com/office/drawing/2014/main" id="{F6D0BE5C-6DC8-4D02-B24C-A9FBC75DF867}"/>
+              </a:ext>
+            </a:extLst>
+          </p:cNvPr>
+          <p:cNvSpPr>
+            <a:spLocks xmlns:a="http://schemas.openxmlformats.org/drawingml/2006/main" noGrp="1"/>
+          </p:cNvSpPr>
+          <p:nvPr/>
+        </p:nvSpPr>
+        <p:spPr>
+          <a:xfrm xmlns:a="http://schemas.openxmlformats.org/drawingml/2006/main">
+            <a:off x="8229600" y="1981200"/>
             <a:ext cx="323850" cy="266700"/>
           </a:xfrm>
           <a:prstGeom xmlns:a="http://schemas.openxmlformats.org/drawingml/2006/main" prst="rect">
@@ -11633,21 +11816,21 @@
       </p:sp>
       <p:sp>
         <p:nvSpPr>
-          <p:cNvPr id="16" name="">
-            <a:extLst xmlns:a="http://schemas.openxmlformats.org/drawingml/2006/main">
-              <a:ext uri="{FF2B5EF4-FFF2-40B4-BE49-F238E27FC236}">
-                <a16:creationId xmlns:a16="http://schemas.microsoft.com/office/drawing/2014/main" id="{BF9EC5FD-5F5E-4674-B6B2-9606505D4CDC}"/>
-              </a:ext>
-            </a:extLst>
-          </p:cNvPr>
-          <p:cNvSpPr>
-            <a:spLocks xmlns:a="http://schemas.openxmlformats.org/drawingml/2006/main" noGrp="1"/>
-          </p:cNvSpPr>
-          <p:nvPr/>
-        </p:nvSpPr>
-        <p:spPr>
-          <a:xfrm xmlns:a="http://schemas.openxmlformats.org/drawingml/2006/main">
-            <a:off x="8629650" y="1952625"/>
+          <p:cNvPr id="17" name="">
+            <a:extLst xmlns:a="http://schemas.openxmlformats.org/drawingml/2006/main">
+              <a:ext uri="{FF2B5EF4-FFF2-40B4-BE49-F238E27FC236}">
+                <a16:creationId xmlns:a16="http://schemas.microsoft.com/office/drawing/2014/main" id="{308092EC-4E92-4373-AEBA-744F6024A5EF}"/>
+              </a:ext>
+            </a:extLst>
+          </p:cNvPr>
+          <p:cNvSpPr>
+            <a:spLocks xmlns:a="http://schemas.openxmlformats.org/drawingml/2006/main" noGrp="1"/>
+          </p:cNvSpPr>
+          <p:nvPr/>
+        </p:nvSpPr>
+        <p:spPr>
+          <a:xfrm xmlns:a="http://schemas.openxmlformats.org/drawingml/2006/main">
+            <a:off x="8629650" y="1981200"/>
             <a:ext cx="2762250" cy="266700"/>
           </a:xfrm>
           <a:prstGeom xmlns:a="http://schemas.openxmlformats.org/drawingml/2006/main" prst="rect">
@@ -11694,22 +11877,22 @@
       </p:sp>
       <p:sp>
         <p:nvSpPr>
-          <p:cNvPr id="17" name="">
-            <a:extLst xmlns:a="http://schemas.openxmlformats.org/drawingml/2006/main">
-              <a:ext uri="{FF2B5EF4-FFF2-40B4-BE49-F238E27FC236}">
-                <a16:creationId xmlns:a16="http://schemas.microsoft.com/office/drawing/2014/main" id="{FBBA4887-C2D4-415D-A27A-FF5F105D8693}"/>
-              </a:ext>
-            </a:extLst>
-          </p:cNvPr>
-          <p:cNvSpPr>
-            <a:spLocks xmlns:a="http://schemas.openxmlformats.org/drawingml/2006/main" noGrp="1"/>
-          </p:cNvSpPr>
-          <p:nvPr/>
-        </p:nvSpPr>
-        <p:spPr>
-          <a:xfrm xmlns:a="http://schemas.openxmlformats.org/drawingml/2006/main">
-            <a:off x="8267700" y="2295525"/>
-            <a:ext cx="3086100" cy="809625"/>
+          <p:cNvPr id="18" name="">
+            <a:extLst xmlns:a="http://schemas.openxmlformats.org/drawingml/2006/main">
+              <a:ext uri="{FF2B5EF4-FFF2-40B4-BE49-F238E27FC236}">
+                <a16:creationId xmlns:a16="http://schemas.microsoft.com/office/drawing/2014/main" id="{714E9BDB-C32F-4A5C-9F2D-8821A5A12A81}"/>
+              </a:ext>
+            </a:extLst>
+          </p:cNvPr>
+          <p:cNvSpPr>
+            <a:spLocks xmlns:a="http://schemas.openxmlformats.org/drawingml/2006/main" noGrp="1"/>
+          </p:cNvSpPr>
+          <p:nvPr/>
+        </p:nvSpPr>
+        <p:spPr>
+          <a:xfrm xmlns:a="http://schemas.openxmlformats.org/drawingml/2006/main">
+            <a:off x="8267700" y="2324100"/>
+            <a:ext cx="3086100" cy="923925"/>
           </a:xfrm>
           <a:prstGeom xmlns:a="http://schemas.openxmlformats.org/drawingml/2006/main" prst="rect">
             <a:avLst/>
@@ -11755,21 +11938,21 @@
       </p:sp>
       <p:sp>
         <p:nvSpPr>
-          <p:cNvPr id="18" name="">
-            <a:extLst xmlns:a="http://schemas.openxmlformats.org/drawingml/2006/main">
-              <a:ext uri="{FF2B5EF4-FFF2-40B4-BE49-F238E27FC236}">
-                <a16:creationId xmlns:a16="http://schemas.microsoft.com/office/drawing/2014/main" id="{798A8110-9478-4975-A859-7DF6722A9931}"/>
-              </a:ext>
-            </a:extLst>
-          </p:cNvPr>
-          <p:cNvSpPr>
-            <a:spLocks xmlns:a="http://schemas.openxmlformats.org/drawingml/2006/main" noGrp="1"/>
-          </p:cNvSpPr>
-          <p:nvPr/>
-        </p:nvSpPr>
-        <p:spPr>
-          <a:xfrm xmlns:a="http://schemas.openxmlformats.org/drawingml/2006/main">
-            <a:off x="8096250" y="3524250"/>
+          <p:cNvPr id="19" name="">
+            <a:extLst xmlns:a="http://schemas.openxmlformats.org/drawingml/2006/main">
+              <a:ext uri="{FF2B5EF4-FFF2-40B4-BE49-F238E27FC236}">
+                <a16:creationId xmlns:a16="http://schemas.microsoft.com/office/drawing/2014/main" id="{822CDB9E-4E0B-4478-8807-68CE2E9A799E}"/>
+              </a:ext>
+            </a:extLst>
+          </p:cNvPr>
+          <p:cNvSpPr>
+            <a:spLocks xmlns:a="http://schemas.openxmlformats.org/drawingml/2006/main" noGrp="1"/>
+          </p:cNvSpPr>
+          <p:nvPr/>
+        </p:nvSpPr>
+        <p:spPr>
+          <a:xfrm xmlns:a="http://schemas.openxmlformats.org/drawingml/2006/main">
+            <a:off x="8096250" y="3571875"/>
             <a:ext cx="3429000" cy="1381125"/>
           </a:xfrm>
           <a:prstGeom xmlns:a="http://schemas.openxmlformats.org/drawingml/2006/main" prst="roundRect">
@@ -11789,21 +11972,21 @@
       </p:sp>
       <p:sp>
         <p:nvSpPr>
-          <p:cNvPr id="19" name="">
-            <a:extLst xmlns:a="http://schemas.openxmlformats.org/drawingml/2006/main">
-              <a:ext uri="{FF2B5EF4-FFF2-40B4-BE49-F238E27FC236}">
-                <a16:creationId xmlns:a16="http://schemas.microsoft.com/office/drawing/2014/main" id="{BE7702F0-4A57-40FE-AD18-B8DF70889703}"/>
-              </a:ext>
-            </a:extLst>
-          </p:cNvPr>
-          <p:cNvSpPr>
-            <a:spLocks xmlns:a="http://schemas.openxmlformats.org/drawingml/2006/main" noGrp="1"/>
-          </p:cNvSpPr>
-          <p:nvPr/>
-        </p:nvSpPr>
-        <p:spPr>
-          <a:xfrm xmlns:a="http://schemas.openxmlformats.org/drawingml/2006/main">
-            <a:off x="8229600" y="3648075"/>
+          <p:cNvPr id="20" name="">
+            <a:extLst xmlns:a="http://schemas.openxmlformats.org/drawingml/2006/main">
+              <a:ext uri="{FF2B5EF4-FFF2-40B4-BE49-F238E27FC236}">
+                <a16:creationId xmlns:a16="http://schemas.microsoft.com/office/drawing/2014/main" id="{5629A000-519C-4646-973E-03DD26B04FF7}"/>
+              </a:ext>
+            </a:extLst>
+          </p:cNvPr>
+          <p:cNvSpPr>
+            <a:spLocks xmlns:a="http://schemas.openxmlformats.org/drawingml/2006/main" noGrp="1"/>
+          </p:cNvSpPr>
+          <p:nvPr/>
+        </p:nvSpPr>
+        <p:spPr>
+          <a:xfrm xmlns:a="http://schemas.openxmlformats.org/drawingml/2006/main">
+            <a:off x="8229600" y="3695700"/>
             <a:ext cx="323850" cy="266700"/>
           </a:xfrm>
           <a:prstGeom xmlns:a="http://schemas.openxmlformats.org/drawingml/2006/main" prst="rect">
@@ -11850,21 +12033,21 @@
       </p:sp>
       <p:sp>
         <p:nvSpPr>
-          <p:cNvPr id="20" name="">
-            <a:extLst xmlns:a="http://schemas.openxmlformats.org/drawingml/2006/main">
-              <a:ext uri="{FF2B5EF4-FFF2-40B4-BE49-F238E27FC236}">
-                <a16:creationId xmlns:a16="http://schemas.microsoft.com/office/drawing/2014/main" id="{CF0192FD-1427-4C57-AE17-7855F0F8DC83}"/>
-              </a:ext>
-            </a:extLst>
-          </p:cNvPr>
-          <p:cNvSpPr>
-            <a:spLocks xmlns:a="http://schemas.openxmlformats.org/drawingml/2006/main" noGrp="1"/>
-          </p:cNvSpPr>
-          <p:nvPr/>
-        </p:nvSpPr>
-        <p:spPr>
-          <a:xfrm xmlns:a="http://schemas.openxmlformats.org/drawingml/2006/main">
-            <a:off x="8629650" y="3648075"/>
+          <p:cNvPr id="21" name="">
+            <a:extLst xmlns:a="http://schemas.openxmlformats.org/drawingml/2006/main">
+              <a:ext uri="{FF2B5EF4-FFF2-40B4-BE49-F238E27FC236}">
+                <a16:creationId xmlns:a16="http://schemas.microsoft.com/office/drawing/2014/main" id="{E2117C8C-3C36-4B74-9F45-8D24C826709B}"/>
+              </a:ext>
+            </a:extLst>
+          </p:cNvPr>
+          <p:cNvSpPr>
+            <a:spLocks xmlns:a="http://schemas.openxmlformats.org/drawingml/2006/main" noGrp="1"/>
+          </p:cNvSpPr>
+          <p:nvPr/>
+        </p:nvSpPr>
+        <p:spPr>
+          <a:xfrm xmlns:a="http://schemas.openxmlformats.org/drawingml/2006/main">
+            <a:off x="8629650" y="3695700"/>
             <a:ext cx="2762250" cy="266700"/>
           </a:xfrm>
           <a:prstGeom xmlns:a="http://schemas.openxmlformats.org/drawingml/2006/main" prst="rect">
@@ -11911,21 +12094,21 @@
       </p:sp>
       <p:sp>
         <p:nvSpPr>
-          <p:cNvPr id="21" name="">
-            <a:extLst xmlns:a="http://schemas.openxmlformats.org/drawingml/2006/main">
-              <a:ext uri="{FF2B5EF4-FFF2-40B4-BE49-F238E27FC236}">
-                <a16:creationId xmlns:a16="http://schemas.microsoft.com/office/drawing/2014/main" id="{9CF7D047-2F1D-4991-9860-88DEBB8C96CE}"/>
-              </a:ext>
-            </a:extLst>
-          </p:cNvPr>
-          <p:cNvSpPr>
-            <a:spLocks xmlns:a="http://schemas.openxmlformats.org/drawingml/2006/main" noGrp="1"/>
-          </p:cNvSpPr>
-          <p:nvPr/>
-        </p:nvSpPr>
-        <p:spPr>
-          <a:xfrm xmlns:a="http://schemas.openxmlformats.org/drawingml/2006/main">
-            <a:off x="8267700" y="3990975"/>
+          <p:cNvPr id="22" name="">
+            <a:extLst xmlns:a="http://schemas.openxmlformats.org/drawingml/2006/main">
+              <a:ext uri="{FF2B5EF4-FFF2-40B4-BE49-F238E27FC236}">
+                <a16:creationId xmlns:a16="http://schemas.microsoft.com/office/drawing/2014/main" id="{019CF637-20CA-42CA-A443-173E917C076C}"/>
+              </a:ext>
+            </a:extLst>
+          </p:cNvPr>
+          <p:cNvSpPr>
+            <a:spLocks xmlns:a="http://schemas.openxmlformats.org/drawingml/2006/main" noGrp="1"/>
+          </p:cNvSpPr>
+          <p:nvPr/>
+        </p:nvSpPr>
+        <p:spPr>
+          <a:xfrm xmlns:a="http://schemas.openxmlformats.org/drawingml/2006/main">
+            <a:off x="8267700" y="4038600"/>
             <a:ext cx="3086100" cy="809625"/>
           </a:xfrm>
           <a:prstGeom xmlns:a="http://schemas.openxmlformats.org/drawingml/2006/main" prst="rect">
@@ -11965,17 +12148,17 @@
                 <a:ea typeface="IBM Plex Sans KR"/>
                 <a:cs typeface="IBM Plex Sans KR"/>
               </a:rPr>
-              <a:t>두 열의 평균을 계산해 소수 둘째 자리까지 보여 주는 블록이에요.</a:t>
-            </a:r>
-          </a:p>
-        </p:txBody>
-      </p:sp>
-      <p:sp>
-        <p:nvSpPr>
-          <p:cNvPr id="22" name="">
-            <a:extLst xmlns:a="http://schemas.openxmlformats.org/drawingml/2006/main">
-              <a:ext uri="{FF2B5EF4-FFF2-40B4-BE49-F238E27FC236}">
-                <a16:creationId xmlns:a16="http://schemas.microsoft.com/office/drawing/2014/main" id="{8578E34D-69AB-4692-8E63-282025700382}"/>
+              <a:t>두 열의 평균을 계산해 소수 둘째 자리까지 출력해요.</a:t>
+            </a:r>
+          </a:p>
+        </p:txBody>
+      </p:sp>
+      <p:sp>
+        <p:nvSpPr>
+          <p:cNvPr id="23" name="">
+            <a:extLst xmlns:a="http://schemas.openxmlformats.org/drawingml/2006/main">
+              <a:ext uri="{FF2B5EF4-FFF2-40B4-BE49-F238E27FC236}">
+                <a16:creationId xmlns:a16="http://schemas.microsoft.com/office/drawing/2014/main" id="{272216FF-0FC3-4FDC-8F25-4196E6D7ED10}"/>
               </a:ext>
             </a:extLst>
           </p:cNvPr>
@@ -12034,7 +12217,7 @@
     </p:spTree>
     <p:extLst>
       <p:ext uri="{BB962C8B-B14F-4D97-AF65-F5344CB8AC3E}">
-        <p14:creationId xmlns:p14="http://schemas.microsoft.com/office/powerpoint/2010/main" val="1562522718"/>
+        <p14:creationId xmlns:p14="http://schemas.microsoft.com/office/powerpoint/2010/main" val="642638767"/>
       </p:ext>
     </p:extLst>
   </p:cSld>
@@ -12062,10 +12245,10 @@
       </p:grpSpPr>
       <p:sp>
         <p:nvSpPr>
-          <p:cNvPr id="29" name="">
-            <a:extLst xmlns:a="http://schemas.openxmlformats.org/drawingml/2006/main">
-              <a:ext uri="{FF2B5EF4-FFF2-40B4-BE49-F238E27FC236}">
-                <a16:creationId xmlns:a16="http://schemas.microsoft.com/office/drawing/2014/main" id="{30184EA6-81D5-4AB1-B35B-2F8A693ADC55}"/>
+          <p:cNvPr id="30" name="">
+            <a:extLst xmlns:a="http://schemas.openxmlformats.org/drawingml/2006/main">
+              <a:ext uri="{FF2B5EF4-FFF2-40B4-BE49-F238E27FC236}">
+                <a16:creationId xmlns:a16="http://schemas.microsoft.com/office/drawing/2014/main" id="{E4107DC1-569D-471C-B1A9-8FE1C4DC3451}"/>
               </a:ext>
             </a:extLst>
           </p:cNvPr>
@@ -12126,7 +12309,7 @@
           <p:cNvPr id="2" name="">
             <a:extLst xmlns:a="http://schemas.openxmlformats.org/drawingml/2006/main">
               <a:ext uri="{FF2B5EF4-FFF2-40B4-BE49-F238E27FC236}">
-                <a16:creationId xmlns:a16="http://schemas.microsoft.com/office/drawing/2014/main" id="{9C054BF5-B4D1-431E-89DF-9B3A6D82578A}"/>
+                <a16:creationId xmlns:a16="http://schemas.microsoft.com/office/drawing/2014/main" id="{58C3EC81-B3BC-40A2-91B2-028579CC2D43}"/>
               </a:ext>
             </a:extLst>
           </p:cNvPr>
@@ -12187,7 +12370,7 @@
           <p:cNvPr id="3" name="">
             <a:extLst xmlns:a="http://schemas.openxmlformats.org/drawingml/2006/main">
               <a:ext uri="{FF2B5EF4-FFF2-40B4-BE49-F238E27FC236}">
-                <a16:creationId xmlns:a16="http://schemas.microsoft.com/office/drawing/2014/main" id="{5F18F21D-E304-495E-BC24-5F23A8CDAFBF}"/>
+                <a16:creationId xmlns:a16="http://schemas.microsoft.com/office/drawing/2014/main" id="{E11EF8EA-450C-4542-B4F3-E881C4784B30}"/>
               </a:ext>
             </a:extLst>
           </p:cNvPr>
@@ -12248,7 +12431,7 @@
           <p:cNvPr id="4" name="">
             <a:extLst xmlns:a="http://schemas.openxmlformats.org/drawingml/2006/main">
               <a:ext uri="{FF2B5EF4-FFF2-40B4-BE49-F238E27FC236}">
-                <a16:creationId xmlns:a16="http://schemas.microsoft.com/office/drawing/2014/main" id="{8246602F-7A3D-4C5A-B42B-D1E227ABB433}"/>
+                <a16:creationId xmlns:a16="http://schemas.microsoft.com/office/drawing/2014/main" id="{41E1C1CD-18CC-4E89-9705-B3E3FDEFCE7C}"/>
               </a:ext>
             </a:extLst>
           </p:cNvPr>
@@ -12280,7 +12463,7 @@
           <p:cNvPr id="5" name="">
             <a:extLst xmlns:a="http://schemas.openxmlformats.org/drawingml/2006/main">
               <a:ext uri="{FF2B5EF4-FFF2-40B4-BE49-F238E27FC236}">
-                <a16:creationId xmlns:a16="http://schemas.microsoft.com/office/drawing/2014/main" id="{B1664482-9CF0-4A9B-B976-6F0833EC4344}"/>
+                <a16:creationId xmlns:a16="http://schemas.microsoft.com/office/drawing/2014/main" id="{976921DE-AF1B-4BF5-AE86-AA3390E9F53B}"/>
               </a:ext>
             </a:extLst>
           </p:cNvPr>
@@ -12341,7 +12524,7 @@
           <p:cNvPr id="6" name="">
             <a:extLst xmlns:a="http://schemas.openxmlformats.org/drawingml/2006/main">
               <a:ext uri="{FF2B5EF4-FFF2-40B4-BE49-F238E27FC236}">
-                <a16:creationId xmlns:a16="http://schemas.microsoft.com/office/drawing/2014/main" id="{4AC1E3B1-1D83-4582-958D-387C6F3CD778}"/>
+                <a16:creationId xmlns:a16="http://schemas.microsoft.com/office/drawing/2014/main" id="{2F32A4AE-AE67-4AE0-8B3B-3D87B070A734}"/>
               </a:ext>
             </a:extLst>
           </p:cNvPr>
@@ -12402,7 +12585,7 @@
           <p:cNvPr id="7" name="">
             <a:extLst xmlns:a="http://schemas.openxmlformats.org/drawingml/2006/main">
               <a:ext uri="{FF2B5EF4-FFF2-40B4-BE49-F238E27FC236}">
-                <a16:creationId xmlns:a16="http://schemas.microsoft.com/office/drawing/2014/main" id="{6E085EF0-529C-42D1-AFE5-517DACF16BCF}"/>
+                <a16:creationId xmlns:a16="http://schemas.microsoft.com/office/drawing/2014/main" id="{F27E154E-5309-4C31-A44B-97EB30250CE9}"/>
               </a:ext>
             </a:extLst>
           </p:cNvPr>
@@ -12463,23 +12646,84 @@
           <p:cNvPr id="8" name="">
             <a:extLst xmlns:a="http://schemas.openxmlformats.org/drawingml/2006/main">
               <a:ext uri="{FF2B5EF4-FFF2-40B4-BE49-F238E27FC236}">
-                <a16:creationId xmlns:a16="http://schemas.microsoft.com/office/drawing/2014/main" id="{D18995BE-472C-4AD8-B5FF-779B852B54C4}"/>
-              </a:ext>
-            </a:extLst>
-          </p:cNvPr>
-          <p:cNvSpPr>
-            <a:spLocks xmlns:a="http://schemas.openxmlformats.org/drawingml/2006/main" noGrp="1"/>
-          </p:cNvSpPr>
-          <p:nvPr/>
-        </p:nvSpPr>
-        <p:spPr>
-          <a:xfrm xmlns:a="http://schemas.openxmlformats.org/drawingml/2006/main">
-            <a:off x="428625" y="1666875"/>
-            <a:ext cx="7429500" cy="1476375"/>
+                <a16:creationId xmlns:a16="http://schemas.microsoft.com/office/drawing/2014/main" id="{21F72EF1-BF53-4216-A1A4-1236C37F7D3D}"/>
+              </a:ext>
+            </a:extLst>
+          </p:cNvPr>
+          <p:cNvSpPr>
+            <a:spLocks xmlns:a="http://schemas.openxmlformats.org/drawingml/2006/main" noGrp="1"/>
+          </p:cNvSpPr>
+          <p:nvPr/>
+        </p:nvSpPr>
+        <p:spPr>
+          <a:xfrm xmlns:a="http://schemas.openxmlformats.org/drawingml/2006/main">
+            <a:off x="428625" y="1571625"/>
+            <a:ext cx="10953750" cy="238125"/>
+          </a:xfrm>
+          <a:prstGeom xmlns:a="http://schemas.openxmlformats.org/drawingml/2006/main" prst="rect">
+            <a:avLst/>
+          </a:prstGeom>
+          <a:noFill xmlns:a="http://schemas.openxmlformats.org/drawingml/2006/main"/>
+          <a:ln xmlns:a="http://schemas.openxmlformats.org/drawingml/2006/main" w="0">
+            <a:noFill/>
+          </a:ln>
+        </p:spPr>
+        <p:txBody>
+          <a:bodyPr xmlns:a="http://schemas.openxmlformats.org/drawingml/2006/main" wrap="square" lIns="0" tIns="0" rIns="0" bIns="0" anchor="t">
+            <a:noAutofit/>
+          </a:bodyPr>
+          <a:lstStyle xmlns:a="http://schemas.openxmlformats.org/drawingml/2006/main"/>
+          <a:p xmlns:a="http://schemas.openxmlformats.org/drawingml/2006/main">
+            <a:pPr algn="l">
+              <a:lnSpc>
+                <a:spcPct val="112000"/>
+              </a:lnSpc>
+              <a:buNone/>
+              <a:defRPr sz="1200" b="0">
+                <a:solidFill>
+                  <a:srgbClr val="34373D"/>
+                </a:solidFill>
+                <a:latin typeface="IBM Plex Sans KR"/>
+                <a:ea typeface="IBM Plex Sans KR"/>
+                <a:cs typeface="IBM Plex Sans KR"/>
+              </a:defRPr>
+            </a:pPr>
+            <a:r>
+              <a:rPr sz="1200" b="0">
+                <a:solidFill>
+                  <a:srgbClr val="34373D"/>
+                </a:solidFill>
+                <a:latin typeface="IBM Plex Sans KR"/>
+                <a:ea typeface="IBM Plex Sans KR"/>
+                <a:cs typeface="IBM Plex Sans KR"/>
+              </a:rPr>
+              <a:t>date와 visitors를 축에 연결하고, 날짜는 다섯 칸마다 표시해요.</a:t>
+            </a:r>
+          </a:p>
+        </p:txBody>
+      </p:sp>
+      <p:sp>
+        <p:nvSpPr>
+          <p:cNvPr id="9" name="">
+            <a:extLst xmlns:a="http://schemas.openxmlformats.org/drawingml/2006/main">
+              <a:ext uri="{FF2B5EF4-FFF2-40B4-BE49-F238E27FC236}">
+                <a16:creationId xmlns:a16="http://schemas.microsoft.com/office/drawing/2014/main" id="{73FE8A8C-158D-4F71-AC21-D44D8F4DDC1F}"/>
+              </a:ext>
+            </a:extLst>
+          </p:cNvPr>
+          <p:cNvSpPr>
+            <a:spLocks xmlns:a="http://schemas.openxmlformats.org/drawingml/2006/main" noGrp="1"/>
+          </p:cNvSpPr>
+          <p:nvPr/>
+        </p:nvSpPr>
+        <p:spPr>
+          <a:xfrm xmlns:a="http://schemas.openxmlformats.org/drawingml/2006/main">
+            <a:off x="428625" y="1905000"/>
+            <a:ext cx="7429500" cy="1381125"/>
           </a:xfrm>
           <a:prstGeom xmlns:a="http://schemas.openxmlformats.org/drawingml/2006/main" prst="roundRect">
             <a:avLst>
-              <a:gd name="adj" fmla="val 3226"/>
+              <a:gd name="adj" fmla="val 3448"/>
             </a:avLst>
           </a:prstGeom>
           <a:solidFill xmlns:a="http://schemas.openxmlformats.org/drawingml/2006/main">
@@ -12494,21 +12738,21 @@
       </p:sp>
       <p:sp>
         <p:nvSpPr>
-          <p:cNvPr id="9" name="">
-            <a:extLst xmlns:a="http://schemas.openxmlformats.org/drawingml/2006/main">
-              <a:ext uri="{FF2B5EF4-FFF2-40B4-BE49-F238E27FC236}">
-                <a16:creationId xmlns:a16="http://schemas.microsoft.com/office/drawing/2014/main" id="{6F9A15A9-3FA2-44D3-BCBA-56EE892B72B3}"/>
-              </a:ext>
-            </a:extLst>
-          </p:cNvPr>
-          <p:cNvSpPr>
-            <a:spLocks xmlns:a="http://schemas.openxmlformats.org/drawingml/2006/main" noGrp="1"/>
-          </p:cNvSpPr>
-          <p:nvPr/>
-        </p:nvSpPr>
-        <p:spPr>
-          <a:xfrm xmlns:a="http://schemas.openxmlformats.org/drawingml/2006/main">
-            <a:off x="542925" y="1781175"/>
+          <p:cNvPr id="10" name="">
+            <a:extLst xmlns:a="http://schemas.openxmlformats.org/drawingml/2006/main">
+              <a:ext uri="{FF2B5EF4-FFF2-40B4-BE49-F238E27FC236}">
+                <a16:creationId xmlns:a16="http://schemas.microsoft.com/office/drawing/2014/main" id="{F1B8BFA9-BECE-4CFE-B1D8-3F18B84D4329}"/>
+              </a:ext>
+            </a:extLst>
+          </p:cNvPr>
+          <p:cNvSpPr>
+            <a:spLocks xmlns:a="http://schemas.openxmlformats.org/drawingml/2006/main" noGrp="1"/>
+          </p:cNvSpPr>
+          <p:nvPr/>
+        </p:nvSpPr>
+        <p:spPr>
+          <a:xfrm xmlns:a="http://schemas.openxmlformats.org/drawingml/2006/main">
+            <a:off x="542925" y="2019300"/>
             <a:ext cx="323850" cy="285750"/>
           </a:xfrm>
           <a:prstGeom xmlns:a="http://schemas.openxmlformats.org/drawingml/2006/main" prst="roundRect">
@@ -12555,22 +12799,22 @@
       </p:sp>
       <p:sp>
         <p:nvSpPr>
-          <p:cNvPr id="10" name="">
-            <a:extLst xmlns:a="http://schemas.openxmlformats.org/drawingml/2006/main">
-              <a:ext uri="{FF2B5EF4-FFF2-40B4-BE49-F238E27FC236}">
-                <a16:creationId xmlns:a16="http://schemas.microsoft.com/office/drawing/2014/main" id="{70E17670-E13F-4A0A-9251-5574BA1C94EB}"/>
-              </a:ext>
-            </a:extLst>
-          </p:cNvPr>
-          <p:cNvSpPr>
-            <a:spLocks xmlns:a="http://schemas.openxmlformats.org/drawingml/2006/main" noGrp="1"/>
-          </p:cNvSpPr>
-          <p:nvPr/>
-        </p:nvSpPr>
-        <p:spPr>
-          <a:xfrm xmlns:a="http://schemas.openxmlformats.org/drawingml/2006/main">
-            <a:off x="981075" y="1762125"/>
-            <a:ext cx="6743700" cy="1285875"/>
+          <p:cNvPr id="11" name="">
+            <a:extLst xmlns:a="http://schemas.openxmlformats.org/drawingml/2006/main">
+              <a:ext uri="{FF2B5EF4-FFF2-40B4-BE49-F238E27FC236}">
+                <a16:creationId xmlns:a16="http://schemas.microsoft.com/office/drawing/2014/main" id="{782A9F7E-66E0-438A-AC5D-CA9EA2B0B4A2}"/>
+              </a:ext>
+            </a:extLst>
+          </p:cNvPr>
+          <p:cNvSpPr>
+            <a:spLocks xmlns:a="http://schemas.openxmlformats.org/drawingml/2006/main" noGrp="1"/>
+          </p:cNvSpPr>
+          <p:nvPr/>
+        </p:nvSpPr>
+        <p:spPr>
+          <a:xfrm xmlns:a="http://schemas.openxmlformats.org/drawingml/2006/main">
+            <a:off x="981075" y="2000250"/>
+            <a:ext cx="6743700" cy="1190625"/>
           </a:xfrm>
           <a:prstGeom xmlns:a="http://schemas.openxmlformats.org/drawingml/2006/main" prst="rect">
             <a:avLst/>
@@ -12670,26 +12914,26 @@
       </p:sp>
       <p:sp>
         <p:nvSpPr>
-          <p:cNvPr id="11" name="">
-            <a:extLst xmlns:a="http://schemas.openxmlformats.org/drawingml/2006/main">
-              <a:ext uri="{FF2B5EF4-FFF2-40B4-BE49-F238E27FC236}">
-                <a16:creationId xmlns:a16="http://schemas.microsoft.com/office/drawing/2014/main" id="{6ACF9FFB-8955-4CAC-AEE9-58F398DC1EF9}"/>
-              </a:ext>
-            </a:extLst>
-          </p:cNvPr>
-          <p:cNvSpPr>
-            <a:spLocks xmlns:a="http://schemas.openxmlformats.org/drawingml/2006/main" noGrp="1"/>
-          </p:cNvSpPr>
-          <p:nvPr/>
-        </p:nvSpPr>
-        <p:spPr>
-          <a:xfrm xmlns:a="http://schemas.openxmlformats.org/drawingml/2006/main">
-            <a:off x="428625" y="3257550"/>
-            <a:ext cx="7429500" cy="1190625"/>
+          <p:cNvPr id="12" name="">
+            <a:extLst xmlns:a="http://schemas.openxmlformats.org/drawingml/2006/main">
+              <a:ext uri="{FF2B5EF4-FFF2-40B4-BE49-F238E27FC236}">
+                <a16:creationId xmlns:a16="http://schemas.microsoft.com/office/drawing/2014/main" id="{08442BCD-1471-4927-B3BE-5EDC3597506D}"/>
+              </a:ext>
+            </a:extLst>
+          </p:cNvPr>
+          <p:cNvSpPr>
+            <a:spLocks xmlns:a="http://schemas.openxmlformats.org/drawingml/2006/main" noGrp="1"/>
+          </p:cNvSpPr>
+          <p:nvPr/>
+        </p:nvSpPr>
+        <p:spPr>
+          <a:xfrm xmlns:a="http://schemas.openxmlformats.org/drawingml/2006/main">
+            <a:off x="428625" y="3400425"/>
+            <a:ext cx="7429500" cy="1095375"/>
           </a:xfrm>
           <a:prstGeom xmlns:a="http://schemas.openxmlformats.org/drawingml/2006/main" prst="roundRect">
             <a:avLst>
-              <a:gd name="adj" fmla="val 4000"/>
+              <a:gd name="adj" fmla="val 4348"/>
             </a:avLst>
           </a:prstGeom>
           <a:solidFill xmlns:a="http://schemas.openxmlformats.org/drawingml/2006/main">
@@ -12704,21 +12948,21 @@
       </p:sp>
       <p:sp>
         <p:nvSpPr>
-          <p:cNvPr id="12" name="">
-            <a:extLst xmlns:a="http://schemas.openxmlformats.org/drawingml/2006/main">
-              <a:ext uri="{FF2B5EF4-FFF2-40B4-BE49-F238E27FC236}">
-                <a16:creationId xmlns:a16="http://schemas.microsoft.com/office/drawing/2014/main" id="{1F0DD875-AD0F-42F7-B5D4-21569D95BCBF}"/>
-              </a:ext>
-            </a:extLst>
-          </p:cNvPr>
-          <p:cNvSpPr>
-            <a:spLocks xmlns:a="http://schemas.openxmlformats.org/drawingml/2006/main" noGrp="1"/>
-          </p:cNvSpPr>
-          <p:nvPr/>
-        </p:nvSpPr>
-        <p:spPr>
-          <a:xfrm xmlns:a="http://schemas.openxmlformats.org/drawingml/2006/main">
-            <a:off x="542925" y="3371850"/>
+          <p:cNvPr id="13" name="">
+            <a:extLst xmlns:a="http://schemas.openxmlformats.org/drawingml/2006/main">
+              <a:ext uri="{FF2B5EF4-FFF2-40B4-BE49-F238E27FC236}">
+                <a16:creationId xmlns:a16="http://schemas.microsoft.com/office/drawing/2014/main" id="{E9D00BA0-87C2-4E87-B592-FD7A5D805C0D}"/>
+              </a:ext>
+            </a:extLst>
+          </p:cNvPr>
+          <p:cNvSpPr>
+            <a:spLocks xmlns:a="http://schemas.openxmlformats.org/drawingml/2006/main" noGrp="1"/>
+          </p:cNvSpPr>
+          <p:nvPr/>
+        </p:nvSpPr>
+        <p:spPr>
+          <a:xfrm xmlns:a="http://schemas.openxmlformats.org/drawingml/2006/main">
+            <a:off x="542925" y="3514725"/>
             <a:ext cx="323850" cy="285750"/>
           </a:xfrm>
           <a:prstGeom xmlns:a="http://schemas.openxmlformats.org/drawingml/2006/main" prst="roundRect">
@@ -12765,22 +13009,22 @@
       </p:sp>
       <p:sp>
         <p:nvSpPr>
-          <p:cNvPr id="13" name="">
-            <a:extLst xmlns:a="http://schemas.openxmlformats.org/drawingml/2006/main">
-              <a:ext uri="{FF2B5EF4-FFF2-40B4-BE49-F238E27FC236}">
-                <a16:creationId xmlns:a16="http://schemas.microsoft.com/office/drawing/2014/main" id="{6648709B-63EE-439F-AB2A-B2F0EF8A8B95}"/>
-              </a:ext>
-            </a:extLst>
-          </p:cNvPr>
-          <p:cNvSpPr>
-            <a:spLocks xmlns:a="http://schemas.openxmlformats.org/drawingml/2006/main" noGrp="1"/>
-          </p:cNvSpPr>
-          <p:nvPr/>
-        </p:nvSpPr>
-        <p:spPr>
-          <a:xfrm xmlns:a="http://schemas.openxmlformats.org/drawingml/2006/main">
-            <a:off x="981075" y="3352800"/>
-            <a:ext cx="6743700" cy="1000125"/>
+          <p:cNvPr id="14" name="">
+            <a:extLst xmlns:a="http://schemas.openxmlformats.org/drawingml/2006/main">
+              <a:ext uri="{FF2B5EF4-FFF2-40B4-BE49-F238E27FC236}">
+                <a16:creationId xmlns:a16="http://schemas.microsoft.com/office/drawing/2014/main" id="{6F8BFE5F-B993-41E5-85E1-52EA2357CAAD}"/>
+              </a:ext>
+            </a:extLst>
+          </p:cNvPr>
+          <p:cNvSpPr>
+            <a:spLocks xmlns:a="http://schemas.openxmlformats.org/drawingml/2006/main" noGrp="1"/>
+          </p:cNvSpPr>
+          <p:nvPr/>
+        </p:nvSpPr>
+        <p:spPr>
+          <a:xfrm xmlns:a="http://schemas.openxmlformats.org/drawingml/2006/main">
+            <a:off x="981075" y="3495675"/>
+            <a:ext cx="6743700" cy="904875"/>
           </a:xfrm>
           <a:prstGeom xmlns:a="http://schemas.openxmlformats.org/drawingml/2006/main" prst="rect">
             <a:avLst/>
@@ -12880,21 +13124,21 @@
       </p:sp>
       <p:sp>
         <p:nvSpPr>
-          <p:cNvPr id="14" name="">
-            <a:extLst xmlns:a="http://schemas.openxmlformats.org/drawingml/2006/main">
-              <a:ext uri="{FF2B5EF4-FFF2-40B4-BE49-F238E27FC236}">
-                <a16:creationId xmlns:a16="http://schemas.microsoft.com/office/drawing/2014/main" id="{F8BB9C69-D061-4BD7-99C7-5FC97C3E5924}"/>
-              </a:ext>
-            </a:extLst>
-          </p:cNvPr>
-          <p:cNvSpPr>
-            <a:spLocks xmlns:a="http://schemas.openxmlformats.org/drawingml/2006/main" noGrp="1"/>
-          </p:cNvSpPr>
-          <p:nvPr/>
-        </p:nvSpPr>
-        <p:spPr>
-          <a:xfrm xmlns:a="http://schemas.openxmlformats.org/drawingml/2006/main">
-            <a:off x="428625" y="4562475"/>
+          <p:cNvPr id="15" name="">
+            <a:extLst xmlns:a="http://schemas.openxmlformats.org/drawingml/2006/main">
+              <a:ext uri="{FF2B5EF4-FFF2-40B4-BE49-F238E27FC236}">
+                <a16:creationId xmlns:a16="http://schemas.microsoft.com/office/drawing/2014/main" id="{69B99374-612C-4558-965E-9A4C7668C93F}"/>
+              </a:ext>
+            </a:extLst>
+          </p:cNvPr>
+          <p:cNvSpPr>
+            <a:spLocks xmlns:a="http://schemas.openxmlformats.org/drawingml/2006/main" noGrp="1"/>
+          </p:cNvSpPr>
+          <p:nvPr/>
+        </p:nvSpPr>
+        <p:spPr>
+          <a:xfrm xmlns:a="http://schemas.openxmlformats.org/drawingml/2006/main">
+            <a:off x="428625" y="4610100"/>
             <a:ext cx="7429500" cy="1123950"/>
           </a:xfrm>
           <a:prstGeom xmlns:a="http://schemas.openxmlformats.org/drawingml/2006/main" prst="roundRect">
@@ -12914,21 +13158,21 @@
       </p:sp>
       <p:sp>
         <p:nvSpPr>
-          <p:cNvPr id="15" name="">
-            <a:extLst xmlns:a="http://schemas.openxmlformats.org/drawingml/2006/main">
-              <a:ext uri="{FF2B5EF4-FFF2-40B4-BE49-F238E27FC236}">
-                <a16:creationId xmlns:a16="http://schemas.microsoft.com/office/drawing/2014/main" id="{659E420B-137B-4104-ABB1-9CEF72E5960C}"/>
-              </a:ext>
-            </a:extLst>
-          </p:cNvPr>
-          <p:cNvSpPr>
-            <a:spLocks xmlns:a="http://schemas.openxmlformats.org/drawingml/2006/main" noGrp="1"/>
-          </p:cNvSpPr>
-          <p:nvPr/>
-        </p:nvSpPr>
-        <p:spPr>
-          <a:xfrm xmlns:a="http://schemas.openxmlformats.org/drawingml/2006/main">
-            <a:off x="542925" y="4676775"/>
+          <p:cNvPr id="16" name="">
+            <a:extLst xmlns:a="http://schemas.openxmlformats.org/drawingml/2006/main">
+              <a:ext uri="{FF2B5EF4-FFF2-40B4-BE49-F238E27FC236}">
+                <a16:creationId xmlns:a16="http://schemas.microsoft.com/office/drawing/2014/main" id="{122F6F53-D994-420A-9962-6FCCA465018F}"/>
+              </a:ext>
+            </a:extLst>
+          </p:cNvPr>
+          <p:cNvSpPr>
+            <a:spLocks xmlns:a="http://schemas.openxmlformats.org/drawingml/2006/main" noGrp="1"/>
+          </p:cNvSpPr>
+          <p:nvPr/>
+        </p:nvSpPr>
+        <p:spPr>
+          <a:xfrm xmlns:a="http://schemas.openxmlformats.org/drawingml/2006/main">
+            <a:off x="542925" y="4724400"/>
             <a:ext cx="323850" cy="285750"/>
           </a:xfrm>
           <a:prstGeom xmlns:a="http://schemas.openxmlformats.org/drawingml/2006/main" prst="roundRect">
@@ -12975,21 +13219,21 @@
       </p:sp>
       <p:sp>
         <p:nvSpPr>
-          <p:cNvPr id="16" name="">
-            <a:extLst xmlns:a="http://schemas.openxmlformats.org/drawingml/2006/main">
-              <a:ext uri="{FF2B5EF4-FFF2-40B4-BE49-F238E27FC236}">
-                <a16:creationId xmlns:a16="http://schemas.microsoft.com/office/drawing/2014/main" id="{2E6E023E-D24E-4423-893B-65AF317A1926}"/>
-              </a:ext>
-            </a:extLst>
-          </p:cNvPr>
-          <p:cNvSpPr>
-            <a:spLocks xmlns:a="http://schemas.openxmlformats.org/drawingml/2006/main" noGrp="1"/>
-          </p:cNvSpPr>
-          <p:nvPr/>
-        </p:nvSpPr>
-        <p:spPr>
-          <a:xfrm xmlns:a="http://schemas.openxmlformats.org/drawingml/2006/main">
-            <a:off x="981075" y="4657725"/>
+          <p:cNvPr id="17" name="">
+            <a:extLst xmlns:a="http://schemas.openxmlformats.org/drawingml/2006/main">
+              <a:ext uri="{FF2B5EF4-FFF2-40B4-BE49-F238E27FC236}">
+                <a16:creationId xmlns:a16="http://schemas.microsoft.com/office/drawing/2014/main" id="{C11C22C2-9950-4D59-A540-77CC15CA4ACF}"/>
+              </a:ext>
+            </a:extLst>
+          </p:cNvPr>
+          <p:cNvSpPr>
+            <a:spLocks xmlns:a="http://schemas.openxmlformats.org/drawingml/2006/main" noGrp="1"/>
+          </p:cNvSpPr>
+          <p:nvPr/>
+        </p:nvSpPr>
+        <p:spPr>
+          <a:xfrm xmlns:a="http://schemas.openxmlformats.org/drawingml/2006/main">
+            <a:off x="981075" y="4705350"/>
             <a:ext cx="6743700" cy="933450"/>
           </a:xfrm>
           <a:prstGeom xmlns:a="http://schemas.openxmlformats.org/drawingml/2006/main" prst="rect">
@@ -13090,26 +13334,26 @@
       </p:sp>
       <p:sp>
         <p:nvSpPr>
-          <p:cNvPr id="17" name="">
-            <a:extLst xmlns:a="http://schemas.openxmlformats.org/drawingml/2006/main">
-              <a:ext uri="{FF2B5EF4-FFF2-40B4-BE49-F238E27FC236}">
-                <a16:creationId xmlns:a16="http://schemas.microsoft.com/office/drawing/2014/main" id="{3E71019B-3036-45DC-B46A-C08A0E36572A}"/>
-              </a:ext>
-            </a:extLst>
-          </p:cNvPr>
-          <p:cNvSpPr>
-            <a:spLocks xmlns:a="http://schemas.openxmlformats.org/drawingml/2006/main" noGrp="1"/>
-          </p:cNvSpPr>
-          <p:nvPr/>
-        </p:nvSpPr>
-        <p:spPr>
-          <a:xfrm xmlns:a="http://schemas.openxmlformats.org/drawingml/2006/main">
-            <a:off x="8096250" y="1714500"/>
-            <a:ext cx="3429000" cy="1047750"/>
+          <p:cNvPr id="18" name="">
+            <a:extLst xmlns:a="http://schemas.openxmlformats.org/drawingml/2006/main">
+              <a:ext uri="{FF2B5EF4-FFF2-40B4-BE49-F238E27FC236}">
+                <a16:creationId xmlns:a16="http://schemas.microsoft.com/office/drawing/2014/main" id="{21579321-22F5-4E7A-9936-DE3D0FA4373E}"/>
+              </a:ext>
+            </a:extLst>
+          </p:cNvPr>
+          <p:cNvSpPr>
+            <a:spLocks xmlns:a="http://schemas.openxmlformats.org/drawingml/2006/main" noGrp="1"/>
+          </p:cNvSpPr>
+          <p:nvPr/>
+        </p:nvSpPr>
+        <p:spPr>
+          <a:xfrm xmlns:a="http://schemas.openxmlformats.org/drawingml/2006/main">
+            <a:off x="8096250" y="1905000"/>
+            <a:ext cx="3429000" cy="1381125"/>
           </a:xfrm>
           <a:prstGeom xmlns:a="http://schemas.openxmlformats.org/drawingml/2006/main" prst="roundRect">
             <a:avLst>
-              <a:gd name="adj" fmla="val 5455"/>
+              <a:gd name="adj" fmla="val 4138"/>
             </a:avLst>
           </a:prstGeom>
           <a:solidFill xmlns:a="http://schemas.openxmlformats.org/drawingml/2006/main">
@@ -13124,21 +13368,21 @@
       </p:sp>
       <p:sp>
         <p:nvSpPr>
-          <p:cNvPr id="18" name="">
-            <a:extLst xmlns:a="http://schemas.openxmlformats.org/drawingml/2006/main">
-              <a:ext uri="{FF2B5EF4-FFF2-40B4-BE49-F238E27FC236}">
-                <a16:creationId xmlns:a16="http://schemas.microsoft.com/office/drawing/2014/main" id="{723566A9-A813-4B47-83B8-2075BE21E798}"/>
-              </a:ext>
-            </a:extLst>
-          </p:cNvPr>
-          <p:cNvSpPr>
-            <a:spLocks xmlns:a="http://schemas.openxmlformats.org/drawingml/2006/main" noGrp="1"/>
-          </p:cNvSpPr>
-          <p:nvPr/>
-        </p:nvSpPr>
-        <p:spPr>
-          <a:xfrm xmlns:a="http://schemas.openxmlformats.org/drawingml/2006/main">
-            <a:off x="8229600" y="1838325"/>
+          <p:cNvPr id="19" name="">
+            <a:extLst xmlns:a="http://schemas.openxmlformats.org/drawingml/2006/main">
+              <a:ext uri="{FF2B5EF4-FFF2-40B4-BE49-F238E27FC236}">
+                <a16:creationId xmlns:a16="http://schemas.microsoft.com/office/drawing/2014/main" id="{67E247C1-058F-4D39-AF63-3F083A39AB40}"/>
+              </a:ext>
+            </a:extLst>
+          </p:cNvPr>
+          <p:cNvSpPr>
+            <a:spLocks xmlns:a="http://schemas.openxmlformats.org/drawingml/2006/main" noGrp="1"/>
+          </p:cNvSpPr>
+          <p:nvPr/>
+        </p:nvSpPr>
+        <p:spPr>
+          <a:xfrm xmlns:a="http://schemas.openxmlformats.org/drawingml/2006/main">
+            <a:off x="8229600" y="2028825"/>
             <a:ext cx="323850" cy="266700"/>
           </a:xfrm>
           <a:prstGeom xmlns:a="http://schemas.openxmlformats.org/drawingml/2006/main" prst="rect">
@@ -13185,21 +13429,21 @@
       </p:sp>
       <p:sp>
         <p:nvSpPr>
-          <p:cNvPr id="19" name="">
-            <a:extLst xmlns:a="http://schemas.openxmlformats.org/drawingml/2006/main">
-              <a:ext uri="{FF2B5EF4-FFF2-40B4-BE49-F238E27FC236}">
-                <a16:creationId xmlns:a16="http://schemas.microsoft.com/office/drawing/2014/main" id="{BC1BC52C-581A-4C3A-AF3D-7C8EFFD72125}"/>
-              </a:ext>
-            </a:extLst>
-          </p:cNvPr>
-          <p:cNvSpPr>
-            <a:spLocks xmlns:a="http://schemas.openxmlformats.org/drawingml/2006/main" noGrp="1"/>
-          </p:cNvSpPr>
-          <p:nvPr/>
-        </p:nvSpPr>
-        <p:spPr>
-          <a:xfrm xmlns:a="http://schemas.openxmlformats.org/drawingml/2006/main">
-            <a:off x="8629650" y="1838325"/>
+          <p:cNvPr id="20" name="">
+            <a:extLst xmlns:a="http://schemas.openxmlformats.org/drawingml/2006/main">
+              <a:ext uri="{FF2B5EF4-FFF2-40B4-BE49-F238E27FC236}">
+                <a16:creationId xmlns:a16="http://schemas.microsoft.com/office/drawing/2014/main" id="{43572688-BFCF-4E14-BF2E-DCF617380A14}"/>
+              </a:ext>
+            </a:extLst>
+          </p:cNvPr>
+          <p:cNvSpPr>
+            <a:spLocks xmlns:a="http://schemas.openxmlformats.org/drawingml/2006/main" noGrp="1"/>
+          </p:cNvSpPr>
+          <p:nvPr/>
+        </p:nvSpPr>
+        <p:spPr>
+          <a:xfrm xmlns:a="http://schemas.openxmlformats.org/drawingml/2006/main">
+            <a:off x="8629650" y="2028825"/>
             <a:ext cx="2762250" cy="266700"/>
           </a:xfrm>
           <a:prstGeom xmlns:a="http://schemas.openxmlformats.org/drawingml/2006/main" prst="rect">
@@ -13246,22 +13490,22 @@
       </p:sp>
       <p:sp>
         <p:nvSpPr>
-          <p:cNvPr id="20" name="">
-            <a:extLst xmlns:a="http://schemas.openxmlformats.org/drawingml/2006/main">
-              <a:ext uri="{FF2B5EF4-FFF2-40B4-BE49-F238E27FC236}">
-                <a16:creationId xmlns:a16="http://schemas.microsoft.com/office/drawing/2014/main" id="{A8DFC8AA-D0FA-44F1-995D-6C9796F8E612}"/>
-              </a:ext>
-            </a:extLst>
-          </p:cNvPr>
-          <p:cNvSpPr>
-            <a:spLocks xmlns:a="http://schemas.openxmlformats.org/drawingml/2006/main" noGrp="1"/>
-          </p:cNvSpPr>
-          <p:nvPr/>
-        </p:nvSpPr>
-        <p:spPr>
-          <a:xfrm xmlns:a="http://schemas.openxmlformats.org/drawingml/2006/main">
-            <a:off x="8267700" y="2181225"/>
-            <a:ext cx="3086100" cy="476250"/>
+          <p:cNvPr id="21" name="">
+            <a:extLst xmlns:a="http://schemas.openxmlformats.org/drawingml/2006/main">
+              <a:ext uri="{FF2B5EF4-FFF2-40B4-BE49-F238E27FC236}">
+                <a16:creationId xmlns:a16="http://schemas.microsoft.com/office/drawing/2014/main" id="{893838A9-CC72-406E-A348-D9683130CFFD}"/>
+              </a:ext>
+            </a:extLst>
+          </p:cNvPr>
+          <p:cNvSpPr>
+            <a:spLocks xmlns:a="http://schemas.openxmlformats.org/drawingml/2006/main" noGrp="1"/>
+          </p:cNvSpPr>
+          <p:nvPr/>
+        </p:nvSpPr>
+        <p:spPr>
+          <a:xfrm xmlns:a="http://schemas.openxmlformats.org/drawingml/2006/main">
+            <a:off x="8267700" y="2371725"/>
+            <a:ext cx="3086100" cy="809625"/>
           </a:xfrm>
           <a:prstGeom xmlns:a="http://schemas.openxmlformats.org/drawingml/2006/main" prst="rect">
             <a:avLst/>
@@ -13307,26 +13551,26 @@
       </p:sp>
       <p:sp>
         <p:nvSpPr>
-          <p:cNvPr id="21" name="">
-            <a:extLst xmlns:a="http://schemas.openxmlformats.org/drawingml/2006/main">
-              <a:ext uri="{FF2B5EF4-FFF2-40B4-BE49-F238E27FC236}">
-                <a16:creationId xmlns:a16="http://schemas.microsoft.com/office/drawing/2014/main" id="{1EDBD4F5-4CBC-452D-A1C6-80B99F5DA91E}"/>
-              </a:ext>
-            </a:extLst>
-          </p:cNvPr>
-          <p:cNvSpPr>
-            <a:spLocks xmlns:a="http://schemas.openxmlformats.org/drawingml/2006/main" noGrp="1"/>
-          </p:cNvSpPr>
-          <p:nvPr/>
-        </p:nvSpPr>
-        <p:spPr>
-          <a:xfrm xmlns:a="http://schemas.openxmlformats.org/drawingml/2006/main">
-            <a:off x="8096250" y="3000375"/>
-            <a:ext cx="3429000" cy="1047750"/>
+          <p:cNvPr id="22" name="">
+            <a:extLst xmlns:a="http://schemas.openxmlformats.org/drawingml/2006/main">
+              <a:ext uri="{FF2B5EF4-FFF2-40B4-BE49-F238E27FC236}">
+                <a16:creationId xmlns:a16="http://schemas.microsoft.com/office/drawing/2014/main" id="{225394B8-5039-4D22-9EF0-059871BA0BB8}"/>
+              </a:ext>
+            </a:extLst>
+          </p:cNvPr>
+          <p:cNvSpPr>
+            <a:spLocks xmlns:a="http://schemas.openxmlformats.org/drawingml/2006/main" noGrp="1"/>
+          </p:cNvSpPr>
+          <p:nvPr/>
+        </p:nvSpPr>
+        <p:spPr>
+          <a:xfrm xmlns:a="http://schemas.openxmlformats.org/drawingml/2006/main">
+            <a:off x="8096250" y="3400425"/>
+            <a:ext cx="3429000" cy="1095375"/>
           </a:xfrm>
           <a:prstGeom xmlns:a="http://schemas.openxmlformats.org/drawingml/2006/main" prst="roundRect">
             <a:avLst>
-              <a:gd name="adj" fmla="val 5455"/>
+              <a:gd name="adj" fmla="val 5217"/>
             </a:avLst>
           </a:prstGeom>
           <a:solidFill xmlns:a="http://schemas.openxmlformats.org/drawingml/2006/main">
@@ -13341,21 +13585,21 @@
       </p:sp>
       <p:sp>
         <p:nvSpPr>
-          <p:cNvPr id="22" name="">
-            <a:extLst xmlns:a="http://schemas.openxmlformats.org/drawingml/2006/main">
-              <a:ext uri="{FF2B5EF4-FFF2-40B4-BE49-F238E27FC236}">
-                <a16:creationId xmlns:a16="http://schemas.microsoft.com/office/drawing/2014/main" id="{87984BFF-E1BC-4BBD-8687-022CB4F7CB14}"/>
-              </a:ext>
-            </a:extLst>
-          </p:cNvPr>
-          <p:cNvSpPr>
-            <a:spLocks xmlns:a="http://schemas.openxmlformats.org/drawingml/2006/main" noGrp="1"/>
-          </p:cNvSpPr>
-          <p:nvPr/>
-        </p:nvSpPr>
-        <p:spPr>
-          <a:xfrm xmlns:a="http://schemas.openxmlformats.org/drawingml/2006/main">
-            <a:off x="8229600" y="3124200"/>
+          <p:cNvPr id="23" name="">
+            <a:extLst xmlns:a="http://schemas.openxmlformats.org/drawingml/2006/main">
+              <a:ext uri="{FF2B5EF4-FFF2-40B4-BE49-F238E27FC236}">
+                <a16:creationId xmlns:a16="http://schemas.microsoft.com/office/drawing/2014/main" id="{D3E1775A-C73E-4920-B414-F04BA4A5C095}"/>
+              </a:ext>
+            </a:extLst>
+          </p:cNvPr>
+          <p:cNvSpPr>
+            <a:spLocks xmlns:a="http://schemas.openxmlformats.org/drawingml/2006/main" noGrp="1"/>
+          </p:cNvSpPr>
+          <p:nvPr/>
+        </p:nvSpPr>
+        <p:spPr>
+          <a:xfrm xmlns:a="http://schemas.openxmlformats.org/drawingml/2006/main">
+            <a:off x="8229600" y="3524250"/>
             <a:ext cx="323850" cy="266700"/>
           </a:xfrm>
           <a:prstGeom xmlns:a="http://schemas.openxmlformats.org/drawingml/2006/main" prst="rect">
@@ -13402,21 +13646,21 @@
       </p:sp>
       <p:sp>
         <p:nvSpPr>
-          <p:cNvPr id="23" name="">
-            <a:extLst xmlns:a="http://schemas.openxmlformats.org/drawingml/2006/main">
-              <a:ext uri="{FF2B5EF4-FFF2-40B4-BE49-F238E27FC236}">
-                <a16:creationId xmlns:a16="http://schemas.microsoft.com/office/drawing/2014/main" id="{92D10A39-3847-473F-9004-31F180E72FF1}"/>
-              </a:ext>
-            </a:extLst>
-          </p:cNvPr>
-          <p:cNvSpPr>
-            <a:spLocks xmlns:a="http://schemas.openxmlformats.org/drawingml/2006/main" noGrp="1"/>
-          </p:cNvSpPr>
-          <p:nvPr/>
-        </p:nvSpPr>
-        <p:spPr>
-          <a:xfrm xmlns:a="http://schemas.openxmlformats.org/drawingml/2006/main">
-            <a:off x="8629650" y="3124200"/>
+          <p:cNvPr id="24" name="">
+            <a:extLst xmlns:a="http://schemas.openxmlformats.org/drawingml/2006/main">
+              <a:ext uri="{FF2B5EF4-FFF2-40B4-BE49-F238E27FC236}">
+                <a16:creationId xmlns:a16="http://schemas.microsoft.com/office/drawing/2014/main" id="{05C7A7F7-AB78-4A2F-BAF3-C6AB36D5F7E4}"/>
+              </a:ext>
+            </a:extLst>
+          </p:cNvPr>
+          <p:cNvSpPr>
+            <a:spLocks xmlns:a="http://schemas.openxmlformats.org/drawingml/2006/main" noGrp="1"/>
+          </p:cNvSpPr>
+          <p:nvPr/>
+        </p:nvSpPr>
+        <p:spPr>
+          <a:xfrm xmlns:a="http://schemas.openxmlformats.org/drawingml/2006/main">
+            <a:off x="8629650" y="3524250"/>
             <a:ext cx="2762250" cy="266700"/>
           </a:xfrm>
           <a:prstGeom xmlns:a="http://schemas.openxmlformats.org/drawingml/2006/main" prst="rect">
@@ -13463,22 +13707,22 @@
       </p:sp>
       <p:sp>
         <p:nvSpPr>
-          <p:cNvPr id="24" name="">
-            <a:extLst xmlns:a="http://schemas.openxmlformats.org/drawingml/2006/main">
-              <a:ext uri="{FF2B5EF4-FFF2-40B4-BE49-F238E27FC236}">
-                <a16:creationId xmlns:a16="http://schemas.microsoft.com/office/drawing/2014/main" id="{1F0FA7BC-C688-4A41-9833-6DF31FC6B1CD}"/>
-              </a:ext>
-            </a:extLst>
-          </p:cNvPr>
-          <p:cNvSpPr>
-            <a:spLocks xmlns:a="http://schemas.openxmlformats.org/drawingml/2006/main" noGrp="1"/>
-          </p:cNvSpPr>
-          <p:nvPr/>
-        </p:nvSpPr>
-        <p:spPr>
-          <a:xfrm xmlns:a="http://schemas.openxmlformats.org/drawingml/2006/main">
-            <a:off x="8267700" y="3467100"/>
-            <a:ext cx="3086100" cy="476250"/>
+          <p:cNvPr id="25" name="">
+            <a:extLst xmlns:a="http://schemas.openxmlformats.org/drawingml/2006/main">
+              <a:ext uri="{FF2B5EF4-FFF2-40B4-BE49-F238E27FC236}">
+                <a16:creationId xmlns:a16="http://schemas.microsoft.com/office/drawing/2014/main" id="{661A309A-30EF-4C7C-A8C1-D4252843A3AC}"/>
+              </a:ext>
+            </a:extLst>
+          </p:cNvPr>
+          <p:cNvSpPr>
+            <a:spLocks xmlns:a="http://schemas.openxmlformats.org/drawingml/2006/main" noGrp="1"/>
+          </p:cNvSpPr>
+          <p:nvPr/>
+        </p:nvSpPr>
+        <p:spPr>
+          <a:xfrm xmlns:a="http://schemas.openxmlformats.org/drawingml/2006/main">
+            <a:off x="8267700" y="3867150"/>
+            <a:ext cx="3086100" cy="523875"/>
           </a:xfrm>
           <a:prstGeom xmlns:a="http://schemas.openxmlformats.org/drawingml/2006/main" prst="rect">
             <a:avLst/>
@@ -13524,26 +13768,26 @@
       </p:sp>
       <p:sp>
         <p:nvSpPr>
-          <p:cNvPr id="25" name="">
-            <a:extLst xmlns:a="http://schemas.openxmlformats.org/drawingml/2006/main">
-              <a:ext uri="{FF2B5EF4-FFF2-40B4-BE49-F238E27FC236}">
-                <a16:creationId xmlns:a16="http://schemas.microsoft.com/office/drawing/2014/main" id="{C4763758-922E-4072-983B-8CDAA514C2F7}"/>
-              </a:ext>
-            </a:extLst>
-          </p:cNvPr>
-          <p:cNvSpPr>
-            <a:spLocks xmlns:a="http://schemas.openxmlformats.org/drawingml/2006/main" noGrp="1"/>
-          </p:cNvSpPr>
-          <p:nvPr/>
-        </p:nvSpPr>
-        <p:spPr>
-          <a:xfrm xmlns:a="http://schemas.openxmlformats.org/drawingml/2006/main">
-            <a:off x="8096250" y="4286250"/>
-            <a:ext cx="3429000" cy="1143000"/>
+          <p:cNvPr id="26" name="">
+            <a:extLst xmlns:a="http://schemas.openxmlformats.org/drawingml/2006/main">
+              <a:ext uri="{FF2B5EF4-FFF2-40B4-BE49-F238E27FC236}">
+                <a16:creationId xmlns:a16="http://schemas.microsoft.com/office/drawing/2014/main" id="{C90FAD1F-477F-44CF-9119-96218F995538}"/>
+              </a:ext>
+            </a:extLst>
+          </p:cNvPr>
+          <p:cNvSpPr>
+            <a:spLocks xmlns:a="http://schemas.openxmlformats.org/drawingml/2006/main" noGrp="1"/>
+          </p:cNvSpPr>
+          <p:nvPr/>
+        </p:nvSpPr>
+        <p:spPr>
+          <a:xfrm xmlns:a="http://schemas.openxmlformats.org/drawingml/2006/main">
+            <a:off x="8096250" y="4610100"/>
+            <a:ext cx="3429000" cy="1123950"/>
           </a:xfrm>
           <a:prstGeom xmlns:a="http://schemas.openxmlformats.org/drawingml/2006/main" prst="roundRect">
             <a:avLst>
-              <a:gd name="adj" fmla="val 5000"/>
+              <a:gd name="adj" fmla="val 5085"/>
             </a:avLst>
           </a:prstGeom>
           <a:solidFill xmlns:a="http://schemas.openxmlformats.org/drawingml/2006/main">
@@ -13558,21 +13802,21 @@
       </p:sp>
       <p:sp>
         <p:nvSpPr>
-          <p:cNvPr id="26" name="">
-            <a:extLst xmlns:a="http://schemas.openxmlformats.org/drawingml/2006/main">
-              <a:ext uri="{FF2B5EF4-FFF2-40B4-BE49-F238E27FC236}">
-                <a16:creationId xmlns:a16="http://schemas.microsoft.com/office/drawing/2014/main" id="{2F614192-E048-488B-B98A-FA87A4A3D6AD}"/>
-              </a:ext>
-            </a:extLst>
-          </p:cNvPr>
-          <p:cNvSpPr>
-            <a:spLocks xmlns:a="http://schemas.openxmlformats.org/drawingml/2006/main" noGrp="1"/>
-          </p:cNvSpPr>
-          <p:nvPr/>
-        </p:nvSpPr>
-        <p:spPr>
-          <a:xfrm xmlns:a="http://schemas.openxmlformats.org/drawingml/2006/main">
-            <a:off x="8229600" y="4410075"/>
+          <p:cNvPr id="27" name="">
+            <a:extLst xmlns:a="http://schemas.openxmlformats.org/drawingml/2006/main">
+              <a:ext uri="{FF2B5EF4-FFF2-40B4-BE49-F238E27FC236}">
+                <a16:creationId xmlns:a16="http://schemas.microsoft.com/office/drawing/2014/main" id="{83237FCD-5964-46FD-B4FA-60565F853025}"/>
+              </a:ext>
+            </a:extLst>
+          </p:cNvPr>
+          <p:cNvSpPr>
+            <a:spLocks xmlns:a="http://schemas.openxmlformats.org/drawingml/2006/main" noGrp="1"/>
+          </p:cNvSpPr>
+          <p:nvPr/>
+        </p:nvSpPr>
+        <p:spPr>
+          <a:xfrm xmlns:a="http://schemas.openxmlformats.org/drawingml/2006/main">
+            <a:off x="8229600" y="4733925"/>
             <a:ext cx="323850" cy="266700"/>
           </a:xfrm>
           <a:prstGeom xmlns:a="http://schemas.openxmlformats.org/drawingml/2006/main" prst="rect">
@@ -13619,21 +13863,21 @@
       </p:sp>
       <p:sp>
         <p:nvSpPr>
-          <p:cNvPr id="27" name="">
-            <a:extLst xmlns:a="http://schemas.openxmlformats.org/drawingml/2006/main">
-              <a:ext uri="{FF2B5EF4-FFF2-40B4-BE49-F238E27FC236}">
-                <a16:creationId xmlns:a16="http://schemas.microsoft.com/office/drawing/2014/main" id="{D2475BF1-A482-4AA2-ACA2-7CD0F2ED560E}"/>
-              </a:ext>
-            </a:extLst>
-          </p:cNvPr>
-          <p:cNvSpPr>
-            <a:spLocks xmlns:a="http://schemas.openxmlformats.org/drawingml/2006/main" noGrp="1"/>
-          </p:cNvSpPr>
-          <p:nvPr/>
-        </p:nvSpPr>
-        <p:spPr>
-          <a:xfrm xmlns:a="http://schemas.openxmlformats.org/drawingml/2006/main">
-            <a:off x="8629650" y="4410075"/>
+          <p:cNvPr id="28" name="">
+            <a:extLst xmlns:a="http://schemas.openxmlformats.org/drawingml/2006/main">
+              <a:ext uri="{FF2B5EF4-FFF2-40B4-BE49-F238E27FC236}">
+                <a16:creationId xmlns:a16="http://schemas.microsoft.com/office/drawing/2014/main" id="{92E8D861-3BF6-445B-B5B9-5C5CF7E49D26}"/>
+              </a:ext>
+            </a:extLst>
+          </p:cNvPr>
+          <p:cNvSpPr>
+            <a:spLocks xmlns:a="http://schemas.openxmlformats.org/drawingml/2006/main" noGrp="1"/>
+          </p:cNvSpPr>
+          <p:nvPr/>
+        </p:nvSpPr>
+        <p:spPr>
+          <a:xfrm xmlns:a="http://schemas.openxmlformats.org/drawingml/2006/main">
+            <a:off x="8629650" y="4733925"/>
             <a:ext cx="2762250" cy="266700"/>
           </a:xfrm>
           <a:prstGeom xmlns:a="http://schemas.openxmlformats.org/drawingml/2006/main" prst="rect">
@@ -13680,22 +13924,22 @@
       </p:sp>
       <p:sp>
         <p:nvSpPr>
-          <p:cNvPr id="28" name="">
-            <a:extLst xmlns:a="http://schemas.openxmlformats.org/drawingml/2006/main">
-              <a:ext uri="{FF2B5EF4-FFF2-40B4-BE49-F238E27FC236}">
-                <a16:creationId xmlns:a16="http://schemas.microsoft.com/office/drawing/2014/main" id="{D3955DBB-C63E-401B-B18E-30871BA934FC}"/>
-              </a:ext>
-            </a:extLst>
-          </p:cNvPr>
-          <p:cNvSpPr>
-            <a:spLocks xmlns:a="http://schemas.openxmlformats.org/drawingml/2006/main" noGrp="1"/>
-          </p:cNvSpPr>
-          <p:nvPr/>
-        </p:nvSpPr>
-        <p:spPr>
-          <a:xfrm xmlns:a="http://schemas.openxmlformats.org/drawingml/2006/main">
-            <a:off x="8267700" y="4752975"/>
-            <a:ext cx="3086100" cy="571500"/>
+          <p:cNvPr id="29" name="">
+            <a:extLst xmlns:a="http://schemas.openxmlformats.org/drawingml/2006/main">
+              <a:ext uri="{FF2B5EF4-FFF2-40B4-BE49-F238E27FC236}">
+                <a16:creationId xmlns:a16="http://schemas.microsoft.com/office/drawing/2014/main" id="{B2F44025-BA09-45B7-9BEF-04B72F8543BD}"/>
+              </a:ext>
+            </a:extLst>
+          </p:cNvPr>
+          <p:cNvSpPr>
+            <a:spLocks xmlns:a="http://schemas.openxmlformats.org/drawingml/2006/main" noGrp="1"/>
+          </p:cNvSpPr>
+          <p:nvPr/>
+        </p:nvSpPr>
+        <p:spPr>
+          <a:xfrm xmlns:a="http://schemas.openxmlformats.org/drawingml/2006/main">
+            <a:off x="8267700" y="5076825"/>
+            <a:ext cx="3086100" cy="552450"/>
           </a:xfrm>
           <a:prstGeom xmlns:a="http://schemas.openxmlformats.org/drawingml/2006/main" prst="rect">
             <a:avLst/>
@@ -13742,7 +13986,7 @@
     </p:spTree>
     <p:extLst>
       <p:ext uri="{BB962C8B-B14F-4D97-AF65-F5344CB8AC3E}">
-        <p14:creationId xmlns:p14="http://schemas.microsoft.com/office/powerpoint/2010/main" val="101376828"/>
+        <p14:creationId xmlns:p14="http://schemas.microsoft.com/office/powerpoint/2010/main" val="2010195649"/>
       </p:ext>
     </p:extLst>
   </p:cSld>
@@ -13773,7 +14017,7 @@
           <p:cNvPr id="16" name="">
             <a:extLst xmlns:a="http://schemas.openxmlformats.org/drawingml/2006/main">
               <a:ext uri="{FF2B5EF4-FFF2-40B4-BE49-F238E27FC236}">
-                <a16:creationId xmlns:a16="http://schemas.microsoft.com/office/drawing/2014/main" id="{EB8EE3A8-0867-4EB8-9D41-70D5CA181845}"/>
+                <a16:creationId xmlns:a16="http://schemas.microsoft.com/office/drawing/2014/main" id="{56706AC7-D29D-400C-9F1D-0FB030BD52A8}"/>
               </a:ext>
             </a:extLst>
           </p:cNvPr>
@@ -13834,7 +14078,7 @@
           <p:cNvPr id="2" name="">
             <a:extLst xmlns:a="http://schemas.openxmlformats.org/drawingml/2006/main">
               <a:ext uri="{FF2B5EF4-FFF2-40B4-BE49-F238E27FC236}">
-                <a16:creationId xmlns:a16="http://schemas.microsoft.com/office/drawing/2014/main" id="{E918B7CD-74E7-4445-9795-E83CC44168E6}"/>
+                <a16:creationId xmlns:a16="http://schemas.microsoft.com/office/drawing/2014/main" id="{E9AAB650-6597-4C75-96FE-8606B40A0890}"/>
               </a:ext>
             </a:extLst>
           </p:cNvPr>
@@ -13895,7 +14139,7 @@
           <p:cNvPr id="3" name="">
             <a:extLst xmlns:a="http://schemas.openxmlformats.org/drawingml/2006/main">
               <a:ext uri="{FF2B5EF4-FFF2-40B4-BE49-F238E27FC236}">
-                <a16:creationId xmlns:a16="http://schemas.microsoft.com/office/drawing/2014/main" id="{03ABC5B2-B727-474A-B56C-13239B86E486}"/>
+                <a16:creationId xmlns:a16="http://schemas.microsoft.com/office/drawing/2014/main" id="{663A0838-5889-412B-8138-9C9DCF15A642}"/>
               </a:ext>
             </a:extLst>
           </p:cNvPr>
@@ -13956,7 +14200,7 @@
           <p:cNvPr id="4" name="">
             <a:extLst xmlns:a="http://schemas.openxmlformats.org/drawingml/2006/main">
               <a:ext uri="{FF2B5EF4-FFF2-40B4-BE49-F238E27FC236}">
-                <a16:creationId xmlns:a16="http://schemas.microsoft.com/office/drawing/2014/main" id="{1C2ADA56-918F-4591-B595-2D76F03C8036}"/>
+                <a16:creationId xmlns:a16="http://schemas.microsoft.com/office/drawing/2014/main" id="{146C1762-5952-4981-92AB-806709D7D0C5}"/>
               </a:ext>
             </a:extLst>
           </p:cNvPr>
@@ -13988,7 +14232,7 @@
           <p:cNvPr id="5" name="">
             <a:extLst xmlns:a="http://schemas.openxmlformats.org/drawingml/2006/main">
               <a:ext uri="{FF2B5EF4-FFF2-40B4-BE49-F238E27FC236}">
-                <a16:creationId xmlns:a16="http://schemas.microsoft.com/office/drawing/2014/main" id="{1ADB6F3C-AB8B-4EF0-A1A4-4934810B187D}"/>
+                <a16:creationId xmlns:a16="http://schemas.microsoft.com/office/drawing/2014/main" id="{27CA18B9-4C30-4D6F-9D54-33472BE24C06}"/>
               </a:ext>
             </a:extLst>
           </p:cNvPr>
@@ -14049,7 +14293,7 @@
           <p:cNvPr id="6" name="">
             <a:extLst xmlns:a="http://schemas.openxmlformats.org/drawingml/2006/main">
               <a:ext uri="{FF2B5EF4-FFF2-40B4-BE49-F238E27FC236}">
-                <a16:creationId xmlns:a16="http://schemas.microsoft.com/office/drawing/2014/main" id="{4B293193-FC95-4D91-8587-F608A0F19571}"/>
+                <a16:creationId xmlns:a16="http://schemas.microsoft.com/office/drawing/2014/main" id="{D3CBB0EA-B289-40AE-8B60-90E66C66CAD8}"/>
               </a:ext>
             </a:extLst>
           </p:cNvPr>
@@ -14110,7 +14354,7 @@
           <p:cNvPr id="7" name="">
             <a:extLst xmlns:a="http://schemas.openxmlformats.org/drawingml/2006/main">
               <a:ext uri="{FF2B5EF4-FFF2-40B4-BE49-F238E27FC236}">
-                <a16:creationId xmlns:a16="http://schemas.microsoft.com/office/drawing/2014/main" id="{901B73D5-4455-479B-98EE-C6E54B253A78}"/>
+                <a16:creationId xmlns:a16="http://schemas.microsoft.com/office/drawing/2014/main" id="{3E413F47-88B9-434E-8D3D-10229FCE22BA}"/>
               </a:ext>
             </a:extLst>
           </p:cNvPr>
@@ -14425,7 +14669,7 @@
           <p:cNvPr id="9" name="">
             <a:extLst xmlns:a="http://schemas.openxmlformats.org/drawingml/2006/main">
               <a:ext uri="{FF2B5EF4-FFF2-40B4-BE49-F238E27FC236}">
-                <a16:creationId xmlns:a16="http://schemas.microsoft.com/office/drawing/2014/main" id="{DDCFF343-E302-4677-9FD0-CCE12FF23EFE}"/>
+                <a16:creationId xmlns:a16="http://schemas.microsoft.com/office/drawing/2014/main" id="{23E340D4-FF5F-43A2-A5F8-29935804D365}"/>
               </a:ext>
             </a:extLst>
           </p:cNvPr>
@@ -14459,7 +14703,7 @@
           <p:cNvPr id="10" name="">
             <a:extLst xmlns:a="http://schemas.openxmlformats.org/drawingml/2006/main">
               <a:ext uri="{FF2B5EF4-FFF2-40B4-BE49-F238E27FC236}">
-                <a16:creationId xmlns:a16="http://schemas.microsoft.com/office/drawing/2014/main" id="{1CABC259-383B-454B-8955-A96516AC9C44}"/>
+                <a16:creationId xmlns:a16="http://schemas.microsoft.com/office/drawing/2014/main" id="{08D0A672-5C28-4AAA-B7B9-BA5290430E6C}"/>
               </a:ext>
             </a:extLst>
           </p:cNvPr>
@@ -14520,7 +14764,7 @@
           <p:cNvPr id="11" name="">
             <a:extLst xmlns:a="http://schemas.openxmlformats.org/drawingml/2006/main">
               <a:ext uri="{FF2B5EF4-FFF2-40B4-BE49-F238E27FC236}">
-                <a16:creationId xmlns:a16="http://schemas.microsoft.com/office/drawing/2014/main" id="{0C4117F2-C277-4ABA-8749-CA5DF72374F8}"/>
+                <a16:creationId xmlns:a16="http://schemas.microsoft.com/office/drawing/2014/main" id="{853D6618-DA8A-4FEE-B390-7CE16AABCCB3}"/>
               </a:ext>
             </a:extLst>
           </p:cNvPr>
@@ -14581,7 +14825,7 @@
           <p:cNvPr id="12" name="">
             <a:extLst xmlns:a="http://schemas.openxmlformats.org/drawingml/2006/main">
               <a:ext uri="{FF2B5EF4-FFF2-40B4-BE49-F238E27FC236}">
-                <a16:creationId xmlns:a16="http://schemas.microsoft.com/office/drawing/2014/main" id="{98936BC4-1463-44A5-999C-8B7FA9838E92}"/>
+                <a16:creationId xmlns:a16="http://schemas.microsoft.com/office/drawing/2014/main" id="{A5FE77C0-588D-4B7C-B012-7AB8BF5808D0}"/>
               </a:ext>
             </a:extLst>
           </p:cNvPr>
@@ -14615,7 +14859,7 @@
           <p:cNvPr id="13" name="">
             <a:extLst xmlns:a="http://schemas.openxmlformats.org/drawingml/2006/main">
               <a:ext uri="{FF2B5EF4-FFF2-40B4-BE49-F238E27FC236}">
-                <a16:creationId xmlns:a16="http://schemas.microsoft.com/office/drawing/2014/main" id="{9710BEA3-B37B-4FC5-A0FC-3760EF7C6E75}"/>
+                <a16:creationId xmlns:a16="http://schemas.microsoft.com/office/drawing/2014/main" id="{F9490BA9-A110-46EF-8BAF-590279B9393A}"/>
               </a:ext>
             </a:extLst>
           </p:cNvPr>
@@ -14676,7 +14920,7 @@
           <p:cNvPr id="14" name="">
             <a:extLst xmlns:a="http://schemas.openxmlformats.org/drawingml/2006/main">
               <a:ext uri="{FF2B5EF4-FFF2-40B4-BE49-F238E27FC236}">
-                <a16:creationId xmlns:a16="http://schemas.microsoft.com/office/drawing/2014/main" id="{38133327-A57B-46F8-9C74-AE9CAABD1B6A}"/>
+                <a16:creationId xmlns:a16="http://schemas.microsoft.com/office/drawing/2014/main" id="{19F98FD8-3832-43DB-A8FF-6FD66087BFDB}"/>
               </a:ext>
             </a:extLst>
           </p:cNvPr>
@@ -14737,7 +14981,7 @@
           <p:cNvPr id="15" name="">
             <a:extLst xmlns:a="http://schemas.openxmlformats.org/drawingml/2006/main">
               <a:ext uri="{FF2B5EF4-FFF2-40B4-BE49-F238E27FC236}">
-                <a16:creationId xmlns:a16="http://schemas.microsoft.com/office/drawing/2014/main" id="{3B6266F6-ED70-4323-83B4-C4E9A9ADC2DF}"/>
+                <a16:creationId xmlns:a16="http://schemas.microsoft.com/office/drawing/2014/main" id="{A80CC4AC-F0DC-4E2F-82AA-1CB7338AC7FC}"/>
               </a:ext>
             </a:extLst>
           </p:cNvPr>
@@ -14796,7 +15040,7 @@
     </p:spTree>
     <p:extLst>
       <p:ext uri="{BB962C8B-B14F-4D97-AF65-F5344CB8AC3E}">
-        <p14:creationId xmlns:p14="http://schemas.microsoft.com/office/powerpoint/2010/main" val="1655467233"/>
+        <p14:creationId xmlns:p14="http://schemas.microsoft.com/office/powerpoint/2010/main" val="223773167"/>
       </p:ext>
     </p:extLst>
   </p:cSld>
@@ -14824,10 +15068,10 @@
       </p:grpSpPr>
       <p:sp>
         <p:nvSpPr>
-          <p:cNvPr id="36" name="">
-            <a:extLst xmlns:a="http://schemas.openxmlformats.org/drawingml/2006/main">
-              <a:ext uri="{FF2B5EF4-FFF2-40B4-BE49-F238E27FC236}">
-                <a16:creationId xmlns:a16="http://schemas.microsoft.com/office/drawing/2014/main" id="{DFE183AC-4782-440F-8502-21CD4F4F475F}"/>
+          <p:cNvPr id="37" name="">
+            <a:extLst xmlns:a="http://schemas.openxmlformats.org/drawingml/2006/main">
+              <a:ext uri="{FF2B5EF4-FFF2-40B4-BE49-F238E27FC236}">
+                <a16:creationId xmlns:a16="http://schemas.microsoft.com/office/drawing/2014/main" id="{549FBB84-6F9E-4150-A7FC-8C616BE1A0A9}"/>
               </a:ext>
             </a:extLst>
           </p:cNvPr>
@@ -14888,7 +15132,7 @@
           <p:cNvPr id="2" name="">
             <a:extLst xmlns:a="http://schemas.openxmlformats.org/drawingml/2006/main">
               <a:ext uri="{FF2B5EF4-FFF2-40B4-BE49-F238E27FC236}">
-                <a16:creationId xmlns:a16="http://schemas.microsoft.com/office/drawing/2014/main" id="{E8B06FEE-3495-4DF2-AE98-26106D8D7FBA}"/>
+                <a16:creationId xmlns:a16="http://schemas.microsoft.com/office/drawing/2014/main" id="{1B5646CD-5392-458B-B8D7-CAFC0015AF26}"/>
               </a:ext>
             </a:extLst>
           </p:cNvPr>
@@ -14949,7 +15193,7 @@
           <p:cNvPr id="3" name="">
             <a:extLst xmlns:a="http://schemas.openxmlformats.org/drawingml/2006/main">
               <a:ext uri="{FF2B5EF4-FFF2-40B4-BE49-F238E27FC236}">
-                <a16:creationId xmlns:a16="http://schemas.microsoft.com/office/drawing/2014/main" id="{BB92AC61-8DDF-464D-B375-F466D2DA7A0A}"/>
+                <a16:creationId xmlns:a16="http://schemas.microsoft.com/office/drawing/2014/main" id="{1DA2B7DC-17F4-47BE-BAF6-2DF53B97AD7A}"/>
               </a:ext>
             </a:extLst>
           </p:cNvPr>
@@ -15010,7 +15254,7 @@
           <p:cNvPr id="4" name="">
             <a:extLst xmlns:a="http://schemas.openxmlformats.org/drawingml/2006/main">
               <a:ext uri="{FF2B5EF4-FFF2-40B4-BE49-F238E27FC236}">
-                <a16:creationId xmlns:a16="http://schemas.microsoft.com/office/drawing/2014/main" id="{5E0C818D-B8F2-4A42-BF29-1ABEE4AB3D74}"/>
+                <a16:creationId xmlns:a16="http://schemas.microsoft.com/office/drawing/2014/main" id="{B2074831-B067-42C7-B1A0-62C9102B9EA2}"/>
               </a:ext>
             </a:extLst>
           </p:cNvPr>
@@ -15042,7 +15286,7 @@
           <p:cNvPr id="5" name="">
             <a:extLst xmlns:a="http://schemas.openxmlformats.org/drawingml/2006/main">
               <a:ext uri="{FF2B5EF4-FFF2-40B4-BE49-F238E27FC236}">
-                <a16:creationId xmlns:a16="http://schemas.microsoft.com/office/drawing/2014/main" id="{7F25319F-E4E2-4BCF-A1C1-26AC8B5FD4F7}"/>
+                <a16:creationId xmlns:a16="http://schemas.microsoft.com/office/drawing/2014/main" id="{11CDC9E2-A4AC-4135-A2F8-FC80A2496965}"/>
               </a:ext>
             </a:extLst>
           </p:cNvPr>
@@ -15103,7 +15347,7 @@
           <p:cNvPr id="6" name="">
             <a:extLst xmlns:a="http://schemas.openxmlformats.org/drawingml/2006/main">
               <a:ext uri="{FF2B5EF4-FFF2-40B4-BE49-F238E27FC236}">
-                <a16:creationId xmlns:a16="http://schemas.microsoft.com/office/drawing/2014/main" id="{46BAAC08-64C2-48F5-910F-5A3CD1F68C4C}"/>
+                <a16:creationId xmlns:a16="http://schemas.microsoft.com/office/drawing/2014/main" id="{94FF9FC2-F37F-4273-A600-6F010A00CA3E}"/>
               </a:ext>
             </a:extLst>
           </p:cNvPr>
@@ -15164,7 +15408,7 @@
           <p:cNvPr id="7" name="">
             <a:extLst xmlns:a="http://schemas.openxmlformats.org/drawingml/2006/main">
               <a:ext uri="{FF2B5EF4-FFF2-40B4-BE49-F238E27FC236}">
-                <a16:creationId xmlns:a16="http://schemas.microsoft.com/office/drawing/2014/main" id="{254DBE29-10A5-45F8-832F-C25B3F0E7215}"/>
+                <a16:creationId xmlns:a16="http://schemas.microsoft.com/office/drawing/2014/main" id="{872AA5BD-3DC6-468B-A90E-8559E431C2A8}"/>
               </a:ext>
             </a:extLst>
           </p:cNvPr>
@@ -15225,18 +15469,79 @@
           <p:cNvPr id="8" name="">
             <a:extLst xmlns:a="http://schemas.openxmlformats.org/drawingml/2006/main">
               <a:ext uri="{FF2B5EF4-FFF2-40B4-BE49-F238E27FC236}">
-                <a16:creationId xmlns:a16="http://schemas.microsoft.com/office/drawing/2014/main" id="{198BC895-936A-4B90-9A1D-2B1EA920CA61}"/>
-              </a:ext>
-            </a:extLst>
-          </p:cNvPr>
-          <p:cNvSpPr>
-            <a:spLocks xmlns:a="http://schemas.openxmlformats.org/drawingml/2006/main" noGrp="1"/>
-          </p:cNvSpPr>
-          <p:nvPr/>
-        </p:nvSpPr>
-        <p:spPr>
-          <a:xfrm xmlns:a="http://schemas.openxmlformats.org/drawingml/2006/main">
-            <a:off x="333375" y="1619250"/>
+                <a16:creationId xmlns:a16="http://schemas.microsoft.com/office/drawing/2014/main" id="{F429B21B-FCF7-46E5-91CC-E7F9B75B4016}"/>
+              </a:ext>
+            </a:extLst>
+          </p:cNvPr>
+          <p:cNvSpPr>
+            <a:spLocks xmlns:a="http://schemas.openxmlformats.org/drawingml/2006/main" noGrp="1"/>
+          </p:cNvSpPr>
+          <p:nvPr/>
+        </p:nvSpPr>
+        <p:spPr>
+          <a:xfrm xmlns:a="http://schemas.openxmlformats.org/drawingml/2006/main">
+            <a:off x="333375" y="1571625"/>
+            <a:ext cx="11144250" cy="238125"/>
+          </a:xfrm>
+          <a:prstGeom xmlns:a="http://schemas.openxmlformats.org/drawingml/2006/main" prst="rect">
+            <a:avLst/>
+          </a:prstGeom>
+          <a:noFill xmlns:a="http://schemas.openxmlformats.org/drawingml/2006/main"/>
+          <a:ln xmlns:a="http://schemas.openxmlformats.org/drawingml/2006/main" w="0">
+            <a:noFill/>
+          </a:ln>
+        </p:spPr>
+        <p:txBody>
+          <a:bodyPr xmlns:a="http://schemas.openxmlformats.org/drawingml/2006/main" wrap="square" lIns="0" tIns="0" rIns="0" bIns="0" anchor="t">
+            <a:noAutofit/>
+          </a:bodyPr>
+          <a:lstStyle xmlns:a="http://schemas.openxmlformats.org/drawingml/2006/main"/>
+          <a:p xmlns:a="http://schemas.openxmlformats.org/drawingml/2006/main">
+            <a:pPr algn="l">
+              <a:lnSpc>
+                <a:spcPct val="112000"/>
+              </a:lnSpc>
+              <a:buNone/>
+              <a:defRPr sz="1200" b="0">
+                <a:solidFill>
+                  <a:srgbClr val="34373D"/>
+                </a:solidFill>
+                <a:latin typeface="IBM Plex Sans KR"/>
+                <a:ea typeface="IBM Plex Sans KR"/>
+                <a:cs typeface="IBM Plex Sans KR"/>
+              </a:defRPr>
+            </a:pPr>
+            <a:r>
+              <a:rPr sz="1200" b="0">
+                <a:solidFill>
+                  <a:srgbClr val="34373D"/>
+                </a:solidFill>
+                <a:latin typeface="IBM Plex Sans KR"/>
+                <a:ea typeface="IBM Plex Sans KR"/>
+                <a:cs typeface="IBM Plex Sans KR"/>
+              </a:rPr>
+              <a:t>하루 값의 흔들림 위에 5일 평균선을 겹쳐 전체 흐름을 봐요.</a:t>
+            </a:r>
+          </a:p>
+        </p:txBody>
+      </p:sp>
+      <p:sp>
+        <p:nvSpPr>
+          <p:cNvPr id="9" name="">
+            <a:extLst xmlns:a="http://schemas.openxmlformats.org/drawingml/2006/main">
+              <a:ext uri="{FF2B5EF4-FFF2-40B4-BE49-F238E27FC236}">
+                <a16:creationId xmlns:a16="http://schemas.microsoft.com/office/drawing/2014/main" id="{7062DADB-B51A-4012-8BD3-BBC211F7E923}"/>
+              </a:ext>
+            </a:extLst>
+          </p:cNvPr>
+          <p:cNvSpPr>
+            <a:spLocks xmlns:a="http://schemas.openxmlformats.org/drawingml/2006/main" noGrp="1"/>
+          </p:cNvSpPr>
+          <p:nvPr/>
+        </p:nvSpPr>
+        <p:spPr>
+          <a:xfrm xmlns:a="http://schemas.openxmlformats.org/drawingml/2006/main">
+            <a:off x="333375" y="1905000"/>
             <a:ext cx="7620000" cy="857250"/>
           </a:xfrm>
           <a:prstGeom xmlns:a="http://schemas.openxmlformats.org/drawingml/2006/main" prst="roundRect">
@@ -15256,21 +15561,21 @@
       </p:sp>
       <p:sp>
         <p:nvSpPr>
-          <p:cNvPr id="9" name="">
-            <a:extLst xmlns:a="http://schemas.openxmlformats.org/drawingml/2006/main">
-              <a:ext uri="{FF2B5EF4-FFF2-40B4-BE49-F238E27FC236}">
-                <a16:creationId xmlns:a16="http://schemas.microsoft.com/office/drawing/2014/main" id="{71EBDECC-47D8-4086-A9AB-012A279D7DE6}"/>
-              </a:ext>
-            </a:extLst>
-          </p:cNvPr>
-          <p:cNvSpPr>
-            <a:spLocks xmlns:a="http://schemas.openxmlformats.org/drawingml/2006/main" noGrp="1"/>
-          </p:cNvSpPr>
-          <p:nvPr/>
-        </p:nvSpPr>
-        <p:spPr>
-          <a:xfrm xmlns:a="http://schemas.openxmlformats.org/drawingml/2006/main">
-            <a:off x="447675" y="1733550"/>
+          <p:cNvPr id="10" name="">
+            <a:extLst xmlns:a="http://schemas.openxmlformats.org/drawingml/2006/main">
+              <a:ext uri="{FF2B5EF4-FFF2-40B4-BE49-F238E27FC236}">
+                <a16:creationId xmlns:a16="http://schemas.microsoft.com/office/drawing/2014/main" id="{5FC82CF0-9942-43B5-8754-949287F11C86}"/>
+              </a:ext>
+            </a:extLst>
+          </p:cNvPr>
+          <p:cNvSpPr>
+            <a:spLocks xmlns:a="http://schemas.openxmlformats.org/drawingml/2006/main" noGrp="1"/>
+          </p:cNvSpPr>
+          <p:nvPr/>
+        </p:nvSpPr>
+        <p:spPr>
+          <a:xfrm xmlns:a="http://schemas.openxmlformats.org/drawingml/2006/main">
+            <a:off x="447675" y="2019300"/>
             <a:ext cx="323850" cy="285750"/>
           </a:xfrm>
           <a:prstGeom xmlns:a="http://schemas.openxmlformats.org/drawingml/2006/main" prst="roundRect">
@@ -15317,21 +15622,21 @@
       </p:sp>
       <p:sp>
         <p:nvSpPr>
-          <p:cNvPr id="10" name="">
-            <a:extLst xmlns:a="http://schemas.openxmlformats.org/drawingml/2006/main">
-              <a:ext uri="{FF2B5EF4-FFF2-40B4-BE49-F238E27FC236}">
-                <a16:creationId xmlns:a16="http://schemas.microsoft.com/office/drawing/2014/main" id="{D33AE6B9-8DD7-476C-B77D-0070AB155CEA}"/>
-              </a:ext>
-            </a:extLst>
-          </p:cNvPr>
-          <p:cNvSpPr>
-            <a:spLocks xmlns:a="http://schemas.openxmlformats.org/drawingml/2006/main" noGrp="1"/>
-          </p:cNvSpPr>
-          <p:nvPr/>
-        </p:nvSpPr>
-        <p:spPr>
-          <a:xfrm xmlns:a="http://schemas.openxmlformats.org/drawingml/2006/main">
-            <a:off x="885825" y="1714500"/>
+          <p:cNvPr id="11" name="">
+            <a:extLst xmlns:a="http://schemas.openxmlformats.org/drawingml/2006/main">
+              <a:ext uri="{FF2B5EF4-FFF2-40B4-BE49-F238E27FC236}">
+                <a16:creationId xmlns:a16="http://schemas.microsoft.com/office/drawing/2014/main" id="{B71E6AFE-0339-409B-A4AB-00BB41CF1964}"/>
+              </a:ext>
+            </a:extLst>
+          </p:cNvPr>
+          <p:cNvSpPr>
+            <a:spLocks xmlns:a="http://schemas.openxmlformats.org/drawingml/2006/main" noGrp="1"/>
+          </p:cNvSpPr>
+          <p:nvPr/>
+        </p:nvSpPr>
+        <p:spPr>
+          <a:xfrm xmlns:a="http://schemas.openxmlformats.org/drawingml/2006/main">
+            <a:off x="885825" y="2000250"/>
             <a:ext cx="6934200" cy="666750"/>
           </a:xfrm>
           <a:prstGeom xmlns:a="http://schemas.openxmlformats.org/drawingml/2006/main" prst="rect">
@@ -15405,21 +15710,21 @@
       </p:sp>
       <p:sp>
         <p:nvSpPr>
-          <p:cNvPr id="11" name="">
-            <a:extLst xmlns:a="http://schemas.openxmlformats.org/drawingml/2006/main">
-              <a:ext uri="{FF2B5EF4-FFF2-40B4-BE49-F238E27FC236}">
-                <a16:creationId xmlns:a16="http://schemas.microsoft.com/office/drawing/2014/main" id="{C6E35C96-C577-4008-80A2-EEDB6BE51206}"/>
-              </a:ext>
-            </a:extLst>
-          </p:cNvPr>
-          <p:cNvSpPr>
-            <a:spLocks xmlns:a="http://schemas.openxmlformats.org/drawingml/2006/main" noGrp="1"/>
-          </p:cNvSpPr>
-          <p:nvPr/>
-        </p:nvSpPr>
-        <p:spPr>
-          <a:xfrm xmlns:a="http://schemas.openxmlformats.org/drawingml/2006/main">
-            <a:off x="333375" y="2571750"/>
+          <p:cNvPr id="12" name="">
+            <a:extLst xmlns:a="http://schemas.openxmlformats.org/drawingml/2006/main">
+              <a:ext uri="{FF2B5EF4-FFF2-40B4-BE49-F238E27FC236}">
+                <a16:creationId xmlns:a16="http://schemas.microsoft.com/office/drawing/2014/main" id="{2391DD8B-C880-42E3-9A2F-D3D3D31A81C6}"/>
+              </a:ext>
+            </a:extLst>
+          </p:cNvPr>
+          <p:cNvSpPr>
+            <a:spLocks xmlns:a="http://schemas.openxmlformats.org/drawingml/2006/main" noGrp="1"/>
+          </p:cNvSpPr>
+          <p:nvPr/>
+        </p:nvSpPr>
+        <p:spPr>
+          <a:xfrm xmlns:a="http://schemas.openxmlformats.org/drawingml/2006/main">
+            <a:off x="333375" y="2857500"/>
             <a:ext cx="7620000" cy="857250"/>
           </a:xfrm>
           <a:prstGeom xmlns:a="http://schemas.openxmlformats.org/drawingml/2006/main" prst="roundRect">
@@ -15439,21 +15744,21 @@
       </p:sp>
       <p:sp>
         <p:nvSpPr>
-          <p:cNvPr id="12" name="">
-            <a:extLst xmlns:a="http://schemas.openxmlformats.org/drawingml/2006/main">
-              <a:ext uri="{FF2B5EF4-FFF2-40B4-BE49-F238E27FC236}">
-                <a16:creationId xmlns:a16="http://schemas.microsoft.com/office/drawing/2014/main" id="{9D14E908-DA7A-4942-93FF-08C9DEA13522}"/>
-              </a:ext>
-            </a:extLst>
-          </p:cNvPr>
-          <p:cNvSpPr>
-            <a:spLocks xmlns:a="http://schemas.openxmlformats.org/drawingml/2006/main" noGrp="1"/>
-          </p:cNvSpPr>
-          <p:nvPr/>
-        </p:nvSpPr>
-        <p:spPr>
-          <a:xfrm xmlns:a="http://schemas.openxmlformats.org/drawingml/2006/main">
-            <a:off x="447675" y="2686050"/>
+          <p:cNvPr id="13" name="">
+            <a:extLst xmlns:a="http://schemas.openxmlformats.org/drawingml/2006/main">
+              <a:ext uri="{FF2B5EF4-FFF2-40B4-BE49-F238E27FC236}">
+                <a16:creationId xmlns:a16="http://schemas.microsoft.com/office/drawing/2014/main" id="{AE8B5DCC-FF8F-4E7E-B92B-5AAE4B0EF1D7}"/>
+              </a:ext>
+            </a:extLst>
+          </p:cNvPr>
+          <p:cNvSpPr>
+            <a:spLocks xmlns:a="http://schemas.openxmlformats.org/drawingml/2006/main" noGrp="1"/>
+          </p:cNvSpPr>
+          <p:nvPr/>
+        </p:nvSpPr>
+        <p:spPr>
+          <a:xfrm xmlns:a="http://schemas.openxmlformats.org/drawingml/2006/main">
+            <a:off x="447675" y="2971800"/>
             <a:ext cx="323850" cy="285750"/>
           </a:xfrm>
           <a:prstGeom xmlns:a="http://schemas.openxmlformats.org/drawingml/2006/main" prst="roundRect">
@@ -15500,21 +15805,21 @@
       </p:sp>
       <p:sp>
         <p:nvSpPr>
-          <p:cNvPr id="13" name="">
-            <a:extLst xmlns:a="http://schemas.openxmlformats.org/drawingml/2006/main">
-              <a:ext uri="{FF2B5EF4-FFF2-40B4-BE49-F238E27FC236}">
-                <a16:creationId xmlns:a16="http://schemas.microsoft.com/office/drawing/2014/main" id="{1D7D0CA6-C2A0-473A-B093-6EFFEE50EADC}"/>
-              </a:ext>
-            </a:extLst>
-          </p:cNvPr>
-          <p:cNvSpPr>
-            <a:spLocks xmlns:a="http://schemas.openxmlformats.org/drawingml/2006/main" noGrp="1"/>
-          </p:cNvSpPr>
-          <p:nvPr/>
-        </p:nvSpPr>
-        <p:spPr>
-          <a:xfrm xmlns:a="http://schemas.openxmlformats.org/drawingml/2006/main">
-            <a:off x="885825" y="2667000"/>
+          <p:cNvPr id="14" name="">
+            <a:extLst xmlns:a="http://schemas.openxmlformats.org/drawingml/2006/main">
+              <a:ext uri="{FF2B5EF4-FFF2-40B4-BE49-F238E27FC236}">
+                <a16:creationId xmlns:a16="http://schemas.microsoft.com/office/drawing/2014/main" id="{AEFCC343-ED7E-4463-A421-CF19696CFCFC}"/>
+              </a:ext>
+            </a:extLst>
+          </p:cNvPr>
+          <p:cNvSpPr>
+            <a:spLocks xmlns:a="http://schemas.openxmlformats.org/drawingml/2006/main" noGrp="1"/>
+          </p:cNvSpPr>
+          <p:nvPr/>
+        </p:nvSpPr>
+        <p:spPr>
+          <a:xfrm xmlns:a="http://schemas.openxmlformats.org/drawingml/2006/main">
+            <a:off x="885825" y="2952750"/>
             <a:ext cx="6934200" cy="666750"/>
           </a:xfrm>
           <a:prstGeom xmlns:a="http://schemas.openxmlformats.org/drawingml/2006/main" prst="rect">
@@ -15588,21 +15893,21 @@
       </p:sp>
       <p:sp>
         <p:nvSpPr>
-          <p:cNvPr id="14" name="">
-            <a:extLst xmlns:a="http://schemas.openxmlformats.org/drawingml/2006/main">
-              <a:ext uri="{FF2B5EF4-FFF2-40B4-BE49-F238E27FC236}">
-                <a16:creationId xmlns:a16="http://schemas.microsoft.com/office/drawing/2014/main" id="{6BE90728-5CFA-4ED3-ABFC-138CD37DF157}"/>
-              </a:ext>
-            </a:extLst>
-          </p:cNvPr>
-          <p:cNvSpPr>
-            <a:spLocks xmlns:a="http://schemas.openxmlformats.org/drawingml/2006/main" noGrp="1"/>
-          </p:cNvSpPr>
-          <p:nvPr/>
-        </p:nvSpPr>
-        <p:spPr>
-          <a:xfrm xmlns:a="http://schemas.openxmlformats.org/drawingml/2006/main">
-            <a:off x="333375" y="3524250"/>
+          <p:cNvPr id="15" name="">
+            <a:extLst xmlns:a="http://schemas.openxmlformats.org/drawingml/2006/main">
+              <a:ext uri="{FF2B5EF4-FFF2-40B4-BE49-F238E27FC236}">
+                <a16:creationId xmlns:a16="http://schemas.microsoft.com/office/drawing/2014/main" id="{4AA80370-4BB5-450F-9C61-124D442B2D46}"/>
+              </a:ext>
+            </a:extLst>
+          </p:cNvPr>
+          <p:cNvSpPr>
+            <a:spLocks xmlns:a="http://schemas.openxmlformats.org/drawingml/2006/main" noGrp="1"/>
+          </p:cNvSpPr>
+          <p:nvPr/>
+        </p:nvSpPr>
+        <p:spPr>
+          <a:xfrm xmlns:a="http://schemas.openxmlformats.org/drawingml/2006/main">
+            <a:off x="333375" y="3810000"/>
             <a:ext cx="7620000" cy="857250"/>
           </a:xfrm>
           <a:prstGeom xmlns:a="http://schemas.openxmlformats.org/drawingml/2006/main" prst="roundRect">
@@ -15622,21 +15927,21 @@
       </p:sp>
       <p:sp>
         <p:nvSpPr>
-          <p:cNvPr id="15" name="">
-            <a:extLst xmlns:a="http://schemas.openxmlformats.org/drawingml/2006/main">
-              <a:ext uri="{FF2B5EF4-FFF2-40B4-BE49-F238E27FC236}">
-                <a16:creationId xmlns:a16="http://schemas.microsoft.com/office/drawing/2014/main" id="{46538CB7-48D1-4F05-A7FA-172CF701B321}"/>
-              </a:ext>
-            </a:extLst>
-          </p:cNvPr>
-          <p:cNvSpPr>
-            <a:spLocks xmlns:a="http://schemas.openxmlformats.org/drawingml/2006/main" noGrp="1"/>
-          </p:cNvSpPr>
-          <p:nvPr/>
-        </p:nvSpPr>
-        <p:spPr>
-          <a:xfrm xmlns:a="http://schemas.openxmlformats.org/drawingml/2006/main">
-            <a:off x="447675" y="3638550"/>
+          <p:cNvPr id="16" name="">
+            <a:extLst xmlns:a="http://schemas.openxmlformats.org/drawingml/2006/main">
+              <a:ext uri="{FF2B5EF4-FFF2-40B4-BE49-F238E27FC236}">
+                <a16:creationId xmlns:a16="http://schemas.microsoft.com/office/drawing/2014/main" id="{893F87FB-166B-4C21-8DD7-70FA502FF82A}"/>
+              </a:ext>
+            </a:extLst>
+          </p:cNvPr>
+          <p:cNvSpPr>
+            <a:spLocks xmlns:a="http://schemas.openxmlformats.org/drawingml/2006/main" noGrp="1"/>
+          </p:cNvSpPr>
+          <p:nvPr/>
+        </p:nvSpPr>
+        <p:spPr>
+          <a:xfrm xmlns:a="http://schemas.openxmlformats.org/drawingml/2006/main">
+            <a:off x="447675" y="3924300"/>
             <a:ext cx="323850" cy="285750"/>
           </a:xfrm>
           <a:prstGeom xmlns:a="http://schemas.openxmlformats.org/drawingml/2006/main" prst="roundRect">
@@ -15683,21 +15988,21 @@
       </p:sp>
       <p:sp>
         <p:nvSpPr>
-          <p:cNvPr id="16" name="">
-            <a:extLst xmlns:a="http://schemas.openxmlformats.org/drawingml/2006/main">
-              <a:ext uri="{FF2B5EF4-FFF2-40B4-BE49-F238E27FC236}">
-                <a16:creationId xmlns:a16="http://schemas.microsoft.com/office/drawing/2014/main" id="{295D3AC0-3BA0-4078-AD34-54E40C14E6F6}"/>
-              </a:ext>
-            </a:extLst>
-          </p:cNvPr>
-          <p:cNvSpPr>
-            <a:spLocks xmlns:a="http://schemas.openxmlformats.org/drawingml/2006/main" noGrp="1"/>
-          </p:cNvSpPr>
-          <p:nvPr/>
-        </p:nvSpPr>
-        <p:spPr>
-          <a:xfrm xmlns:a="http://schemas.openxmlformats.org/drawingml/2006/main">
-            <a:off x="885825" y="3619500"/>
+          <p:cNvPr id="17" name="">
+            <a:extLst xmlns:a="http://schemas.openxmlformats.org/drawingml/2006/main">
+              <a:ext uri="{FF2B5EF4-FFF2-40B4-BE49-F238E27FC236}">
+                <a16:creationId xmlns:a16="http://schemas.microsoft.com/office/drawing/2014/main" id="{56E20C4E-F3E9-476E-92AD-122A7A3EF648}"/>
+              </a:ext>
+            </a:extLst>
+          </p:cNvPr>
+          <p:cNvSpPr>
+            <a:spLocks xmlns:a="http://schemas.openxmlformats.org/drawingml/2006/main" noGrp="1"/>
+          </p:cNvSpPr>
+          <p:nvPr/>
+        </p:nvSpPr>
+        <p:spPr>
+          <a:xfrm xmlns:a="http://schemas.openxmlformats.org/drawingml/2006/main">
+            <a:off x="885825" y="3905250"/>
             <a:ext cx="6934200" cy="666750"/>
           </a:xfrm>
           <a:prstGeom xmlns:a="http://schemas.openxmlformats.org/drawingml/2006/main" prst="rect">
@@ -15771,26 +16076,26 @@
       </p:sp>
       <p:sp>
         <p:nvSpPr>
-          <p:cNvPr id="17" name="">
-            <a:extLst xmlns:a="http://schemas.openxmlformats.org/drawingml/2006/main">
-              <a:ext uri="{FF2B5EF4-FFF2-40B4-BE49-F238E27FC236}">
-                <a16:creationId xmlns:a16="http://schemas.microsoft.com/office/drawing/2014/main" id="{2ABB6959-BDAA-4F79-95DE-85C469FC4DBF}"/>
-              </a:ext>
-            </a:extLst>
-          </p:cNvPr>
-          <p:cNvSpPr>
-            <a:spLocks xmlns:a="http://schemas.openxmlformats.org/drawingml/2006/main" noGrp="1"/>
-          </p:cNvSpPr>
-          <p:nvPr/>
-        </p:nvSpPr>
-        <p:spPr>
-          <a:xfrm xmlns:a="http://schemas.openxmlformats.org/drawingml/2006/main">
-            <a:off x="333375" y="4476750"/>
-            <a:ext cx="7620000" cy="1524000"/>
+          <p:cNvPr id="18" name="">
+            <a:extLst xmlns:a="http://schemas.openxmlformats.org/drawingml/2006/main">
+              <a:ext uri="{FF2B5EF4-FFF2-40B4-BE49-F238E27FC236}">
+                <a16:creationId xmlns:a16="http://schemas.microsoft.com/office/drawing/2014/main" id="{A803F128-B385-4774-92F3-A9ADD88BDE61}"/>
+              </a:ext>
+            </a:extLst>
+          </p:cNvPr>
+          <p:cNvSpPr>
+            <a:spLocks xmlns:a="http://schemas.openxmlformats.org/drawingml/2006/main" noGrp="1"/>
+          </p:cNvSpPr>
+          <p:nvPr/>
+        </p:nvSpPr>
+        <p:spPr>
+          <a:xfrm xmlns:a="http://schemas.openxmlformats.org/drawingml/2006/main">
+            <a:off x="333375" y="4762500"/>
+            <a:ext cx="7620000" cy="1333500"/>
           </a:xfrm>
           <a:prstGeom xmlns:a="http://schemas.openxmlformats.org/drawingml/2006/main" prst="roundRect">
             <a:avLst>
-              <a:gd name="adj" fmla="val 3125"/>
+              <a:gd name="adj" fmla="val 3571"/>
             </a:avLst>
           </a:prstGeom>
           <a:solidFill xmlns:a="http://schemas.openxmlformats.org/drawingml/2006/main">
@@ -15805,21 +16110,21 @@
       </p:sp>
       <p:sp>
         <p:nvSpPr>
-          <p:cNvPr id="18" name="">
-            <a:extLst xmlns:a="http://schemas.openxmlformats.org/drawingml/2006/main">
-              <a:ext uri="{FF2B5EF4-FFF2-40B4-BE49-F238E27FC236}">
-                <a16:creationId xmlns:a16="http://schemas.microsoft.com/office/drawing/2014/main" id="{6579E7B4-E1E5-40F4-9F73-02EDE77FD652}"/>
-              </a:ext>
-            </a:extLst>
-          </p:cNvPr>
-          <p:cNvSpPr>
-            <a:spLocks xmlns:a="http://schemas.openxmlformats.org/drawingml/2006/main" noGrp="1"/>
-          </p:cNvSpPr>
-          <p:nvPr/>
-        </p:nvSpPr>
-        <p:spPr>
-          <a:xfrm xmlns:a="http://schemas.openxmlformats.org/drawingml/2006/main">
-            <a:off x="447675" y="4591050"/>
+          <p:cNvPr id="19" name="">
+            <a:extLst xmlns:a="http://schemas.openxmlformats.org/drawingml/2006/main">
+              <a:ext uri="{FF2B5EF4-FFF2-40B4-BE49-F238E27FC236}">
+                <a16:creationId xmlns:a16="http://schemas.microsoft.com/office/drawing/2014/main" id="{4C56BE88-9DD1-480C-8F64-CEA632DC2E78}"/>
+              </a:ext>
+            </a:extLst>
+          </p:cNvPr>
+          <p:cNvSpPr>
+            <a:spLocks xmlns:a="http://schemas.openxmlformats.org/drawingml/2006/main" noGrp="1"/>
+          </p:cNvSpPr>
+          <p:nvPr/>
+        </p:nvSpPr>
+        <p:spPr>
+          <a:xfrm xmlns:a="http://schemas.openxmlformats.org/drawingml/2006/main">
+            <a:off x="447675" y="4876800"/>
             <a:ext cx="323850" cy="285750"/>
           </a:xfrm>
           <a:prstGeom xmlns:a="http://schemas.openxmlformats.org/drawingml/2006/main" prst="roundRect">
@@ -15866,22 +16171,22 @@
       </p:sp>
       <p:sp>
         <p:nvSpPr>
-          <p:cNvPr id="19" name="">
-            <a:extLst xmlns:a="http://schemas.openxmlformats.org/drawingml/2006/main">
-              <a:ext uri="{FF2B5EF4-FFF2-40B4-BE49-F238E27FC236}">
-                <a16:creationId xmlns:a16="http://schemas.microsoft.com/office/drawing/2014/main" id="{91A4974F-23C2-46CD-A067-133181444B5C}"/>
-              </a:ext>
-            </a:extLst>
-          </p:cNvPr>
-          <p:cNvSpPr>
-            <a:spLocks xmlns:a="http://schemas.openxmlformats.org/drawingml/2006/main" noGrp="1"/>
-          </p:cNvSpPr>
-          <p:nvPr/>
-        </p:nvSpPr>
-        <p:spPr>
-          <a:xfrm xmlns:a="http://schemas.openxmlformats.org/drawingml/2006/main">
-            <a:off x="885825" y="4572000"/>
-            <a:ext cx="6934200" cy="1333500"/>
+          <p:cNvPr id="20" name="">
+            <a:extLst xmlns:a="http://schemas.openxmlformats.org/drawingml/2006/main">
+              <a:ext uri="{FF2B5EF4-FFF2-40B4-BE49-F238E27FC236}">
+                <a16:creationId xmlns:a16="http://schemas.microsoft.com/office/drawing/2014/main" id="{C2E65F3A-E170-41E1-B997-142747F430ED}"/>
+              </a:ext>
+            </a:extLst>
+          </p:cNvPr>
+          <p:cNvSpPr>
+            <a:spLocks xmlns:a="http://schemas.openxmlformats.org/drawingml/2006/main" noGrp="1"/>
+          </p:cNvSpPr>
+          <p:nvPr/>
+        </p:nvSpPr>
+        <p:spPr>
+          <a:xfrm xmlns:a="http://schemas.openxmlformats.org/drawingml/2006/main">
+            <a:off x="885825" y="4857750"/>
+            <a:ext cx="6934200" cy="1143000"/>
           </a:xfrm>
           <a:prstGeom xmlns:a="http://schemas.openxmlformats.org/drawingml/2006/main" prst="rect">
             <a:avLst/>
@@ -15902,7 +16207,7 @@
                 <a:spcPct val="116000"/>
               </a:lnSpc>
               <a:buNone/>
-              <a:defRPr sz="900" b="0">
+              <a:defRPr sz="863" b="0">
                 <a:solidFill>
                   <a:srgbClr val="FFFFFF"/>
                 </a:solidFill>
@@ -15912,7 +16217,7 @@
               </a:defRPr>
             </a:pPr>
             <a:r>
-              <a:rPr sz="900" b="0">
+              <a:rPr sz="863" b="0">
                 <a:solidFill>
                   <a:srgbClr val="FFFFFF"/>
                 </a:solidFill>
@@ -15929,7 +16234,7 @@
                 <a:spcPct val="116000"/>
               </a:lnSpc>
               <a:buNone/>
-              <a:defRPr sz="900" b="0">
+              <a:defRPr sz="863" b="0">
                 <a:solidFill>
                   <a:srgbClr val="FFFFFF"/>
                 </a:solidFill>
@@ -15939,7 +16244,7 @@
               </a:defRPr>
             </a:pPr>
             <a:r>
-              <a:rPr sz="900" b="0">
+              <a:rPr sz="863" b="0">
                 <a:solidFill>
                   <a:srgbClr val="FFFFFF"/>
                 </a:solidFill>
@@ -15956,7 +16261,7 @@
                 <a:spcPct val="116000"/>
               </a:lnSpc>
               <a:buNone/>
-              <a:defRPr sz="900" b="0">
+              <a:defRPr sz="863" b="0">
                 <a:solidFill>
                   <a:srgbClr val="FFFFFF"/>
                 </a:solidFill>
@@ -15966,7 +16271,7 @@
               </a:defRPr>
             </a:pPr>
             <a:r>
-              <a:rPr sz="900" b="0">
+              <a:rPr sz="863" b="0">
                 <a:solidFill>
                   <a:srgbClr val="FFFFFF"/>
                 </a:solidFill>
@@ -15983,7 +16288,7 @@
                 <a:spcPct val="116000"/>
               </a:lnSpc>
               <a:buNone/>
-              <a:defRPr sz="900" b="0">
+              <a:defRPr sz="863" b="0">
                 <a:solidFill>
                   <a:srgbClr val="FFFFFF"/>
                 </a:solidFill>
@@ -15993,7 +16298,7 @@
               </a:defRPr>
             </a:pPr>
             <a:r>
-              <a:rPr sz="900" b="0">
+              <a:rPr sz="863" b="0">
                 <a:solidFill>
                   <a:srgbClr val="FFFFFF"/>
                 </a:solidFill>
@@ -16010,7 +16315,7 @@
                 <a:spcPct val="116000"/>
               </a:lnSpc>
               <a:buNone/>
-              <a:defRPr sz="900" b="0">
+              <a:defRPr sz="863" b="0">
                 <a:solidFill>
                   <a:srgbClr val="FFFFFF"/>
                 </a:solidFill>
@@ -16020,7 +16325,7 @@
               </a:defRPr>
             </a:pPr>
             <a:r>
-              <a:rPr sz="900" b="0">
+              <a:rPr sz="863" b="0">
                 <a:solidFill>
                   <a:srgbClr val="FFFFFF"/>
                 </a:solidFill>
@@ -16037,7 +16342,7 @@
                 <a:spcPct val="116000"/>
               </a:lnSpc>
               <a:buNone/>
-              <a:defRPr sz="900" b="0">
+              <a:defRPr sz="863" b="0">
                 <a:solidFill>
                   <a:srgbClr val="FFFFFF"/>
                 </a:solidFill>
@@ -16047,7 +16352,7 @@
               </a:defRPr>
             </a:pPr>
             <a:r>
-              <a:rPr sz="900" b="0">
+              <a:rPr sz="863" b="0">
                 <a:solidFill>
                   <a:srgbClr val="FFFFFF"/>
                 </a:solidFill>
@@ -16064,7 +16369,7 @@
                 <a:spcPct val="116000"/>
               </a:lnSpc>
               <a:buNone/>
-              <a:defRPr sz="900" b="0">
+              <a:defRPr sz="863" b="0">
                 <a:solidFill>
                   <a:srgbClr val="FFFFFF"/>
                 </a:solidFill>
@@ -16074,7 +16379,7 @@
               </a:defRPr>
             </a:pPr>
             <a:r>
-              <a:rPr sz="900" b="0">
+              <a:rPr sz="863" b="0">
                 <a:solidFill>
                   <a:srgbClr val="FFFFFF"/>
                 </a:solidFill>
@@ -16089,26 +16394,26 @@
       </p:sp>
       <p:sp>
         <p:nvSpPr>
-          <p:cNvPr id="20" name="">
-            <a:extLst xmlns:a="http://schemas.openxmlformats.org/drawingml/2006/main">
-              <a:ext uri="{FF2B5EF4-FFF2-40B4-BE49-F238E27FC236}">
-                <a16:creationId xmlns:a16="http://schemas.microsoft.com/office/drawing/2014/main" id="{07441EDB-DC2F-473C-BACF-8737D95D4ED7}"/>
-              </a:ext>
-            </a:extLst>
-          </p:cNvPr>
-          <p:cNvSpPr>
-            <a:spLocks xmlns:a="http://schemas.openxmlformats.org/drawingml/2006/main" noGrp="1"/>
-          </p:cNvSpPr>
-          <p:nvPr/>
-        </p:nvSpPr>
-        <p:spPr>
-          <a:xfrm xmlns:a="http://schemas.openxmlformats.org/drawingml/2006/main">
-            <a:off x="8143875" y="1619250"/>
-            <a:ext cx="3381375" cy="933450"/>
+          <p:cNvPr id="21" name="">
+            <a:extLst xmlns:a="http://schemas.openxmlformats.org/drawingml/2006/main">
+              <a:ext uri="{FF2B5EF4-FFF2-40B4-BE49-F238E27FC236}">
+                <a16:creationId xmlns:a16="http://schemas.microsoft.com/office/drawing/2014/main" id="{9E10A6D9-80A0-4CE5-A8EA-C00767BA993C}"/>
+              </a:ext>
+            </a:extLst>
+          </p:cNvPr>
+          <p:cNvSpPr>
+            <a:spLocks xmlns:a="http://schemas.openxmlformats.org/drawingml/2006/main" noGrp="1"/>
+          </p:cNvSpPr>
+          <p:nvPr/>
+        </p:nvSpPr>
+        <p:spPr>
+          <a:xfrm xmlns:a="http://schemas.openxmlformats.org/drawingml/2006/main">
+            <a:off x="8143875" y="1905000"/>
+            <a:ext cx="3381375" cy="857250"/>
           </a:xfrm>
           <a:prstGeom xmlns:a="http://schemas.openxmlformats.org/drawingml/2006/main" prst="roundRect">
             <a:avLst>
-              <a:gd name="adj" fmla="val 6122"/>
+              <a:gd name="adj" fmla="val 6667"/>
             </a:avLst>
           </a:prstGeom>
           <a:solidFill xmlns:a="http://schemas.openxmlformats.org/drawingml/2006/main">
@@ -16123,21 +16428,21 @@
       </p:sp>
       <p:sp>
         <p:nvSpPr>
-          <p:cNvPr id="21" name="">
-            <a:extLst xmlns:a="http://schemas.openxmlformats.org/drawingml/2006/main">
-              <a:ext uri="{FF2B5EF4-FFF2-40B4-BE49-F238E27FC236}">
-                <a16:creationId xmlns:a16="http://schemas.microsoft.com/office/drawing/2014/main" id="{7670A800-F277-4FC0-BD4F-D3F84CBB1B7D}"/>
-              </a:ext>
-            </a:extLst>
-          </p:cNvPr>
-          <p:cNvSpPr>
-            <a:spLocks xmlns:a="http://schemas.openxmlformats.org/drawingml/2006/main" noGrp="1"/>
-          </p:cNvSpPr>
-          <p:nvPr/>
-        </p:nvSpPr>
-        <p:spPr>
-          <a:xfrm xmlns:a="http://schemas.openxmlformats.org/drawingml/2006/main">
-            <a:off x="8277225" y="1743075"/>
+          <p:cNvPr id="22" name="">
+            <a:extLst xmlns:a="http://schemas.openxmlformats.org/drawingml/2006/main">
+              <a:ext uri="{FF2B5EF4-FFF2-40B4-BE49-F238E27FC236}">
+                <a16:creationId xmlns:a16="http://schemas.microsoft.com/office/drawing/2014/main" id="{EDF7C6DF-AFA9-4ABC-966E-4D0B74FC55E7}"/>
+              </a:ext>
+            </a:extLst>
+          </p:cNvPr>
+          <p:cNvSpPr>
+            <a:spLocks xmlns:a="http://schemas.openxmlformats.org/drawingml/2006/main" noGrp="1"/>
+          </p:cNvSpPr>
+          <p:nvPr/>
+        </p:nvSpPr>
+        <p:spPr>
+          <a:xfrm xmlns:a="http://schemas.openxmlformats.org/drawingml/2006/main">
+            <a:off x="8277225" y="2028825"/>
             <a:ext cx="323850" cy="266700"/>
           </a:xfrm>
           <a:prstGeom xmlns:a="http://schemas.openxmlformats.org/drawingml/2006/main" prst="rect">
@@ -16184,21 +16489,21 @@
       </p:sp>
       <p:sp>
         <p:nvSpPr>
-          <p:cNvPr id="22" name="">
-            <a:extLst xmlns:a="http://schemas.openxmlformats.org/drawingml/2006/main">
-              <a:ext uri="{FF2B5EF4-FFF2-40B4-BE49-F238E27FC236}">
-                <a16:creationId xmlns:a16="http://schemas.microsoft.com/office/drawing/2014/main" id="{2189B6EF-067A-4FAA-B19E-98C8002EE8D4}"/>
-              </a:ext>
-            </a:extLst>
-          </p:cNvPr>
-          <p:cNvSpPr>
-            <a:spLocks xmlns:a="http://schemas.openxmlformats.org/drawingml/2006/main" noGrp="1"/>
-          </p:cNvSpPr>
-          <p:nvPr/>
-        </p:nvSpPr>
-        <p:spPr>
-          <a:xfrm xmlns:a="http://schemas.openxmlformats.org/drawingml/2006/main">
-            <a:off x="8677275" y="1743075"/>
+          <p:cNvPr id="23" name="">
+            <a:extLst xmlns:a="http://schemas.openxmlformats.org/drawingml/2006/main">
+              <a:ext uri="{FF2B5EF4-FFF2-40B4-BE49-F238E27FC236}">
+                <a16:creationId xmlns:a16="http://schemas.microsoft.com/office/drawing/2014/main" id="{797D088D-560D-4C2E-85C2-4C41EB653D49}"/>
+              </a:ext>
+            </a:extLst>
+          </p:cNvPr>
+          <p:cNvSpPr>
+            <a:spLocks xmlns:a="http://schemas.openxmlformats.org/drawingml/2006/main" noGrp="1"/>
+          </p:cNvSpPr>
+          <p:nvPr/>
+        </p:nvSpPr>
+        <p:spPr>
+          <a:xfrm xmlns:a="http://schemas.openxmlformats.org/drawingml/2006/main">
+            <a:off x="8677275" y="2028825"/>
             <a:ext cx="2714625" cy="266700"/>
           </a:xfrm>
           <a:prstGeom xmlns:a="http://schemas.openxmlformats.org/drawingml/2006/main" prst="rect">
@@ -16245,22 +16550,22 @@
       </p:sp>
       <p:sp>
         <p:nvSpPr>
-          <p:cNvPr id="23" name="">
-            <a:extLst xmlns:a="http://schemas.openxmlformats.org/drawingml/2006/main">
-              <a:ext uri="{FF2B5EF4-FFF2-40B4-BE49-F238E27FC236}">
-                <a16:creationId xmlns:a16="http://schemas.microsoft.com/office/drawing/2014/main" id="{B35EFD0B-C96A-450D-BDA9-F94ADCB9C6D3}"/>
-              </a:ext>
-            </a:extLst>
-          </p:cNvPr>
-          <p:cNvSpPr>
-            <a:spLocks xmlns:a="http://schemas.openxmlformats.org/drawingml/2006/main" noGrp="1"/>
-          </p:cNvSpPr>
-          <p:nvPr/>
-        </p:nvSpPr>
-        <p:spPr>
-          <a:xfrm xmlns:a="http://schemas.openxmlformats.org/drawingml/2006/main">
-            <a:off x="8315325" y="2085975"/>
-            <a:ext cx="3038475" cy="361950"/>
+          <p:cNvPr id="24" name="">
+            <a:extLst xmlns:a="http://schemas.openxmlformats.org/drawingml/2006/main">
+              <a:ext uri="{FF2B5EF4-FFF2-40B4-BE49-F238E27FC236}">
+                <a16:creationId xmlns:a16="http://schemas.microsoft.com/office/drawing/2014/main" id="{B1421175-EDBF-41C1-ACA5-73B0EE51D2B7}"/>
+              </a:ext>
+            </a:extLst>
+          </p:cNvPr>
+          <p:cNvSpPr>
+            <a:spLocks xmlns:a="http://schemas.openxmlformats.org/drawingml/2006/main" noGrp="1"/>
+          </p:cNvSpPr>
+          <p:nvPr/>
+        </p:nvSpPr>
+        <p:spPr>
+          <a:xfrm xmlns:a="http://schemas.openxmlformats.org/drawingml/2006/main">
+            <a:off x="8315325" y="2371725"/>
+            <a:ext cx="3038475" cy="285750"/>
           </a:xfrm>
           <a:prstGeom xmlns:a="http://schemas.openxmlformats.org/drawingml/2006/main" prst="rect">
             <a:avLst/>
@@ -16306,26 +16611,26 @@
       </p:sp>
       <p:sp>
         <p:nvSpPr>
-          <p:cNvPr id="24" name="">
-            <a:extLst xmlns:a="http://schemas.openxmlformats.org/drawingml/2006/main">
-              <a:ext uri="{FF2B5EF4-FFF2-40B4-BE49-F238E27FC236}">
-                <a16:creationId xmlns:a16="http://schemas.microsoft.com/office/drawing/2014/main" id="{E1201BCF-9BE2-401C-956D-920A07B99197}"/>
-              </a:ext>
-            </a:extLst>
-          </p:cNvPr>
-          <p:cNvSpPr>
-            <a:spLocks xmlns:a="http://schemas.openxmlformats.org/drawingml/2006/main" noGrp="1"/>
-          </p:cNvSpPr>
-          <p:nvPr/>
-        </p:nvSpPr>
-        <p:spPr>
-          <a:xfrm xmlns:a="http://schemas.openxmlformats.org/drawingml/2006/main">
-            <a:off x="8143875" y="2647950"/>
-            <a:ext cx="3381375" cy="933450"/>
+          <p:cNvPr id="25" name="">
+            <a:extLst xmlns:a="http://schemas.openxmlformats.org/drawingml/2006/main">
+              <a:ext uri="{FF2B5EF4-FFF2-40B4-BE49-F238E27FC236}">
+                <a16:creationId xmlns:a16="http://schemas.microsoft.com/office/drawing/2014/main" id="{556DD62B-337D-4344-9BDE-62BE56972296}"/>
+              </a:ext>
+            </a:extLst>
+          </p:cNvPr>
+          <p:cNvSpPr>
+            <a:spLocks xmlns:a="http://schemas.openxmlformats.org/drawingml/2006/main" noGrp="1"/>
+          </p:cNvSpPr>
+          <p:nvPr/>
+        </p:nvSpPr>
+        <p:spPr>
+          <a:xfrm xmlns:a="http://schemas.openxmlformats.org/drawingml/2006/main">
+            <a:off x="8143875" y="2857500"/>
+            <a:ext cx="3381375" cy="857250"/>
           </a:xfrm>
           <a:prstGeom xmlns:a="http://schemas.openxmlformats.org/drawingml/2006/main" prst="roundRect">
             <a:avLst>
-              <a:gd name="adj" fmla="val 6122"/>
+              <a:gd name="adj" fmla="val 6667"/>
             </a:avLst>
           </a:prstGeom>
           <a:solidFill xmlns:a="http://schemas.openxmlformats.org/drawingml/2006/main">
@@ -16340,21 +16645,21 @@
       </p:sp>
       <p:sp>
         <p:nvSpPr>
-          <p:cNvPr id="25" name="">
-            <a:extLst xmlns:a="http://schemas.openxmlformats.org/drawingml/2006/main">
-              <a:ext uri="{FF2B5EF4-FFF2-40B4-BE49-F238E27FC236}">
-                <a16:creationId xmlns:a16="http://schemas.microsoft.com/office/drawing/2014/main" id="{53A2CA0E-F8ED-4CDC-A088-120896163C04}"/>
-              </a:ext>
-            </a:extLst>
-          </p:cNvPr>
-          <p:cNvSpPr>
-            <a:spLocks xmlns:a="http://schemas.openxmlformats.org/drawingml/2006/main" noGrp="1"/>
-          </p:cNvSpPr>
-          <p:nvPr/>
-        </p:nvSpPr>
-        <p:spPr>
-          <a:xfrm xmlns:a="http://schemas.openxmlformats.org/drawingml/2006/main">
-            <a:off x="8277225" y="2771775"/>
+          <p:cNvPr id="26" name="">
+            <a:extLst xmlns:a="http://schemas.openxmlformats.org/drawingml/2006/main">
+              <a:ext uri="{FF2B5EF4-FFF2-40B4-BE49-F238E27FC236}">
+                <a16:creationId xmlns:a16="http://schemas.microsoft.com/office/drawing/2014/main" id="{B4C43BB4-8947-4E49-AA10-6D48DD7E2E64}"/>
+              </a:ext>
+            </a:extLst>
+          </p:cNvPr>
+          <p:cNvSpPr>
+            <a:spLocks xmlns:a="http://schemas.openxmlformats.org/drawingml/2006/main" noGrp="1"/>
+          </p:cNvSpPr>
+          <p:nvPr/>
+        </p:nvSpPr>
+        <p:spPr>
+          <a:xfrm xmlns:a="http://schemas.openxmlformats.org/drawingml/2006/main">
+            <a:off x="8277225" y="2981325"/>
             <a:ext cx="323850" cy="266700"/>
           </a:xfrm>
           <a:prstGeom xmlns:a="http://schemas.openxmlformats.org/drawingml/2006/main" prst="rect">
@@ -16401,21 +16706,21 @@
       </p:sp>
       <p:sp>
         <p:nvSpPr>
-          <p:cNvPr id="26" name="">
-            <a:extLst xmlns:a="http://schemas.openxmlformats.org/drawingml/2006/main">
-              <a:ext uri="{FF2B5EF4-FFF2-40B4-BE49-F238E27FC236}">
-                <a16:creationId xmlns:a16="http://schemas.microsoft.com/office/drawing/2014/main" id="{35DBC56D-42D5-4B15-A3DC-989825C08762}"/>
-              </a:ext>
-            </a:extLst>
-          </p:cNvPr>
-          <p:cNvSpPr>
-            <a:spLocks xmlns:a="http://schemas.openxmlformats.org/drawingml/2006/main" noGrp="1"/>
-          </p:cNvSpPr>
-          <p:nvPr/>
-        </p:nvSpPr>
-        <p:spPr>
-          <a:xfrm xmlns:a="http://schemas.openxmlformats.org/drawingml/2006/main">
-            <a:off x="8677275" y="2771775"/>
+          <p:cNvPr id="27" name="">
+            <a:extLst xmlns:a="http://schemas.openxmlformats.org/drawingml/2006/main">
+              <a:ext uri="{FF2B5EF4-FFF2-40B4-BE49-F238E27FC236}">
+                <a16:creationId xmlns:a16="http://schemas.microsoft.com/office/drawing/2014/main" id="{21CF0427-8A42-47F4-873C-5C0F931AC421}"/>
+              </a:ext>
+            </a:extLst>
+          </p:cNvPr>
+          <p:cNvSpPr>
+            <a:spLocks xmlns:a="http://schemas.openxmlformats.org/drawingml/2006/main" noGrp="1"/>
+          </p:cNvSpPr>
+          <p:nvPr/>
+        </p:nvSpPr>
+        <p:spPr>
+          <a:xfrm xmlns:a="http://schemas.openxmlformats.org/drawingml/2006/main">
+            <a:off x="8677275" y="2981325"/>
             <a:ext cx="2714625" cy="266700"/>
           </a:xfrm>
           <a:prstGeom xmlns:a="http://schemas.openxmlformats.org/drawingml/2006/main" prst="rect">
@@ -16462,22 +16767,22 @@
       </p:sp>
       <p:sp>
         <p:nvSpPr>
-          <p:cNvPr id="27" name="">
-            <a:extLst xmlns:a="http://schemas.openxmlformats.org/drawingml/2006/main">
-              <a:ext uri="{FF2B5EF4-FFF2-40B4-BE49-F238E27FC236}">
-                <a16:creationId xmlns:a16="http://schemas.microsoft.com/office/drawing/2014/main" id="{CA2948D1-42B7-4F12-8C57-15CC7EB684C9}"/>
-              </a:ext>
-            </a:extLst>
-          </p:cNvPr>
-          <p:cNvSpPr>
-            <a:spLocks xmlns:a="http://schemas.openxmlformats.org/drawingml/2006/main" noGrp="1"/>
-          </p:cNvSpPr>
-          <p:nvPr/>
-        </p:nvSpPr>
-        <p:spPr>
-          <a:xfrm xmlns:a="http://schemas.openxmlformats.org/drawingml/2006/main">
-            <a:off x="8315325" y="3114675"/>
-            <a:ext cx="3038475" cy="361950"/>
+          <p:cNvPr id="28" name="">
+            <a:extLst xmlns:a="http://schemas.openxmlformats.org/drawingml/2006/main">
+              <a:ext uri="{FF2B5EF4-FFF2-40B4-BE49-F238E27FC236}">
+                <a16:creationId xmlns:a16="http://schemas.microsoft.com/office/drawing/2014/main" id="{75518F6B-52A7-4129-8A9B-5DAD614018FF}"/>
+              </a:ext>
+            </a:extLst>
+          </p:cNvPr>
+          <p:cNvSpPr>
+            <a:spLocks xmlns:a="http://schemas.openxmlformats.org/drawingml/2006/main" noGrp="1"/>
+          </p:cNvSpPr>
+          <p:nvPr/>
+        </p:nvSpPr>
+        <p:spPr>
+          <a:xfrm xmlns:a="http://schemas.openxmlformats.org/drawingml/2006/main">
+            <a:off x="8315325" y="3324225"/>
+            <a:ext cx="3038475" cy="285750"/>
           </a:xfrm>
           <a:prstGeom xmlns:a="http://schemas.openxmlformats.org/drawingml/2006/main" prst="rect">
             <a:avLst/>
@@ -16523,26 +16828,26 @@
       </p:sp>
       <p:sp>
         <p:nvSpPr>
-          <p:cNvPr id="28" name="">
-            <a:extLst xmlns:a="http://schemas.openxmlformats.org/drawingml/2006/main">
-              <a:ext uri="{FF2B5EF4-FFF2-40B4-BE49-F238E27FC236}">
-                <a16:creationId xmlns:a16="http://schemas.microsoft.com/office/drawing/2014/main" id="{421F8B48-61AD-4DC2-A7B7-A94BCE89065A}"/>
-              </a:ext>
-            </a:extLst>
-          </p:cNvPr>
-          <p:cNvSpPr>
-            <a:spLocks xmlns:a="http://schemas.openxmlformats.org/drawingml/2006/main" noGrp="1"/>
-          </p:cNvSpPr>
-          <p:nvPr/>
-        </p:nvSpPr>
-        <p:spPr>
-          <a:xfrm xmlns:a="http://schemas.openxmlformats.org/drawingml/2006/main">
-            <a:off x="8143875" y="3676650"/>
-            <a:ext cx="3381375" cy="933450"/>
+          <p:cNvPr id="29" name="">
+            <a:extLst xmlns:a="http://schemas.openxmlformats.org/drawingml/2006/main">
+              <a:ext uri="{FF2B5EF4-FFF2-40B4-BE49-F238E27FC236}">
+                <a16:creationId xmlns:a16="http://schemas.microsoft.com/office/drawing/2014/main" id="{815B1912-D9E8-4DE7-A248-95C0D9FD042F}"/>
+              </a:ext>
+            </a:extLst>
+          </p:cNvPr>
+          <p:cNvSpPr>
+            <a:spLocks xmlns:a="http://schemas.openxmlformats.org/drawingml/2006/main" noGrp="1"/>
+          </p:cNvSpPr>
+          <p:nvPr/>
+        </p:nvSpPr>
+        <p:spPr>
+          <a:xfrm xmlns:a="http://schemas.openxmlformats.org/drawingml/2006/main">
+            <a:off x="8143875" y="3810000"/>
+            <a:ext cx="3381375" cy="857250"/>
           </a:xfrm>
           <a:prstGeom xmlns:a="http://schemas.openxmlformats.org/drawingml/2006/main" prst="roundRect">
             <a:avLst>
-              <a:gd name="adj" fmla="val 6122"/>
+              <a:gd name="adj" fmla="val 6667"/>
             </a:avLst>
           </a:prstGeom>
           <a:solidFill xmlns:a="http://schemas.openxmlformats.org/drawingml/2006/main">
@@ -16557,21 +16862,21 @@
       </p:sp>
       <p:sp>
         <p:nvSpPr>
-          <p:cNvPr id="29" name="">
-            <a:extLst xmlns:a="http://schemas.openxmlformats.org/drawingml/2006/main">
-              <a:ext uri="{FF2B5EF4-FFF2-40B4-BE49-F238E27FC236}">
-                <a16:creationId xmlns:a16="http://schemas.microsoft.com/office/drawing/2014/main" id="{6DABE8DD-CCE4-4460-9F2D-32A2C24DF47C}"/>
-              </a:ext>
-            </a:extLst>
-          </p:cNvPr>
-          <p:cNvSpPr>
-            <a:spLocks xmlns:a="http://schemas.openxmlformats.org/drawingml/2006/main" noGrp="1"/>
-          </p:cNvSpPr>
-          <p:nvPr/>
-        </p:nvSpPr>
-        <p:spPr>
-          <a:xfrm xmlns:a="http://schemas.openxmlformats.org/drawingml/2006/main">
-            <a:off x="8277225" y="3800475"/>
+          <p:cNvPr id="30" name="">
+            <a:extLst xmlns:a="http://schemas.openxmlformats.org/drawingml/2006/main">
+              <a:ext uri="{FF2B5EF4-FFF2-40B4-BE49-F238E27FC236}">
+                <a16:creationId xmlns:a16="http://schemas.microsoft.com/office/drawing/2014/main" id="{957A2F75-CBAF-4FF4-9439-1C3A2289061E}"/>
+              </a:ext>
+            </a:extLst>
+          </p:cNvPr>
+          <p:cNvSpPr>
+            <a:spLocks xmlns:a="http://schemas.openxmlformats.org/drawingml/2006/main" noGrp="1"/>
+          </p:cNvSpPr>
+          <p:nvPr/>
+        </p:nvSpPr>
+        <p:spPr>
+          <a:xfrm xmlns:a="http://schemas.openxmlformats.org/drawingml/2006/main">
+            <a:off x="8277225" y="3933825"/>
             <a:ext cx="323850" cy="266700"/>
           </a:xfrm>
           <a:prstGeom xmlns:a="http://schemas.openxmlformats.org/drawingml/2006/main" prst="rect">
@@ -16618,21 +16923,21 @@
       </p:sp>
       <p:sp>
         <p:nvSpPr>
-          <p:cNvPr id="30" name="">
-            <a:extLst xmlns:a="http://schemas.openxmlformats.org/drawingml/2006/main">
-              <a:ext uri="{FF2B5EF4-FFF2-40B4-BE49-F238E27FC236}">
-                <a16:creationId xmlns:a16="http://schemas.microsoft.com/office/drawing/2014/main" id="{03B63C84-54A2-4CD7-AA3E-E923845F25E6}"/>
-              </a:ext>
-            </a:extLst>
-          </p:cNvPr>
-          <p:cNvSpPr>
-            <a:spLocks xmlns:a="http://schemas.openxmlformats.org/drawingml/2006/main" noGrp="1"/>
-          </p:cNvSpPr>
-          <p:nvPr/>
-        </p:nvSpPr>
-        <p:spPr>
-          <a:xfrm xmlns:a="http://schemas.openxmlformats.org/drawingml/2006/main">
-            <a:off x="8677275" y="3800475"/>
+          <p:cNvPr id="31" name="">
+            <a:extLst xmlns:a="http://schemas.openxmlformats.org/drawingml/2006/main">
+              <a:ext uri="{FF2B5EF4-FFF2-40B4-BE49-F238E27FC236}">
+                <a16:creationId xmlns:a16="http://schemas.microsoft.com/office/drawing/2014/main" id="{6A007DC4-0AED-4583-9A05-3164E10124E0}"/>
+              </a:ext>
+            </a:extLst>
+          </p:cNvPr>
+          <p:cNvSpPr>
+            <a:spLocks xmlns:a="http://schemas.openxmlformats.org/drawingml/2006/main" noGrp="1"/>
+          </p:cNvSpPr>
+          <p:nvPr/>
+        </p:nvSpPr>
+        <p:spPr>
+          <a:xfrm xmlns:a="http://schemas.openxmlformats.org/drawingml/2006/main">
+            <a:off x="8677275" y="3933825"/>
             <a:ext cx="2714625" cy="266700"/>
           </a:xfrm>
           <a:prstGeom xmlns:a="http://schemas.openxmlformats.org/drawingml/2006/main" prst="rect">
@@ -16679,22 +16984,22 @@
       </p:sp>
       <p:sp>
         <p:nvSpPr>
-          <p:cNvPr id="31" name="">
-            <a:extLst xmlns:a="http://schemas.openxmlformats.org/drawingml/2006/main">
-              <a:ext uri="{FF2B5EF4-FFF2-40B4-BE49-F238E27FC236}">
-                <a16:creationId xmlns:a16="http://schemas.microsoft.com/office/drawing/2014/main" id="{B306D39B-1BBC-4824-B061-8ED664623AF4}"/>
-              </a:ext>
-            </a:extLst>
-          </p:cNvPr>
-          <p:cNvSpPr>
-            <a:spLocks xmlns:a="http://schemas.openxmlformats.org/drawingml/2006/main" noGrp="1"/>
-          </p:cNvSpPr>
-          <p:nvPr/>
-        </p:nvSpPr>
-        <p:spPr>
-          <a:xfrm xmlns:a="http://schemas.openxmlformats.org/drawingml/2006/main">
-            <a:off x="8315325" y="4143375"/>
-            <a:ext cx="3038475" cy="361950"/>
+          <p:cNvPr id="32" name="">
+            <a:extLst xmlns:a="http://schemas.openxmlformats.org/drawingml/2006/main">
+              <a:ext uri="{FF2B5EF4-FFF2-40B4-BE49-F238E27FC236}">
+                <a16:creationId xmlns:a16="http://schemas.microsoft.com/office/drawing/2014/main" id="{0AA6C634-F5DA-447D-8694-45FD6D7D33B7}"/>
+              </a:ext>
+            </a:extLst>
+          </p:cNvPr>
+          <p:cNvSpPr>
+            <a:spLocks xmlns:a="http://schemas.openxmlformats.org/drawingml/2006/main" noGrp="1"/>
+          </p:cNvSpPr>
+          <p:nvPr/>
+        </p:nvSpPr>
+        <p:spPr>
+          <a:xfrm xmlns:a="http://schemas.openxmlformats.org/drawingml/2006/main">
+            <a:off x="8315325" y="4276725"/>
+            <a:ext cx="3038475" cy="285750"/>
           </a:xfrm>
           <a:prstGeom xmlns:a="http://schemas.openxmlformats.org/drawingml/2006/main" prst="rect">
             <a:avLst/>
@@ -16740,26 +17045,26 @@
       </p:sp>
       <p:sp>
         <p:nvSpPr>
-          <p:cNvPr id="32" name="">
-            <a:extLst xmlns:a="http://schemas.openxmlformats.org/drawingml/2006/main">
-              <a:ext uri="{FF2B5EF4-FFF2-40B4-BE49-F238E27FC236}">
-                <a16:creationId xmlns:a16="http://schemas.microsoft.com/office/drawing/2014/main" id="{D0C5EFBB-6B0A-4E6A-90B5-C3F3D821CE1A}"/>
-              </a:ext>
-            </a:extLst>
-          </p:cNvPr>
-          <p:cNvSpPr>
-            <a:spLocks xmlns:a="http://schemas.openxmlformats.org/drawingml/2006/main" noGrp="1"/>
-          </p:cNvSpPr>
-          <p:nvPr/>
-        </p:nvSpPr>
-        <p:spPr>
-          <a:xfrm xmlns:a="http://schemas.openxmlformats.org/drawingml/2006/main">
-            <a:off x="8143875" y="4705350"/>
-            <a:ext cx="3381375" cy="1123950"/>
+          <p:cNvPr id="33" name="">
+            <a:extLst xmlns:a="http://schemas.openxmlformats.org/drawingml/2006/main">
+              <a:ext uri="{FF2B5EF4-FFF2-40B4-BE49-F238E27FC236}">
+                <a16:creationId xmlns:a16="http://schemas.microsoft.com/office/drawing/2014/main" id="{D91FDE7D-D084-4546-8C6F-F91983809DA5}"/>
+              </a:ext>
+            </a:extLst>
+          </p:cNvPr>
+          <p:cNvSpPr>
+            <a:spLocks xmlns:a="http://schemas.openxmlformats.org/drawingml/2006/main" noGrp="1"/>
+          </p:cNvSpPr>
+          <p:nvPr/>
+        </p:nvSpPr>
+        <p:spPr>
+          <a:xfrm xmlns:a="http://schemas.openxmlformats.org/drawingml/2006/main">
+            <a:off x="8143875" y="4762500"/>
+            <a:ext cx="3381375" cy="1333500"/>
           </a:xfrm>
           <a:prstGeom xmlns:a="http://schemas.openxmlformats.org/drawingml/2006/main" prst="roundRect">
             <a:avLst>
-              <a:gd name="adj" fmla="val 5085"/>
+              <a:gd name="adj" fmla="val 4286"/>
             </a:avLst>
           </a:prstGeom>
           <a:solidFill xmlns:a="http://schemas.openxmlformats.org/drawingml/2006/main">
@@ -16774,21 +17079,21 @@
       </p:sp>
       <p:sp>
         <p:nvSpPr>
-          <p:cNvPr id="33" name="">
-            <a:extLst xmlns:a="http://schemas.openxmlformats.org/drawingml/2006/main">
-              <a:ext uri="{FF2B5EF4-FFF2-40B4-BE49-F238E27FC236}">
-                <a16:creationId xmlns:a16="http://schemas.microsoft.com/office/drawing/2014/main" id="{24729CB3-B43B-4E94-9A0B-322DF1FD5707}"/>
-              </a:ext>
-            </a:extLst>
-          </p:cNvPr>
-          <p:cNvSpPr>
-            <a:spLocks xmlns:a="http://schemas.openxmlformats.org/drawingml/2006/main" noGrp="1"/>
-          </p:cNvSpPr>
-          <p:nvPr/>
-        </p:nvSpPr>
-        <p:spPr>
-          <a:xfrm xmlns:a="http://schemas.openxmlformats.org/drawingml/2006/main">
-            <a:off x="8277225" y="4829175"/>
+          <p:cNvPr id="34" name="">
+            <a:extLst xmlns:a="http://schemas.openxmlformats.org/drawingml/2006/main">
+              <a:ext uri="{FF2B5EF4-FFF2-40B4-BE49-F238E27FC236}">
+                <a16:creationId xmlns:a16="http://schemas.microsoft.com/office/drawing/2014/main" id="{F093C4EA-C234-4F46-90D6-898CBB8D5823}"/>
+              </a:ext>
+            </a:extLst>
+          </p:cNvPr>
+          <p:cNvSpPr>
+            <a:spLocks xmlns:a="http://schemas.openxmlformats.org/drawingml/2006/main" noGrp="1"/>
+          </p:cNvSpPr>
+          <p:nvPr/>
+        </p:nvSpPr>
+        <p:spPr>
+          <a:xfrm xmlns:a="http://schemas.openxmlformats.org/drawingml/2006/main">
+            <a:off x="8277225" y="4886325"/>
             <a:ext cx="323850" cy="266700"/>
           </a:xfrm>
           <a:prstGeom xmlns:a="http://schemas.openxmlformats.org/drawingml/2006/main" prst="rect">
@@ -16835,21 +17140,21 @@
       </p:sp>
       <p:sp>
         <p:nvSpPr>
-          <p:cNvPr id="34" name="">
-            <a:extLst xmlns:a="http://schemas.openxmlformats.org/drawingml/2006/main">
-              <a:ext uri="{FF2B5EF4-FFF2-40B4-BE49-F238E27FC236}">
-                <a16:creationId xmlns:a16="http://schemas.microsoft.com/office/drawing/2014/main" id="{B71F001F-B1BD-4D69-9CA4-99CB25FBF5C4}"/>
-              </a:ext>
-            </a:extLst>
-          </p:cNvPr>
-          <p:cNvSpPr>
-            <a:spLocks xmlns:a="http://schemas.openxmlformats.org/drawingml/2006/main" noGrp="1"/>
-          </p:cNvSpPr>
-          <p:nvPr/>
-        </p:nvSpPr>
-        <p:spPr>
-          <a:xfrm xmlns:a="http://schemas.openxmlformats.org/drawingml/2006/main">
-            <a:off x="8677275" y="4829175"/>
+          <p:cNvPr id="35" name="">
+            <a:extLst xmlns:a="http://schemas.openxmlformats.org/drawingml/2006/main">
+              <a:ext uri="{FF2B5EF4-FFF2-40B4-BE49-F238E27FC236}">
+                <a16:creationId xmlns:a16="http://schemas.microsoft.com/office/drawing/2014/main" id="{D21F63C4-63F1-4641-B657-A8278FA7A487}"/>
+              </a:ext>
+            </a:extLst>
+          </p:cNvPr>
+          <p:cNvSpPr>
+            <a:spLocks xmlns:a="http://schemas.openxmlformats.org/drawingml/2006/main" noGrp="1"/>
+          </p:cNvSpPr>
+          <p:nvPr/>
+        </p:nvSpPr>
+        <p:spPr>
+          <a:xfrm xmlns:a="http://schemas.openxmlformats.org/drawingml/2006/main">
+            <a:off x="8677275" y="4886325"/>
             <a:ext cx="2714625" cy="266700"/>
           </a:xfrm>
           <a:prstGeom xmlns:a="http://schemas.openxmlformats.org/drawingml/2006/main" prst="rect">
@@ -16896,22 +17201,22 @@
       </p:sp>
       <p:sp>
         <p:nvSpPr>
-          <p:cNvPr id="35" name="">
-            <a:extLst xmlns:a="http://schemas.openxmlformats.org/drawingml/2006/main">
-              <a:ext uri="{FF2B5EF4-FFF2-40B4-BE49-F238E27FC236}">
-                <a16:creationId xmlns:a16="http://schemas.microsoft.com/office/drawing/2014/main" id="{32FFA958-3658-48A9-92A9-B78402C9DFDB}"/>
-              </a:ext>
-            </a:extLst>
-          </p:cNvPr>
-          <p:cNvSpPr>
-            <a:spLocks xmlns:a="http://schemas.openxmlformats.org/drawingml/2006/main" noGrp="1"/>
-          </p:cNvSpPr>
-          <p:nvPr/>
-        </p:nvSpPr>
-        <p:spPr>
-          <a:xfrm xmlns:a="http://schemas.openxmlformats.org/drawingml/2006/main">
-            <a:off x="8315325" y="5172075"/>
-            <a:ext cx="3038475" cy="552450"/>
+          <p:cNvPr id="36" name="">
+            <a:extLst xmlns:a="http://schemas.openxmlformats.org/drawingml/2006/main">
+              <a:ext uri="{FF2B5EF4-FFF2-40B4-BE49-F238E27FC236}">
+                <a16:creationId xmlns:a16="http://schemas.microsoft.com/office/drawing/2014/main" id="{2EBA34CD-BBD7-4185-95AA-0E1DBF171349}"/>
+              </a:ext>
+            </a:extLst>
+          </p:cNvPr>
+          <p:cNvSpPr>
+            <a:spLocks xmlns:a="http://schemas.openxmlformats.org/drawingml/2006/main" noGrp="1"/>
+          </p:cNvSpPr>
+          <p:nvPr/>
+        </p:nvSpPr>
+        <p:spPr>
+          <a:xfrm xmlns:a="http://schemas.openxmlformats.org/drawingml/2006/main">
+            <a:off x="8315325" y="5229225"/>
+            <a:ext cx="3038475" cy="762000"/>
           </a:xfrm>
           <a:prstGeom xmlns:a="http://schemas.openxmlformats.org/drawingml/2006/main" prst="rect">
             <a:avLst/>
@@ -16958,7 +17263,7 @@
     </p:spTree>
     <p:extLst>
       <p:ext uri="{BB962C8B-B14F-4D97-AF65-F5344CB8AC3E}">
-        <p14:creationId xmlns:p14="http://schemas.microsoft.com/office/powerpoint/2010/main" val="1408079376"/>
+        <p14:creationId xmlns:p14="http://schemas.microsoft.com/office/powerpoint/2010/main" val="949190865"/>
       </p:ext>
     </p:extLst>
   </p:cSld>
@@ -16986,10 +17291,10 @@
       </p:grpSpPr>
       <p:sp>
         <p:nvSpPr>
-          <p:cNvPr id="21" name="">
-            <a:extLst xmlns:a="http://schemas.openxmlformats.org/drawingml/2006/main">
-              <a:ext uri="{FF2B5EF4-FFF2-40B4-BE49-F238E27FC236}">
-                <a16:creationId xmlns:a16="http://schemas.microsoft.com/office/drawing/2014/main" id="{1F47FE59-2D75-4737-94BF-469ACEB30B00}"/>
+          <p:cNvPr id="22" name="">
+            <a:extLst xmlns:a="http://schemas.openxmlformats.org/drawingml/2006/main">
+              <a:ext uri="{FF2B5EF4-FFF2-40B4-BE49-F238E27FC236}">
+                <a16:creationId xmlns:a16="http://schemas.microsoft.com/office/drawing/2014/main" id="{02788F43-17A7-42C5-9D32-CFF4062AB6B0}"/>
               </a:ext>
             </a:extLst>
           </p:cNvPr>
@@ -17050,7 +17355,7 @@
           <p:cNvPr id="2" name="">
             <a:extLst xmlns:a="http://schemas.openxmlformats.org/drawingml/2006/main">
               <a:ext uri="{FF2B5EF4-FFF2-40B4-BE49-F238E27FC236}">
-                <a16:creationId xmlns:a16="http://schemas.microsoft.com/office/drawing/2014/main" id="{5B3A7242-2F36-43C9-91C7-3D34B700AD0B}"/>
+                <a16:creationId xmlns:a16="http://schemas.microsoft.com/office/drawing/2014/main" id="{6273AC78-83F8-4FC4-9FC7-86825B07D2ED}"/>
               </a:ext>
             </a:extLst>
           </p:cNvPr>
@@ -17111,7 +17416,7 @@
           <p:cNvPr id="3" name="">
             <a:extLst xmlns:a="http://schemas.openxmlformats.org/drawingml/2006/main">
               <a:ext uri="{FF2B5EF4-FFF2-40B4-BE49-F238E27FC236}">
-                <a16:creationId xmlns:a16="http://schemas.microsoft.com/office/drawing/2014/main" id="{32C550F0-58F3-4E83-B19A-3CDD28DF858E}"/>
+                <a16:creationId xmlns:a16="http://schemas.microsoft.com/office/drawing/2014/main" id="{9B21DA57-6653-44AD-A91E-2BEE70B868C0}"/>
               </a:ext>
             </a:extLst>
           </p:cNvPr>
@@ -17172,7 +17477,7 @@
           <p:cNvPr id="4" name="">
             <a:extLst xmlns:a="http://schemas.openxmlformats.org/drawingml/2006/main">
               <a:ext uri="{FF2B5EF4-FFF2-40B4-BE49-F238E27FC236}">
-                <a16:creationId xmlns:a16="http://schemas.microsoft.com/office/drawing/2014/main" id="{753AD108-7567-4090-9023-BFB22AEA09BF}"/>
+                <a16:creationId xmlns:a16="http://schemas.microsoft.com/office/drawing/2014/main" id="{F0CBC368-E94F-4027-AFF7-509F664E13CB}"/>
               </a:ext>
             </a:extLst>
           </p:cNvPr>
@@ -17204,7 +17509,7 @@
           <p:cNvPr id="5" name="">
             <a:extLst xmlns:a="http://schemas.openxmlformats.org/drawingml/2006/main">
               <a:ext uri="{FF2B5EF4-FFF2-40B4-BE49-F238E27FC236}">
-                <a16:creationId xmlns:a16="http://schemas.microsoft.com/office/drawing/2014/main" id="{0C8736AA-D4DF-4797-A1E7-51CF0AC71F83}"/>
+                <a16:creationId xmlns:a16="http://schemas.microsoft.com/office/drawing/2014/main" id="{0FC890A1-9955-4873-B3DB-FCDFE0D7D2C2}"/>
               </a:ext>
             </a:extLst>
           </p:cNvPr>
@@ -17265,7 +17570,7 @@
           <p:cNvPr id="6" name="">
             <a:extLst xmlns:a="http://schemas.openxmlformats.org/drawingml/2006/main">
               <a:ext uri="{FF2B5EF4-FFF2-40B4-BE49-F238E27FC236}">
-                <a16:creationId xmlns:a16="http://schemas.microsoft.com/office/drawing/2014/main" id="{02BCC525-E5B6-4127-B6A3-F4E5F22108D0}"/>
+                <a16:creationId xmlns:a16="http://schemas.microsoft.com/office/drawing/2014/main" id="{D60EBB80-6A02-47ED-AAD4-A9431032C5ED}"/>
               </a:ext>
             </a:extLst>
           </p:cNvPr>
@@ -17326,7 +17631,7 @@
           <p:cNvPr id="7" name="">
             <a:extLst xmlns:a="http://schemas.openxmlformats.org/drawingml/2006/main">
               <a:ext uri="{FF2B5EF4-FFF2-40B4-BE49-F238E27FC236}">
-                <a16:creationId xmlns:a16="http://schemas.microsoft.com/office/drawing/2014/main" id="{40F57077-5E0F-45E0-8738-67A83A72D85C}"/>
+                <a16:creationId xmlns:a16="http://schemas.microsoft.com/office/drawing/2014/main" id="{8D97C692-D289-4A2E-967B-2D335167FB0B}"/>
               </a:ext>
             </a:extLst>
           </p:cNvPr>
@@ -17387,18 +17692,79 @@
           <p:cNvPr id="8" name="">
             <a:extLst xmlns:a="http://schemas.openxmlformats.org/drawingml/2006/main">
               <a:ext uri="{FF2B5EF4-FFF2-40B4-BE49-F238E27FC236}">
-                <a16:creationId xmlns:a16="http://schemas.microsoft.com/office/drawing/2014/main" id="{3ABB6BF0-C3DB-4D58-81BC-5C125C423DBA}"/>
-              </a:ext>
-            </a:extLst>
-          </p:cNvPr>
-          <p:cNvSpPr>
-            <a:spLocks xmlns:a="http://schemas.openxmlformats.org/drawingml/2006/main" noGrp="1"/>
-          </p:cNvSpPr>
-          <p:nvPr/>
-        </p:nvSpPr>
-        <p:spPr>
-          <a:xfrm xmlns:a="http://schemas.openxmlformats.org/drawingml/2006/main">
-            <a:off x="809625" y="1762125"/>
+                <a16:creationId xmlns:a16="http://schemas.microsoft.com/office/drawing/2014/main" id="{97E284FB-AB7C-4465-969B-DDDED09C7328}"/>
+              </a:ext>
+            </a:extLst>
+          </p:cNvPr>
+          <p:cNvSpPr>
+            <a:spLocks xmlns:a="http://schemas.openxmlformats.org/drawingml/2006/main" noGrp="1"/>
+          </p:cNvSpPr>
+          <p:nvPr/>
+        </p:nvSpPr>
+        <p:spPr>
+          <a:xfrm xmlns:a="http://schemas.openxmlformats.org/drawingml/2006/main">
+            <a:off x="809625" y="1571625"/>
+            <a:ext cx="10287000" cy="285750"/>
+          </a:xfrm>
+          <a:prstGeom xmlns:a="http://schemas.openxmlformats.org/drawingml/2006/main" prst="rect">
+            <a:avLst/>
+          </a:prstGeom>
+          <a:noFill xmlns:a="http://schemas.openxmlformats.org/drawingml/2006/main"/>
+          <a:ln xmlns:a="http://schemas.openxmlformats.org/drawingml/2006/main" w="0">
+            <a:noFill/>
+          </a:ln>
+        </p:spPr>
+        <p:txBody>
+          <a:bodyPr xmlns:a="http://schemas.openxmlformats.org/drawingml/2006/main" wrap="square" lIns="0" tIns="0" rIns="0" bIns="0" anchor="t">
+            <a:noAutofit/>
+          </a:bodyPr>
+          <a:lstStyle xmlns:a="http://schemas.openxmlformats.org/drawingml/2006/main"/>
+          <a:p xmlns:a="http://schemas.openxmlformats.org/drawingml/2006/main">
+            <a:pPr algn="l">
+              <a:lnSpc>
+                <a:spcPct val="112000"/>
+              </a:lnSpc>
+              <a:buNone/>
+              <a:defRPr sz="1275" b="0">
+                <a:solidFill>
+                  <a:srgbClr val="34373D"/>
+                </a:solidFill>
+                <a:latin typeface="IBM Plex Sans KR"/>
+                <a:ea typeface="IBM Plex Sans KR"/>
+                <a:cs typeface="IBM Plex Sans KR"/>
+              </a:defRPr>
+            </a:pPr>
+            <a:r>
+              <a:rPr sz="1275" b="0">
+                <a:solidFill>
+                  <a:srgbClr val="34373D"/>
+                </a:solidFill>
+                <a:latin typeface="IBM Plex Sans KR"/>
+                <a:ea typeface="IBM Plex Sans KR"/>
+                <a:cs typeface="IBM Plex Sans KR"/>
+              </a:rPr>
+              <a:t>AI에게 나누어 요청한 순서가 코드의 1~6번 블록으로 이어져요.</a:t>
+            </a:r>
+          </a:p>
+        </p:txBody>
+      </p:sp>
+      <p:sp>
+        <p:nvSpPr>
+          <p:cNvPr id="9" name="">
+            <a:extLst xmlns:a="http://schemas.openxmlformats.org/drawingml/2006/main">
+              <a:ext uri="{FF2B5EF4-FFF2-40B4-BE49-F238E27FC236}">
+                <a16:creationId xmlns:a16="http://schemas.microsoft.com/office/drawing/2014/main" id="{46B5F7FB-2422-4F4B-83C5-BA33A1796BEC}"/>
+              </a:ext>
+            </a:extLst>
+          </p:cNvPr>
+          <p:cNvSpPr>
+            <a:spLocks xmlns:a="http://schemas.openxmlformats.org/drawingml/2006/main" noGrp="1"/>
+          </p:cNvSpPr>
+          <p:nvPr/>
+        </p:nvSpPr>
+        <p:spPr>
+          <a:xfrm xmlns:a="http://schemas.openxmlformats.org/drawingml/2006/main">
+            <a:off x="809625" y="1952625"/>
             <a:ext cx="742950" cy="590550"/>
           </a:xfrm>
           <a:prstGeom xmlns:a="http://schemas.openxmlformats.org/drawingml/2006/main" prst="rect">
@@ -17445,21 +17811,21 @@
       </p:sp>
       <p:sp>
         <p:nvSpPr>
-          <p:cNvPr id="9" name="">
-            <a:extLst xmlns:a="http://schemas.openxmlformats.org/drawingml/2006/main">
-              <a:ext uri="{FF2B5EF4-FFF2-40B4-BE49-F238E27FC236}">
-                <a16:creationId xmlns:a16="http://schemas.microsoft.com/office/drawing/2014/main" id="{1907FDC7-005F-4151-A8B7-BE826EDFC62E}"/>
-              </a:ext>
-            </a:extLst>
-          </p:cNvPr>
-          <p:cNvSpPr>
-            <a:spLocks xmlns:a="http://schemas.openxmlformats.org/drawingml/2006/main" noGrp="1"/>
-          </p:cNvSpPr>
-          <p:nvPr/>
-        </p:nvSpPr>
-        <p:spPr>
-          <a:xfrm xmlns:a="http://schemas.openxmlformats.org/drawingml/2006/main">
-            <a:off x="1714500" y="1762125"/>
+          <p:cNvPr id="10" name="">
+            <a:extLst xmlns:a="http://schemas.openxmlformats.org/drawingml/2006/main">
+              <a:ext uri="{FF2B5EF4-FFF2-40B4-BE49-F238E27FC236}">
+                <a16:creationId xmlns:a16="http://schemas.microsoft.com/office/drawing/2014/main" id="{1A544DC2-3818-4D0A-B2AA-2F58AF4E420E}"/>
+              </a:ext>
+            </a:extLst>
+          </p:cNvPr>
+          <p:cNvSpPr>
+            <a:spLocks xmlns:a="http://schemas.openxmlformats.org/drawingml/2006/main" noGrp="1"/>
+          </p:cNvSpPr>
+          <p:nvPr/>
+        </p:nvSpPr>
+        <p:spPr>
+          <a:xfrm xmlns:a="http://schemas.openxmlformats.org/drawingml/2006/main">
+            <a:off x="1714500" y="1952625"/>
             <a:ext cx="2667000" cy="590550"/>
           </a:xfrm>
           <a:prstGeom xmlns:a="http://schemas.openxmlformats.org/drawingml/2006/main" prst="rect">
@@ -17506,21 +17872,21 @@
       </p:sp>
       <p:sp>
         <p:nvSpPr>
-          <p:cNvPr id="10" name="">
-            <a:extLst xmlns:a="http://schemas.openxmlformats.org/drawingml/2006/main">
-              <a:ext uri="{FF2B5EF4-FFF2-40B4-BE49-F238E27FC236}">
-                <a16:creationId xmlns:a16="http://schemas.microsoft.com/office/drawing/2014/main" id="{C819D5D4-2A01-4CBB-B9EF-E6B2C0712106}"/>
-              </a:ext>
-            </a:extLst>
-          </p:cNvPr>
-          <p:cNvSpPr>
-            <a:spLocks xmlns:a="http://schemas.openxmlformats.org/drawingml/2006/main" noGrp="1"/>
-          </p:cNvSpPr>
-          <p:nvPr/>
-        </p:nvSpPr>
-        <p:spPr>
-          <a:xfrm xmlns:a="http://schemas.openxmlformats.org/drawingml/2006/main">
-            <a:off x="4429125" y="1762125"/>
+          <p:cNvPr id="11" name="">
+            <a:extLst xmlns:a="http://schemas.openxmlformats.org/drawingml/2006/main">
+              <a:ext uri="{FF2B5EF4-FFF2-40B4-BE49-F238E27FC236}">
+                <a16:creationId xmlns:a16="http://schemas.microsoft.com/office/drawing/2014/main" id="{256BBF18-4E6C-4FD5-8647-5A06AF98F1CD}"/>
+              </a:ext>
+            </a:extLst>
+          </p:cNvPr>
+          <p:cNvSpPr>
+            <a:spLocks xmlns:a="http://schemas.openxmlformats.org/drawingml/2006/main" noGrp="1"/>
+          </p:cNvSpPr>
+          <p:nvPr/>
+        </p:nvSpPr>
+        <p:spPr>
+          <a:xfrm xmlns:a="http://schemas.openxmlformats.org/drawingml/2006/main">
+            <a:off x="4429125" y="1952625"/>
             <a:ext cx="6381750" cy="590550"/>
           </a:xfrm>
           <a:prstGeom xmlns:a="http://schemas.openxmlformats.org/drawingml/2006/main" prst="rect">
@@ -17567,21 +17933,21 @@
       </p:sp>
       <p:sp>
         <p:nvSpPr>
-          <p:cNvPr id="11" name="">
-            <a:extLst xmlns:a="http://schemas.openxmlformats.org/drawingml/2006/main">
-              <a:ext uri="{FF2B5EF4-FFF2-40B4-BE49-F238E27FC236}">
-                <a16:creationId xmlns:a16="http://schemas.microsoft.com/office/drawing/2014/main" id="{89114332-028B-4997-91F3-00942B12A83F}"/>
-              </a:ext>
-            </a:extLst>
-          </p:cNvPr>
-          <p:cNvSpPr>
-            <a:spLocks xmlns:a="http://schemas.openxmlformats.org/drawingml/2006/main" noGrp="1"/>
-          </p:cNvSpPr>
-          <p:nvPr/>
-        </p:nvSpPr>
-        <p:spPr>
-          <a:xfrm xmlns:a="http://schemas.openxmlformats.org/drawingml/2006/main">
-            <a:off x="809625" y="2714625"/>
+          <p:cNvPr id="12" name="">
+            <a:extLst xmlns:a="http://schemas.openxmlformats.org/drawingml/2006/main">
+              <a:ext uri="{FF2B5EF4-FFF2-40B4-BE49-F238E27FC236}">
+                <a16:creationId xmlns:a16="http://schemas.microsoft.com/office/drawing/2014/main" id="{A866A851-4850-4511-8955-32EF6001EB06}"/>
+              </a:ext>
+            </a:extLst>
+          </p:cNvPr>
+          <p:cNvSpPr>
+            <a:spLocks xmlns:a="http://schemas.openxmlformats.org/drawingml/2006/main" noGrp="1"/>
+          </p:cNvSpPr>
+          <p:nvPr/>
+        </p:nvSpPr>
+        <p:spPr>
+          <a:xfrm xmlns:a="http://schemas.openxmlformats.org/drawingml/2006/main">
+            <a:off x="809625" y="2828925"/>
             <a:ext cx="742950" cy="590550"/>
           </a:xfrm>
           <a:prstGeom xmlns:a="http://schemas.openxmlformats.org/drawingml/2006/main" prst="rect">
@@ -17628,21 +17994,21 @@
       </p:sp>
       <p:sp>
         <p:nvSpPr>
-          <p:cNvPr id="12" name="">
-            <a:extLst xmlns:a="http://schemas.openxmlformats.org/drawingml/2006/main">
-              <a:ext uri="{FF2B5EF4-FFF2-40B4-BE49-F238E27FC236}">
-                <a16:creationId xmlns:a16="http://schemas.microsoft.com/office/drawing/2014/main" id="{0027ADC4-CF9E-45AD-B2F7-28497F212A5B}"/>
-              </a:ext>
-            </a:extLst>
-          </p:cNvPr>
-          <p:cNvSpPr>
-            <a:spLocks xmlns:a="http://schemas.openxmlformats.org/drawingml/2006/main" noGrp="1"/>
-          </p:cNvSpPr>
-          <p:nvPr/>
-        </p:nvSpPr>
-        <p:spPr>
-          <a:xfrm xmlns:a="http://schemas.openxmlformats.org/drawingml/2006/main">
-            <a:off x="1714500" y="2714625"/>
+          <p:cNvPr id="13" name="">
+            <a:extLst xmlns:a="http://schemas.openxmlformats.org/drawingml/2006/main">
+              <a:ext uri="{FF2B5EF4-FFF2-40B4-BE49-F238E27FC236}">
+                <a16:creationId xmlns:a16="http://schemas.microsoft.com/office/drawing/2014/main" id="{2668EBC1-D24B-4507-B953-4FD37819C849}"/>
+              </a:ext>
+            </a:extLst>
+          </p:cNvPr>
+          <p:cNvSpPr>
+            <a:spLocks xmlns:a="http://schemas.openxmlformats.org/drawingml/2006/main" noGrp="1"/>
+          </p:cNvSpPr>
+          <p:nvPr/>
+        </p:nvSpPr>
+        <p:spPr>
+          <a:xfrm xmlns:a="http://schemas.openxmlformats.org/drawingml/2006/main">
+            <a:off x="1714500" y="2828925"/>
             <a:ext cx="2667000" cy="590550"/>
           </a:xfrm>
           <a:prstGeom xmlns:a="http://schemas.openxmlformats.org/drawingml/2006/main" prst="rect">
@@ -17689,21 +18055,21 @@
       </p:sp>
       <p:sp>
         <p:nvSpPr>
-          <p:cNvPr id="13" name="">
-            <a:extLst xmlns:a="http://schemas.openxmlformats.org/drawingml/2006/main">
-              <a:ext uri="{FF2B5EF4-FFF2-40B4-BE49-F238E27FC236}">
-                <a16:creationId xmlns:a16="http://schemas.microsoft.com/office/drawing/2014/main" id="{0F5DF4B1-2FA7-4778-B266-A4561F9B9F0D}"/>
-              </a:ext>
-            </a:extLst>
-          </p:cNvPr>
-          <p:cNvSpPr>
-            <a:spLocks xmlns:a="http://schemas.openxmlformats.org/drawingml/2006/main" noGrp="1"/>
-          </p:cNvSpPr>
-          <p:nvPr/>
-        </p:nvSpPr>
-        <p:spPr>
-          <a:xfrm xmlns:a="http://schemas.openxmlformats.org/drawingml/2006/main">
-            <a:off x="4429125" y="2714625"/>
+          <p:cNvPr id="14" name="">
+            <a:extLst xmlns:a="http://schemas.openxmlformats.org/drawingml/2006/main">
+              <a:ext uri="{FF2B5EF4-FFF2-40B4-BE49-F238E27FC236}">
+                <a16:creationId xmlns:a16="http://schemas.microsoft.com/office/drawing/2014/main" id="{DAB20ED3-A0F2-4367-99F4-5B439968AE66}"/>
+              </a:ext>
+            </a:extLst>
+          </p:cNvPr>
+          <p:cNvSpPr>
+            <a:spLocks xmlns:a="http://schemas.openxmlformats.org/drawingml/2006/main" noGrp="1"/>
+          </p:cNvSpPr>
+          <p:nvPr/>
+        </p:nvSpPr>
+        <p:spPr>
+          <a:xfrm xmlns:a="http://schemas.openxmlformats.org/drawingml/2006/main">
+            <a:off x="4429125" y="2828925"/>
             <a:ext cx="6381750" cy="590550"/>
           </a:xfrm>
           <a:prstGeom xmlns:a="http://schemas.openxmlformats.org/drawingml/2006/main" prst="rect">
@@ -17750,21 +18116,21 @@
       </p:sp>
       <p:sp>
         <p:nvSpPr>
-          <p:cNvPr id="14" name="">
-            <a:extLst xmlns:a="http://schemas.openxmlformats.org/drawingml/2006/main">
-              <a:ext uri="{FF2B5EF4-FFF2-40B4-BE49-F238E27FC236}">
-                <a16:creationId xmlns:a16="http://schemas.microsoft.com/office/drawing/2014/main" id="{C07AA0DD-6A6C-4121-AAD5-D0D703818E85}"/>
-              </a:ext>
-            </a:extLst>
-          </p:cNvPr>
-          <p:cNvSpPr>
-            <a:spLocks xmlns:a="http://schemas.openxmlformats.org/drawingml/2006/main" noGrp="1"/>
-          </p:cNvSpPr>
-          <p:nvPr/>
-        </p:nvSpPr>
-        <p:spPr>
-          <a:xfrm xmlns:a="http://schemas.openxmlformats.org/drawingml/2006/main">
-            <a:off x="809625" y="3667125"/>
+          <p:cNvPr id="15" name="">
+            <a:extLst xmlns:a="http://schemas.openxmlformats.org/drawingml/2006/main">
+              <a:ext uri="{FF2B5EF4-FFF2-40B4-BE49-F238E27FC236}">
+                <a16:creationId xmlns:a16="http://schemas.microsoft.com/office/drawing/2014/main" id="{74988E3D-F6FC-433C-BEFC-2FAB1B5E891D}"/>
+              </a:ext>
+            </a:extLst>
+          </p:cNvPr>
+          <p:cNvSpPr>
+            <a:spLocks xmlns:a="http://schemas.openxmlformats.org/drawingml/2006/main" noGrp="1"/>
+          </p:cNvSpPr>
+          <p:nvPr/>
+        </p:nvSpPr>
+        <p:spPr>
+          <a:xfrm xmlns:a="http://schemas.openxmlformats.org/drawingml/2006/main">
+            <a:off x="809625" y="3705225"/>
             <a:ext cx="742950" cy="590550"/>
           </a:xfrm>
           <a:prstGeom xmlns:a="http://schemas.openxmlformats.org/drawingml/2006/main" prst="rect">
@@ -17811,21 +18177,21 @@
       </p:sp>
       <p:sp>
         <p:nvSpPr>
-          <p:cNvPr id="15" name="">
-            <a:extLst xmlns:a="http://schemas.openxmlformats.org/drawingml/2006/main">
-              <a:ext uri="{FF2B5EF4-FFF2-40B4-BE49-F238E27FC236}">
-                <a16:creationId xmlns:a16="http://schemas.microsoft.com/office/drawing/2014/main" id="{88CC48A2-8620-416A-8039-7FCFFFD3F0FC}"/>
-              </a:ext>
-            </a:extLst>
-          </p:cNvPr>
-          <p:cNvSpPr>
-            <a:spLocks xmlns:a="http://schemas.openxmlformats.org/drawingml/2006/main" noGrp="1"/>
-          </p:cNvSpPr>
-          <p:nvPr/>
-        </p:nvSpPr>
-        <p:spPr>
-          <a:xfrm xmlns:a="http://schemas.openxmlformats.org/drawingml/2006/main">
-            <a:off x="1714500" y="3667125"/>
+          <p:cNvPr id="16" name="">
+            <a:extLst xmlns:a="http://schemas.openxmlformats.org/drawingml/2006/main">
+              <a:ext uri="{FF2B5EF4-FFF2-40B4-BE49-F238E27FC236}">
+                <a16:creationId xmlns:a16="http://schemas.microsoft.com/office/drawing/2014/main" id="{29FD3814-5D95-49C0-9EDF-91E057F45AF8}"/>
+              </a:ext>
+            </a:extLst>
+          </p:cNvPr>
+          <p:cNvSpPr>
+            <a:spLocks xmlns:a="http://schemas.openxmlformats.org/drawingml/2006/main" noGrp="1"/>
+          </p:cNvSpPr>
+          <p:nvPr/>
+        </p:nvSpPr>
+        <p:spPr>
+          <a:xfrm xmlns:a="http://schemas.openxmlformats.org/drawingml/2006/main">
+            <a:off x="1714500" y="3705225"/>
             <a:ext cx="2667000" cy="590550"/>
           </a:xfrm>
           <a:prstGeom xmlns:a="http://schemas.openxmlformats.org/drawingml/2006/main" prst="rect">
@@ -17872,21 +18238,21 @@
       </p:sp>
       <p:sp>
         <p:nvSpPr>
-          <p:cNvPr id="16" name="">
-            <a:extLst xmlns:a="http://schemas.openxmlformats.org/drawingml/2006/main">
-              <a:ext uri="{FF2B5EF4-FFF2-40B4-BE49-F238E27FC236}">
-                <a16:creationId xmlns:a16="http://schemas.microsoft.com/office/drawing/2014/main" id="{C5A12C1F-E2EC-4BAB-B0FC-F88FB2C0763A}"/>
-              </a:ext>
-            </a:extLst>
-          </p:cNvPr>
-          <p:cNvSpPr>
-            <a:spLocks xmlns:a="http://schemas.openxmlformats.org/drawingml/2006/main" noGrp="1"/>
-          </p:cNvSpPr>
-          <p:nvPr/>
-        </p:nvSpPr>
-        <p:spPr>
-          <a:xfrm xmlns:a="http://schemas.openxmlformats.org/drawingml/2006/main">
-            <a:off x="4429125" y="3667125"/>
+          <p:cNvPr id="17" name="">
+            <a:extLst xmlns:a="http://schemas.openxmlformats.org/drawingml/2006/main">
+              <a:ext uri="{FF2B5EF4-FFF2-40B4-BE49-F238E27FC236}">
+                <a16:creationId xmlns:a16="http://schemas.microsoft.com/office/drawing/2014/main" id="{E7FF1844-CEB2-4038-9AE0-541ADC774231}"/>
+              </a:ext>
+            </a:extLst>
+          </p:cNvPr>
+          <p:cNvSpPr>
+            <a:spLocks xmlns:a="http://schemas.openxmlformats.org/drawingml/2006/main" noGrp="1"/>
+          </p:cNvSpPr>
+          <p:nvPr/>
+        </p:nvSpPr>
+        <p:spPr>
+          <a:xfrm xmlns:a="http://schemas.openxmlformats.org/drawingml/2006/main">
+            <a:off x="4429125" y="3705225"/>
             <a:ext cx="6381750" cy="590550"/>
           </a:xfrm>
           <a:prstGeom xmlns:a="http://schemas.openxmlformats.org/drawingml/2006/main" prst="rect">
@@ -17933,21 +18299,21 @@
       </p:sp>
       <p:sp>
         <p:nvSpPr>
-          <p:cNvPr id="17" name="">
-            <a:extLst xmlns:a="http://schemas.openxmlformats.org/drawingml/2006/main">
-              <a:ext uri="{FF2B5EF4-FFF2-40B4-BE49-F238E27FC236}">
-                <a16:creationId xmlns:a16="http://schemas.microsoft.com/office/drawing/2014/main" id="{6E1588F6-E5B7-44EB-A3A2-A86FFD0DF59E}"/>
-              </a:ext>
-            </a:extLst>
-          </p:cNvPr>
-          <p:cNvSpPr>
-            <a:spLocks xmlns:a="http://schemas.openxmlformats.org/drawingml/2006/main" noGrp="1"/>
-          </p:cNvSpPr>
-          <p:nvPr/>
-        </p:nvSpPr>
-        <p:spPr>
-          <a:xfrm xmlns:a="http://schemas.openxmlformats.org/drawingml/2006/main">
-            <a:off x="809625" y="4619625"/>
+          <p:cNvPr id="18" name="">
+            <a:extLst xmlns:a="http://schemas.openxmlformats.org/drawingml/2006/main">
+              <a:ext uri="{FF2B5EF4-FFF2-40B4-BE49-F238E27FC236}">
+                <a16:creationId xmlns:a16="http://schemas.microsoft.com/office/drawing/2014/main" id="{178D5AA1-6BDF-4CE9-A7C8-D74DBD64F667}"/>
+              </a:ext>
+            </a:extLst>
+          </p:cNvPr>
+          <p:cNvSpPr>
+            <a:spLocks xmlns:a="http://schemas.openxmlformats.org/drawingml/2006/main" noGrp="1"/>
+          </p:cNvSpPr>
+          <p:nvPr/>
+        </p:nvSpPr>
+        <p:spPr>
+          <a:xfrm xmlns:a="http://schemas.openxmlformats.org/drawingml/2006/main">
+            <a:off x="809625" y="4581525"/>
             <a:ext cx="742950" cy="590550"/>
           </a:xfrm>
           <a:prstGeom xmlns:a="http://schemas.openxmlformats.org/drawingml/2006/main" prst="rect">
@@ -17994,21 +18360,21 @@
       </p:sp>
       <p:sp>
         <p:nvSpPr>
-          <p:cNvPr id="18" name="">
-            <a:extLst xmlns:a="http://schemas.openxmlformats.org/drawingml/2006/main">
-              <a:ext uri="{FF2B5EF4-FFF2-40B4-BE49-F238E27FC236}">
-                <a16:creationId xmlns:a16="http://schemas.microsoft.com/office/drawing/2014/main" id="{9753D858-0F41-4122-A7C8-8AB9C28AFFC1}"/>
-              </a:ext>
-            </a:extLst>
-          </p:cNvPr>
-          <p:cNvSpPr>
-            <a:spLocks xmlns:a="http://schemas.openxmlformats.org/drawingml/2006/main" noGrp="1"/>
-          </p:cNvSpPr>
-          <p:nvPr/>
-        </p:nvSpPr>
-        <p:spPr>
-          <a:xfrm xmlns:a="http://schemas.openxmlformats.org/drawingml/2006/main">
-            <a:off x="1714500" y="4619625"/>
+          <p:cNvPr id="19" name="">
+            <a:extLst xmlns:a="http://schemas.openxmlformats.org/drawingml/2006/main">
+              <a:ext uri="{FF2B5EF4-FFF2-40B4-BE49-F238E27FC236}">
+                <a16:creationId xmlns:a16="http://schemas.microsoft.com/office/drawing/2014/main" id="{13DCF279-4ED0-4246-8817-270131FF70E9}"/>
+              </a:ext>
+            </a:extLst>
+          </p:cNvPr>
+          <p:cNvSpPr>
+            <a:spLocks xmlns:a="http://schemas.openxmlformats.org/drawingml/2006/main" noGrp="1"/>
+          </p:cNvSpPr>
+          <p:nvPr/>
+        </p:nvSpPr>
+        <p:spPr>
+          <a:xfrm xmlns:a="http://schemas.openxmlformats.org/drawingml/2006/main">
+            <a:off x="1714500" y="4581525"/>
             <a:ext cx="2667000" cy="590550"/>
           </a:xfrm>
           <a:prstGeom xmlns:a="http://schemas.openxmlformats.org/drawingml/2006/main" prst="rect">
@@ -18055,21 +18421,21 @@
       </p:sp>
       <p:sp>
         <p:nvSpPr>
-          <p:cNvPr id="19" name="">
-            <a:extLst xmlns:a="http://schemas.openxmlformats.org/drawingml/2006/main">
-              <a:ext uri="{FF2B5EF4-FFF2-40B4-BE49-F238E27FC236}">
-                <a16:creationId xmlns:a16="http://schemas.microsoft.com/office/drawing/2014/main" id="{5656BCE1-24FE-4227-A81B-2C470D0E616B}"/>
-              </a:ext>
-            </a:extLst>
-          </p:cNvPr>
-          <p:cNvSpPr>
-            <a:spLocks xmlns:a="http://schemas.openxmlformats.org/drawingml/2006/main" noGrp="1"/>
-          </p:cNvSpPr>
-          <p:nvPr/>
-        </p:nvSpPr>
-        <p:spPr>
-          <a:xfrm xmlns:a="http://schemas.openxmlformats.org/drawingml/2006/main">
-            <a:off x="4429125" y="4619625"/>
+          <p:cNvPr id="20" name="">
+            <a:extLst xmlns:a="http://schemas.openxmlformats.org/drawingml/2006/main">
+              <a:ext uri="{FF2B5EF4-FFF2-40B4-BE49-F238E27FC236}">
+                <a16:creationId xmlns:a16="http://schemas.microsoft.com/office/drawing/2014/main" id="{47A4463B-6A76-4BD8-9DC5-1546683DFB5D}"/>
+              </a:ext>
+            </a:extLst>
+          </p:cNvPr>
+          <p:cNvSpPr>
+            <a:spLocks xmlns:a="http://schemas.openxmlformats.org/drawingml/2006/main" noGrp="1"/>
+          </p:cNvSpPr>
+          <p:nvPr/>
+        </p:nvSpPr>
+        <p:spPr>
+          <a:xfrm xmlns:a="http://schemas.openxmlformats.org/drawingml/2006/main">
+            <a:off x="4429125" y="4581525"/>
             <a:ext cx="6381750" cy="590550"/>
           </a:xfrm>
           <a:prstGeom xmlns:a="http://schemas.openxmlformats.org/drawingml/2006/main" prst="rect">
@@ -18116,10 +18482,10 @@
       </p:sp>
       <p:sp>
         <p:nvSpPr>
-          <p:cNvPr id="20" name="">
-            <a:extLst xmlns:a="http://schemas.openxmlformats.org/drawingml/2006/main">
-              <a:ext uri="{FF2B5EF4-FFF2-40B4-BE49-F238E27FC236}">
-                <a16:creationId xmlns:a16="http://schemas.microsoft.com/office/drawing/2014/main" id="{DACD1005-4536-4E0A-965A-C4C9B2ADE36A}"/>
+          <p:cNvPr id="21" name="">
+            <a:extLst xmlns:a="http://schemas.openxmlformats.org/drawingml/2006/main">
+              <a:ext uri="{FF2B5EF4-FFF2-40B4-BE49-F238E27FC236}">
+                <a16:creationId xmlns:a16="http://schemas.microsoft.com/office/drawing/2014/main" id="{B5855BF4-B050-4451-917A-EFED27F12282}"/>
               </a:ext>
             </a:extLst>
           </p:cNvPr>
@@ -18178,7 +18544,7 @@
     </p:spTree>
     <p:extLst>
       <p:ext uri="{BB962C8B-B14F-4D97-AF65-F5344CB8AC3E}">
-        <p14:creationId xmlns:p14="http://schemas.microsoft.com/office/powerpoint/2010/main" val="1423804929"/>
+        <p14:creationId xmlns:p14="http://schemas.microsoft.com/office/powerpoint/2010/main" val="999972585"/>
       </p:ext>
     </p:extLst>
   </p:cSld>
@@ -18209,7 +18575,7 @@
           <p:cNvPr id="23" name="">
             <a:extLst xmlns:a="http://schemas.openxmlformats.org/drawingml/2006/main">
               <a:ext uri="{FF2B5EF4-FFF2-40B4-BE49-F238E27FC236}">
-                <a16:creationId xmlns:a16="http://schemas.microsoft.com/office/drawing/2014/main" id="{4E33307A-ADB8-4E6C-A90E-63DE325A7C64}"/>
+                <a16:creationId xmlns:a16="http://schemas.microsoft.com/office/drawing/2014/main" id="{558BA11A-4994-4B03-A78F-99FE2DB98ADE}"/>
               </a:ext>
             </a:extLst>
           </p:cNvPr>
@@ -18270,7 +18636,7 @@
           <p:cNvPr id="2" name="">
             <a:extLst xmlns:a="http://schemas.openxmlformats.org/drawingml/2006/main">
               <a:ext uri="{FF2B5EF4-FFF2-40B4-BE49-F238E27FC236}">
-                <a16:creationId xmlns:a16="http://schemas.microsoft.com/office/drawing/2014/main" id="{91CA3095-8C72-40B8-8229-CD20C95934D7}"/>
+                <a16:creationId xmlns:a16="http://schemas.microsoft.com/office/drawing/2014/main" id="{1811D342-8CCF-4641-B53E-76208F513FA9}"/>
               </a:ext>
             </a:extLst>
           </p:cNvPr>
@@ -18331,7 +18697,7 @@
           <p:cNvPr id="3" name="">
             <a:extLst xmlns:a="http://schemas.openxmlformats.org/drawingml/2006/main">
               <a:ext uri="{FF2B5EF4-FFF2-40B4-BE49-F238E27FC236}">
-                <a16:creationId xmlns:a16="http://schemas.microsoft.com/office/drawing/2014/main" id="{AAB0CA68-964E-48B5-8336-6FC8E849270A}"/>
+                <a16:creationId xmlns:a16="http://schemas.microsoft.com/office/drawing/2014/main" id="{99150302-D690-43AE-B410-E8D9FC8F93C5}"/>
               </a:ext>
             </a:extLst>
           </p:cNvPr>
@@ -18392,7 +18758,7 @@
           <p:cNvPr id="4" name="">
             <a:extLst xmlns:a="http://schemas.openxmlformats.org/drawingml/2006/main">
               <a:ext uri="{FF2B5EF4-FFF2-40B4-BE49-F238E27FC236}">
-                <a16:creationId xmlns:a16="http://schemas.microsoft.com/office/drawing/2014/main" id="{922BFEEE-8F04-48B2-8268-5E52684F3ABD}"/>
+                <a16:creationId xmlns:a16="http://schemas.microsoft.com/office/drawing/2014/main" id="{62113342-5465-46F4-8E00-2156D5BB04DF}"/>
               </a:ext>
             </a:extLst>
           </p:cNvPr>
@@ -18424,7 +18790,7 @@
           <p:cNvPr id="5" name="">
             <a:extLst xmlns:a="http://schemas.openxmlformats.org/drawingml/2006/main">
               <a:ext uri="{FF2B5EF4-FFF2-40B4-BE49-F238E27FC236}">
-                <a16:creationId xmlns:a16="http://schemas.microsoft.com/office/drawing/2014/main" id="{DB24A5E1-8ABA-4A7F-9007-DD332F5BD1DE}"/>
+                <a16:creationId xmlns:a16="http://schemas.microsoft.com/office/drawing/2014/main" id="{CE7617A1-6DAE-4E54-887B-5E85E1387558}"/>
               </a:ext>
             </a:extLst>
           </p:cNvPr>
@@ -18485,7 +18851,7 @@
           <p:cNvPr id="6" name="">
             <a:extLst xmlns:a="http://schemas.openxmlformats.org/drawingml/2006/main">
               <a:ext uri="{FF2B5EF4-FFF2-40B4-BE49-F238E27FC236}">
-                <a16:creationId xmlns:a16="http://schemas.microsoft.com/office/drawing/2014/main" id="{1AA97C15-5397-4D64-B33F-E807F0BCD52C}"/>
+                <a16:creationId xmlns:a16="http://schemas.microsoft.com/office/drawing/2014/main" id="{B0F833D8-D709-41C5-879C-1103266EAB26}"/>
               </a:ext>
             </a:extLst>
           </p:cNvPr>
@@ -18546,7 +18912,7 @@
           <p:cNvPr id="7" name="">
             <a:extLst xmlns:a="http://schemas.openxmlformats.org/drawingml/2006/main">
               <a:ext uri="{FF2B5EF4-FFF2-40B4-BE49-F238E27FC236}">
-                <a16:creationId xmlns:a16="http://schemas.microsoft.com/office/drawing/2014/main" id="{05EAE1AC-C479-43E4-A69C-2432A6C6694C}"/>
+                <a16:creationId xmlns:a16="http://schemas.microsoft.com/office/drawing/2014/main" id="{2E1E91CF-2364-41CF-B85F-E8A3717DA3F8}"/>
               </a:ext>
             </a:extLst>
           </p:cNvPr>
@@ -18607,7 +18973,7 @@
           <p:cNvPr id="8" name="">
             <a:extLst xmlns:a="http://schemas.openxmlformats.org/drawingml/2006/main">
               <a:ext uri="{FF2B5EF4-FFF2-40B4-BE49-F238E27FC236}">
-                <a16:creationId xmlns:a16="http://schemas.microsoft.com/office/drawing/2014/main" id="{5F261167-65AA-4787-8E0E-937396037783}"/>
+                <a16:creationId xmlns:a16="http://schemas.microsoft.com/office/drawing/2014/main" id="{39217F53-3485-4168-8CAA-A7C3B6697807}"/>
               </a:ext>
             </a:extLst>
           </p:cNvPr>
@@ -18668,7 +19034,7 @@
           <p:cNvPr id="9" name="">
             <a:extLst xmlns:a="http://schemas.openxmlformats.org/drawingml/2006/main">
               <a:ext uri="{FF2B5EF4-FFF2-40B4-BE49-F238E27FC236}">
-                <a16:creationId xmlns:a16="http://schemas.microsoft.com/office/drawing/2014/main" id="{6A1E52FC-CB50-4AA1-9450-4D824EB68908}"/>
+                <a16:creationId xmlns:a16="http://schemas.microsoft.com/office/drawing/2014/main" id="{FDAFE3AF-C930-48D0-AAE5-D2BB2A84A043}"/>
               </a:ext>
             </a:extLst>
           </p:cNvPr>
@@ -18733,7 +19099,7 @@
           <p:cNvPr id="10" name="">
             <a:extLst xmlns:a="http://schemas.openxmlformats.org/drawingml/2006/main">
               <a:ext uri="{FF2B5EF4-FFF2-40B4-BE49-F238E27FC236}">
-                <a16:creationId xmlns:a16="http://schemas.microsoft.com/office/drawing/2014/main" id="{7982FBA2-08F0-4348-9A94-582F56E0116B}"/>
+                <a16:creationId xmlns:a16="http://schemas.microsoft.com/office/drawing/2014/main" id="{7C7D317A-1C3C-4426-B7EA-87F23610FF60}"/>
               </a:ext>
             </a:extLst>
           </p:cNvPr>
@@ -18767,7 +19133,7 @@
           <p:cNvPr id="11" name="">
             <a:extLst xmlns:a="http://schemas.openxmlformats.org/drawingml/2006/main">
               <a:ext uri="{FF2B5EF4-FFF2-40B4-BE49-F238E27FC236}">
-                <a16:creationId xmlns:a16="http://schemas.microsoft.com/office/drawing/2014/main" id="{8732EF18-FB32-482D-8FE9-48C247BBD9AC}"/>
+                <a16:creationId xmlns:a16="http://schemas.microsoft.com/office/drawing/2014/main" id="{E58D4A09-B47D-4371-9855-2A8FB5E95606}"/>
               </a:ext>
             </a:extLst>
           </p:cNvPr>
@@ -18828,7 +19194,7 @@
           <p:cNvPr id="12" name="">
             <a:extLst xmlns:a="http://schemas.openxmlformats.org/drawingml/2006/main">
               <a:ext uri="{FF2B5EF4-FFF2-40B4-BE49-F238E27FC236}">
-                <a16:creationId xmlns:a16="http://schemas.microsoft.com/office/drawing/2014/main" id="{BA40EEBD-D756-4F92-9906-2A8D69B07E2D}"/>
+                <a16:creationId xmlns:a16="http://schemas.microsoft.com/office/drawing/2014/main" id="{F983706E-CD80-4CCD-9DA6-89E3F0525465}"/>
               </a:ext>
             </a:extLst>
           </p:cNvPr>
@@ -18889,7 +19255,7 @@
           <p:cNvPr id="13" name="">
             <a:extLst xmlns:a="http://schemas.openxmlformats.org/drawingml/2006/main">
               <a:ext uri="{FF2B5EF4-FFF2-40B4-BE49-F238E27FC236}">
-                <a16:creationId xmlns:a16="http://schemas.microsoft.com/office/drawing/2014/main" id="{168E6DEC-3D77-4316-B003-D7C24F4C0B6F}"/>
+                <a16:creationId xmlns:a16="http://schemas.microsoft.com/office/drawing/2014/main" id="{11D932E0-8580-43D5-81C3-4DF85D3A6374}"/>
               </a:ext>
             </a:extLst>
           </p:cNvPr>
@@ -18950,7 +19316,7 @@
           <p:cNvPr id="14" name="">
             <a:extLst xmlns:a="http://schemas.openxmlformats.org/drawingml/2006/main">
               <a:ext uri="{FF2B5EF4-FFF2-40B4-BE49-F238E27FC236}">
-                <a16:creationId xmlns:a16="http://schemas.microsoft.com/office/drawing/2014/main" id="{C6D8F064-7850-44B7-87AA-7D8ACF762F9D}"/>
+                <a16:creationId xmlns:a16="http://schemas.microsoft.com/office/drawing/2014/main" id="{0E4195E4-CD8D-44C0-85DD-451CDDFAA17D}"/>
               </a:ext>
             </a:extLst>
           </p:cNvPr>
@@ -18984,7 +19350,7 @@
           <p:cNvPr id="15" name="">
             <a:extLst xmlns:a="http://schemas.openxmlformats.org/drawingml/2006/main">
               <a:ext uri="{FF2B5EF4-FFF2-40B4-BE49-F238E27FC236}">
-                <a16:creationId xmlns:a16="http://schemas.microsoft.com/office/drawing/2014/main" id="{9AB5FBF8-5AEB-4A89-A991-A4D945902E6E}"/>
+                <a16:creationId xmlns:a16="http://schemas.microsoft.com/office/drawing/2014/main" id="{A05F3B33-4480-4571-9587-EAEC54F56743}"/>
               </a:ext>
             </a:extLst>
           </p:cNvPr>
@@ -19045,7 +19411,7 @@
           <p:cNvPr id="16" name="">
             <a:extLst xmlns:a="http://schemas.openxmlformats.org/drawingml/2006/main">
               <a:ext uri="{FF2B5EF4-FFF2-40B4-BE49-F238E27FC236}">
-                <a16:creationId xmlns:a16="http://schemas.microsoft.com/office/drawing/2014/main" id="{1F613696-0272-4995-92D6-30977013DCB9}"/>
+                <a16:creationId xmlns:a16="http://schemas.microsoft.com/office/drawing/2014/main" id="{2C508EC2-C5D9-450E-805B-7995FDB45C23}"/>
               </a:ext>
             </a:extLst>
           </p:cNvPr>
@@ -19106,7 +19472,7 @@
           <p:cNvPr id="17" name="">
             <a:extLst xmlns:a="http://schemas.openxmlformats.org/drawingml/2006/main">
               <a:ext uri="{FF2B5EF4-FFF2-40B4-BE49-F238E27FC236}">
-                <a16:creationId xmlns:a16="http://schemas.microsoft.com/office/drawing/2014/main" id="{98479E2B-579A-44DD-86F2-D1A1D79E2DEF}"/>
+                <a16:creationId xmlns:a16="http://schemas.microsoft.com/office/drawing/2014/main" id="{28DC6EE3-0B7D-47EB-B7FA-2BEF44B00552}"/>
               </a:ext>
             </a:extLst>
           </p:cNvPr>
@@ -19167,7 +19533,7 @@
           <p:cNvPr id="18" name="">
             <a:extLst xmlns:a="http://schemas.openxmlformats.org/drawingml/2006/main">
               <a:ext uri="{FF2B5EF4-FFF2-40B4-BE49-F238E27FC236}">
-                <a16:creationId xmlns:a16="http://schemas.microsoft.com/office/drawing/2014/main" id="{EDBBB9A4-7A18-42B8-B272-30AFE4DB2BBD}"/>
+                <a16:creationId xmlns:a16="http://schemas.microsoft.com/office/drawing/2014/main" id="{EB4B9882-172E-4D3E-9D3D-1C433AA507BC}"/>
               </a:ext>
             </a:extLst>
           </p:cNvPr>
@@ -19201,7 +19567,7 @@
           <p:cNvPr id="19" name="">
             <a:extLst xmlns:a="http://schemas.openxmlformats.org/drawingml/2006/main">
               <a:ext uri="{FF2B5EF4-FFF2-40B4-BE49-F238E27FC236}">
-                <a16:creationId xmlns:a16="http://schemas.microsoft.com/office/drawing/2014/main" id="{0DAB0EE2-3741-410C-BAF3-6F89A9F3F333}"/>
+                <a16:creationId xmlns:a16="http://schemas.microsoft.com/office/drawing/2014/main" id="{DC1ACF51-85A1-4B6A-80BB-96E435921374}"/>
               </a:ext>
             </a:extLst>
           </p:cNvPr>
@@ -19262,7 +19628,7 @@
           <p:cNvPr id="20" name="">
             <a:extLst xmlns:a="http://schemas.openxmlformats.org/drawingml/2006/main">
               <a:ext uri="{FF2B5EF4-FFF2-40B4-BE49-F238E27FC236}">
-                <a16:creationId xmlns:a16="http://schemas.microsoft.com/office/drawing/2014/main" id="{C858BC41-CF1D-470F-9452-972FD090CE89}"/>
+                <a16:creationId xmlns:a16="http://schemas.microsoft.com/office/drawing/2014/main" id="{B4FA3CD5-5714-4034-9D08-5AFC8568EB0C}"/>
               </a:ext>
             </a:extLst>
           </p:cNvPr>
@@ -19323,7 +19689,7 @@
           <p:cNvPr id="21" name="">
             <a:extLst xmlns:a="http://schemas.openxmlformats.org/drawingml/2006/main">
               <a:ext uri="{FF2B5EF4-FFF2-40B4-BE49-F238E27FC236}">
-                <a16:creationId xmlns:a16="http://schemas.microsoft.com/office/drawing/2014/main" id="{16219F08-26CA-4D25-BA28-F2EC75B2D4A0}"/>
+                <a16:creationId xmlns:a16="http://schemas.microsoft.com/office/drawing/2014/main" id="{11660434-0EF5-4624-983C-93AA367A5EAA}"/>
               </a:ext>
             </a:extLst>
           </p:cNvPr>
@@ -19384,7 +19750,7 @@
           <p:cNvPr id="22" name="">
             <a:extLst xmlns:a="http://schemas.openxmlformats.org/drawingml/2006/main">
               <a:ext uri="{FF2B5EF4-FFF2-40B4-BE49-F238E27FC236}">
-                <a16:creationId xmlns:a16="http://schemas.microsoft.com/office/drawing/2014/main" id="{56BE0934-BC8E-46B4-B6F9-77D95EB2709E}"/>
+                <a16:creationId xmlns:a16="http://schemas.microsoft.com/office/drawing/2014/main" id="{A70BC223-B98A-44B2-BA7D-0F7432D2D990}"/>
               </a:ext>
             </a:extLst>
           </p:cNvPr>
@@ -19443,7 +19809,7 @@
     </p:spTree>
     <p:extLst>
       <p:ext uri="{BB962C8B-B14F-4D97-AF65-F5344CB8AC3E}">
-        <p14:creationId xmlns:p14="http://schemas.microsoft.com/office/powerpoint/2010/main" val="239957682"/>
+        <p14:creationId xmlns:p14="http://schemas.microsoft.com/office/powerpoint/2010/main" val="422851080"/>
       </p:ext>
     </p:extLst>
   </p:cSld>
@@ -19474,7 +19840,7 @@
           <p:cNvPr id="11" name="">
             <a:extLst xmlns:a="http://schemas.openxmlformats.org/drawingml/2006/main">
               <a:ext uri="{FF2B5EF4-FFF2-40B4-BE49-F238E27FC236}">
-                <a16:creationId xmlns:a16="http://schemas.microsoft.com/office/drawing/2014/main" id="{376E0F48-A6F8-4D7C-A02D-09EA6683D2F6}"/>
+                <a16:creationId xmlns:a16="http://schemas.microsoft.com/office/drawing/2014/main" id="{0D9F73A8-BAF3-4E3B-B510-5E69AF5DC59B}"/>
               </a:ext>
             </a:extLst>
           </p:cNvPr>
@@ -19535,7 +19901,7 @@
           <p:cNvPr id="2" name="">
             <a:extLst xmlns:a="http://schemas.openxmlformats.org/drawingml/2006/main">
               <a:ext uri="{FF2B5EF4-FFF2-40B4-BE49-F238E27FC236}">
-                <a16:creationId xmlns:a16="http://schemas.microsoft.com/office/drawing/2014/main" id="{DDF58BAF-E7A3-4FED-8A25-B0C14EB02D64}"/>
+                <a16:creationId xmlns:a16="http://schemas.microsoft.com/office/drawing/2014/main" id="{685F311B-79A9-4611-BF70-D31B061CBE59}"/>
               </a:ext>
             </a:extLst>
           </p:cNvPr>
@@ -19596,7 +19962,7 @@
           <p:cNvPr id="3" name="">
             <a:extLst xmlns:a="http://schemas.openxmlformats.org/drawingml/2006/main">
               <a:ext uri="{FF2B5EF4-FFF2-40B4-BE49-F238E27FC236}">
-                <a16:creationId xmlns:a16="http://schemas.microsoft.com/office/drawing/2014/main" id="{721E7865-F8EF-4A8E-A75B-3DB6ACD5695F}"/>
+                <a16:creationId xmlns:a16="http://schemas.microsoft.com/office/drawing/2014/main" id="{DC0C90B3-288E-4DA1-955E-984FBAB2EEF8}"/>
               </a:ext>
             </a:extLst>
           </p:cNvPr>
@@ -19657,7 +20023,7 @@
           <p:cNvPr id="4" name="">
             <a:extLst xmlns:a="http://schemas.openxmlformats.org/drawingml/2006/main">
               <a:ext uri="{FF2B5EF4-FFF2-40B4-BE49-F238E27FC236}">
-                <a16:creationId xmlns:a16="http://schemas.microsoft.com/office/drawing/2014/main" id="{2316D17E-9970-4C7B-9439-9B542507F80E}"/>
+                <a16:creationId xmlns:a16="http://schemas.microsoft.com/office/drawing/2014/main" id="{E2FB3F34-740F-43B8-9C82-96D5CC3DFC68}"/>
               </a:ext>
             </a:extLst>
           </p:cNvPr>
@@ -19689,7 +20055,7 @@
           <p:cNvPr id="5" name="">
             <a:extLst xmlns:a="http://schemas.openxmlformats.org/drawingml/2006/main">
               <a:ext uri="{FF2B5EF4-FFF2-40B4-BE49-F238E27FC236}">
-                <a16:creationId xmlns:a16="http://schemas.microsoft.com/office/drawing/2014/main" id="{E3ED0705-7BB9-48B9-B37A-25FEEBE6CC4E}"/>
+                <a16:creationId xmlns:a16="http://schemas.microsoft.com/office/drawing/2014/main" id="{4D67E018-F4A0-4BF4-AB93-7CD1EABB6480}"/>
               </a:ext>
             </a:extLst>
           </p:cNvPr>
@@ -19750,7 +20116,7 @@
           <p:cNvPr id="6" name="">
             <a:extLst xmlns:a="http://schemas.openxmlformats.org/drawingml/2006/main">
               <a:ext uri="{FF2B5EF4-FFF2-40B4-BE49-F238E27FC236}">
-                <a16:creationId xmlns:a16="http://schemas.microsoft.com/office/drawing/2014/main" id="{BF81F68C-DA1D-4190-8D3E-AD50079631CA}"/>
+                <a16:creationId xmlns:a16="http://schemas.microsoft.com/office/drawing/2014/main" id="{EF8B6B14-5B2E-4666-9996-FC5BCA740778}"/>
               </a:ext>
             </a:extLst>
           </p:cNvPr>
@@ -19811,7 +20177,7 @@
           <p:cNvPr id="7" name="">
             <a:extLst xmlns:a="http://schemas.openxmlformats.org/drawingml/2006/main">
               <a:ext uri="{FF2B5EF4-FFF2-40B4-BE49-F238E27FC236}">
-                <a16:creationId xmlns:a16="http://schemas.microsoft.com/office/drawing/2014/main" id="{B411D85C-4B14-4242-8365-3C6339623520}"/>
+                <a16:creationId xmlns:a16="http://schemas.microsoft.com/office/drawing/2014/main" id="{0D21E7F5-05A1-4C48-B6F0-C4A5A31F05CE}"/>
               </a:ext>
             </a:extLst>
           </p:cNvPr>
@@ -20102,7 +20468,7 @@
           <p:cNvPr id="9" name="">
             <a:extLst xmlns:a="http://schemas.openxmlformats.org/drawingml/2006/main">
               <a:ext uri="{FF2B5EF4-FFF2-40B4-BE49-F238E27FC236}">
-                <a16:creationId xmlns:a16="http://schemas.microsoft.com/office/drawing/2014/main" id="{95470AE5-D23F-48D4-AD18-89BBAFC81F9E}"/>
+                <a16:creationId xmlns:a16="http://schemas.microsoft.com/office/drawing/2014/main" id="{FD4F7DB4-2A40-4D1F-9121-8893493595A0}"/>
               </a:ext>
             </a:extLst>
           </p:cNvPr>
@@ -20163,7 +20529,7 @@
           <p:cNvPr id="10" name="">
             <a:extLst xmlns:a="http://schemas.openxmlformats.org/drawingml/2006/main">
               <a:ext uri="{FF2B5EF4-FFF2-40B4-BE49-F238E27FC236}">
-                <a16:creationId xmlns:a16="http://schemas.microsoft.com/office/drawing/2014/main" id="{17227F37-C0E7-428F-804A-8743AD9754CC}"/>
+                <a16:creationId xmlns:a16="http://schemas.microsoft.com/office/drawing/2014/main" id="{F9B5FE59-DC27-483C-A43F-1F0AD88EDBFC}"/>
               </a:ext>
             </a:extLst>
           </p:cNvPr>
@@ -20222,7 +20588,7 @@
     </p:spTree>
     <p:extLst>
       <p:ext uri="{BB962C8B-B14F-4D97-AF65-F5344CB8AC3E}">
-        <p14:creationId xmlns:p14="http://schemas.microsoft.com/office/powerpoint/2010/main" val="1122664795"/>
+        <p14:creationId xmlns:p14="http://schemas.microsoft.com/office/powerpoint/2010/main" val="1463693702"/>
       </p:ext>
     </p:extLst>
   </p:cSld>
@@ -20253,7 +20619,7 @@
           <p:cNvPr id="10" name="">
             <a:extLst xmlns:a="http://schemas.openxmlformats.org/drawingml/2006/main">
               <a:ext uri="{FF2B5EF4-FFF2-40B4-BE49-F238E27FC236}">
-                <a16:creationId xmlns:a16="http://schemas.microsoft.com/office/drawing/2014/main" id="{257C66E8-E016-43E3-AFD0-866329447523}"/>
+                <a16:creationId xmlns:a16="http://schemas.microsoft.com/office/drawing/2014/main" id="{FBB17EA8-9348-408D-916E-51648E948323}"/>
               </a:ext>
             </a:extLst>
           </p:cNvPr>
@@ -20314,7 +20680,7 @@
           <p:cNvPr id="2" name="">
             <a:extLst xmlns:a="http://schemas.openxmlformats.org/drawingml/2006/main">
               <a:ext uri="{FF2B5EF4-FFF2-40B4-BE49-F238E27FC236}">
-                <a16:creationId xmlns:a16="http://schemas.microsoft.com/office/drawing/2014/main" id="{0117F115-4F43-4B73-A55A-06864C0F3855}"/>
+                <a16:creationId xmlns:a16="http://schemas.microsoft.com/office/drawing/2014/main" id="{23A1C81F-0733-4284-80B4-9DD0914F2042}"/>
               </a:ext>
             </a:extLst>
           </p:cNvPr>
@@ -20375,7 +20741,7 @@
           <p:cNvPr id="3" name="">
             <a:extLst xmlns:a="http://schemas.openxmlformats.org/drawingml/2006/main">
               <a:ext uri="{FF2B5EF4-FFF2-40B4-BE49-F238E27FC236}">
-                <a16:creationId xmlns:a16="http://schemas.microsoft.com/office/drawing/2014/main" id="{350ED194-9503-470B-AD14-443BA57379F5}"/>
+                <a16:creationId xmlns:a16="http://schemas.microsoft.com/office/drawing/2014/main" id="{5FC01D7B-DFC5-4BA9-A735-B417A821755D}"/>
               </a:ext>
             </a:extLst>
           </p:cNvPr>
@@ -20436,7 +20802,7 @@
           <p:cNvPr id="4" name="">
             <a:extLst xmlns:a="http://schemas.openxmlformats.org/drawingml/2006/main">
               <a:ext uri="{FF2B5EF4-FFF2-40B4-BE49-F238E27FC236}">
-                <a16:creationId xmlns:a16="http://schemas.microsoft.com/office/drawing/2014/main" id="{DA31B6E8-5CB1-4471-B09D-779D322C61E1}"/>
+                <a16:creationId xmlns:a16="http://schemas.microsoft.com/office/drawing/2014/main" id="{DD14C035-07A3-42FE-8B88-F94762D7F1EE}"/>
               </a:ext>
             </a:extLst>
           </p:cNvPr>
@@ -20468,7 +20834,7 @@
           <p:cNvPr id="5" name="">
             <a:extLst xmlns:a="http://schemas.openxmlformats.org/drawingml/2006/main">
               <a:ext uri="{FF2B5EF4-FFF2-40B4-BE49-F238E27FC236}">
-                <a16:creationId xmlns:a16="http://schemas.microsoft.com/office/drawing/2014/main" id="{7DE82A8A-57EF-4261-AA92-A1856EE646A7}"/>
+                <a16:creationId xmlns:a16="http://schemas.microsoft.com/office/drawing/2014/main" id="{EECD979A-094D-4DEC-B34D-40ABBDC2C076}"/>
               </a:ext>
             </a:extLst>
           </p:cNvPr>
@@ -20529,7 +20895,7 @@
           <p:cNvPr id="6" name="">
             <a:extLst xmlns:a="http://schemas.openxmlformats.org/drawingml/2006/main">
               <a:ext uri="{FF2B5EF4-FFF2-40B4-BE49-F238E27FC236}">
-                <a16:creationId xmlns:a16="http://schemas.microsoft.com/office/drawing/2014/main" id="{D873AC59-0D3A-4212-802D-C6D87A8C52C7}"/>
+                <a16:creationId xmlns:a16="http://schemas.microsoft.com/office/drawing/2014/main" id="{AD8C3C28-AA32-426A-B765-36EEE45A25FA}"/>
               </a:ext>
             </a:extLst>
           </p:cNvPr>
@@ -20590,7 +20956,7 @@
           <p:cNvPr id="7" name="">
             <a:extLst xmlns:a="http://schemas.openxmlformats.org/drawingml/2006/main">
               <a:ext uri="{FF2B5EF4-FFF2-40B4-BE49-F238E27FC236}">
-                <a16:creationId xmlns:a16="http://schemas.microsoft.com/office/drawing/2014/main" id="{A24A687B-CE05-4321-BAD2-98F99543E9BE}"/>
+                <a16:creationId xmlns:a16="http://schemas.microsoft.com/office/drawing/2014/main" id="{653ACE2B-4C09-4866-8CC9-7A56AB5FC948}"/>
               </a:ext>
             </a:extLst>
           </p:cNvPr>
@@ -20651,7 +21017,7 @@
           <p:cNvPr id="8" name="">
             <a:extLst xmlns:a="http://schemas.openxmlformats.org/drawingml/2006/main">
               <a:ext uri="{FF2B5EF4-FFF2-40B4-BE49-F238E27FC236}">
-                <a16:creationId xmlns:a16="http://schemas.microsoft.com/office/drawing/2014/main" id="{35C19D1D-3299-4912-BFF4-E71AC91B3BF3}"/>
+                <a16:creationId xmlns:a16="http://schemas.microsoft.com/office/drawing/2014/main" id="{C0513F3E-5CD3-4BE2-9D89-4C491BBA54E1}"/>
               </a:ext>
             </a:extLst>
           </p:cNvPr>
@@ -20856,7 +21222,7 @@
           <p:cNvPr id="9" name="">
             <a:extLst xmlns:a="http://schemas.openxmlformats.org/drawingml/2006/main">
               <a:ext uri="{FF2B5EF4-FFF2-40B4-BE49-F238E27FC236}">
-                <a16:creationId xmlns:a16="http://schemas.microsoft.com/office/drawing/2014/main" id="{442CFADF-E992-420B-94D9-DB63DE5C868F}"/>
+                <a16:creationId xmlns:a16="http://schemas.microsoft.com/office/drawing/2014/main" id="{159A505D-31AD-4617-94E5-44A9E18539A0}"/>
               </a:ext>
             </a:extLst>
           </p:cNvPr>
@@ -20915,7 +21281,7 @@
     </p:spTree>
     <p:extLst>
       <p:ext uri="{BB962C8B-B14F-4D97-AF65-F5344CB8AC3E}">
-        <p14:creationId xmlns:p14="http://schemas.microsoft.com/office/powerpoint/2010/main" val="1716393301"/>
+        <p14:creationId xmlns:p14="http://schemas.microsoft.com/office/powerpoint/2010/main" val="278129853"/>
       </p:ext>
     </p:extLst>
   </p:cSld>
@@ -20946,7 +21312,7 @@
           <p:cNvPr id="10" name="">
             <a:extLst xmlns:a="http://schemas.openxmlformats.org/drawingml/2006/main">
               <a:ext uri="{FF2B5EF4-FFF2-40B4-BE49-F238E27FC236}">
-                <a16:creationId xmlns:a16="http://schemas.microsoft.com/office/drawing/2014/main" id="{54E8B15F-BD5C-4A9C-B306-83BA96B4021B}"/>
+                <a16:creationId xmlns:a16="http://schemas.microsoft.com/office/drawing/2014/main" id="{C7775402-835B-450D-A06C-D16DE40F047B}"/>
               </a:ext>
             </a:extLst>
           </p:cNvPr>
@@ -21007,7 +21373,7 @@
           <p:cNvPr id="2" name="">
             <a:extLst xmlns:a="http://schemas.openxmlformats.org/drawingml/2006/main">
               <a:ext uri="{FF2B5EF4-FFF2-40B4-BE49-F238E27FC236}">
-                <a16:creationId xmlns:a16="http://schemas.microsoft.com/office/drawing/2014/main" id="{BE9AC380-B0F8-4EA7-B3F4-F1D089D5B594}"/>
+                <a16:creationId xmlns:a16="http://schemas.microsoft.com/office/drawing/2014/main" id="{01947197-D30C-46E5-88F6-98CB21C52088}"/>
               </a:ext>
             </a:extLst>
           </p:cNvPr>
@@ -21068,7 +21434,7 @@
           <p:cNvPr id="3" name="">
             <a:extLst xmlns:a="http://schemas.openxmlformats.org/drawingml/2006/main">
               <a:ext uri="{FF2B5EF4-FFF2-40B4-BE49-F238E27FC236}">
-                <a16:creationId xmlns:a16="http://schemas.microsoft.com/office/drawing/2014/main" id="{397D6B24-753D-431A-96E0-A49D4F7B92F8}"/>
+                <a16:creationId xmlns:a16="http://schemas.microsoft.com/office/drawing/2014/main" id="{DC804FBA-8549-428A-B2F5-D55B99C32D81}"/>
               </a:ext>
             </a:extLst>
           </p:cNvPr>
@@ -21129,7 +21495,7 @@
           <p:cNvPr id="4" name="">
             <a:extLst xmlns:a="http://schemas.openxmlformats.org/drawingml/2006/main">
               <a:ext uri="{FF2B5EF4-FFF2-40B4-BE49-F238E27FC236}">
-                <a16:creationId xmlns:a16="http://schemas.microsoft.com/office/drawing/2014/main" id="{07E4560F-9796-4BF2-AFB3-4FBCE012858D}"/>
+                <a16:creationId xmlns:a16="http://schemas.microsoft.com/office/drawing/2014/main" id="{F45D6DD9-63DC-4787-B00F-79471C66CEE8}"/>
               </a:ext>
             </a:extLst>
           </p:cNvPr>
@@ -21161,7 +21527,7 @@
           <p:cNvPr id="5" name="">
             <a:extLst xmlns:a="http://schemas.openxmlformats.org/drawingml/2006/main">
               <a:ext uri="{FF2B5EF4-FFF2-40B4-BE49-F238E27FC236}">
-                <a16:creationId xmlns:a16="http://schemas.microsoft.com/office/drawing/2014/main" id="{62F61CD0-E7D0-41D8-8E28-8BB5A7ACA12D}"/>
+                <a16:creationId xmlns:a16="http://schemas.microsoft.com/office/drawing/2014/main" id="{2C9B4FD0-C2E6-4BAF-BE6F-1333AE65E3CB}"/>
               </a:ext>
             </a:extLst>
           </p:cNvPr>
@@ -21222,7 +21588,7 @@
           <p:cNvPr id="6" name="">
             <a:extLst xmlns:a="http://schemas.openxmlformats.org/drawingml/2006/main">
               <a:ext uri="{FF2B5EF4-FFF2-40B4-BE49-F238E27FC236}">
-                <a16:creationId xmlns:a16="http://schemas.microsoft.com/office/drawing/2014/main" id="{25658638-51AD-4440-8BB9-1F025970FF49}"/>
+                <a16:creationId xmlns:a16="http://schemas.microsoft.com/office/drawing/2014/main" id="{4E2D9E6C-87C7-428C-A856-BA0340B363DF}"/>
               </a:ext>
             </a:extLst>
           </p:cNvPr>
@@ -21283,7 +21649,7 @@
           <p:cNvPr id="7" name="">
             <a:extLst xmlns:a="http://schemas.openxmlformats.org/drawingml/2006/main">
               <a:ext uri="{FF2B5EF4-FFF2-40B4-BE49-F238E27FC236}">
-                <a16:creationId xmlns:a16="http://schemas.microsoft.com/office/drawing/2014/main" id="{C0F2D11A-60B6-4CA0-9B01-83E07E37DA8F}"/>
+                <a16:creationId xmlns:a16="http://schemas.microsoft.com/office/drawing/2014/main" id="{A3B22034-982B-4858-8AE6-CB53F846DA34}"/>
               </a:ext>
             </a:extLst>
           </p:cNvPr>
@@ -21626,7 +21992,7 @@
           <p:cNvPr id="9" name="">
             <a:extLst xmlns:a="http://schemas.openxmlformats.org/drawingml/2006/main">
               <a:ext uri="{FF2B5EF4-FFF2-40B4-BE49-F238E27FC236}">
-                <a16:creationId xmlns:a16="http://schemas.microsoft.com/office/drawing/2014/main" id="{13071AAB-8880-4C18-BA1A-A6CD35F4BC33}"/>
+                <a16:creationId xmlns:a16="http://schemas.microsoft.com/office/drawing/2014/main" id="{B6B07D5F-D727-4032-A681-4F23A37791D5}"/>
               </a:ext>
             </a:extLst>
           </p:cNvPr>
@@ -21685,7 +22051,7 @@
     </p:spTree>
     <p:extLst>
       <p:ext uri="{BB962C8B-B14F-4D97-AF65-F5344CB8AC3E}">
-        <p14:creationId xmlns:p14="http://schemas.microsoft.com/office/powerpoint/2010/main" val="1368014313"/>
+        <p14:creationId xmlns:p14="http://schemas.microsoft.com/office/powerpoint/2010/main" val="1737218367"/>
       </p:ext>
     </p:extLst>
   </p:cSld>
@@ -21716,7 +22082,7 @@
           <p:cNvPr id="9" name="">
             <a:extLst xmlns:a="http://schemas.openxmlformats.org/drawingml/2006/main">
               <a:ext uri="{FF2B5EF4-FFF2-40B4-BE49-F238E27FC236}">
-                <a16:creationId xmlns:a16="http://schemas.microsoft.com/office/drawing/2014/main" id="{5EF1AE3A-0424-46FA-A689-BF77860C583F}"/>
+                <a16:creationId xmlns:a16="http://schemas.microsoft.com/office/drawing/2014/main" id="{672D217A-93A3-49F9-9FEC-D228239CF036}"/>
               </a:ext>
             </a:extLst>
           </p:cNvPr>
@@ -21777,7 +22143,7 @@
           <p:cNvPr id="2" name="">
             <a:extLst xmlns:a="http://schemas.openxmlformats.org/drawingml/2006/main">
               <a:ext uri="{FF2B5EF4-FFF2-40B4-BE49-F238E27FC236}">
-                <a16:creationId xmlns:a16="http://schemas.microsoft.com/office/drawing/2014/main" id="{8692E6E7-A50D-4A17-8F2F-DC299E6CE963}"/>
+                <a16:creationId xmlns:a16="http://schemas.microsoft.com/office/drawing/2014/main" id="{48E54409-A91A-4F75-8371-E019AB38B08A}"/>
               </a:ext>
             </a:extLst>
           </p:cNvPr>
@@ -21838,7 +22204,7 @@
           <p:cNvPr id="3" name="">
             <a:extLst xmlns:a="http://schemas.openxmlformats.org/drawingml/2006/main">
               <a:ext uri="{FF2B5EF4-FFF2-40B4-BE49-F238E27FC236}">
-                <a16:creationId xmlns:a16="http://schemas.microsoft.com/office/drawing/2014/main" id="{3B96D94E-E63B-4EDB-882F-D071E890761A}"/>
+                <a16:creationId xmlns:a16="http://schemas.microsoft.com/office/drawing/2014/main" id="{9B5D08ED-1EAF-4B57-938A-4D1FF4CF0748}"/>
               </a:ext>
             </a:extLst>
           </p:cNvPr>
@@ -21899,7 +22265,7 @@
           <p:cNvPr id="4" name="">
             <a:extLst xmlns:a="http://schemas.openxmlformats.org/drawingml/2006/main">
               <a:ext uri="{FF2B5EF4-FFF2-40B4-BE49-F238E27FC236}">
-                <a16:creationId xmlns:a16="http://schemas.microsoft.com/office/drawing/2014/main" id="{64AF7AA3-212D-4E3F-9293-AF5AAFE00F1E}"/>
+                <a16:creationId xmlns:a16="http://schemas.microsoft.com/office/drawing/2014/main" id="{CA4AAC99-8432-401A-B555-E1F4D7E1886C}"/>
               </a:ext>
             </a:extLst>
           </p:cNvPr>
@@ -21931,7 +22297,7 @@
           <p:cNvPr id="5" name="">
             <a:extLst xmlns:a="http://schemas.openxmlformats.org/drawingml/2006/main">
               <a:ext uri="{FF2B5EF4-FFF2-40B4-BE49-F238E27FC236}">
-                <a16:creationId xmlns:a16="http://schemas.microsoft.com/office/drawing/2014/main" id="{E0335E0F-4053-419D-8E2F-B98947FEEE99}"/>
+                <a16:creationId xmlns:a16="http://schemas.microsoft.com/office/drawing/2014/main" id="{D84038E8-5E4F-47A0-871F-4C98D9549F7F}"/>
               </a:ext>
             </a:extLst>
           </p:cNvPr>
@@ -21992,7 +22358,7 @@
           <p:cNvPr id="6" name="">
             <a:extLst xmlns:a="http://schemas.openxmlformats.org/drawingml/2006/main">
               <a:ext uri="{FF2B5EF4-FFF2-40B4-BE49-F238E27FC236}">
-                <a16:creationId xmlns:a16="http://schemas.microsoft.com/office/drawing/2014/main" id="{C8FEA72E-5823-4385-A2A1-A4CEAFFF4601}"/>
+                <a16:creationId xmlns:a16="http://schemas.microsoft.com/office/drawing/2014/main" id="{E1635B14-5EE6-4C16-89B7-7C73CCE993A4}"/>
               </a:ext>
             </a:extLst>
           </p:cNvPr>
@@ -22053,7 +22419,7 @@
           <p:cNvPr id="7" name="">
             <a:extLst xmlns:a="http://schemas.openxmlformats.org/drawingml/2006/main">
               <a:ext uri="{FF2B5EF4-FFF2-40B4-BE49-F238E27FC236}">
-                <a16:creationId xmlns:a16="http://schemas.microsoft.com/office/drawing/2014/main" id="{FA96182F-4CB7-4201-A662-3AC0D6C87716}"/>
+                <a16:creationId xmlns:a16="http://schemas.microsoft.com/office/drawing/2014/main" id="{D9896FC4-6B71-4EBA-B568-6E2FA21210FB}"/>
               </a:ext>
             </a:extLst>
           </p:cNvPr>
@@ -22114,7 +22480,7 @@
           <p:cNvPr id="8" name="">
             <a:extLst xmlns:a="http://schemas.openxmlformats.org/drawingml/2006/main">
               <a:ext uri="{FF2B5EF4-FFF2-40B4-BE49-F238E27FC236}">
-                <a16:creationId xmlns:a16="http://schemas.microsoft.com/office/drawing/2014/main" id="{3492C8BB-4F3E-4E00-95C7-45EAF9B08FEE}"/>
+                <a16:creationId xmlns:a16="http://schemas.microsoft.com/office/drawing/2014/main" id="{A0AEE3A4-D2A4-435D-A7A8-6F31741CC668}"/>
               </a:ext>
             </a:extLst>
           </p:cNvPr>
@@ -22327,7 +22693,7 @@
     </p:spTree>
     <p:extLst>
       <p:ext uri="{BB962C8B-B14F-4D97-AF65-F5344CB8AC3E}">
-        <p14:creationId xmlns:p14="http://schemas.microsoft.com/office/powerpoint/2010/main" val="1527650776"/>
+        <p14:creationId xmlns:p14="http://schemas.microsoft.com/office/powerpoint/2010/main" val="23421164"/>
       </p:ext>
     </p:extLst>
   </p:cSld>
@@ -22358,7 +22724,7 @@
           <p:cNvPr id="18" name="">
             <a:extLst xmlns:a="http://schemas.openxmlformats.org/drawingml/2006/main">
               <a:ext uri="{FF2B5EF4-FFF2-40B4-BE49-F238E27FC236}">
-                <a16:creationId xmlns:a16="http://schemas.microsoft.com/office/drawing/2014/main" id="{4A30B6A5-F95D-4D24-BBEC-719E534CC5D4}"/>
+                <a16:creationId xmlns:a16="http://schemas.microsoft.com/office/drawing/2014/main" id="{236D8E2F-092B-442D-8E01-A9AA3CE7472E}"/>
               </a:ext>
             </a:extLst>
           </p:cNvPr>
@@ -22419,7 +22785,7 @@
           <p:cNvPr id="2" name="">
             <a:extLst xmlns:a="http://schemas.openxmlformats.org/drawingml/2006/main">
               <a:ext uri="{FF2B5EF4-FFF2-40B4-BE49-F238E27FC236}">
-                <a16:creationId xmlns:a16="http://schemas.microsoft.com/office/drawing/2014/main" id="{54E82E62-FC31-4F5F-A2DB-011AD472B181}"/>
+                <a16:creationId xmlns:a16="http://schemas.microsoft.com/office/drawing/2014/main" id="{D37D0F0F-964F-4341-A062-934C0A8FF781}"/>
               </a:ext>
             </a:extLst>
           </p:cNvPr>
@@ -22480,7 +22846,7 @@
           <p:cNvPr id="3" name="">
             <a:extLst xmlns:a="http://schemas.openxmlformats.org/drawingml/2006/main">
               <a:ext uri="{FF2B5EF4-FFF2-40B4-BE49-F238E27FC236}">
-                <a16:creationId xmlns:a16="http://schemas.microsoft.com/office/drawing/2014/main" id="{C3F77C24-46FF-4542-A666-4F30BA0262CE}"/>
+                <a16:creationId xmlns:a16="http://schemas.microsoft.com/office/drawing/2014/main" id="{36E5CFC4-E229-4192-B093-8472AD4B7D8E}"/>
               </a:ext>
             </a:extLst>
           </p:cNvPr>
@@ -22541,7 +22907,7 @@
           <p:cNvPr id="4" name="">
             <a:extLst xmlns:a="http://schemas.openxmlformats.org/drawingml/2006/main">
               <a:ext uri="{FF2B5EF4-FFF2-40B4-BE49-F238E27FC236}">
-                <a16:creationId xmlns:a16="http://schemas.microsoft.com/office/drawing/2014/main" id="{FFC037E9-B931-4D23-BDAD-EB88D95BC7B3}"/>
+                <a16:creationId xmlns:a16="http://schemas.microsoft.com/office/drawing/2014/main" id="{0DCFF537-604B-45EB-98A4-46B2D9E507AA}"/>
               </a:ext>
             </a:extLst>
           </p:cNvPr>
@@ -22573,7 +22939,7 @@
           <p:cNvPr id="5" name="">
             <a:extLst xmlns:a="http://schemas.openxmlformats.org/drawingml/2006/main">
               <a:ext uri="{FF2B5EF4-FFF2-40B4-BE49-F238E27FC236}">
-                <a16:creationId xmlns:a16="http://schemas.microsoft.com/office/drawing/2014/main" id="{20FE93AC-2194-43C7-B986-4D68D22A399D}"/>
+                <a16:creationId xmlns:a16="http://schemas.microsoft.com/office/drawing/2014/main" id="{CFC86316-1E2C-4E4C-9EBB-37B5A1202FB1}"/>
               </a:ext>
             </a:extLst>
           </p:cNvPr>
@@ -22634,7 +23000,7 @@
           <p:cNvPr id="6" name="">
             <a:extLst xmlns:a="http://schemas.openxmlformats.org/drawingml/2006/main">
               <a:ext uri="{FF2B5EF4-FFF2-40B4-BE49-F238E27FC236}">
-                <a16:creationId xmlns:a16="http://schemas.microsoft.com/office/drawing/2014/main" id="{242F1A6A-6B89-4740-A97A-F44E7227FF1E}"/>
+                <a16:creationId xmlns:a16="http://schemas.microsoft.com/office/drawing/2014/main" id="{53442465-B3D2-471B-ACB4-4231CB597D51}"/>
               </a:ext>
             </a:extLst>
           </p:cNvPr>
@@ -22695,7 +23061,7 @@
           <p:cNvPr id="7" name="">
             <a:extLst xmlns:a="http://schemas.openxmlformats.org/drawingml/2006/main">
               <a:ext uri="{FF2B5EF4-FFF2-40B4-BE49-F238E27FC236}">
-                <a16:creationId xmlns:a16="http://schemas.microsoft.com/office/drawing/2014/main" id="{1196FA4C-49C8-428C-A4C0-0B3C09CB7DC3}"/>
+                <a16:creationId xmlns:a16="http://schemas.microsoft.com/office/drawing/2014/main" id="{11CCD421-2DE8-4B46-AA78-1E49216D3A9A}"/>
               </a:ext>
             </a:extLst>
           </p:cNvPr>
@@ -22756,7 +23122,7 @@
           <p:cNvPr id="8" name="">
             <a:extLst xmlns:a="http://schemas.openxmlformats.org/drawingml/2006/main">
               <a:ext uri="{FF2B5EF4-FFF2-40B4-BE49-F238E27FC236}">
-                <a16:creationId xmlns:a16="http://schemas.microsoft.com/office/drawing/2014/main" id="{B14F03F5-7DB4-469F-8332-AADAD99AD71F}"/>
+                <a16:creationId xmlns:a16="http://schemas.microsoft.com/office/drawing/2014/main" id="{C17BAC38-406D-49F5-8189-53CEACCAC15E}"/>
               </a:ext>
             </a:extLst>
           </p:cNvPr>
@@ -22817,7 +23183,7 @@
           <p:cNvPr id="9" name="">
             <a:extLst xmlns:a="http://schemas.openxmlformats.org/drawingml/2006/main">
               <a:ext uri="{FF2B5EF4-FFF2-40B4-BE49-F238E27FC236}">
-                <a16:creationId xmlns:a16="http://schemas.microsoft.com/office/drawing/2014/main" id="{3B49D054-F2DA-4B16-A3B9-15DBF9A2F9C5}"/>
+                <a16:creationId xmlns:a16="http://schemas.microsoft.com/office/drawing/2014/main" id="{D600EE3E-E85D-475D-A2BE-53737CAFFFEE}"/>
               </a:ext>
             </a:extLst>
           </p:cNvPr>
@@ -22884,7 +23250,7 @@
           <p:cNvPr id="10" name="">
             <a:extLst xmlns:a="http://schemas.openxmlformats.org/drawingml/2006/main">
               <a:ext uri="{FF2B5EF4-FFF2-40B4-BE49-F238E27FC236}">
-                <a16:creationId xmlns:a16="http://schemas.microsoft.com/office/drawing/2014/main" id="{739FA616-CBC9-485F-9CFC-9F9875A64C0E}"/>
+                <a16:creationId xmlns:a16="http://schemas.microsoft.com/office/drawing/2014/main" id="{9636210E-74C5-47F7-9491-52FD9A0C0232}"/>
               </a:ext>
             </a:extLst>
           </p:cNvPr>
@@ -22945,7 +23311,7 @@
           <p:cNvPr id="11" name="">
             <a:extLst xmlns:a="http://schemas.openxmlformats.org/drawingml/2006/main">
               <a:ext uri="{FF2B5EF4-FFF2-40B4-BE49-F238E27FC236}">
-                <a16:creationId xmlns:a16="http://schemas.microsoft.com/office/drawing/2014/main" id="{E52AC7D6-C0C3-4BE1-8FD7-DE8A4593AB2C}"/>
+                <a16:creationId xmlns:a16="http://schemas.microsoft.com/office/drawing/2014/main" id="{84A62756-FF46-4505-9C89-8410489B5F44}"/>
               </a:ext>
             </a:extLst>
           </p:cNvPr>
@@ -23006,7 +23372,7 @@
           <p:cNvPr id="12" name="">
             <a:extLst xmlns:a="http://schemas.openxmlformats.org/drawingml/2006/main">
               <a:ext uri="{FF2B5EF4-FFF2-40B4-BE49-F238E27FC236}">
-                <a16:creationId xmlns:a16="http://schemas.microsoft.com/office/drawing/2014/main" id="{305223C5-0F6D-4933-B2C3-D96C3E2BB0ED}"/>
+                <a16:creationId xmlns:a16="http://schemas.microsoft.com/office/drawing/2014/main" id="{B19BEA54-46AB-43D6-A620-1DABA29A226A}"/>
               </a:ext>
             </a:extLst>
           </p:cNvPr>
@@ -23073,7 +23439,7 @@
           <p:cNvPr id="13" name="">
             <a:extLst xmlns:a="http://schemas.openxmlformats.org/drawingml/2006/main">
               <a:ext uri="{FF2B5EF4-FFF2-40B4-BE49-F238E27FC236}">
-                <a16:creationId xmlns:a16="http://schemas.microsoft.com/office/drawing/2014/main" id="{5DD607FB-FA82-4100-BCB8-4D0662319EC6}"/>
+                <a16:creationId xmlns:a16="http://schemas.microsoft.com/office/drawing/2014/main" id="{9A23BDE9-5B7D-425F-8F21-861F67968F8A}"/>
               </a:ext>
             </a:extLst>
           </p:cNvPr>
@@ -23134,7 +23500,7 @@
           <p:cNvPr id="14" name="">
             <a:extLst xmlns:a="http://schemas.openxmlformats.org/drawingml/2006/main">
               <a:ext uri="{FF2B5EF4-FFF2-40B4-BE49-F238E27FC236}">
-                <a16:creationId xmlns:a16="http://schemas.microsoft.com/office/drawing/2014/main" id="{3601BA8A-5270-408F-813E-5635136289B8}"/>
+                <a16:creationId xmlns:a16="http://schemas.microsoft.com/office/drawing/2014/main" id="{DD514B6B-F0C9-4E2D-B689-5D26A1C26FB7}"/>
               </a:ext>
             </a:extLst>
           </p:cNvPr>
@@ -23195,7 +23561,7 @@
           <p:cNvPr id="15" name="">
             <a:extLst xmlns:a="http://schemas.openxmlformats.org/drawingml/2006/main">
               <a:ext uri="{FF2B5EF4-FFF2-40B4-BE49-F238E27FC236}">
-                <a16:creationId xmlns:a16="http://schemas.microsoft.com/office/drawing/2014/main" id="{A5C4BA1D-A868-4C69-AD97-9DE63ED6C089}"/>
+                <a16:creationId xmlns:a16="http://schemas.microsoft.com/office/drawing/2014/main" id="{0B12B16A-2519-4B83-A3FF-71C1BFD5E8C9}"/>
               </a:ext>
             </a:extLst>
           </p:cNvPr>
@@ -23262,7 +23628,7 @@
           <p:cNvPr id="16" name="">
             <a:extLst xmlns:a="http://schemas.openxmlformats.org/drawingml/2006/main">
               <a:ext uri="{FF2B5EF4-FFF2-40B4-BE49-F238E27FC236}">
-                <a16:creationId xmlns:a16="http://schemas.microsoft.com/office/drawing/2014/main" id="{245DB9B8-0782-4AEE-8234-DFD2CD5BC8B7}"/>
+                <a16:creationId xmlns:a16="http://schemas.microsoft.com/office/drawing/2014/main" id="{288A8809-AD75-4AA7-A65D-A91CE8F74A62}"/>
               </a:ext>
             </a:extLst>
           </p:cNvPr>
@@ -23323,7 +23689,7 @@
           <p:cNvPr id="17" name="">
             <a:extLst xmlns:a="http://schemas.openxmlformats.org/drawingml/2006/main">
               <a:ext uri="{FF2B5EF4-FFF2-40B4-BE49-F238E27FC236}">
-                <a16:creationId xmlns:a16="http://schemas.microsoft.com/office/drawing/2014/main" id="{543ECB14-05DE-4866-8367-E94F2308CEEF}"/>
+                <a16:creationId xmlns:a16="http://schemas.microsoft.com/office/drawing/2014/main" id="{37E31C9C-9576-49FF-9D75-67CBBF310F32}"/>
               </a:ext>
             </a:extLst>
           </p:cNvPr>
@@ -23382,7 +23748,7 @@
     </p:spTree>
     <p:extLst>
       <p:ext uri="{BB962C8B-B14F-4D97-AF65-F5344CB8AC3E}">
-        <p14:creationId xmlns:p14="http://schemas.microsoft.com/office/powerpoint/2010/main" val="1539754657"/>
+        <p14:creationId xmlns:p14="http://schemas.microsoft.com/office/powerpoint/2010/main" val="1713264897"/>
       </p:ext>
     </p:extLst>
   </p:cSld>
@@ -23413,7 +23779,7 @@
           <p:cNvPr id="16" name="">
             <a:extLst xmlns:a="http://schemas.openxmlformats.org/drawingml/2006/main">
               <a:ext uri="{FF2B5EF4-FFF2-40B4-BE49-F238E27FC236}">
-                <a16:creationId xmlns:a16="http://schemas.microsoft.com/office/drawing/2014/main" id="{FCC90CAA-B8CE-4DAA-95F7-BE6B32CD4406}"/>
+                <a16:creationId xmlns:a16="http://schemas.microsoft.com/office/drawing/2014/main" id="{075AD804-AD9D-41A4-803D-41216738741D}"/>
               </a:ext>
             </a:extLst>
           </p:cNvPr>
@@ -23474,7 +23840,7 @@
           <p:cNvPr id="2" name="">
             <a:extLst xmlns:a="http://schemas.openxmlformats.org/drawingml/2006/main">
               <a:ext uri="{FF2B5EF4-FFF2-40B4-BE49-F238E27FC236}">
-                <a16:creationId xmlns:a16="http://schemas.microsoft.com/office/drawing/2014/main" id="{E87E31C0-14D3-4554-9EC9-0BC65E0CFE57}"/>
+                <a16:creationId xmlns:a16="http://schemas.microsoft.com/office/drawing/2014/main" id="{BC4212C8-9341-4CAD-8890-ECFE71E16104}"/>
               </a:ext>
             </a:extLst>
           </p:cNvPr>
@@ -23535,7 +23901,7 @@
           <p:cNvPr id="3" name="">
             <a:extLst xmlns:a="http://schemas.openxmlformats.org/drawingml/2006/main">
               <a:ext uri="{FF2B5EF4-FFF2-40B4-BE49-F238E27FC236}">
-                <a16:creationId xmlns:a16="http://schemas.microsoft.com/office/drawing/2014/main" id="{D86E40B1-A119-4EA4-8814-E4D73C2AF1BE}"/>
+                <a16:creationId xmlns:a16="http://schemas.microsoft.com/office/drawing/2014/main" id="{99C0D119-8CD4-43E9-A88A-A04ECCBB8C84}"/>
               </a:ext>
             </a:extLst>
           </p:cNvPr>
@@ -23596,7 +23962,7 @@
           <p:cNvPr id="4" name="">
             <a:extLst xmlns:a="http://schemas.openxmlformats.org/drawingml/2006/main">
               <a:ext uri="{FF2B5EF4-FFF2-40B4-BE49-F238E27FC236}">
-                <a16:creationId xmlns:a16="http://schemas.microsoft.com/office/drawing/2014/main" id="{DE81E00B-7112-4745-BE02-6CC2283CF117}"/>
+                <a16:creationId xmlns:a16="http://schemas.microsoft.com/office/drawing/2014/main" id="{AB53CBBF-4941-4546-A3AC-21AFCF2134CE}"/>
               </a:ext>
             </a:extLst>
           </p:cNvPr>
@@ -23628,7 +23994,7 @@
           <p:cNvPr id="5" name="">
             <a:extLst xmlns:a="http://schemas.openxmlformats.org/drawingml/2006/main">
               <a:ext uri="{FF2B5EF4-FFF2-40B4-BE49-F238E27FC236}">
-                <a16:creationId xmlns:a16="http://schemas.microsoft.com/office/drawing/2014/main" id="{5ADD9F13-BA0A-42EF-B42F-82EE4D0B0B30}"/>
+                <a16:creationId xmlns:a16="http://schemas.microsoft.com/office/drawing/2014/main" id="{AFD3664B-FAE0-4FCE-A718-5D67BBFF2D17}"/>
               </a:ext>
             </a:extLst>
           </p:cNvPr>
@@ -23689,7 +24055,7 @@
           <p:cNvPr id="6" name="">
             <a:extLst xmlns:a="http://schemas.openxmlformats.org/drawingml/2006/main">
               <a:ext uri="{FF2B5EF4-FFF2-40B4-BE49-F238E27FC236}">
-                <a16:creationId xmlns:a16="http://schemas.microsoft.com/office/drawing/2014/main" id="{E1E96D31-4715-40C8-9A26-186C584317D1}"/>
+                <a16:creationId xmlns:a16="http://schemas.microsoft.com/office/drawing/2014/main" id="{EC3FF0E3-E616-4C1A-B165-B1A5AFE6BDD2}"/>
               </a:ext>
             </a:extLst>
           </p:cNvPr>
@@ -23750,7 +24116,7 @@
           <p:cNvPr id="7" name="">
             <a:extLst xmlns:a="http://schemas.openxmlformats.org/drawingml/2006/main">
               <a:ext uri="{FF2B5EF4-FFF2-40B4-BE49-F238E27FC236}">
-                <a16:creationId xmlns:a16="http://schemas.microsoft.com/office/drawing/2014/main" id="{0362CC45-4819-4B03-9464-DD1D12B630A8}"/>
+                <a16:creationId xmlns:a16="http://schemas.microsoft.com/office/drawing/2014/main" id="{E27E567A-1609-44C9-A217-0CEEAF355794}"/>
               </a:ext>
             </a:extLst>
           </p:cNvPr>
@@ -23811,7 +24177,7 @@
           <p:cNvPr id="8" name="">
             <a:extLst xmlns:a="http://schemas.openxmlformats.org/drawingml/2006/main">
               <a:ext uri="{FF2B5EF4-FFF2-40B4-BE49-F238E27FC236}">
-                <a16:creationId xmlns:a16="http://schemas.microsoft.com/office/drawing/2014/main" id="{77EBD3AD-D13B-4D15-B5E8-B1C0B73A4603}"/>
+                <a16:creationId xmlns:a16="http://schemas.microsoft.com/office/drawing/2014/main" id="{6E3234A6-D19C-4CE5-9472-AA8B8672A19B}"/>
               </a:ext>
             </a:extLst>
           </p:cNvPr>
@@ -23845,7 +24211,7 @@
           <p:cNvPr id="9" name="">
             <a:extLst xmlns:a="http://schemas.openxmlformats.org/drawingml/2006/main">
               <a:ext uri="{FF2B5EF4-FFF2-40B4-BE49-F238E27FC236}">
-                <a16:creationId xmlns:a16="http://schemas.microsoft.com/office/drawing/2014/main" id="{7D53F757-7077-4577-A4DD-59E67F7C565E}"/>
+                <a16:creationId xmlns:a16="http://schemas.microsoft.com/office/drawing/2014/main" id="{19109713-4B98-488A-8E3B-50D3ABAEBA7A}"/>
               </a:ext>
             </a:extLst>
           </p:cNvPr>
@@ -23906,7 +24272,7 @@
           <p:cNvPr id="10" name="">
             <a:extLst xmlns:a="http://schemas.openxmlformats.org/drawingml/2006/main">
               <a:ext uri="{FF2B5EF4-FFF2-40B4-BE49-F238E27FC236}">
-                <a16:creationId xmlns:a16="http://schemas.microsoft.com/office/drawing/2014/main" id="{9BF3B959-F827-4F6C-AD38-817776E0CE3B}"/>
+                <a16:creationId xmlns:a16="http://schemas.microsoft.com/office/drawing/2014/main" id="{2A178A0A-333A-404F-B5B2-A8BC606B3591}"/>
               </a:ext>
             </a:extLst>
           </p:cNvPr>
@@ -23994,7 +24360,7 @@
           <p:cNvPr id="11" name="">
             <a:extLst xmlns:a="http://schemas.openxmlformats.org/drawingml/2006/main">
               <a:ext uri="{FF2B5EF4-FFF2-40B4-BE49-F238E27FC236}">
-                <a16:creationId xmlns:a16="http://schemas.microsoft.com/office/drawing/2014/main" id="{9F1B92C1-3788-4F12-88BC-136E24AC62BA}"/>
+                <a16:creationId xmlns:a16="http://schemas.microsoft.com/office/drawing/2014/main" id="{9B6F0FBE-0CD3-406C-8412-F032B0476B33}"/>
               </a:ext>
             </a:extLst>
           </p:cNvPr>
@@ -24028,7 +24394,7 @@
           <p:cNvPr id="12" name="">
             <a:extLst xmlns:a="http://schemas.openxmlformats.org/drawingml/2006/main">
               <a:ext uri="{FF2B5EF4-FFF2-40B4-BE49-F238E27FC236}">
-                <a16:creationId xmlns:a16="http://schemas.microsoft.com/office/drawing/2014/main" id="{5D3FE2E4-7147-44C1-A8FD-71139EF107CB}"/>
+                <a16:creationId xmlns:a16="http://schemas.microsoft.com/office/drawing/2014/main" id="{0A51F21C-0AFB-4458-91F6-F88D8BC456D3}"/>
               </a:ext>
             </a:extLst>
           </p:cNvPr>
@@ -24089,7 +24455,7 @@
           <p:cNvPr id="13" name="">
             <a:extLst xmlns:a="http://schemas.openxmlformats.org/drawingml/2006/main">
               <a:ext uri="{FF2B5EF4-FFF2-40B4-BE49-F238E27FC236}">
-                <a16:creationId xmlns:a16="http://schemas.microsoft.com/office/drawing/2014/main" id="{AC71E8F2-CC4A-43BF-9EE8-5EE24E3F1DF0}"/>
+                <a16:creationId xmlns:a16="http://schemas.microsoft.com/office/drawing/2014/main" id="{634B39B2-0E7A-44D7-8D1B-D703A14ED792}"/>
               </a:ext>
             </a:extLst>
           </p:cNvPr>
@@ -24177,7 +24543,7 @@
           <p:cNvPr id="14" name="">
             <a:extLst xmlns:a="http://schemas.openxmlformats.org/drawingml/2006/main">
               <a:ext uri="{FF2B5EF4-FFF2-40B4-BE49-F238E27FC236}">
-                <a16:creationId xmlns:a16="http://schemas.microsoft.com/office/drawing/2014/main" id="{01959E6A-10C4-4E98-86D3-B1F6B466A2A5}"/>
+                <a16:creationId xmlns:a16="http://schemas.microsoft.com/office/drawing/2014/main" id="{AD6967C9-676F-4CDA-B591-5C9E349D6AAA}"/>
               </a:ext>
             </a:extLst>
           </p:cNvPr>
@@ -24238,7 +24604,7 @@
           <p:cNvPr id="15" name="">
             <a:extLst xmlns:a="http://schemas.openxmlformats.org/drawingml/2006/main">
               <a:ext uri="{FF2B5EF4-FFF2-40B4-BE49-F238E27FC236}">
-                <a16:creationId xmlns:a16="http://schemas.microsoft.com/office/drawing/2014/main" id="{6B0D0AF7-62F1-4B26-8C27-82896F25524B}"/>
+                <a16:creationId xmlns:a16="http://schemas.microsoft.com/office/drawing/2014/main" id="{A4A96B09-E0AA-433B-8E50-91D6CA68DE33}"/>
               </a:ext>
             </a:extLst>
           </p:cNvPr>
@@ -24297,7 +24663,7 @@
     </p:spTree>
     <p:extLst>
       <p:ext uri="{BB962C8B-B14F-4D97-AF65-F5344CB8AC3E}">
-        <p14:creationId xmlns:p14="http://schemas.microsoft.com/office/powerpoint/2010/main" val="904784233"/>
+        <p14:creationId xmlns:p14="http://schemas.microsoft.com/office/powerpoint/2010/main" val="1606749808"/>
       </p:ext>
     </p:extLst>
   </p:cSld>
